--- a/ai101/slides/week-01.pptx
+++ b/ai101/slides/week-01.pptx
@@ -12,6 +12,15 @@
     <p:sldId id="260" r:id="rId11"/>
     <p:sldId id="261" r:id="rId12"/>
     <p:sldId id="262" r:id="rId13"/>
+    <p:sldId id="263" r:id="rId14"/>
+    <p:sldId id="264" r:id="rId15"/>
+    <p:sldId id="265" r:id="rId16"/>
+    <p:sldId id="266" r:id="rId17"/>
+    <p:sldId id="267" r:id="rId18"/>
+    <p:sldId id="268" r:id="rId19"/>
+    <p:sldId id="269" r:id="rId20"/>
+    <p:sldId id="270" r:id="rId21"/>
+    <p:sldId id="271" r:id="rId22"/>
   </p:sldIdLst>
   <p:sldSz cx="12191695" cy="6858000" type="screen4x3"/>
   <p:notesSz cx="6858000" cy="9144000"/>
@@ -3166,6 +3175,1495 @@
 </p:sld>
 </file>
 
+<file path=ppt/slides/slide10.xml><?xml version="1.0" encoding="utf-8"?>
+<p:sld xmlns:a="http://schemas.openxmlformats.org/drawingml/2006/main" xmlns:p="http://schemas.openxmlformats.org/presentationml/2006/main" xmlns:r="http://schemas.openxmlformats.org/officeDocument/2006/relationships">
+  <p:cSld>
+    <p:bg>
+      <p:bgPr>
+        <a:solidFill>
+          <a:srgbClr val="102127"/>
+        </a:solidFill>
+        <a:effectLst/>
+      </p:bgPr>
+    </p:bg>
+    <p:spTree>
+      <p:nvGrpSpPr>
+        <p:cNvPr id="1" name=""/>
+        <p:cNvGrpSpPr/>
+        <p:nvPr/>
+      </p:nvGrpSpPr>
+      <p:grpSpPr/>
+      <p:sp>
+        <p:nvSpPr>
+          <p:cNvPr id="2" name="TextBox 1"/>
+          <p:cNvSpPr txBox="1"/>
+          <p:nvPr/>
+        </p:nvSpPr>
+        <p:spPr>
+          <a:xfrm>
+            <a:off x="502920" y="274320"/>
+            <a:ext cx="11155680" cy="731520"/>
+          </a:xfrm>
+          <a:prstGeom prst="rect">
+            <a:avLst/>
+          </a:prstGeom>
+          <a:noFill/>
+        </p:spPr>
+        <p:txBody>
+          <a:bodyPr wrap="none">
+            <a:spAutoFit/>
+          </a:bodyPr>
+          <a:lstStyle/>
+          <a:p>
+            <a:r>
+              <a:rPr sz="2600" b="1">
+                <a:solidFill>
+                  <a:srgbClr val="01AEFD"/>
+                </a:solidFill>
+              </a:rPr>
+              <a:t>Type this into style.css  (2 of 4)</a:t>
+            </a:r>
+          </a:p>
+        </p:txBody>
+      </p:sp>
+      <p:sp>
+        <p:nvSpPr>
+          <p:cNvPr id="3" name="TextBox 2"/>
+          <p:cNvSpPr txBox="1"/>
+          <p:nvPr/>
+        </p:nvSpPr>
+        <p:spPr>
+          <a:xfrm>
+            <a:off x="502920" y="1051560"/>
+            <a:ext cx="11155680" cy="5394960"/>
+          </a:xfrm>
+          <a:prstGeom prst="rect">
+            <a:avLst/>
+          </a:prstGeom>
+          <a:noFill/>
+        </p:spPr>
+        <p:txBody>
+          <a:bodyPr wrap="none">
+            <a:spAutoFit/>
+          </a:bodyPr>
+          <a:lstStyle/>
+          <a:p>
+            <a:pPr>
+              <a:spcAft>
+                <a:spcPts val="0"/>
+              </a:spcAft>
+            </a:pPr>
+            <a:r>
+              <a:rPr sz="1400">
+                <a:solidFill>
+                  <a:srgbClr val="6D8C97"/>
+                </a:solidFill>
+                <a:latin typeface="Consolas"/>
+              </a:rPr>
+              <a:t>   7  </a:t>
+            </a:r>
+            <a:r>
+              <a:rPr sz="1400">
+                <a:solidFill>
+                  <a:srgbClr val="7FE0A0"/>
+                </a:solidFill>
+                <a:latin typeface="Consolas"/>
+              </a:rPr>
+              <a:t>.app {</a:t>
+            </a:r>
+          </a:p>
+          <a:p>
+            <a:pPr>
+              <a:spcAft>
+                <a:spcPts val="0"/>
+              </a:spcAft>
+            </a:pPr>
+            <a:r>
+              <a:rPr sz="1400">
+                <a:solidFill>
+                  <a:srgbClr val="6D8C97"/>
+                </a:solidFill>
+                <a:latin typeface="Consolas"/>
+              </a:rPr>
+              <a:t>   8  </a:t>
+            </a:r>
+            <a:r>
+              <a:rPr sz="1400">
+                <a:solidFill>
+                  <a:srgbClr val="7FE0A0"/>
+                </a:solidFill>
+                <a:latin typeface="Consolas"/>
+              </a:rPr>
+              <a:t>  max-width: 620px;</a:t>
+            </a:r>
+          </a:p>
+          <a:p>
+            <a:pPr>
+              <a:spcAft>
+                <a:spcPts val="0"/>
+              </a:spcAft>
+            </a:pPr>
+            <a:r>
+              <a:rPr sz="1400">
+                <a:solidFill>
+                  <a:srgbClr val="6D8C97"/>
+                </a:solidFill>
+                <a:latin typeface="Consolas"/>
+              </a:rPr>
+              <a:t>   9  </a:t>
+            </a:r>
+            <a:r>
+              <a:rPr sz="1400">
+                <a:solidFill>
+                  <a:srgbClr val="7FE0A0"/>
+                </a:solidFill>
+                <a:latin typeface="Consolas"/>
+              </a:rPr>
+              <a:t>  margin: 0 auto;</a:t>
+            </a:r>
+          </a:p>
+          <a:p>
+            <a:pPr>
+              <a:spcAft>
+                <a:spcPts val="0"/>
+              </a:spcAft>
+            </a:pPr>
+            <a:r>
+              <a:rPr sz="1400">
+                <a:solidFill>
+                  <a:srgbClr val="6D8C97"/>
+                </a:solidFill>
+                <a:latin typeface="Consolas"/>
+              </a:rPr>
+              <a:t>  10  </a:t>
+            </a:r>
+            <a:r>
+              <a:rPr sz="1400">
+                <a:solidFill>
+                  <a:srgbClr val="7FE0A0"/>
+                </a:solidFill>
+                <a:latin typeface="Consolas"/>
+              </a:rPr>
+              <a:t>  padding: 20px;</a:t>
+            </a:r>
+          </a:p>
+          <a:p>
+            <a:pPr>
+              <a:spcAft>
+                <a:spcPts val="0"/>
+              </a:spcAft>
+            </a:pPr>
+            <a:r>
+              <a:rPr sz="1400">
+                <a:solidFill>
+                  <a:srgbClr val="6D8C97"/>
+                </a:solidFill>
+                <a:latin typeface="Consolas"/>
+              </a:rPr>
+              <a:t>  11  </a:t>
+            </a:r>
+            <a:r>
+              <a:rPr sz="1400">
+                <a:solidFill>
+                  <a:srgbClr val="7FE0A0"/>
+                </a:solidFill>
+                <a:latin typeface="Consolas"/>
+              </a:rPr>
+              <a:t>}</a:t>
+            </a:r>
+          </a:p>
+          <a:p>
+            <a:pPr>
+              <a:spcAft>
+                <a:spcPts val="0"/>
+              </a:spcAft>
+            </a:pPr>
+            <a:r>
+              <a:rPr sz="1400">
+                <a:solidFill>
+                  <a:srgbClr val="6D8C97"/>
+                </a:solidFill>
+                <a:latin typeface="Consolas"/>
+              </a:rPr>
+              <a:t>  12  </a:t>
+            </a:r>
+            <a:r>
+              <a:rPr sz="1400">
+                <a:solidFill>
+                  <a:srgbClr val="7FE0A0"/>
+                </a:solidFill>
+                <a:latin typeface="Consolas"/>
+              </a:rPr>
+              <a:t>.top h1 { margin: 0 0 4px; font-size: 26px; }</a:t>
+            </a:r>
+          </a:p>
+          <a:p>
+            <a:pPr>
+              <a:spcAft>
+                <a:spcPts val="0"/>
+              </a:spcAft>
+            </a:pPr>
+            <a:r>
+              <a:rPr sz="1400">
+                <a:solidFill>
+                  <a:srgbClr val="6D8C97"/>
+                </a:solidFill>
+                <a:latin typeface="Consolas"/>
+              </a:rPr>
+              <a:t>  13  </a:t>
+            </a:r>
+            <a:r>
+              <a:rPr sz="1400">
+                <a:solidFill>
+                  <a:srgbClr val="7FE0A0"/>
+                </a:solidFill>
+                <a:latin typeface="Consolas"/>
+              </a:rPr>
+              <a:t>.tag { margin: 0 0 18px; color: #6b7787; font-size: 14px; }</a:t>
+            </a:r>
+          </a:p>
+          <a:p>
+            <a:pPr>
+              <a:spcAft>
+                <a:spcPts val="0"/>
+              </a:spcAft>
+            </a:pPr>
+            <a:r>
+              <a:rPr sz="1400">
+                <a:solidFill>
+                  <a:srgbClr val="6D8C97"/>
+                </a:solidFill>
+                <a:latin typeface="Consolas"/>
+              </a:rPr>
+              <a:t>  14  </a:t>
+            </a:r>
+            <a:r>
+              <a:rPr sz="1400">
+                <a:solidFill>
+                  <a:srgbClr val="7FE0A0"/>
+                </a:solidFill>
+                <a:latin typeface="Consolas"/>
+              </a:rPr>
+              <a:t>.chat {</a:t>
+            </a:r>
+          </a:p>
+          <a:p>
+            <a:pPr>
+              <a:spcAft>
+                <a:spcPts val="0"/>
+              </a:spcAft>
+            </a:pPr>
+            <a:r>
+              <a:rPr sz="1400">
+                <a:solidFill>
+                  <a:srgbClr val="6D8C97"/>
+                </a:solidFill>
+                <a:latin typeface="Consolas"/>
+              </a:rPr>
+              <a:t>  15  </a:t>
+            </a:r>
+            <a:r>
+              <a:rPr sz="1400">
+                <a:solidFill>
+                  <a:srgbClr val="7FE0A0"/>
+                </a:solidFill>
+                <a:latin typeface="Consolas"/>
+              </a:rPr>
+              <a:t>  min-height: 260px;</a:t>
+            </a:r>
+          </a:p>
+          <a:p>
+            <a:pPr>
+              <a:spcAft>
+                <a:spcPts val="0"/>
+              </a:spcAft>
+            </a:pPr>
+            <a:r>
+              <a:rPr sz="1400">
+                <a:solidFill>
+                  <a:srgbClr val="6D8C97"/>
+                </a:solidFill>
+                <a:latin typeface="Consolas"/>
+              </a:rPr>
+              <a:t>  16  </a:t>
+            </a:r>
+            <a:r>
+              <a:rPr sz="1400">
+                <a:solidFill>
+                  <a:srgbClr val="7FE0A0"/>
+                </a:solidFill>
+                <a:latin typeface="Consolas"/>
+              </a:rPr>
+              <a:t>  padding: 12px;</a:t>
+            </a:r>
+          </a:p>
+          <a:p>
+            <a:pPr>
+              <a:spcAft>
+                <a:spcPts val="0"/>
+              </a:spcAft>
+            </a:pPr>
+            <a:r>
+              <a:rPr sz="1400">
+                <a:solidFill>
+                  <a:srgbClr val="6D8C97"/>
+                </a:solidFill>
+                <a:latin typeface="Consolas"/>
+              </a:rPr>
+              <a:t>  17  </a:t>
+            </a:r>
+            <a:r>
+              <a:rPr sz="1400">
+                <a:solidFill>
+                  <a:srgbClr val="7FE0A0"/>
+                </a:solidFill>
+                <a:latin typeface="Consolas"/>
+              </a:rPr>
+              <a:t>  background: #ffffff;</a:t>
+            </a:r>
+          </a:p>
+          <a:p>
+            <a:pPr>
+              <a:spcAft>
+                <a:spcPts val="0"/>
+              </a:spcAft>
+            </a:pPr>
+            <a:r>
+              <a:rPr sz="1400">
+                <a:solidFill>
+                  <a:srgbClr val="6D8C97"/>
+                </a:solidFill>
+                <a:latin typeface="Consolas"/>
+              </a:rPr>
+              <a:t>  18  </a:t>
+            </a:r>
+            <a:r>
+              <a:rPr sz="1400">
+                <a:solidFill>
+                  <a:srgbClr val="7FE0A0"/>
+                </a:solidFill>
+                <a:latin typeface="Consolas"/>
+              </a:rPr>
+              <a:t>  border: 1px solid #dbe3ec;</a:t>
+            </a:r>
+          </a:p>
+          <a:p>
+            <a:pPr>
+              <a:spcAft>
+                <a:spcPts val="0"/>
+              </a:spcAft>
+            </a:pPr>
+            <a:r>
+              <a:rPr sz="1400">
+                <a:solidFill>
+                  <a:srgbClr val="6D8C97"/>
+                </a:solidFill>
+                <a:latin typeface="Consolas"/>
+              </a:rPr>
+              <a:t>  19  </a:t>
+            </a:r>
+            <a:r>
+              <a:rPr sz="1400">
+                <a:solidFill>
+                  <a:srgbClr val="7FE0A0"/>
+                </a:solidFill>
+                <a:latin typeface="Consolas"/>
+              </a:rPr>
+              <a:t>  border-radius: 8px;</a:t>
+            </a:r>
+          </a:p>
+          <a:p>
+            <a:pPr>
+              <a:spcAft>
+                <a:spcPts val="0"/>
+              </a:spcAft>
+            </a:pPr>
+            <a:r>
+              <a:rPr sz="1400">
+                <a:solidFill>
+                  <a:srgbClr val="6D8C97"/>
+                </a:solidFill>
+                <a:latin typeface="Consolas"/>
+              </a:rPr>
+              <a:t>  20  </a:t>
+            </a:r>
+            <a:r>
+              <a:rPr sz="1400">
+                <a:solidFill>
+                  <a:srgbClr val="7FE0A0"/>
+                </a:solidFill>
+                <a:latin typeface="Consolas"/>
+              </a:rPr>
+              <a:t>}</a:t>
+            </a:r>
+          </a:p>
+        </p:txBody>
+      </p:sp>
+    </p:spTree>
+  </p:cSld>
+  <p:clrMapOvr>
+    <a:masterClrMapping/>
+  </p:clrMapOvr>
+</p:sld>
+</file>
+
+<file path=ppt/slides/slide11.xml><?xml version="1.0" encoding="utf-8"?>
+<p:sld xmlns:a="http://schemas.openxmlformats.org/drawingml/2006/main" xmlns:p="http://schemas.openxmlformats.org/presentationml/2006/main" xmlns:r="http://schemas.openxmlformats.org/officeDocument/2006/relationships">
+  <p:cSld>
+    <p:bg>
+      <p:bgPr>
+        <a:solidFill>
+          <a:srgbClr val="102127"/>
+        </a:solidFill>
+        <a:effectLst/>
+      </p:bgPr>
+    </p:bg>
+    <p:spTree>
+      <p:nvGrpSpPr>
+        <p:cNvPr id="1" name=""/>
+        <p:cNvGrpSpPr/>
+        <p:nvPr/>
+      </p:nvGrpSpPr>
+      <p:grpSpPr/>
+      <p:sp>
+        <p:nvSpPr>
+          <p:cNvPr id="2" name="TextBox 1"/>
+          <p:cNvSpPr txBox="1"/>
+          <p:nvPr/>
+        </p:nvSpPr>
+        <p:spPr>
+          <a:xfrm>
+            <a:off x="502920" y="274320"/>
+            <a:ext cx="11155680" cy="731520"/>
+          </a:xfrm>
+          <a:prstGeom prst="rect">
+            <a:avLst/>
+          </a:prstGeom>
+          <a:noFill/>
+        </p:spPr>
+        <p:txBody>
+          <a:bodyPr wrap="none">
+            <a:spAutoFit/>
+          </a:bodyPr>
+          <a:lstStyle/>
+          <a:p>
+            <a:r>
+              <a:rPr sz="2600" b="1">
+                <a:solidFill>
+                  <a:srgbClr val="01AEFD"/>
+                </a:solidFill>
+              </a:rPr>
+              <a:t>Type this into style.css  (3 of 4)</a:t>
+            </a:r>
+          </a:p>
+        </p:txBody>
+      </p:sp>
+      <p:sp>
+        <p:nvSpPr>
+          <p:cNvPr id="3" name="TextBox 2"/>
+          <p:cNvSpPr txBox="1"/>
+          <p:nvPr/>
+        </p:nvSpPr>
+        <p:spPr>
+          <a:xfrm>
+            <a:off x="502920" y="1051560"/>
+            <a:ext cx="11155680" cy="5394960"/>
+          </a:xfrm>
+          <a:prstGeom prst="rect">
+            <a:avLst/>
+          </a:prstGeom>
+          <a:noFill/>
+        </p:spPr>
+        <p:txBody>
+          <a:bodyPr wrap="none">
+            <a:spAutoFit/>
+          </a:bodyPr>
+          <a:lstStyle/>
+          <a:p>
+            <a:pPr>
+              <a:spcAft>
+                <a:spcPts val="0"/>
+              </a:spcAft>
+            </a:pPr>
+            <a:r>
+              <a:rPr sz="1400">
+                <a:solidFill>
+                  <a:srgbClr val="6D8C97"/>
+                </a:solidFill>
+                <a:latin typeface="Consolas"/>
+              </a:rPr>
+              <a:t>  21  </a:t>
+            </a:r>
+            <a:r>
+              <a:rPr sz="1400">
+                <a:solidFill>
+                  <a:srgbClr val="7FE0A0"/>
+                </a:solidFill>
+                <a:latin typeface="Consolas"/>
+              </a:rPr>
+              <a:t>.composer { display: flex; gap: 8px; margin-top: 12px; }</a:t>
+            </a:r>
+          </a:p>
+          <a:p>
+            <a:pPr>
+              <a:spcAft>
+                <a:spcPts val="0"/>
+              </a:spcAft>
+            </a:pPr>
+            <a:r>
+              <a:rPr sz="1400">
+                <a:solidFill>
+                  <a:srgbClr val="6D8C97"/>
+                </a:solidFill>
+                <a:latin typeface="Consolas"/>
+              </a:rPr>
+              <a:t>  22  </a:t>
+            </a:r>
+            <a:r>
+              <a:rPr sz="1400">
+                <a:solidFill>
+                  <a:srgbClr val="7FE0A0"/>
+                </a:solidFill>
+                <a:latin typeface="Consolas"/>
+              </a:rPr>
+              <a:t>.composer input {</a:t>
+            </a:r>
+          </a:p>
+          <a:p>
+            <a:pPr>
+              <a:spcAft>
+                <a:spcPts val="0"/>
+              </a:spcAft>
+            </a:pPr>
+            <a:r>
+              <a:rPr sz="1400">
+                <a:solidFill>
+                  <a:srgbClr val="6D8C97"/>
+                </a:solidFill>
+                <a:latin typeface="Consolas"/>
+              </a:rPr>
+              <a:t>  23  </a:t>
+            </a:r>
+            <a:r>
+              <a:rPr sz="1400">
+                <a:solidFill>
+                  <a:srgbClr val="7FE0A0"/>
+                </a:solidFill>
+                <a:latin typeface="Consolas"/>
+              </a:rPr>
+              <a:t>  flex: 1;</a:t>
+            </a:r>
+          </a:p>
+          <a:p>
+            <a:pPr>
+              <a:spcAft>
+                <a:spcPts val="0"/>
+              </a:spcAft>
+            </a:pPr>
+            <a:r>
+              <a:rPr sz="1400">
+                <a:solidFill>
+                  <a:srgbClr val="6D8C97"/>
+                </a:solidFill>
+                <a:latin typeface="Consolas"/>
+              </a:rPr>
+              <a:t>  24  </a:t>
+            </a:r>
+            <a:r>
+              <a:rPr sz="1400">
+                <a:solidFill>
+                  <a:srgbClr val="7FE0A0"/>
+                </a:solidFill>
+                <a:latin typeface="Consolas"/>
+              </a:rPr>
+              <a:t>  padding: 11px;</a:t>
+            </a:r>
+          </a:p>
+          <a:p>
+            <a:pPr>
+              <a:spcAft>
+                <a:spcPts val="0"/>
+              </a:spcAft>
+            </a:pPr>
+            <a:r>
+              <a:rPr sz="1400">
+                <a:solidFill>
+                  <a:srgbClr val="6D8C97"/>
+                </a:solidFill>
+                <a:latin typeface="Consolas"/>
+              </a:rPr>
+              <a:t>  25  </a:t>
+            </a:r>
+            <a:r>
+              <a:rPr sz="1400">
+                <a:solidFill>
+                  <a:srgbClr val="7FE0A0"/>
+                </a:solidFill>
+                <a:latin typeface="Consolas"/>
+              </a:rPr>
+              <a:t>  border: 1px solid #dbe3ec;</a:t>
+            </a:r>
+          </a:p>
+          <a:p>
+            <a:pPr>
+              <a:spcAft>
+                <a:spcPts val="0"/>
+              </a:spcAft>
+            </a:pPr>
+            <a:r>
+              <a:rPr sz="1400">
+                <a:solidFill>
+                  <a:srgbClr val="6D8C97"/>
+                </a:solidFill>
+                <a:latin typeface="Consolas"/>
+              </a:rPr>
+              <a:t>  26  </a:t>
+            </a:r>
+            <a:r>
+              <a:rPr sz="1400">
+                <a:solidFill>
+                  <a:srgbClr val="7FE0A0"/>
+                </a:solidFill>
+                <a:latin typeface="Consolas"/>
+              </a:rPr>
+              <a:t>  border-radius: 6px;</a:t>
+            </a:r>
+          </a:p>
+          <a:p>
+            <a:pPr>
+              <a:spcAft>
+                <a:spcPts val="0"/>
+              </a:spcAft>
+            </a:pPr>
+            <a:r>
+              <a:rPr sz="1400">
+                <a:solidFill>
+                  <a:srgbClr val="6D8C97"/>
+                </a:solidFill>
+                <a:latin typeface="Consolas"/>
+              </a:rPr>
+              <a:t>  27  </a:t>
+            </a:r>
+            <a:r>
+              <a:rPr sz="1400">
+                <a:solidFill>
+                  <a:srgbClr val="7FE0A0"/>
+                </a:solidFill>
+                <a:latin typeface="Consolas"/>
+              </a:rPr>
+              <a:t>  font-size: 15px;</a:t>
+            </a:r>
+          </a:p>
+          <a:p>
+            <a:pPr>
+              <a:spcAft>
+                <a:spcPts val="0"/>
+              </a:spcAft>
+            </a:pPr>
+            <a:r>
+              <a:rPr sz="1400">
+                <a:solidFill>
+                  <a:srgbClr val="6D8C97"/>
+                </a:solidFill>
+                <a:latin typeface="Consolas"/>
+              </a:rPr>
+              <a:t>  28  </a:t>
+            </a:r>
+            <a:r>
+              <a:rPr sz="1400">
+                <a:solidFill>
+                  <a:srgbClr val="7FE0A0"/>
+                </a:solidFill>
+                <a:latin typeface="Consolas"/>
+              </a:rPr>
+              <a:t>}</a:t>
+            </a:r>
+          </a:p>
+          <a:p>
+            <a:pPr>
+              <a:spcAft>
+                <a:spcPts val="0"/>
+              </a:spcAft>
+            </a:pPr>
+            <a:r>
+              <a:rPr sz="1400">
+                <a:solidFill>
+                  <a:srgbClr val="6D8C97"/>
+                </a:solidFill>
+                <a:latin typeface="Consolas"/>
+              </a:rPr>
+              <a:t>  29  </a:t>
+            </a:r>
+            <a:r>
+              <a:rPr sz="1400">
+                <a:solidFill>
+                  <a:srgbClr val="7FE0A0"/>
+                </a:solidFill>
+                <a:latin typeface="Consolas"/>
+              </a:rPr>
+              <a:t>.composer button {</a:t>
+            </a:r>
+          </a:p>
+          <a:p>
+            <a:pPr>
+              <a:spcAft>
+                <a:spcPts val="0"/>
+              </a:spcAft>
+            </a:pPr>
+            <a:r>
+              <a:rPr sz="1400">
+                <a:solidFill>
+                  <a:srgbClr val="6D8C97"/>
+                </a:solidFill>
+                <a:latin typeface="Consolas"/>
+              </a:rPr>
+              <a:t>  30  </a:t>
+            </a:r>
+            <a:r>
+              <a:rPr sz="1400">
+                <a:solidFill>
+                  <a:srgbClr val="7FE0A0"/>
+                </a:solidFill>
+                <a:latin typeface="Consolas"/>
+              </a:rPr>
+              <a:t>  padding: 11px 18px;</a:t>
+            </a:r>
+          </a:p>
+          <a:p>
+            <a:pPr>
+              <a:spcAft>
+                <a:spcPts val="0"/>
+              </a:spcAft>
+            </a:pPr>
+            <a:r>
+              <a:rPr sz="1400">
+                <a:solidFill>
+                  <a:srgbClr val="6D8C97"/>
+                </a:solidFill>
+                <a:latin typeface="Consolas"/>
+              </a:rPr>
+              <a:t>  31  </a:t>
+            </a:r>
+            <a:r>
+              <a:rPr sz="1400">
+                <a:solidFill>
+                  <a:srgbClr val="7FE0A0"/>
+                </a:solidFill>
+                <a:latin typeface="Consolas"/>
+              </a:rPr>
+              <a:t>  border: 0;</a:t>
+            </a:r>
+          </a:p>
+          <a:p>
+            <a:pPr>
+              <a:spcAft>
+                <a:spcPts val="0"/>
+              </a:spcAft>
+            </a:pPr>
+            <a:r>
+              <a:rPr sz="1400">
+                <a:solidFill>
+                  <a:srgbClr val="6D8C97"/>
+                </a:solidFill>
+                <a:latin typeface="Consolas"/>
+              </a:rPr>
+              <a:t>  32  </a:t>
+            </a:r>
+            <a:r>
+              <a:rPr sz="1400">
+                <a:solidFill>
+                  <a:srgbClr val="7FE0A0"/>
+                </a:solidFill>
+                <a:latin typeface="Consolas"/>
+              </a:rPr>
+              <a:t>  border-radius: 6px;</a:t>
+            </a:r>
+          </a:p>
+          <a:p>
+            <a:pPr>
+              <a:spcAft>
+                <a:spcPts val="0"/>
+              </a:spcAft>
+            </a:pPr>
+            <a:r>
+              <a:rPr sz="1400">
+                <a:solidFill>
+                  <a:srgbClr val="6D8C97"/>
+                </a:solidFill>
+                <a:latin typeface="Consolas"/>
+              </a:rPr>
+              <a:t>  33  </a:t>
+            </a:r>
+            <a:r>
+              <a:rPr sz="1400">
+                <a:solidFill>
+                  <a:srgbClr val="7FE0A0"/>
+                </a:solidFill>
+                <a:latin typeface="Consolas"/>
+              </a:rPr>
+              <a:t>  background: #01aefd;</a:t>
+            </a:r>
+          </a:p>
+          <a:p>
+            <a:pPr>
+              <a:spcAft>
+                <a:spcPts val="0"/>
+              </a:spcAft>
+            </a:pPr>
+            <a:r>
+              <a:rPr sz="1400">
+                <a:solidFill>
+                  <a:srgbClr val="6D8C97"/>
+                </a:solidFill>
+                <a:latin typeface="Consolas"/>
+              </a:rPr>
+              <a:t>  34  </a:t>
+            </a:r>
+            <a:r>
+              <a:rPr sz="1400">
+                <a:solidFill>
+                  <a:srgbClr val="7FE0A0"/>
+                </a:solidFill>
+                <a:latin typeface="Consolas"/>
+              </a:rPr>
+              <a:t>  color: #ffffff;</a:t>
+            </a:r>
+          </a:p>
+          <a:p>
+            <a:pPr>
+              <a:spcAft>
+                <a:spcPts val="0"/>
+              </a:spcAft>
+            </a:pPr>
+            <a:r>
+              <a:rPr sz="1400">
+                <a:solidFill>
+                  <a:srgbClr val="6D8C97"/>
+                </a:solidFill>
+                <a:latin typeface="Consolas"/>
+              </a:rPr>
+              <a:t>  35  </a:t>
+            </a:r>
+            <a:r>
+              <a:rPr sz="1400">
+                <a:solidFill>
+                  <a:srgbClr val="7FE0A0"/>
+                </a:solidFill>
+                <a:latin typeface="Consolas"/>
+              </a:rPr>
+              <a:t>  font-size: 15px;</a:t>
+            </a:r>
+          </a:p>
+        </p:txBody>
+      </p:sp>
+    </p:spTree>
+  </p:cSld>
+  <p:clrMapOvr>
+    <a:masterClrMapping/>
+  </p:clrMapOvr>
+</p:sld>
+</file>
+
+<file path=ppt/slides/slide12.xml><?xml version="1.0" encoding="utf-8"?>
+<p:sld xmlns:a="http://schemas.openxmlformats.org/drawingml/2006/main" xmlns:p="http://schemas.openxmlformats.org/presentationml/2006/main" xmlns:r="http://schemas.openxmlformats.org/officeDocument/2006/relationships">
+  <p:cSld>
+    <p:bg>
+      <p:bgPr>
+        <a:solidFill>
+          <a:srgbClr val="102127"/>
+        </a:solidFill>
+        <a:effectLst/>
+      </p:bgPr>
+    </p:bg>
+    <p:spTree>
+      <p:nvGrpSpPr>
+        <p:cNvPr id="1" name=""/>
+        <p:cNvGrpSpPr/>
+        <p:nvPr/>
+      </p:nvGrpSpPr>
+      <p:grpSpPr/>
+      <p:sp>
+        <p:nvSpPr>
+          <p:cNvPr id="2" name="TextBox 1"/>
+          <p:cNvSpPr txBox="1"/>
+          <p:nvPr/>
+        </p:nvSpPr>
+        <p:spPr>
+          <a:xfrm>
+            <a:off x="502920" y="274320"/>
+            <a:ext cx="11155680" cy="731520"/>
+          </a:xfrm>
+          <a:prstGeom prst="rect">
+            <a:avLst/>
+          </a:prstGeom>
+          <a:noFill/>
+        </p:spPr>
+        <p:txBody>
+          <a:bodyPr wrap="none">
+            <a:spAutoFit/>
+          </a:bodyPr>
+          <a:lstStyle/>
+          <a:p>
+            <a:r>
+              <a:rPr sz="2600" b="1">
+                <a:solidFill>
+                  <a:srgbClr val="01AEFD"/>
+                </a:solidFill>
+              </a:rPr>
+              <a:t>Type this into style.css  (4 of 4)</a:t>
+            </a:r>
+          </a:p>
+        </p:txBody>
+      </p:sp>
+      <p:sp>
+        <p:nvSpPr>
+          <p:cNvPr id="3" name="TextBox 2"/>
+          <p:cNvSpPr txBox="1"/>
+          <p:nvPr/>
+        </p:nvSpPr>
+        <p:spPr>
+          <a:xfrm>
+            <a:off x="502920" y="1051560"/>
+            <a:ext cx="11155680" cy="5394960"/>
+          </a:xfrm>
+          <a:prstGeom prst="rect">
+            <a:avLst/>
+          </a:prstGeom>
+          <a:noFill/>
+        </p:spPr>
+        <p:txBody>
+          <a:bodyPr wrap="none">
+            <a:spAutoFit/>
+          </a:bodyPr>
+          <a:lstStyle/>
+          <a:p>
+            <a:pPr>
+              <a:spcAft>
+                <a:spcPts val="0"/>
+              </a:spcAft>
+            </a:pPr>
+            <a:r>
+              <a:rPr sz="1700">
+                <a:solidFill>
+                  <a:srgbClr val="6D8C97"/>
+                </a:solidFill>
+                <a:latin typeface="Consolas"/>
+              </a:rPr>
+              <a:t>  36  </a:t>
+            </a:r>
+            <a:r>
+              <a:rPr sz="1700">
+                <a:solidFill>
+                  <a:srgbClr val="7FE0A0"/>
+                </a:solidFill>
+                <a:latin typeface="Consolas"/>
+              </a:rPr>
+              <a:t>  cursor: pointer;</a:t>
+            </a:r>
+          </a:p>
+          <a:p>
+            <a:pPr>
+              <a:spcAft>
+                <a:spcPts val="0"/>
+              </a:spcAft>
+            </a:pPr>
+            <a:r>
+              <a:rPr sz="1700">
+                <a:solidFill>
+                  <a:srgbClr val="6D8C97"/>
+                </a:solidFill>
+                <a:latin typeface="Consolas"/>
+              </a:rPr>
+              <a:t>  37  </a:t>
+            </a:r>
+            <a:r>
+              <a:rPr sz="1700">
+                <a:solidFill>
+                  <a:srgbClr val="7FE0A0"/>
+                </a:solidFill>
+                <a:latin typeface="Consolas"/>
+              </a:rPr>
+              <a:t>}</a:t>
+            </a:r>
+          </a:p>
+        </p:txBody>
+      </p:sp>
+    </p:spTree>
+  </p:cSld>
+  <p:clrMapOvr>
+    <a:masterClrMapping/>
+  </p:clrMapOvr>
+</p:sld>
+</file>
+
+<file path=ppt/slides/slide13.xml><?xml version="1.0" encoding="utf-8"?>
+<p:sld xmlns:a="http://schemas.openxmlformats.org/drawingml/2006/main" xmlns:p="http://schemas.openxmlformats.org/presentationml/2006/main" xmlns:r="http://schemas.openxmlformats.org/officeDocument/2006/relationships">
+  <p:cSld>
+    <p:spTree>
+      <p:nvGrpSpPr>
+        <p:cNvPr id="1" name=""/>
+        <p:cNvGrpSpPr/>
+        <p:nvPr/>
+      </p:nvGrpSpPr>
+      <p:grpSpPr/>
+      <p:sp>
+        <p:nvSpPr>
+          <p:cNvPr id="2" name="Title 1"/>
+          <p:cNvSpPr>
+            <a:spLocks noGrp="1"/>
+          </p:cNvSpPr>
+          <p:nvPr>
+            <p:ph type="title"/>
+          </p:nvPr>
+        </p:nvSpPr>
+        <p:spPr/>
+        <p:txBody>
+          <a:bodyPr/>
+          <a:lstStyle/>
+          <a:p>
+            <a:r>
+              <a:rPr sz="3800" b="1">
+                <a:solidFill>
+                  <a:srgbClr val="1F2A37"/>
+                </a:solidFill>
+              </a:rPr>
+              <a:t>Two buttons you will use every week</a:t>
+            </a:r>
+          </a:p>
+        </p:txBody>
+      </p:sp>
+      <p:sp>
+        <p:nvSpPr>
+          <p:cNvPr id="3" name="TextBox 2"/>
+          <p:cNvSpPr txBox="1"/>
+          <p:nvPr/>
+        </p:nvSpPr>
+        <p:spPr>
+          <a:xfrm>
+            <a:off x="822960" y="1828800"/>
+            <a:ext cx="10515600" cy="4206240"/>
+          </a:xfrm>
+          <a:prstGeom prst="rect">
+            <a:avLst/>
+          </a:prstGeom>
+          <a:noFill/>
+        </p:spPr>
+        <p:txBody>
+          <a:bodyPr wrap="square">
+            <a:spAutoFit/>
+          </a:bodyPr>
+          <a:lstStyle/>
+          <a:p>
+            <a:pPr>
+              <a:spcAft>
+                <a:spcPts val="1400"/>
+              </a:spcAft>
+            </a:pPr>
+            <a:r>
+              <a:rPr sz="2400">
+                <a:solidFill>
+                  <a:srgbClr val="1F2A37"/>
+                </a:solidFill>
+              </a:rPr>
+              <a:t>• Run - nothing happens until you press it</a:t>
+            </a:r>
+          </a:p>
+          <a:p>
+            <a:pPr>
+              <a:spcAft>
+                <a:spcPts val="1400"/>
+              </a:spcAft>
+            </a:pPr>
+            <a:r>
+              <a:rPr sz="2400">
+                <a:solidFill>
+                  <a:srgbClr val="1F2A37"/>
+                </a:solidFill>
+              </a:rPr>
+              <a:t>• Console - where your code talks to you</a:t>
+            </a:r>
+          </a:p>
+        </p:txBody>
+      </p:sp>
+    </p:spTree>
+  </p:cSld>
+  <p:clrMapOvr>
+    <a:masterClrMapping/>
+  </p:clrMapOvr>
+</p:sld>
+</file>
+
+<file path=ppt/slides/slide14.xml><?xml version="1.0" encoding="utf-8"?>
+<p:sld xmlns:a="http://schemas.openxmlformats.org/drawingml/2006/main" xmlns:p="http://schemas.openxmlformats.org/presentationml/2006/main" xmlns:r="http://schemas.openxmlformats.org/officeDocument/2006/relationships">
+  <p:cSld>
+    <p:bg>
+      <p:bgPr>
+        <a:solidFill>
+          <a:srgbClr val="102127"/>
+        </a:solidFill>
+        <a:effectLst/>
+      </p:bgPr>
+    </p:bg>
+    <p:spTree>
+      <p:nvGrpSpPr>
+        <p:cNvPr id="1" name=""/>
+        <p:cNvGrpSpPr/>
+        <p:nvPr/>
+      </p:nvGrpSpPr>
+      <p:grpSpPr/>
+      <p:sp>
+        <p:nvSpPr>
+          <p:cNvPr id="2" name="TextBox 1"/>
+          <p:cNvSpPr txBox="1"/>
+          <p:nvPr/>
+        </p:nvSpPr>
+        <p:spPr>
+          <a:xfrm>
+            <a:off x="502920" y="274320"/>
+            <a:ext cx="11155680" cy="731520"/>
+          </a:xfrm>
+          <a:prstGeom prst="rect">
+            <a:avLst/>
+          </a:prstGeom>
+          <a:noFill/>
+        </p:spPr>
+        <p:txBody>
+          <a:bodyPr wrap="none">
+            <a:spAutoFit/>
+          </a:bodyPr>
+          <a:lstStyle/>
+          <a:p>
+            <a:r>
+              <a:rPr sz="2600" b="1">
+                <a:solidFill>
+                  <a:srgbClr val="01AEFD"/>
+                </a:solidFill>
+              </a:rPr>
+              <a:t>Type this into script.js</a:t>
+            </a:r>
+          </a:p>
+        </p:txBody>
+      </p:sp>
+      <p:sp>
+        <p:nvSpPr>
+          <p:cNvPr id="3" name="TextBox 2"/>
+          <p:cNvSpPr txBox="1"/>
+          <p:nvPr/>
+        </p:nvSpPr>
+        <p:spPr>
+          <a:xfrm>
+            <a:off x="502920" y="1051560"/>
+            <a:ext cx="11155680" cy="5394960"/>
+          </a:xfrm>
+          <a:prstGeom prst="rect">
+            <a:avLst/>
+          </a:prstGeom>
+          <a:noFill/>
+        </p:spPr>
+        <p:txBody>
+          <a:bodyPr wrap="none">
+            <a:spAutoFit/>
+          </a:bodyPr>
+          <a:lstStyle/>
+          <a:p>
+            <a:pPr>
+              <a:spcAft>
+                <a:spcPts val="0"/>
+              </a:spcAft>
+            </a:pPr>
+            <a:r>
+              <a:rPr sz="1700">
+                <a:solidFill>
+                  <a:srgbClr val="6D8C97"/>
+                </a:solidFill>
+                <a:latin typeface="Consolas"/>
+              </a:rPr>
+              <a:t>   1  </a:t>
+            </a:r>
+            <a:r>
+              <a:rPr sz="1700">
+                <a:solidFill>
+                  <a:srgbClr val="7FE0A0"/>
+                </a:solidFill>
+                <a:latin typeface="Consolas"/>
+              </a:rPr>
+              <a:t>// Week 1: prove the JavaScript file is really running.</a:t>
+            </a:r>
+          </a:p>
+          <a:p>
+            <a:pPr>
+              <a:spcAft>
+                <a:spcPts val="0"/>
+              </a:spcAft>
+            </a:pPr>
+            <a:r>
+              <a:rPr sz="1700">
+                <a:solidFill>
+                  <a:srgbClr val="6D8C97"/>
+                </a:solidFill>
+                <a:latin typeface="Consolas"/>
+              </a:rPr>
+              <a:t>   2  </a:t>
+            </a:r>
+            <a:r>
+              <a:rPr sz="1700">
+                <a:solidFill>
+                  <a:srgbClr val="7FE0A0"/>
+                </a:solidFill>
+                <a:latin typeface="Consolas"/>
+              </a:rPr>
+              <a:t>console.log('My AI companion is starting up.');</a:t>
+            </a:r>
+          </a:p>
+        </p:txBody>
+      </p:sp>
+    </p:spTree>
+  </p:cSld>
+  <p:clrMapOvr>
+    <a:masterClrMapping/>
+  </p:clrMapOvr>
+</p:sld>
+</file>
+
+<file path=ppt/slides/slide15.xml><?xml version="1.0" encoding="utf-8"?>
+<p:sld xmlns:a="http://schemas.openxmlformats.org/drawingml/2006/main" xmlns:p="http://schemas.openxmlformats.org/presentationml/2006/main" xmlns:r="http://schemas.openxmlformats.org/officeDocument/2006/relationships">
+  <p:cSld>
+    <p:spTree>
+      <p:nvGrpSpPr>
+        <p:cNvPr id="1" name=""/>
+        <p:cNvGrpSpPr/>
+        <p:nvPr/>
+      </p:nvGrpSpPr>
+      <p:grpSpPr/>
+      <p:sp>
+        <p:nvSpPr>
+          <p:cNvPr id="2" name="Title 1"/>
+          <p:cNvSpPr>
+            <a:spLocks noGrp="1"/>
+          </p:cNvSpPr>
+          <p:nvPr>
+            <p:ph type="title"/>
+          </p:nvPr>
+        </p:nvSpPr>
+        <p:spPr/>
+        <p:txBody>
+          <a:bodyPr/>
+          <a:lstStyle/>
+          <a:p>
+            <a:r>
+              <a:rPr sz="3800" b="1">
+                <a:solidFill>
+                  <a:srgbClr val="1F2A37"/>
+                </a:solidFill>
+              </a:rPr>
+              <a:t>id = a name</a:t>
+            </a:r>
+          </a:p>
+        </p:txBody>
+      </p:sp>
+      <p:sp>
+        <p:nvSpPr>
+          <p:cNvPr id="3" name="TextBox 2"/>
+          <p:cNvSpPr txBox="1"/>
+          <p:nvPr/>
+        </p:nvSpPr>
+        <p:spPr>
+          <a:xfrm>
+            <a:off x="822960" y="1828800"/>
+            <a:ext cx="10515600" cy="4206240"/>
+          </a:xfrm>
+          <a:prstGeom prst="rect">
+            <a:avLst/>
+          </a:prstGeom>
+          <a:noFill/>
+        </p:spPr>
+        <p:txBody>
+          <a:bodyPr wrap="square">
+            <a:spAutoFit/>
+          </a:bodyPr>
+          <a:lstStyle/>
+          <a:p>
+            <a:pPr>
+              <a:spcAft>
+                <a:spcPts val="1400"/>
+              </a:spcAft>
+            </a:pPr>
+            <a:r>
+              <a:rPr sz="2400">
+                <a:solidFill>
+                  <a:srgbClr val="1F2A37"/>
+                </a:solidFill>
+              </a:rPr>
+              <a:t>• &lt;div id="chat"&gt;</a:t>
+            </a:r>
+          </a:p>
+          <a:p>
+            <a:pPr>
+              <a:spcAft>
+                <a:spcPts val="1400"/>
+              </a:spcAft>
+            </a:pPr>
+            <a:r>
+              <a:rPr sz="2400">
+                <a:solidFill>
+                  <a:srgbClr val="1F2A37"/>
+                </a:solidFill>
+              </a:rPr>
+              <a:t>• Next week JavaScript uses that name to find the box</a:t>
+            </a:r>
+          </a:p>
+          <a:p>
+            <a:pPr>
+              <a:spcAft>
+                <a:spcPts val="1400"/>
+              </a:spcAft>
+            </a:pPr>
+            <a:r>
+              <a:rPr sz="2400">
+                <a:solidFill>
+                  <a:srgbClr val="1F2A37"/>
+                </a:solidFill>
+              </a:rPr>
+              <a:t>• Names must be spelled exactly the same in both files</a:t>
+            </a:r>
+          </a:p>
+        </p:txBody>
+      </p:sp>
+    </p:spTree>
+  </p:cSld>
+  <p:clrMapOvr>
+    <a:masterClrMapping/>
+  </p:clrMapOvr>
+</p:sld>
+</file>
+
+<file path=ppt/slides/slide16.xml><?xml version="1.0" encoding="utf-8"?>
+<p:sld xmlns:a="http://schemas.openxmlformats.org/drawingml/2006/main" xmlns:p="http://schemas.openxmlformats.org/presentationml/2006/main" xmlns:r="http://schemas.openxmlformats.org/officeDocument/2006/relationships">
+  <p:cSld>
+    <p:spTree>
+      <p:nvGrpSpPr>
+        <p:cNvPr id="1" name=""/>
+        <p:cNvGrpSpPr/>
+        <p:nvPr/>
+      </p:nvGrpSpPr>
+      <p:grpSpPr/>
+      <p:sp>
+        <p:nvSpPr>
+          <p:cNvPr id="2" name="Title 1"/>
+          <p:cNvSpPr>
+            <a:spLocks noGrp="1"/>
+          </p:cNvSpPr>
+          <p:nvPr>
+            <p:ph type="title"/>
+          </p:nvPr>
+        </p:nvSpPr>
+        <p:spPr/>
+        <p:txBody>
+          <a:bodyPr/>
+          <a:lstStyle/>
+          <a:p>
+            <a:r>
+              <a:rPr sz="3800" b="1">
+                <a:solidFill>
+                  <a:srgbClr val="1F2A37"/>
+                </a:solidFill>
+              </a:rPr>
+              <a:t>Your turn</a:t>
+            </a:r>
+          </a:p>
+        </p:txBody>
+      </p:sp>
+      <p:sp>
+        <p:nvSpPr>
+          <p:cNvPr id="3" name="TextBox 2"/>
+          <p:cNvSpPr txBox="1"/>
+          <p:nvPr/>
+        </p:nvSpPr>
+        <p:spPr>
+          <a:xfrm>
+            <a:off x="822960" y="1828800"/>
+            <a:ext cx="10515600" cy="4206240"/>
+          </a:xfrm>
+          <a:prstGeom prst="rect">
+            <a:avLst/>
+          </a:prstGeom>
+          <a:noFill/>
+        </p:spPr>
+        <p:txBody>
+          <a:bodyPr wrap="square">
+            <a:spAutoFit/>
+          </a:bodyPr>
+          <a:lstStyle/>
+          <a:p>
+            <a:pPr>
+              <a:spcAft>
+                <a:spcPts val="1400"/>
+              </a:spcAft>
+            </a:pPr>
+            <a:r>
+              <a:rPr sz="2800">
+                <a:solidFill>
+                  <a:srgbClr val="01AEFD"/>
+                </a:solidFill>
+              </a:rPr>
+              <a:t>Make it yours</a:t>
+            </a:r>
+          </a:p>
+          <a:p>
+            <a:pPr>
+              <a:spcAft>
+                <a:spcPts val="1400"/>
+              </a:spcAft>
+            </a:pPr>
+            <a:r>
+              <a:rPr sz="2400">
+                <a:solidFill>
+                  <a:srgbClr val="1F2A37"/>
+                </a:solidFill>
+              </a:rPr>
+              <a:t>• Change the title</a:t>
+            </a:r>
+          </a:p>
+          <a:p>
+            <a:pPr>
+              <a:spcAft>
+                <a:spcPts val="1400"/>
+              </a:spcAft>
+            </a:pPr>
+            <a:r>
+              <a:rPr sz="2400">
+                <a:solidFill>
+                  <a:srgbClr val="1F2A37"/>
+                </a:solidFill>
+              </a:rPr>
+              <a:t>• Change the colours</a:t>
+            </a:r>
+          </a:p>
+          <a:p>
+            <a:pPr>
+              <a:spcAft>
+                <a:spcPts val="1400"/>
+              </a:spcAft>
+            </a:pPr>
+            <a:r>
+              <a:rPr sz="2400">
+                <a:solidFill>
+                  <a:srgbClr val="1F2A37"/>
+                </a:solidFill>
+              </a:rPr>
+              <a:t>• Press Run</a:t>
+            </a:r>
+          </a:p>
+        </p:txBody>
+      </p:sp>
+    </p:spTree>
+  </p:cSld>
+  <p:clrMapOvr>
+    <a:masterClrMapping/>
+  </p:clrMapOvr>
+</p:sld>
+</file>
+
 <file path=ppt/slides/slide2.xml><?xml version="1.0" encoding="utf-8"?>
 <p:sld xmlns:a="http://schemas.openxmlformats.org/drawingml/2006/main" xmlns:p="http://schemas.openxmlformats.org/presentationml/2006/main" xmlns:r="http://schemas.openxmlformats.org/officeDocument/2006/relationships">
   <p:cSld>
@@ -3438,6 +4936,14 @@
 <file path=ppt/slides/slide4.xml><?xml version="1.0" encoding="utf-8"?>
 <p:sld xmlns:a="http://schemas.openxmlformats.org/drawingml/2006/main" xmlns:p="http://schemas.openxmlformats.org/presentationml/2006/main" xmlns:r="http://schemas.openxmlformats.org/officeDocument/2006/relationships">
   <p:cSld>
+    <p:bg>
+      <p:bgPr>
+        <a:solidFill>
+          <a:srgbClr val="102127"/>
+        </a:solidFill>
+        <a:effectLst/>
+      </p:bgPr>
+    </p:bg>
     <p:spTree>
       <p:nvGrpSpPr>
         <p:cNvPr id="1" name=""/>
@@ -3447,40 +4953,14 @@
       <p:grpSpPr/>
       <p:sp>
         <p:nvSpPr>
-          <p:cNvPr id="2" name="Title 1"/>
-          <p:cNvSpPr>
-            <a:spLocks noGrp="1"/>
-          </p:cNvSpPr>
-          <p:nvPr>
-            <p:ph type="title"/>
-          </p:nvPr>
-        </p:nvSpPr>
-        <p:spPr/>
-        <p:txBody>
-          <a:bodyPr/>
-          <a:lstStyle/>
-          <a:p>
-            <a:r>
-              <a:rPr sz="3800" b="1">
-                <a:solidFill>
-                  <a:srgbClr val="1F2A37"/>
-                </a:solidFill>
-              </a:rPr>
-              <a:t>Three files</a:t>
-            </a:r>
-          </a:p>
-        </p:txBody>
-      </p:sp>
-      <p:sp>
-        <p:nvSpPr>
-          <p:cNvPr id="3" name="TextBox 2"/>
+          <p:cNvPr id="2" name="TextBox 1"/>
           <p:cNvSpPr txBox="1"/>
           <p:nvPr/>
         </p:nvSpPr>
         <p:spPr>
           <a:xfrm>
-            <a:off x="822960" y="1828800"/>
-            <a:ext cx="10515600" cy="4206240"/>
+            <a:off x="502920" y="274320"/>
+            <a:ext cx="11155680" cy="731520"/>
           </a:xfrm>
           <a:prstGeom prst="rect">
             <a:avLst/>
@@ -3488,53 +4968,166 @@
           <a:noFill/>
         </p:spPr>
         <p:txBody>
-          <a:bodyPr wrap="square">
+          <a:bodyPr wrap="none">
             <a:spAutoFit/>
           </a:bodyPr>
           <a:lstStyle/>
           <a:p>
-            <a:pPr>
-              <a:spcAft>
-                <a:spcPts val="1400"/>
-              </a:spcAft>
-            </a:pPr>
-            <a:r>
-              <a:rPr sz="2400">
-                <a:solidFill>
-                  <a:srgbClr val="1F2A37"/>
-                </a:solidFill>
-              </a:rPr>
-              <a:t>• index.html - the boxes</a:t>
-            </a:r>
-          </a:p>
-          <a:p>
-            <a:pPr>
-              <a:spcAft>
-                <a:spcPts val="1400"/>
-              </a:spcAft>
-            </a:pPr>
-            <a:r>
-              <a:rPr sz="2400">
-                <a:solidFill>
-                  <a:srgbClr val="1F2A37"/>
-                </a:solidFill>
-              </a:rPr>
-              <a:t>• style.css - what they look like</a:t>
-            </a:r>
-          </a:p>
-          <a:p>
-            <a:pPr>
-              <a:spcAft>
-                <a:spcPts val="1400"/>
-              </a:spcAft>
-            </a:pPr>
-            <a:r>
-              <a:rPr sz="2400">
-                <a:solidFill>
-                  <a:srgbClr val="1F2A37"/>
-                </a:solidFill>
-              </a:rPr>
-              <a:t>• script.js - what they do</a:t>
+            <a:r>
+              <a:rPr sz="2600" b="1">
+                <a:solidFill>
+                  <a:srgbClr val="01AEFD"/>
+                </a:solidFill>
+              </a:rPr>
+              <a:t>Type this into index.html  (1 of 4)</a:t>
+            </a:r>
+          </a:p>
+        </p:txBody>
+      </p:sp>
+      <p:sp>
+        <p:nvSpPr>
+          <p:cNvPr id="3" name="TextBox 2"/>
+          <p:cNvSpPr txBox="1"/>
+          <p:nvPr/>
+        </p:nvSpPr>
+        <p:spPr>
+          <a:xfrm>
+            <a:off x="502920" y="1051560"/>
+            <a:ext cx="11155680" cy="5394960"/>
+          </a:xfrm>
+          <a:prstGeom prst="rect">
+            <a:avLst/>
+          </a:prstGeom>
+          <a:noFill/>
+        </p:spPr>
+        <p:txBody>
+          <a:bodyPr wrap="none">
+            <a:spAutoFit/>
+          </a:bodyPr>
+          <a:lstStyle/>
+          <a:p>
+            <a:pPr>
+              <a:spcAft>
+                <a:spcPts val="0"/>
+              </a:spcAft>
+            </a:pPr>
+            <a:r>
+              <a:rPr sz="1700">
+                <a:solidFill>
+                  <a:srgbClr val="6D8C97"/>
+                </a:solidFill>
+                <a:latin typeface="Consolas"/>
+              </a:rPr>
+              <a:t>   1  </a:t>
+            </a:r>
+            <a:r>
+              <a:rPr sz="1700">
+                <a:solidFill>
+                  <a:srgbClr val="7FE0A0"/>
+                </a:solidFill>
+                <a:latin typeface="Consolas"/>
+              </a:rPr>
+              <a:t>&lt;main class="app"&gt;</a:t>
+            </a:r>
+          </a:p>
+          <a:p>
+            <a:pPr>
+              <a:spcAft>
+                <a:spcPts val="0"/>
+              </a:spcAft>
+            </a:pPr>
+            <a:r>
+              <a:rPr sz="1700">
+                <a:solidFill>
+                  <a:srgbClr val="6D8C97"/>
+                </a:solidFill>
+                <a:latin typeface="Consolas"/>
+              </a:rPr>
+              <a:t>   2  </a:t>
+            </a:r>
+            <a:r>
+              <a:rPr sz="1700">
+                <a:solidFill>
+                  <a:srgbClr val="7FE0A0"/>
+                </a:solidFill>
+                <a:latin typeface="Consolas"/>
+              </a:rPr>
+              <a:t>  &lt;header class="top"&gt;</a:t>
+            </a:r>
+          </a:p>
+          <a:p>
+            <a:pPr>
+              <a:spcAft>
+                <a:spcPts val="0"/>
+              </a:spcAft>
+            </a:pPr>
+            <a:r>
+              <a:rPr sz="1700">
+                <a:solidFill>
+                  <a:srgbClr val="6D8C97"/>
+                </a:solidFill>
+                <a:latin typeface="Consolas"/>
+              </a:rPr>
+              <a:t>   3  </a:t>
+            </a:r>
+            <a:r>
+              <a:rPr sz="1700">
+                <a:solidFill>
+                  <a:srgbClr val="7FE0A0"/>
+                </a:solidFill>
+                <a:latin typeface="Consolas"/>
+              </a:rPr>
+              <a:t>    &lt;h1&gt;My AI Companion&lt;/h1&gt;</a:t>
+            </a:r>
+          </a:p>
+          <a:p>
+            <a:pPr>
+              <a:spcAft>
+                <a:spcPts val="0"/>
+              </a:spcAft>
+            </a:pPr>
+            <a:r>
+              <a:rPr sz="1700">
+                <a:solidFill>
+                  <a:srgbClr val="6D8C97"/>
+                </a:solidFill>
+                <a:latin typeface="Consolas"/>
+              </a:rPr>
+              <a:t>   4  </a:t>
+            </a:r>
+            <a:r>
+              <a:rPr sz="1700">
+                <a:solidFill>
+                  <a:srgbClr val="7FE0A0"/>
+                </a:solidFill>
+                <a:latin typeface="Consolas"/>
+              </a:rPr>
+              <a:t>    &lt;p class="tag"&gt;Built by me, running on the school AI&lt;/p&gt;</a:t>
+            </a:r>
+          </a:p>
+          <a:p>
+            <a:pPr>
+              <a:spcAft>
+                <a:spcPts val="0"/>
+              </a:spcAft>
+            </a:pPr>
+            <a:r>
+              <a:rPr sz="1700">
+                <a:solidFill>
+                  <a:srgbClr val="6D8C97"/>
+                </a:solidFill>
+                <a:latin typeface="Consolas"/>
+              </a:rPr>
+              <a:t>   5  </a:t>
+            </a:r>
+            <a:r>
+              <a:rPr sz="1700">
+                <a:solidFill>
+                  <a:srgbClr val="7FE0A0"/>
+                </a:solidFill>
+                <a:latin typeface="Consolas"/>
+              </a:rPr>
+              <a:t>  &lt;/header&gt;</a:t>
             </a:r>
           </a:p>
         </p:txBody>
@@ -3550,6 +5143,14 @@
 <file path=ppt/slides/slide5.xml><?xml version="1.0" encoding="utf-8"?>
 <p:sld xmlns:a="http://schemas.openxmlformats.org/drawingml/2006/main" xmlns:p="http://schemas.openxmlformats.org/presentationml/2006/main" xmlns:r="http://schemas.openxmlformats.org/officeDocument/2006/relationships">
   <p:cSld>
+    <p:bg>
+      <p:bgPr>
+        <a:solidFill>
+          <a:srgbClr val="102127"/>
+        </a:solidFill>
+        <a:effectLst/>
+      </p:bgPr>
+    </p:bg>
     <p:spTree>
       <p:nvGrpSpPr>
         <p:cNvPr id="1" name=""/>
@@ -3559,40 +5160,14 @@
       <p:grpSpPr/>
       <p:sp>
         <p:nvSpPr>
-          <p:cNvPr id="2" name="Title 1"/>
-          <p:cNvSpPr>
-            <a:spLocks noGrp="1"/>
-          </p:cNvSpPr>
-          <p:nvPr>
-            <p:ph type="title"/>
-          </p:nvPr>
-        </p:nvSpPr>
-        <p:spPr/>
-        <p:txBody>
-          <a:bodyPr/>
-          <a:lstStyle/>
-          <a:p>
-            <a:r>
-              <a:rPr sz="3800" b="1">
-                <a:solidFill>
-                  <a:srgbClr val="1F2A37"/>
-                </a:solidFill>
-              </a:rPr>
-              <a:t>Two buttons you will use every week</a:t>
-            </a:r>
-          </a:p>
-        </p:txBody>
-      </p:sp>
-      <p:sp>
-        <p:nvSpPr>
-          <p:cNvPr id="3" name="TextBox 2"/>
+          <p:cNvPr id="2" name="TextBox 1"/>
           <p:cNvSpPr txBox="1"/>
           <p:nvPr/>
         </p:nvSpPr>
         <p:spPr>
           <a:xfrm>
-            <a:off x="822960" y="1828800"/>
-            <a:ext cx="10515600" cy="4206240"/>
+            <a:off x="502920" y="274320"/>
+            <a:ext cx="11155680" cy="731520"/>
           </a:xfrm>
           <a:prstGeom prst="rect">
             <a:avLst/>
@@ -3600,38 +5175,66 @@
           <a:noFill/>
         </p:spPr>
         <p:txBody>
-          <a:bodyPr wrap="square">
+          <a:bodyPr wrap="none">
             <a:spAutoFit/>
           </a:bodyPr>
           <a:lstStyle/>
           <a:p>
-            <a:pPr>
-              <a:spcAft>
-                <a:spcPts val="1400"/>
-              </a:spcAft>
-            </a:pPr>
-            <a:r>
-              <a:rPr sz="2400">
-                <a:solidFill>
-                  <a:srgbClr val="1F2A37"/>
-                </a:solidFill>
-              </a:rPr>
-              <a:t>• Run - nothing happens until you press it</a:t>
-            </a:r>
-          </a:p>
-          <a:p>
-            <a:pPr>
-              <a:spcAft>
-                <a:spcPts val="1400"/>
-              </a:spcAft>
-            </a:pPr>
-            <a:r>
-              <a:rPr sz="2400">
-                <a:solidFill>
-                  <a:srgbClr val="1F2A37"/>
-                </a:solidFill>
-              </a:rPr>
-              <a:t>• Console - where your code talks to you</a:t>
+            <a:r>
+              <a:rPr sz="2600" b="1">
+                <a:solidFill>
+                  <a:srgbClr val="01AEFD"/>
+                </a:solidFill>
+              </a:rPr>
+              <a:t>Type this into index.html  (2 of 4)</a:t>
+            </a:r>
+          </a:p>
+        </p:txBody>
+      </p:sp>
+      <p:sp>
+        <p:nvSpPr>
+          <p:cNvPr id="3" name="TextBox 2"/>
+          <p:cNvSpPr txBox="1"/>
+          <p:nvPr/>
+        </p:nvSpPr>
+        <p:spPr>
+          <a:xfrm>
+            <a:off x="502920" y="1051560"/>
+            <a:ext cx="11155680" cy="5394960"/>
+          </a:xfrm>
+          <a:prstGeom prst="rect">
+            <a:avLst/>
+          </a:prstGeom>
+          <a:noFill/>
+        </p:spPr>
+        <p:txBody>
+          <a:bodyPr wrap="none">
+            <a:spAutoFit/>
+          </a:bodyPr>
+          <a:lstStyle/>
+          <a:p>
+            <a:pPr>
+              <a:spcAft>
+                <a:spcPts val="0"/>
+              </a:spcAft>
+            </a:pPr>
+            <a:r>
+              <a:rPr sz="1700">
+                <a:solidFill>
+                  <a:srgbClr val="6D8C97"/>
+                </a:solidFill>
+                <a:latin typeface="Consolas"/>
+              </a:rPr>
+              <a:t>   6  </a:t>
+            </a:r>
+            <a:r>
+              <a:rPr sz="1700">
+                <a:solidFill>
+                  <a:srgbClr val="7FE0A0"/>
+                </a:solidFill>
+                <a:latin typeface="Consolas"/>
+              </a:rPr>
+              <a:t>  &lt;div id="chat" class="chat"&gt;&lt;/div&gt;</a:t>
             </a:r>
           </a:p>
         </p:txBody>
@@ -3647,6 +5250,14 @@
 <file path=ppt/slides/slide6.xml><?xml version="1.0" encoding="utf-8"?>
 <p:sld xmlns:a="http://schemas.openxmlformats.org/drawingml/2006/main" xmlns:p="http://schemas.openxmlformats.org/presentationml/2006/main" xmlns:r="http://schemas.openxmlformats.org/officeDocument/2006/relationships">
   <p:cSld>
+    <p:bg>
+      <p:bgPr>
+        <a:solidFill>
+          <a:srgbClr val="102127"/>
+        </a:solidFill>
+        <a:effectLst/>
+      </p:bgPr>
+    </p:bg>
     <p:spTree>
       <p:nvGrpSpPr>
         <p:cNvPr id="1" name=""/>
@@ -3656,40 +5267,14 @@
       <p:grpSpPr/>
       <p:sp>
         <p:nvSpPr>
-          <p:cNvPr id="2" name="Title 1"/>
-          <p:cNvSpPr>
-            <a:spLocks noGrp="1"/>
-          </p:cNvSpPr>
-          <p:nvPr>
-            <p:ph type="title"/>
-          </p:nvPr>
-        </p:nvSpPr>
-        <p:spPr/>
-        <p:txBody>
-          <a:bodyPr/>
-          <a:lstStyle/>
-          <a:p>
-            <a:r>
-              <a:rPr sz="3800" b="1">
-                <a:solidFill>
-                  <a:srgbClr val="1F2A37"/>
-                </a:solidFill>
-              </a:rPr>
-              <a:t>id = a name</a:t>
-            </a:r>
-          </a:p>
-        </p:txBody>
-      </p:sp>
-      <p:sp>
-        <p:nvSpPr>
-          <p:cNvPr id="3" name="TextBox 2"/>
+          <p:cNvPr id="2" name="TextBox 1"/>
           <p:cNvSpPr txBox="1"/>
           <p:nvPr/>
         </p:nvSpPr>
         <p:spPr>
           <a:xfrm>
-            <a:off x="822960" y="1828800"/>
-            <a:ext cx="10515600" cy="4206240"/>
+            <a:off x="502920" y="274320"/>
+            <a:ext cx="11155680" cy="731520"/>
           </a:xfrm>
           <a:prstGeom prst="rect">
             <a:avLst/>
@@ -3697,53 +5282,141 @@
           <a:noFill/>
         </p:spPr>
         <p:txBody>
-          <a:bodyPr wrap="square">
+          <a:bodyPr wrap="none">
             <a:spAutoFit/>
           </a:bodyPr>
           <a:lstStyle/>
           <a:p>
-            <a:pPr>
-              <a:spcAft>
-                <a:spcPts val="1400"/>
-              </a:spcAft>
-            </a:pPr>
-            <a:r>
-              <a:rPr sz="2400">
-                <a:solidFill>
-                  <a:srgbClr val="1F2A37"/>
-                </a:solidFill>
-              </a:rPr>
-              <a:t>• &lt;div id="chat"&gt;</a:t>
-            </a:r>
-          </a:p>
-          <a:p>
-            <a:pPr>
-              <a:spcAft>
-                <a:spcPts val="1400"/>
-              </a:spcAft>
-            </a:pPr>
-            <a:r>
-              <a:rPr sz="2400">
-                <a:solidFill>
-                  <a:srgbClr val="1F2A37"/>
-                </a:solidFill>
-              </a:rPr>
-              <a:t>• Next week JavaScript uses that name to find the box</a:t>
-            </a:r>
-          </a:p>
-          <a:p>
-            <a:pPr>
-              <a:spcAft>
-                <a:spcPts val="1400"/>
-              </a:spcAft>
-            </a:pPr>
-            <a:r>
-              <a:rPr sz="2400">
-                <a:solidFill>
-                  <a:srgbClr val="1F2A37"/>
-                </a:solidFill>
-              </a:rPr>
-              <a:t>• Names must be spelled exactly the same in both files</a:t>
+            <a:r>
+              <a:rPr sz="2600" b="1">
+                <a:solidFill>
+                  <a:srgbClr val="01AEFD"/>
+                </a:solidFill>
+              </a:rPr>
+              <a:t>Type this into index.html  (3 of 4)</a:t>
+            </a:r>
+          </a:p>
+        </p:txBody>
+      </p:sp>
+      <p:sp>
+        <p:nvSpPr>
+          <p:cNvPr id="3" name="TextBox 2"/>
+          <p:cNvSpPr txBox="1"/>
+          <p:nvPr/>
+        </p:nvSpPr>
+        <p:spPr>
+          <a:xfrm>
+            <a:off x="502920" y="1051560"/>
+            <a:ext cx="11155680" cy="5394960"/>
+          </a:xfrm>
+          <a:prstGeom prst="rect">
+            <a:avLst/>
+          </a:prstGeom>
+          <a:noFill/>
+        </p:spPr>
+        <p:txBody>
+          <a:bodyPr wrap="none">
+            <a:spAutoFit/>
+          </a:bodyPr>
+          <a:lstStyle/>
+          <a:p>
+            <a:pPr>
+              <a:spcAft>
+                <a:spcPts val="0"/>
+              </a:spcAft>
+            </a:pPr>
+            <a:r>
+              <a:rPr sz="1700">
+                <a:solidFill>
+                  <a:srgbClr val="6D8C97"/>
+                </a:solidFill>
+                <a:latin typeface="Consolas"/>
+              </a:rPr>
+              <a:t>   7  </a:t>
+            </a:r>
+            <a:r>
+              <a:rPr sz="1700">
+                <a:solidFill>
+                  <a:srgbClr val="7FE0A0"/>
+                </a:solidFill>
+                <a:latin typeface="Consolas"/>
+              </a:rPr>
+              <a:t>  &lt;form id="composer" class="composer"&gt;</a:t>
+            </a:r>
+          </a:p>
+          <a:p>
+            <a:pPr>
+              <a:spcAft>
+                <a:spcPts val="0"/>
+              </a:spcAft>
+            </a:pPr>
+            <a:r>
+              <a:rPr sz="1700">
+                <a:solidFill>
+                  <a:srgbClr val="6D8C97"/>
+                </a:solidFill>
+                <a:latin typeface="Consolas"/>
+              </a:rPr>
+              <a:t>   8  </a:t>
+            </a:r>
+            <a:r>
+              <a:rPr sz="1700">
+                <a:solidFill>
+                  <a:srgbClr val="7FE0A0"/>
+                </a:solidFill>
+                <a:latin typeface="Consolas"/>
+              </a:rPr>
+              <a:t>    &lt;input id="prompt" placeholder="Say something..." autocomplete="off"&gt;</a:t>
+            </a:r>
+          </a:p>
+          <a:p>
+            <a:pPr>
+              <a:spcAft>
+                <a:spcPts val="0"/>
+              </a:spcAft>
+            </a:pPr>
+            <a:r>
+              <a:rPr sz="1700">
+                <a:solidFill>
+                  <a:srgbClr val="6D8C97"/>
+                </a:solidFill>
+                <a:latin typeface="Consolas"/>
+              </a:rPr>
+              <a:t>   9  </a:t>
+            </a:r>
+            <a:r>
+              <a:rPr sz="1700">
+                <a:solidFill>
+                  <a:srgbClr val="7FE0A0"/>
+                </a:solidFill>
+                <a:latin typeface="Consolas"/>
+              </a:rPr>
+              <a:t>    &lt;button id="send" type="submit"&gt;Send&lt;/button&gt;</a:t>
+            </a:r>
+          </a:p>
+          <a:p>
+            <a:pPr>
+              <a:spcAft>
+                <a:spcPts val="0"/>
+              </a:spcAft>
+            </a:pPr>
+            <a:r>
+              <a:rPr sz="1700">
+                <a:solidFill>
+                  <a:srgbClr val="6D8C97"/>
+                </a:solidFill>
+                <a:latin typeface="Consolas"/>
+              </a:rPr>
+              <a:t>  10  </a:t>
+            </a:r>
+            <a:r>
+              <a:rPr sz="1700">
+                <a:solidFill>
+                  <a:srgbClr val="7FE0A0"/>
+                </a:solidFill>
+                <a:latin typeface="Consolas"/>
+              </a:rPr>
+              <a:t>  &lt;/form&gt;</a:t>
             </a:r>
           </a:p>
         </p:txBody>
@@ -3759,6 +5432,14 @@
 <file path=ppt/slides/slide7.xml><?xml version="1.0" encoding="utf-8"?>
 <p:sld xmlns:a="http://schemas.openxmlformats.org/drawingml/2006/main" xmlns:p="http://schemas.openxmlformats.org/presentationml/2006/main" xmlns:r="http://schemas.openxmlformats.org/officeDocument/2006/relationships">
   <p:cSld>
+    <p:bg>
+      <p:bgPr>
+        <a:solidFill>
+          <a:srgbClr val="102127"/>
+        </a:solidFill>
+        <a:effectLst/>
+      </p:bgPr>
+    </p:bg>
     <p:spTree>
       <p:nvGrpSpPr>
         <p:cNvPr id="1" name=""/>
@@ -3768,6 +5449,105 @@
       <p:grpSpPr/>
       <p:sp>
         <p:nvSpPr>
+          <p:cNvPr id="2" name="TextBox 1"/>
+          <p:cNvSpPr txBox="1"/>
+          <p:nvPr/>
+        </p:nvSpPr>
+        <p:spPr>
+          <a:xfrm>
+            <a:off x="502920" y="274320"/>
+            <a:ext cx="11155680" cy="731520"/>
+          </a:xfrm>
+          <a:prstGeom prst="rect">
+            <a:avLst/>
+          </a:prstGeom>
+          <a:noFill/>
+        </p:spPr>
+        <p:txBody>
+          <a:bodyPr wrap="none">
+            <a:spAutoFit/>
+          </a:bodyPr>
+          <a:lstStyle/>
+          <a:p>
+            <a:r>
+              <a:rPr sz="2600" b="1">
+                <a:solidFill>
+                  <a:srgbClr val="01AEFD"/>
+                </a:solidFill>
+              </a:rPr>
+              <a:t>Type this into index.html  (4 of 4)</a:t>
+            </a:r>
+          </a:p>
+        </p:txBody>
+      </p:sp>
+      <p:sp>
+        <p:nvSpPr>
+          <p:cNvPr id="3" name="TextBox 2"/>
+          <p:cNvSpPr txBox="1"/>
+          <p:nvPr/>
+        </p:nvSpPr>
+        <p:spPr>
+          <a:xfrm>
+            <a:off x="502920" y="1051560"/>
+            <a:ext cx="11155680" cy="5394960"/>
+          </a:xfrm>
+          <a:prstGeom prst="rect">
+            <a:avLst/>
+          </a:prstGeom>
+          <a:noFill/>
+        </p:spPr>
+        <p:txBody>
+          <a:bodyPr wrap="none">
+            <a:spAutoFit/>
+          </a:bodyPr>
+          <a:lstStyle/>
+          <a:p>
+            <a:pPr>
+              <a:spcAft>
+                <a:spcPts val="0"/>
+              </a:spcAft>
+            </a:pPr>
+            <a:r>
+              <a:rPr sz="1700">
+                <a:solidFill>
+                  <a:srgbClr val="6D8C97"/>
+                </a:solidFill>
+                <a:latin typeface="Consolas"/>
+              </a:rPr>
+              <a:t>  11  </a:t>
+            </a:r>
+            <a:r>
+              <a:rPr sz="1700">
+                <a:solidFill>
+                  <a:srgbClr val="7FE0A0"/>
+                </a:solidFill>
+                <a:latin typeface="Consolas"/>
+              </a:rPr>
+              <a:t>&lt;/main&gt;</a:t>
+            </a:r>
+          </a:p>
+        </p:txBody>
+      </p:sp>
+    </p:spTree>
+  </p:cSld>
+  <p:clrMapOvr>
+    <a:masterClrMapping/>
+  </p:clrMapOvr>
+</p:sld>
+</file>
+
+<file path=ppt/slides/slide8.xml><?xml version="1.0" encoding="utf-8"?>
+<p:sld xmlns:a="http://schemas.openxmlformats.org/drawingml/2006/main" xmlns:p="http://schemas.openxmlformats.org/presentationml/2006/main" xmlns:r="http://schemas.openxmlformats.org/officeDocument/2006/relationships">
+  <p:cSld>
+    <p:spTree>
+      <p:nvGrpSpPr>
+        <p:cNvPr id="1" name=""/>
+        <p:cNvGrpSpPr/>
+        <p:nvPr/>
+      </p:nvGrpSpPr>
+      <p:grpSpPr/>
+      <p:sp>
+        <p:nvSpPr>
           <p:cNvPr id="2" name="Title 1"/>
           <p:cNvSpPr>
             <a:spLocks noGrp="1"/>
@@ -3787,7 +5567,7 @@
                   <a:srgbClr val="1F2A37"/>
                 </a:solidFill>
               </a:rPr>
-              <a:t>Your turn</a:t>
+              <a:t>Three files</a:t>
             </a:r>
           </a:p>
         </p:txBody>
@@ -3820,57 +5600,274 @@
               </a:spcAft>
             </a:pPr>
             <a:r>
-              <a:rPr sz="2800">
+              <a:rPr sz="2400">
+                <a:solidFill>
+                  <a:srgbClr val="1F2A37"/>
+                </a:solidFill>
+              </a:rPr>
+              <a:t>• index.html - the boxes</a:t>
+            </a:r>
+          </a:p>
+          <a:p>
+            <a:pPr>
+              <a:spcAft>
+                <a:spcPts val="1400"/>
+              </a:spcAft>
+            </a:pPr>
+            <a:r>
+              <a:rPr sz="2400">
+                <a:solidFill>
+                  <a:srgbClr val="1F2A37"/>
+                </a:solidFill>
+              </a:rPr>
+              <a:t>• style.css - what they look like</a:t>
+            </a:r>
+          </a:p>
+          <a:p>
+            <a:pPr>
+              <a:spcAft>
+                <a:spcPts val="1400"/>
+              </a:spcAft>
+            </a:pPr>
+            <a:r>
+              <a:rPr sz="2400">
+                <a:solidFill>
+                  <a:srgbClr val="1F2A37"/>
+                </a:solidFill>
+              </a:rPr>
+              <a:t>• script.js - what they do</a:t>
+            </a:r>
+          </a:p>
+        </p:txBody>
+      </p:sp>
+    </p:spTree>
+  </p:cSld>
+  <p:clrMapOvr>
+    <a:masterClrMapping/>
+  </p:clrMapOvr>
+</p:sld>
+</file>
+
+<file path=ppt/slides/slide9.xml><?xml version="1.0" encoding="utf-8"?>
+<p:sld xmlns:a="http://schemas.openxmlformats.org/drawingml/2006/main" xmlns:p="http://schemas.openxmlformats.org/presentationml/2006/main" xmlns:r="http://schemas.openxmlformats.org/officeDocument/2006/relationships">
+  <p:cSld>
+    <p:bg>
+      <p:bgPr>
+        <a:solidFill>
+          <a:srgbClr val="102127"/>
+        </a:solidFill>
+        <a:effectLst/>
+      </p:bgPr>
+    </p:bg>
+    <p:spTree>
+      <p:nvGrpSpPr>
+        <p:cNvPr id="1" name=""/>
+        <p:cNvGrpSpPr/>
+        <p:nvPr/>
+      </p:nvGrpSpPr>
+      <p:grpSpPr/>
+      <p:sp>
+        <p:nvSpPr>
+          <p:cNvPr id="2" name="TextBox 1"/>
+          <p:cNvSpPr txBox="1"/>
+          <p:nvPr/>
+        </p:nvSpPr>
+        <p:spPr>
+          <a:xfrm>
+            <a:off x="502920" y="274320"/>
+            <a:ext cx="11155680" cy="731520"/>
+          </a:xfrm>
+          <a:prstGeom prst="rect">
+            <a:avLst/>
+          </a:prstGeom>
+          <a:noFill/>
+        </p:spPr>
+        <p:txBody>
+          <a:bodyPr wrap="none">
+            <a:spAutoFit/>
+          </a:bodyPr>
+          <a:lstStyle/>
+          <a:p>
+            <a:r>
+              <a:rPr sz="2600" b="1">
                 <a:solidFill>
                   <a:srgbClr val="01AEFD"/>
                 </a:solidFill>
               </a:rPr>
-              <a:t>Make it yours</a:t>
-            </a:r>
-          </a:p>
-          <a:p>
-            <a:pPr>
-              <a:spcAft>
-                <a:spcPts val="1400"/>
-              </a:spcAft>
-            </a:pPr>
-            <a:r>
-              <a:rPr sz="2400">
-                <a:solidFill>
-                  <a:srgbClr val="1F2A37"/>
-                </a:solidFill>
-              </a:rPr>
-              <a:t>• Change the title</a:t>
-            </a:r>
-          </a:p>
-          <a:p>
-            <a:pPr>
-              <a:spcAft>
-                <a:spcPts val="1400"/>
-              </a:spcAft>
-            </a:pPr>
-            <a:r>
-              <a:rPr sz="2400">
-                <a:solidFill>
-                  <a:srgbClr val="1F2A37"/>
-                </a:solidFill>
-              </a:rPr>
-              <a:t>• Change the colours</a:t>
-            </a:r>
-          </a:p>
-          <a:p>
-            <a:pPr>
-              <a:spcAft>
-                <a:spcPts val="1400"/>
-              </a:spcAft>
-            </a:pPr>
-            <a:r>
-              <a:rPr sz="2400">
-                <a:solidFill>
-                  <a:srgbClr val="1F2A37"/>
-                </a:solidFill>
-              </a:rPr>
-              <a:t>• Press Run</a:t>
+              <a:t>Type this into style.css  (1 of 4)</a:t>
+            </a:r>
+          </a:p>
+        </p:txBody>
+      </p:sp>
+      <p:sp>
+        <p:nvSpPr>
+          <p:cNvPr id="3" name="TextBox 2"/>
+          <p:cNvSpPr txBox="1"/>
+          <p:nvPr/>
+        </p:nvSpPr>
+        <p:spPr>
+          <a:xfrm>
+            <a:off x="502920" y="1051560"/>
+            <a:ext cx="11155680" cy="5394960"/>
+          </a:xfrm>
+          <a:prstGeom prst="rect">
+            <a:avLst/>
+          </a:prstGeom>
+          <a:noFill/>
+        </p:spPr>
+        <p:txBody>
+          <a:bodyPr wrap="none">
+            <a:spAutoFit/>
+          </a:bodyPr>
+          <a:lstStyle/>
+          <a:p>
+            <a:pPr>
+              <a:spcAft>
+                <a:spcPts val="0"/>
+              </a:spcAft>
+            </a:pPr>
+            <a:r>
+              <a:rPr sz="1700">
+                <a:solidFill>
+                  <a:srgbClr val="6D8C97"/>
+                </a:solidFill>
+                <a:latin typeface="Consolas"/>
+              </a:rPr>
+              <a:t>   1  </a:t>
+            </a:r>
+            <a:r>
+              <a:rPr sz="1700">
+                <a:solidFill>
+                  <a:srgbClr val="7FE0A0"/>
+                </a:solidFill>
+                <a:latin typeface="Consolas"/>
+              </a:rPr>
+              <a:t>body {</a:t>
+            </a:r>
+          </a:p>
+          <a:p>
+            <a:pPr>
+              <a:spcAft>
+                <a:spcPts val="0"/>
+              </a:spcAft>
+            </a:pPr>
+            <a:r>
+              <a:rPr sz="1700">
+                <a:solidFill>
+                  <a:srgbClr val="6D8C97"/>
+                </a:solidFill>
+                <a:latin typeface="Consolas"/>
+              </a:rPr>
+              <a:t>   2  </a:t>
+            </a:r>
+            <a:r>
+              <a:rPr sz="1700">
+                <a:solidFill>
+                  <a:srgbClr val="7FE0A0"/>
+                </a:solidFill>
+                <a:latin typeface="Consolas"/>
+              </a:rPr>
+              <a:t>  margin: 0;</a:t>
+            </a:r>
+          </a:p>
+          <a:p>
+            <a:pPr>
+              <a:spcAft>
+                <a:spcPts val="0"/>
+              </a:spcAft>
+            </a:pPr>
+            <a:r>
+              <a:rPr sz="1700">
+                <a:solidFill>
+                  <a:srgbClr val="6D8C97"/>
+                </a:solidFill>
+                <a:latin typeface="Consolas"/>
+              </a:rPr>
+              <a:t>   3  </a:t>
+            </a:r>
+            <a:r>
+              <a:rPr sz="1700">
+                <a:solidFill>
+                  <a:srgbClr val="7FE0A0"/>
+                </a:solidFill>
+                <a:latin typeface="Consolas"/>
+              </a:rPr>
+              <a:t>  font-family: Arial, Helvetica, sans-serif;</a:t>
+            </a:r>
+          </a:p>
+          <a:p>
+            <a:pPr>
+              <a:spcAft>
+                <a:spcPts val="0"/>
+              </a:spcAft>
+            </a:pPr>
+            <a:r>
+              <a:rPr sz="1700">
+                <a:solidFill>
+                  <a:srgbClr val="6D8C97"/>
+                </a:solidFill>
+                <a:latin typeface="Consolas"/>
+              </a:rPr>
+              <a:t>   4  </a:t>
+            </a:r>
+            <a:r>
+              <a:rPr sz="1700">
+                <a:solidFill>
+                  <a:srgbClr val="7FE0A0"/>
+                </a:solidFill>
+                <a:latin typeface="Consolas"/>
+              </a:rPr>
+              <a:t>  background: #eef2f7;</a:t>
+            </a:r>
+          </a:p>
+          <a:p>
+            <a:pPr>
+              <a:spcAft>
+                <a:spcPts val="0"/>
+              </a:spcAft>
+            </a:pPr>
+            <a:r>
+              <a:rPr sz="1700">
+                <a:solidFill>
+                  <a:srgbClr val="6D8C97"/>
+                </a:solidFill>
+                <a:latin typeface="Consolas"/>
+              </a:rPr>
+              <a:t>   5  </a:t>
+            </a:r>
+            <a:r>
+              <a:rPr sz="1700">
+                <a:solidFill>
+                  <a:srgbClr val="7FE0A0"/>
+                </a:solidFill>
+                <a:latin typeface="Consolas"/>
+              </a:rPr>
+              <a:t>  color: #1f2a37;</a:t>
+            </a:r>
+          </a:p>
+          <a:p>
+            <a:pPr>
+              <a:spcAft>
+                <a:spcPts val="0"/>
+              </a:spcAft>
+            </a:pPr>
+            <a:r>
+              <a:rPr sz="1700">
+                <a:solidFill>
+                  <a:srgbClr val="6D8C97"/>
+                </a:solidFill>
+                <a:latin typeface="Consolas"/>
+              </a:rPr>
+              <a:t>   6  </a:t>
+            </a:r>
+            <a:r>
+              <a:rPr sz="1700">
+                <a:solidFill>
+                  <a:srgbClr val="7FE0A0"/>
+                </a:solidFill>
+                <a:latin typeface="Consolas"/>
+              </a:rPr>
+              <a:t>}</a:t>
             </a:r>
           </a:p>
         </p:txBody>

--- a/ai101/slides/week-01.pptx
+++ b/ai101/slides/week-01.pptx
@@ -21,6 +21,10 @@
     <p:sldId id="269" r:id="rId20"/>
     <p:sldId id="270" r:id="rId21"/>
     <p:sldId id="271" r:id="rId22"/>
+    <p:sldId id="272" r:id="rId23"/>
+    <p:sldId id="273" r:id="rId24"/>
+    <p:sldId id="274" r:id="rId25"/>
+    <p:sldId id="275" r:id="rId26"/>
   </p:sldIdLst>
   <p:sldSz cx="12191695" cy="6858000" type="screen4x3"/>
   <p:notesSz cx="6858000" cy="9144000"/>
@@ -3178,14 +3182,6 @@
 <file path=ppt/slides/slide10.xml><?xml version="1.0" encoding="utf-8"?>
 <p:sld xmlns:a="http://schemas.openxmlformats.org/drawingml/2006/main" xmlns:p="http://schemas.openxmlformats.org/presentationml/2006/main" xmlns:r="http://schemas.openxmlformats.org/officeDocument/2006/relationships">
   <p:cSld>
-    <p:bg>
-      <p:bgPr>
-        <a:solidFill>
-          <a:srgbClr val="102127"/>
-        </a:solidFill>
-        <a:effectLst/>
-      </p:bgPr>
-    </p:bg>
     <p:spTree>
       <p:nvGrpSpPr>
         <p:cNvPr id="1" name=""/>
@@ -3195,14 +3191,40 @@
       <p:grpSpPr/>
       <p:sp>
         <p:nvSpPr>
-          <p:cNvPr id="2" name="TextBox 1"/>
+          <p:cNvPr id="2" name="Title 1"/>
+          <p:cNvSpPr>
+            <a:spLocks noGrp="1"/>
+          </p:cNvSpPr>
+          <p:nvPr>
+            <p:ph type="title"/>
+          </p:nvPr>
+        </p:nvSpPr>
+        <p:spPr/>
+        <p:txBody>
+          <a:bodyPr/>
+          <a:lstStyle/>
+          <a:p>
+            <a:r>
+              <a:rPr sz="3800" b="1">
+                <a:solidFill>
+                  <a:srgbClr val="1F2A37"/>
+                </a:solidFill>
+              </a:rPr>
+              <a:t>Three files</a:t>
+            </a:r>
+          </a:p>
+        </p:txBody>
+      </p:sp>
+      <p:sp>
+        <p:nvSpPr>
+          <p:cNvPr id="3" name="TextBox 2"/>
           <p:cNvSpPr txBox="1"/>
           <p:nvPr/>
         </p:nvSpPr>
         <p:spPr>
           <a:xfrm>
-            <a:off x="502920" y="274320"/>
-            <a:ext cx="11155680" cy="731520"/>
+            <a:off x="822960" y="1828800"/>
+            <a:ext cx="10515600" cy="4206240"/>
           </a:xfrm>
           <a:prstGeom prst="rect">
             <a:avLst/>
@@ -3210,391 +3232,53 @@
           <a:noFill/>
         </p:spPr>
         <p:txBody>
-          <a:bodyPr wrap="none">
+          <a:bodyPr wrap="square">
             <a:spAutoFit/>
           </a:bodyPr>
           <a:lstStyle/>
           <a:p>
-            <a:r>
-              <a:rPr sz="2600" b="1">
-                <a:solidFill>
-                  <a:srgbClr val="01AEFD"/>
-                </a:solidFill>
-              </a:rPr>
-              <a:t>Type this into style.css  (2 of 4)</a:t>
-            </a:r>
-          </a:p>
-        </p:txBody>
-      </p:sp>
-      <p:sp>
-        <p:nvSpPr>
-          <p:cNvPr id="3" name="TextBox 2"/>
-          <p:cNvSpPr txBox="1"/>
-          <p:nvPr/>
-        </p:nvSpPr>
-        <p:spPr>
-          <a:xfrm>
-            <a:off x="502920" y="1051560"/>
-            <a:ext cx="11155680" cy="5394960"/>
-          </a:xfrm>
-          <a:prstGeom prst="rect">
-            <a:avLst/>
-          </a:prstGeom>
-          <a:noFill/>
-        </p:spPr>
-        <p:txBody>
-          <a:bodyPr wrap="none">
-            <a:spAutoFit/>
-          </a:bodyPr>
-          <a:lstStyle/>
-          <a:p>
-            <a:pPr>
-              <a:spcAft>
-                <a:spcPts val="0"/>
-              </a:spcAft>
-            </a:pPr>
-            <a:r>
-              <a:rPr sz="1400">
-                <a:solidFill>
-                  <a:srgbClr val="6D8C97"/>
-                </a:solidFill>
-                <a:latin typeface="Consolas"/>
-              </a:rPr>
-              <a:t>   7  </a:t>
-            </a:r>
-            <a:r>
-              <a:rPr sz="1400">
-                <a:solidFill>
-                  <a:srgbClr val="7FE0A0"/>
-                </a:solidFill>
-                <a:latin typeface="Consolas"/>
-              </a:rPr>
-              <a:t>.app {</a:t>
-            </a:r>
-          </a:p>
-          <a:p>
-            <a:pPr>
-              <a:spcAft>
-                <a:spcPts val="0"/>
-              </a:spcAft>
-            </a:pPr>
-            <a:r>
-              <a:rPr sz="1400">
-                <a:solidFill>
-                  <a:srgbClr val="6D8C97"/>
-                </a:solidFill>
-                <a:latin typeface="Consolas"/>
-              </a:rPr>
-              <a:t>   8  </a:t>
-            </a:r>
-            <a:r>
-              <a:rPr sz="1400">
-                <a:solidFill>
-                  <a:srgbClr val="7FE0A0"/>
-                </a:solidFill>
-                <a:latin typeface="Consolas"/>
-              </a:rPr>
-              <a:t>  max-width: 620px;</a:t>
-            </a:r>
-          </a:p>
-          <a:p>
-            <a:pPr>
-              <a:spcAft>
-                <a:spcPts val="0"/>
-              </a:spcAft>
-            </a:pPr>
-            <a:r>
-              <a:rPr sz="1400">
-                <a:solidFill>
-                  <a:srgbClr val="6D8C97"/>
-                </a:solidFill>
-                <a:latin typeface="Consolas"/>
-              </a:rPr>
-              <a:t>   9  </a:t>
-            </a:r>
-            <a:r>
-              <a:rPr sz="1400">
-                <a:solidFill>
-                  <a:srgbClr val="7FE0A0"/>
-                </a:solidFill>
-                <a:latin typeface="Consolas"/>
-              </a:rPr>
-              <a:t>  margin: 0 auto;</a:t>
-            </a:r>
-          </a:p>
-          <a:p>
-            <a:pPr>
-              <a:spcAft>
-                <a:spcPts val="0"/>
-              </a:spcAft>
-            </a:pPr>
-            <a:r>
-              <a:rPr sz="1400">
-                <a:solidFill>
-                  <a:srgbClr val="6D8C97"/>
-                </a:solidFill>
-                <a:latin typeface="Consolas"/>
-              </a:rPr>
-              <a:t>  10  </a:t>
-            </a:r>
-            <a:r>
-              <a:rPr sz="1400">
-                <a:solidFill>
-                  <a:srgbClr val="7FE0A0"/>
-                </a:solidFill>
-                <a:latin typeface="Consolas"/>
-              </a:rPr>
-              <a:t>  padding: 20px;</a:t>
-            </a:r>
-          </a:p>
-          <a:p>
-            <a:pPr>
-              <a:spcAft>
-                <a:spcPts val="0"/>
-              </a:spcAft>
-            </a:pPr>
-            <a:r>
-              <a:rPr sz="1400">
-                <a:solidFill>
-                  <a:srgbClr val="6D8C97"/>
-                </a:solidFill>
-                <a:latin typeface="Consolas"/>
-              </a:rPr>
-              <a:t>  11  </a:t>
-            </a:r>
-            <a:r>
-              <a:rPr sz="1400">
-                <a:solidFill>
-                  <a:srgbClr val="7FE0A0"/>
-                </a:solidFill>
-                <a:latin typeface="Consolas"/>
-              </a:rPr>
-              <a:t>}</a:t>
-            </a:r>
-          </a:p>
-          <a:p>
-            <a:pPr>
-              <a:spcAft>
-                <a:spcPts val="0"/>
-              </a:spcAft>
-            </a:pPr>
-            <a:r>
-              <a:rPr sz="1400">
-                <a:solidFill>
-                  <a:srgbClr val="6D8C97"/>
-                </a:solidFill>
-                <a:latin typeface="Consolas"/>
-              </a:rPr>
-              <a:t>  12  </a:t>
-            </a:r>
-            <a:r>
-              <a:rPr sz="1400">
-                <a:solidFill>
-                  <a:srgbClr val="7FE0A0"/>
-                </a:solidFill>
-                <a:latin typeface="Consolas"/>
-              </a:rPr>
-              <a:t>.top h1 { margin: 0 0 4px; font-size: 26px; }</a:t>
-            </a:r>
-          </a:p>
-          <a:p>
-            <a:pPr>
-              <a:spcAft>
-                <a:spcPts val="0"/>
-              </a:spcAft>
-            </a:pPr>
-            <a:r>
-              <a:rPr sz="1400">
-                <a:solidFill>
-                  <a:srgbClr val="6D8C97"/>
-                </a:solidFill>
-                <a:latin typeface="Consolas"/>
-              </a:rPr>
-              <a:t>  13  </a:t>
-            </a:r>
-            <a:r>
-              <a:rPr sz="1400">
-                <a:solidFill>
-                  <a:srgbClr val="7FE0A0"/>
-                </a:solidFill>
-                <a:latin typeface="Consolas"/>
-              </a:rPr>
-              <a:t>.tag { margin: 0 0 18px; color: #6b7787; font-size: 14px; }</a:t>
-            </a:r>
-          </a:p>
-          <a:p>
-            <a:pPr>
-              <a:spcAft>
-                <a:spcPts val="0"/>
-              </a:spcAft>
-            </a:pPr>
-            <a:r>
-              <a:rPr sz="1400">
-                <a:solidFill>
-                  <a:srgbClr val="6D8C97"/>
-                </a:solidFill>
-                <a:latin typeface="Consolas"/>
-              </a:rPr>
-              <a:t>  14  </a:t>
-            </a:r>
-            <a:r>
-              <a:rPr sz="1400">
-                <a:solidFill>
-                  <a:srgbClr val="7FE0A0"/>
-                </a:solidFill>
-                <a:latin typeface="Consolas"/>
-              </a:rPr>
-              <a:t>.chat {</a:t>
-            </a:r>
-          </a:p>
-          <a:p>
-            <a:pPr>
-              <a:spcAft>
-                <a:spcPts val="0"/>
-              </a:spcAft>
-            </a:pPr>
-            <a:r>
-              <a:rPr sz="1400">
-                <a:solidFill>
-                  <a:srgbClr val="6D8C97"/>
-                </a:solidFill>
-                <a:latin typeface="Consolas"/>
-              </a:rPr>
-              <a:t>  15  </a:t>
-            </a:r>
-            <a:r>
-              <a:rPr sz="1400">
-                <a:solidFill>
-                  <a:srgbClr val="7FE0A0"/>
-                </a:solidFill>
-                <a:latin typeface="Consolas"/>
-              </a:rPr>
-              <a:t>  min-height: 260px;</a:t>
-            </a:r>
-          </a:p>
-          <a:p>
-            <a:pPr>
-              <a:spcAft>
-                <a:spcPts val="0"/>
-              </a:spcAft>
-            </a:pPr>
-            <a:r>
-              <a:rPr sz="1400">
-                <a:solidFill>
-                  <a:srgbClr val="6D8C97"/>
-                </a:solidFill>
-                <a:latin typeface="Consolas"/>
-              </a:rPr>
-              <a:t>  16  </a:t>
-            </a:r>
-            <a:r>
-              <a:rPr sz="1400">
-                <a:solidFill>
-                  <a:srgbClr val="7FE0A0"/>
-                </a:solidFill>
-                <a:latin typeface="Consolas"/>
-              </a:rPr>
-              <a:t>  padding: 12px;</a:t>
-            </a:r>
-          </a:p>
-          <a:p>
-            <a:pPr>
-              <a:spcAft>
-                <a:spcPts val="0"/>
-              </a:spcAft>
-            </a:pPr>
-            <a:r>
-              <a:rPr sz="1400">
-                <a:solidFill>
-                  <a:srgbClr val="6D8C97"/>
-                </a:solidFill>
-                <a:latin typeface="Consolas"/>
-              </a:rPr>
-              <a:t>  17  </a:t>
-            </a:r>
-            <a:r>
-              <a:rPr sz="1400">
-                <a:solidFill>
-                  <a:srgbClr val="7FE0A0"/>
-                </a:solidFill>
-                <a:latin typeface="Consolas"/>
-              </a:rPr>
-              <a:t>  background: #ffffff;</a:t>
-            </a:r>
-          </a:p>
-          <a:p>
-            <a:pPr>
-              <a:spcAft>
-                <a:spcPts val="0"/>
-              </a:spcAft>
-            </a:pPr>
-            <a:r>
-              <a:rPr sz="1400">
-                <a:solidFill>
-                  <a:srgbClr val="6D8C97"/>
-                </a:solidFill>
-                <a:latin typeface="Consolas"/>
-              </a:rPr>
-              <a:t>  18  </a:t>
-            </a:r>
-            <a:r>
-              <a:rPr sz="1400">
-                <a:solidFill>
-                  <a:srgbClr val="7FE0A0"/>
-                </a:solidFill>
-                <a:latin typeface="Consolas"/>
-              </a:rPr>
-              <a:t>  border: 1px solid #dbe3ec;</a:t>
-            </a:r>
-          </a:p>
-          <a:p>
-            <a:pPr>
-              <a:spcAft>
-                <a:spcPts val="0"/>
-              </a:spcAft>
-            </a:pPr>
-            <a:r>
-              <a:rPr sz="1400">
-                <a:solidFill>
-                  <a:srgbClr val="6D8C97"/>
-                </a:solidFill>
-                <a:latin typeface="Consolas"/>
-              </a:rPr>
-              <a:t>  19  </a:t>
-            </a:r>
-            <a:r>
-              <a:rPr sz="1400">
-                <a:solidFill>
-                  <a:srgbClr val="7FE0A0"/>
-                </a:solidFill>
-                <a:latin typeface="Consolas"/>
-              </a:rPr>
-              <a:t>  border-radius: 8px;</a:t>
-            </a:r>
-          </a:p>
-          <a:p>
-            <a:pPr>
-              <a:spcAft>
-                <a:spcPts val="0"/>
-              </a:spcAft>
-            </a:pPr>
-            <a:r>
-              <a:rPr sz="1400">
-                <a:solidFill>
-                  <a:srgbClr val="6D8C97"/>
-                </a:solidFill>
-                <a:latin typeface="Consolas"/>
-              </a:rPr>
-              <a:t>  20  </a:t>
-            </a:r>
-            <a:r>
-              <a:rPr sz="1400">
-                <a:solidFill>
-                  <a:srgbClr val="7FE0A0"/>
-                </a:solidFill>
-                <a:latin typeface="Consolas"/>
-              </a:rPr>
-              <a:t>}</a:t>
+            <a:pPr>
+              <a:spcAft>
+                <a:spcPts val="1400"/>
+              </a:spcAft>
+            </a:pPr>
+            <a:r>
+              <a:rPr sz="2400">
+                <a:solidFill>
+                  <a:srgbClr val="1F2A37"/>
+                </a:solidFill>
+              </a:rPr>
+              <a:t>• index.html - the boxes</a:t>
+            </a:r>
+          </a:p>
+          <a:p>
+            <a:pPr>
+              <a:spcAft>
+                <a:spcPts val="1400"/>
+              </a:spcAft>
+            </a:pPr>
+            <a:r>
+              <a:rPr sz="2400">
+                <a:solidFill>
+                  <a:srgbClr val="1F2A37"/>
+                </a:solidFill>
+              </a:rPr>
+              <a:t>• style.css - what they look like</a:t>
+            </a:r>
+          </a:p>
+          <a:p>
+            <a:pPr>
+              <a:spcAft>
+                <a:spcPts val="1400"/>
+              </a:spcAft>
+            </a:pPr>
+            <a:r>
+              <a:rPr sz="2400">
+                <a:solidFill>
+                  <a:srgbClr val="1F2A37"/>
+                </a:solidFill>
+              </a:rPr>
+              <a:t>• script.js - what they do</a:t>
             </a:r>
           </a:p>
         </p:txBody>
@@ -3653,7 +3337,7 @@
                   <a:srgbClr val="01AEFD"/>
                 </a:solidFill>
               </a:rPr>
-              <a:t>Type this into style.css  (3 of 4)</a:t>
+              <a:t>Type this into style.css  (1 of 4)</a:t>
             </a:r>
           </a:p>
         </p:txBody>
@@ -3686,22 +3370,22 @@
               </a:spcAft>
             </a:pPr>
             <a:r>
-              <a:rPr sz="1400">
+              <a:rPr sz="1700">
                 <a:solidFill>
                   <a:srgbClr val="6D8C97"/>
                 </a:solidFill>
                 <a:latin typeface="Consolas"/>
               </a:rPr>
-              <a:t>  21  </a:t>
-            </a:r>
-            <a:r>
-              <a:rPr sz="1400">
+              <a:t>   1  </a:t>
+            </a:r>
+            <a:r>
+              <a:rPr sz="1700">
                 <a:solidFill>
                   <a:srgbClr val="7FE0A0"/>
                 </a:solidFill>
                 <a:latin typeface="Consolas"/>
               </a:rPr>
-              <a:t>.composer { display: flex; gap: 8px; margin-top: 12px; }</a:t>
+              <a:t>body {</a:t>
             </a:r>
           </a:p>
           <a:p>
@@ -3711,22 +3395,22 @@
               </a:spcAft>
             </a:pPr>
             <a:r>
-              <a:rPr sz="1400">
+              <a:rPr sz="1700">
                 <a:solidFill>
                   <a:srgbClr val="6D8C97"/>
                 </a:solidFill>
                 <a:latin typeface="Consolas"/>
               </a:rPr>
-              <a:t>  22  </a:t>
-            </a:r>
-            <a:r>
-              <a:rPr sz="1400">
+              <a:t>   2  </a:t>
+            </a:r>
+            <a:r>
+              <a:rPr sz="1700">
                 <a:solidFill>
                   <a:srgbClr val="7FE0A0"/>
                 </a:solidFill>
                 <a:latin typeface="Consolas"/>
               </a:rPr>
-              <a:t>.composer input {</a:t>
+              <a:t>  margin: 0;</a:t>
             </a:r>
           </a:p>
           <a:p>
@@ -3736,22 +3420,22 @@
               </a:spcAft>
             </a:pPr>
             <a:r>
-              <a:rPr sz="1400">
+              <a:rPr sz="1700">
                 <a:solidFill>
                   <a:srgbClr val="6D8C97"/>
                 </a:solidFill>
                 <a:latin typeface="Consolas"/>
               </a:rPr>
-              <a:t>  23  </a:t>
-            </a:r>
-            <a:r>
-              <a:rPr sz="1400">
+              <a:t>   3  </a:t>
+            </a:r>
+            <a:r>
+              <a:rPr sz="1700">
                 <a:solidFill>
                   <a:srgbClr val="7FE0A0"/>
                 </a:solidFill>
                 <a:latin typeface="Consolas"/>
               </a:rPr>
-              <a:t>  flex: 1;</a:t>
+              <a:t>  font-family: Arial, Helvetica, sans-serif;</a:t>
             </a:r>
           </a:p>
           <a:p>
@@ -3761,22 +3445,22 @@
               </a:spcAft>
             </a:pPr>
             <a:r>
-              <a:rPr sz="1400">
+              <a:rPr sz="1700">
                 <a:solidFill>
                   <a:srgbClr val="6D8C97"/>
                 </a:solidFill>
                 <a:latin typeface="Consolas"/>
               </a:rPr>
-              <a:t>  24  </a:t>
-            </a:r>
-            <a:r>
-              <a:rPr sz="1400">
+              <a:t>   4  </a:t>
+            </a:r>
+            <a:r>
+              <a:rPr sz="1700">
                 <a:solidFill>
                   <a:srgbClr val="7FE0A0"/>
                 </a:solidFill>
                 <a:latin typeface="Consolas"/>
               </a:rPr>
-              <a:t>  padding: 11px;</a:t>
+              <a:t>  background: #eef2f7;</a:t>
             </a:r>
           </a:p>
           <a:p>
@@ -3786,22 +3470,22 @@
               </a:spcAft>
             </a:pPr>
             <a:r>
-              <a:rPr sz="1400">
+              <a:rPr sz="1700">
                 <a:solidFill>
                   <a:srgbClr val="6D8C97"/>
                 </a:solidFill>
                 <a:latin typeface="Consolas"/>
               </a:rPr>
-              <a:t>  25  </a:t>
-            </a:r>
-            <a:r>
-              <a:rPr sz="1400">
+              <a:t>   5  </a:t>
+            </a:r>
+            <a:r>
+              <a:rPr sz="1700">
                 <a:solidFill>
                   <a:srgbClr val="7FE0A0"/>
                 </a:solidFill>
                 <a:latin typeface="Consolas"/>
               </a:rPr>
-              <a:t>  border: 1px solid #dbe3ec;</a:t>
+              <a:t>  color: #1f2a37;</a:t>
             </a:r>
           </a:p>
           <a:p>
@@ -3811,247 +3495,22 @@
               </a:spcAft>
             </a:pPr>
             <a:r>
-              <a:rPr sz="1400">
+              <a:rPr sz="1700">
                 <a:solidFill>
                   <a:srgbClr val="6D8C97"/>
                 </a:solidFill>
                 <a:latin typeface="Consolas"/>
               </a:rPr>
-              <a:t>  26  </a:t>
-            </a:r>
-            <a:r>
-              <a:rPr sz="1400">
+              <a:t>   6  </a:t>
+            </a:r>
+            <a:r>
+              <a:rPr sz="1700">
                 <a:solidFill>
                   <a:srgbClr val="7FE0A0"/>
                 </a:solidFill>
                 <a:latin typeface="Consolas"/>
               </a:rPr>
-              <a:t>  border-radius: 6px;</a:t>
-            </a:r>
-          </a:p>
-          <a:p>
-            <a:pPr>
-              <a:spcAft>
-                <a:spcPts val="0"/>
-              </a:spcAft>
-            </a:pPr>
-            <a:r>
-              <a:rPr sz="1400">
-                <a:solidFill>
-                  <a:srgbClr val="6D8C97"/>
-                </a:solidFill>
-                <a:latin typeface="Consolas"/>
-              </a:rPr>
-              <a:t>  27  </a:t>
-            </a:r>
-            <a:r>
-              <a:rPr sz="1400">
-                <a:solidFill>
-                  <a:srgbClr val="7FE0A0"/>
-                </a:solidFill>
-                <a:latin typeface="Consolas"/>
-              </a:rPr>
-              <a:t>  font-size: 15px;</a:t>
-            </a:r>
-          </a:p>
-          <a:p>
-            <a:pPr>
-              <a:spcAft>
-                <a:spcPts val="0"/>
-              </a:spcAft>
-            </a:pPr>
-            <a:r>
-              <a:rPr sz="1400">
-                <a:solidFill>
-                  <a:srgbClr val="6D8C97"/>
-                </a:solidFill>
-                <a:latin typeface="Consolas"/>
-              </a:rPr>
-              <a:t>  28  </a:t>
-            </a:r>
-            <a:r>
-              <a:rPr sz="1400">
-                <a:solidFill>
-                  <a:srgbClr val="7FE0A0"/>
-                </a:solidFill>
-                <a:latin typeface="Consolas"/>
-              </a:rPr>
               <a:t>}</a:t>
-            </a:r>
-          </a:p>
-          <a:p>
-            <a:pPr>
-              <a:spcAft>
-                <a:spcPts val="0"/>
-              </a:spcAft>
-            </a:pPr>
-            <a:r>
-              <a:rPr sz="1400">
-                <a:solidFill>
-                  <a:srgbClr val="6D8C97"/>
-                </a:solidFill>
-                <a:latin typeface="Consolas"/>
-              </a:rPr>
-              <a:t>  29  </a:t>
-            </a:r>
-            <a:r>
-              <a:rPr sz="1400">
-                <a:solidFill>
-                  <a:srgbClr val="7FE0A0"/>
-                </a:solidFill>
-                <a:latin typeface="Consolas"/>
-              </a:rPr>
-              <a:t>.composer button {</a:t>
-            </a:r>
-          </a:p>
-          <a:p>
-            <a:pPr>
-              <a:spcAft>
-                <a:spcPts val="0"/>
-              </a:spcAft>
-            </a:pPr>
-            <a:r>
-              <a:rPr sz="1400">
-                <a:solidFill>
-                  <a:srgbClr val="6D8C97"/>
-                </a:solidFill>
-                <a:latin typeface="Consolas"/>
-              </a:rPr>
-              <a:t>  30  </a:t>
-            </a:r>
-            <a:r>
-              <a:rPr sz="1400">
-                <a:solidFill>
-                  <a:srgbClr val="7FE0A0"/>
-                </a:solidFill>
-                <a:latin typeface="Consolas"/>
-              </a:rPr>
-              <a:t>  padding: 11px 18px;</a:t>
-            </a:r>
-          </a:p>
-          <a:p>
-            <a:pPr>
-              <a:spcAft>
-                <a:spcPts val="0"/>
-              </a:spcAft>
-            </a:pPr>
-            <a:r>
-              <a:rPr sz="1400">
-                <a:solidFill>
-                  <a:srgbClr val="6D8C97"/>
-                </a:solidFill>
-                <a:latin typeface="Consolas"/>
-              </a:rPr>
-              <a:t>  31  </a:t>
-            </a:r>
-            <a:r>
-              <a:rPr sz="1400">
-                <a:solidFill>
-                  <a:srgbClr val="7FE0A0"/>
-                </a:solidFill>
-                <a:latin typeface="Consolas"/>
-              </a:rPr>
-              <a:t>  border: 0;</a:t>
-            </a:r>
-          </a:p>
-          <a:p>
-            <a:pPr>
-              <a:spcAft>
-                <a:spcPts val="0"/>
-              </a:spcAft>
-            </a:pPr>
-            <a:r>
-              <a:rPr sz="1400">
-                <a:solidFill>
-                  <a:srgbClr val="6D8C97"/>
-                </a:solidFill>
-                <a:latin typeface="Consolas"/>
-              </a:rPr>
-              <a:t>  32  </a:t>
-            </a:r>
-            <a:r>
-              <a:rPr sz="1400">
-                <a:solidFill>
-                  <a:srgbClr val="7FE0A0"/>
-                </a:solidFill>
-                <a:latin typeface="Consolas"/>
-              </a:rPr>
-              <a:t>  border-radius: 6px;</a:t>
-            </a:r>
-          </a:p>
-          <a:p>
-            <a:pPr>
-              <a:spcAft>
-                <a:spcPts val="0"/>
-              </a:spcAft>
-            </a:pPr>
-            <a:r>
-              <a:rPr sz="1400">
-                <a:solidFill>
-                  <a:srgbClr val="6D8C97"/>
-                </a:solidFill>
-                <a:latin typeface="Consolas"/>
-              </a:rPr>
-              <a:t>  33  </a:t>
-            </a:r>
-            <a:r>
-              <a:rPr sz="1400">
-                <a:solidFill>
-                  <a:srgbClr val="7FE0A0"/>
-                </a:solidFill>
-                <a:latin typeface="Consolas"/>
-              </a:rPr>
-              <a:t>  background: #01aefd;</a:t>
-            </a:r>
-          </a:p>
-          <a:p>
-            <a:pPr>
-              <a:spcAft>
-                <a:spcPts val="0"/>
-              </a:spcAft>
-            </a:pPr>
-            <a:r>
-              <a:rPr sz="1400">
-                <a:solidFill>
-                  <a:srgbClr val="6D8C97"/>
-                </a:solidFill>
-                <a:latin typeface="Consolas"/>
-              </a:rPr>
-              <a:t>  34  </a:t>
-            </a:r>
-            <a:r>
-              <a:rPr sz="1400">
-                <a:solidFill>
-                  <a:srgbClr val="7FE0A0"/>
-                </a:solidFill>
-                <a:latin typeface="Consolas"/>
-              </a:rPr>
-              <a:t>  color: #ffffff;</a:t>
-            </a:r>
-          </a:p>
-          <a:p>
-            <a:pPr>
-              <a:spcAft>
-                <a:spcPts val="0"/>
-              </a:spcAft>
-            </a:pPr>
-            <a:r>
-              <a:rPr sz="1400">
-                <a:solidFill>
-                  <a:srgbClr val="6D8C97"/>
-                </a:solidFill>
-                <a:latin typeface="Consolas"/>
-              </a:rPr>
-              <a:t>  35  </a:t>
-            </a:r>
-            <a:r>
-              <a:rPr sz="1400">
-                <a:solidFill>
-                  <a:srgbClr val="7FE0A0"/>
-                </a:solidFill>
-                <a:latin typeface="Consolas"/>
-              </a:rPr>
-              <a:t>  font-size: 15px;</a:t>
             </a:r>
           </a:p>
         </p:txBody>
@@ -4110,7 +3569,7 @@
                   <a:srgbClr val="01AEFD"/>
                 </a:solidFill>
               </a:rPr>
-              <a:t>Type this into style.css  (4 of 4)</a:t>
+              <a:t>Type this into style.css  (2 of 4)</a:t>
             </a:r>
           </a:p>
         </p:txBody>
@@ -4143,22 +3602,22 @@
               </a:spcAft>
             </a:pPr>
             <a:r>
-              <a:rPr sz="1700">
+              <a:rPr sz="1400">
                 <a:solidFill>
                   <a:srgbClr val="6D8C97"/>
                 </a:solidFill>
                 <a:latin typeface="Consolas"/>
               </a:rPr>
-              <a:t>  36  </a:t>
-            </a:r>
-            <a:r>
-              <a:rPr sz="1700">
+              <a:t>   7  </a:t>
+            </a:r>
+            <a:r>
+              <a:rPr sz="1400">
                 <a:solidFill>
                   <a:srgbClr val="7FE0A0"/>
                 </a:solidFill>
                 <a:latin typeface="Consolas"/>
               </a:rPr>
-              <a:t>  cursor: pointer;</a:t>
+              <a:t>.app {</a:t>
             </a:r>
           </a:p>
           <a:p>
@@ -4168,16 +3627,316 @@
               </a:spcAft>
             </a:pPr>
             <a:r>
-              <a:rPr sz="1700">
+              <a:rPr sz="1400">
                 <a:solidFill>
                   <a:srgbClr val="6D8C97"/>
                 </a:solidFill>
                 <a:latin typeface="Consolas"/>
               </a:rPr>
-              <a:t>  37  </a:t>
-            </a:r>
-            <a:r>
-              <a:rPr sz="1700">
+              <a:t>   8  </a:t>
+            </a:r>
+            <a:r>
+              <a:rPr sz="1400">
+                <a:solidFill>
+                  <a:srgbClr val="7FE0A0"/>
+                </a:solidFill>
+                <a:latin typeface="Consolas"/>
+              </a:rPr>
+              <a:t>  max-width: 620px;</a:t>
+            </a:r>
+          </a:p>
+          <a:p>
+            <a:pPr>
+              <a:spcAft>
+                <a:spcPts val="0"/>
+              </a:spcAft>
+            </a:pPr>
+            <a:r>
+              <a:rPr sz="1400">
+                <a:solidFill>
+                  <a:srgbClr val="6D8C97"/>
+                </a:solidFill>
+                <a:latin typeface="Consolas"/>
+              </a:rPr>
+              <a:t>   9  </a:t>
+            </a:r>
+            <a:r>
+              <a:rPr sz="1400">
+                <a:solidFill>
+                  <a:srgbClr val="7FE0A0"/>
+                </a:solidFill>
+                <a:latin typeface="Consolas"/>
+              </a:rPr>
+              <a:t>  margin: 0 auto;</a:t>
+            </a:r>
+          </a:p>
+          <a:p>
+            <a:pPr>
+              <a:spcAft>
+                <a:spcPts val="0"/>
+              </a:spcAft>
+            </a:pPr>
+            <a:r>
+              <a:rPr sz="1400">
+                <a:solidFill>
+                  <a:srgbClr val="6D8C97"/>
+                </a:solidFill>
+                <a:latin typeface="Consolas"/>
+              </a:rPr>
+              <a:t>  10  </a:t>
+            </a:r>
+            <a:r>
+              <a:rPr sz="1400">
+                <a:solidFill>
+                  <a:srgbClr val="7FE0A0"/>
+                </a:solidFill>
+                <a:latin typeface="Consolas"/>
+              </a:rPr>
+              <a:t>  padding: 20px;</a:t>
+            </a:r>
+          </a:p>
+          <a:p>
+            <a:pPr>
+              <a:spcAft>
+                <a:spcPts val="0"/>
+              </a:spcAft>
+            </a:pPr>
+            <a:r>
+              <a:rPr sz="1400">
+                <a:solidFill>
+                  <a:srgbClr val="6D8C97"/>
+                </a:solidFill>
+                <a:latin typeface="Consolas"/>
+              </a:rPr>
+              <a:t>  11  </a:t>
+            </a:r>
+            <a:r>
+              <a:rPr sz="1400">
+                <a:solidFill>
+                  <a:srgbClr val="7FE0A0"/>
+                </a:solidFill>
+                <a:latin typeface="Consolas"/>
+              </a:rPr>
+              <a:t>}</a:t>
+            </a:r>
+          </a:p>
+          <a:p>
+            <a:pPr>
+              <a:spcAft>
+                <a:spcPts val="0"/>
+              </a:spcAft>
+            </a:pPr>
+            <a:r>
+              <a:rPr sz="1400">
+                <a:solidFill>
+                  <a:srgbClr val="6D8C97"/>
+                </a:solidFill>
+                <a:latin typeface="Consolas"/>
+              </a:rPr>
+              <a:t>  12  </a:t>
+            </a:r>
+            <a:r>
+              <a:rPr sz="1400">
+                <a:solidFill>
+                  <a:srgbClr val="7FE0A0"/>
+                </a:solidFill>
+                <a:latin typeface="Consolas"/>
+              </a:rPr>
+              <a:t>.top h1 { margin: 0 0 4px; font-size: 26px; }</a:t>
+            </a:r>
+          </a:p>
+          <a:p>
+            <a:pPr>
+              <a:spcAft>
+                <a:spcPts val="0"/>
+              </a:spcAft>
+            </a:pPr>
+            <a:r>
+              <a:rPr sz="1400">
+                <a:solidFill>
+                  <a:srgbClr val="6D8C97"/>
+                </a:solidFill>
+                <a:latin typeface="Consolas"/>
+              </a:rPr>
+              <a:t>  13  </a:t>
+            </a:r>
+            <a:r>
+              <a:rPr sz="1400">
+                <a:solidFill>
+                  <a:srgbClr val="7FE0A0"/>
+                </a:solidFill>
+                <a:latin typeface="Consolas"/>
+              </a:rPr>
+              <a:t>.tag { margin: 0 0 18px; color: #6b7787; font-size: 14px; }</a:t>
+            </a:r>
+          </a:p>
+          <a:p>
+            <a:pPr>
+              <a:spcAft>
+                <a:spcPts val="0"/>
+              </a:spcAft>
+            </a:pPr>
+            <a:r>
+              <a:rPr sz="1400">
+                <a:solidFill>
+                  <a:srgbClr val="6D8C97"/>
+                </a:solidFill>
+                <a:latin typeface="Consolas"/>
+              </a:rPr>
+              <a:t>  14  </a:t>
+            </a:r>
+            <a:r>
+              <a:rPr sz="1400">
+                <a:solidFill>
+                  <a:srgbClr val="7FE0A0"/>
+                </a:solidFill>
+                <a:latin typeface="Consolas"/>
+              </a:rPr>
+              <a:t>.chat {</a:t>
+            </a:r>
+          </a:p>
+          <a:p>
+            <a:pPr>
+              <a:spcAft>
+                <a:spcPts val="0"/>
+              </a:spcAft>
+            </a:pPr>
+            <a:r>
+              <a:rPr sz="1400">
+                <a:solidFill>
+                  <a:srgbClr val="6D8C97"/>
+                </a:solidFill>
+                <a:latin typeface="Consolas"/>
+              </a:rPr>
+              <a:t>  15  </a:t>
+            </a:r>
+            <a:r>
+              <a:rPr sz="1400">
+                <a:solidFill>
+                  <a:srgbClr val="7FE0A0"/>
+                </a:solidFill>
+                <a:latin typeface="Consolas"/>
+              </a:rPr>
+              <a:t>  min-height: 260px;</a:t>
+            </a:r>
+          </a:p>
+          <a:p>
+            <a:pPr>
+              <a:spcAft>
+                <a:spcPts val="0"/>
+              </a:spcAft>
+            </a:pPr>
+            <a:r>
+              <a:rPr sz="1400">
+                <a:solidFill>
+                  <a:srgbClr val="6D8C97"/>
+                </a:solidFill>
+                <a:latin typeface="Consolas"/>
+              </a:rPr>
+              <a:t>  16  </a:t>
+            </a:r>
+            <a:r>
+              <a:rPr sz="1400">
+                <a:solidFill>
+                  <a:srgbClr val="7FE0A0"/>
+                </a:solidFill>
+                <a:latin typeface="Consolas"/>
+              </a:rPr>
+              <a:t>  padding: 12px;</a:t>
+            </a:r>
+          </a:p>
+          <a:p>
+            <a:pPr>
+              <a:spcAft>
+                <a:spcPts val="0"/>
+              </a:spcAft>
+            </a:pPr>
+            <a:r>
+              <a:rPr sz="1400">
+                <a:solidFill>
+                  <a:srgbClr val="6D8C97"/>
+                </a:solidFill>
+                <a:latin typeface="Consolas"/>
+              </a:rPr>
+              <a:t>  17  </a:t>
+            </a:r>
+            <a:r>
+              <a:rPr sz="1400">
+                <a:solidFill>
+                  <a:srgbClr val="7FE0A0"/>
+                </a:solidFill>
+                <a:latin typeface="Consolas"/>
+              </a:rPr>
+              <a:t>  background: #ffffff;</a:t>
+            </a:r>
+          </a:p>
+          <a:p>
+            <a:pPr>
+              <a:spcAft>
+                <a:spcPts val="0"/>
+              </a:spcAft>
+            </a:pPr>
+            <a:r>
+              <a:rPr sz="1400">
+                <a:solidFill>
+                  <a:srgbClr val="6D8C97"/>
+                </a:solidFill>
+                <a:latin typeface="Consolas"/>
+              </a:rPr>
+              <a:t>  18  </a:t>
+            </a:r>
+            <a:r>
+              <a:rPr sz="1400">
+                <a:solidFill>
+                  <a:srgbClr val="7FE0A0"/>
+                </a:solidFill>
+                <a:latin typeface="Consolas"/>
+              </a:rPr>
+              <a:t>  border: 1px solid #dbe3ec;</a:t>
+            </a:r>
+          </a:p>
+          <a:p>
+            <a:pPr>
+              <a:spcAft>
+                <a:spcPts val="0"/>
+              </a:spcAft>
+            </a:pPr>
+            <a:r>
+              <a:rPr sz="1400">
+                <a:solidFill>
+                  <a:srgbClr val="6D8C97"/>
+                </a:solidFill>
+                <a:latin typeface="Consolas"/>
+              </a:rPr>
+              <a:t>  19  </a:t>
+            </a:r>
+            <a:r>
+              <a:rPr sz="1400">
+                <a:solidFill>
+                  <a:srgbClr val="7FE0A0"/>
+                </a:solidFill>
+                <a:latin typeface="Consolas"/>
+              </a:rPr>
+              <a:t>  border-radius: 8px;</a:t>
+            </a:r>
+          </a:p>
+          <a:p>
+            <a:pPr>
+              <a:spcAft>
+                <a:spcPts val="0"/>
+              </a:spcAft>
+            </a:pPr>
+            <a:r>
+              <a:rPr sz="1400">
+                <a:solidFill>
+                  <a:srgbClr val="6D8C97"/>
+                </a:solidFill>
+                <a:latin typeface="Consolas"/>
+              </a:rPr>
+              <a:t>  20  </a:t>
+            </a:r>
+            <a:r>
+              <a:rPr sz="1400">
                 <a:solidFill>
                   <a:srgbClr val="7FE0A0"/>
                 </a:solidFill>
@@ -4199,6 +3958,14 @@
 <file path=ppt/slides/slide13.xml><?xml version="1.0" encoding="utf-8"?>
 <p:sld xmlns:a="http://schemas.openxmlformats.org/drawingml/2006/main" xmlns:p="http://schemas.openxmlformats.org/presentationml/2006/main" xmlns:r="http://schemas.openxmlformats.org/officeDocument/2006/relationships">
   <p:cSld>
+    <p:bg>
+      <p:bgPr>
+        <a:solidFill>
+          <a:srgbClr val="102127"/>
+        </a:solidFill>
+        <a:effectLst/>
+      </p:bgPr>
+    </p:bg>
     <p:spTree>
       <p:nvGrpSpPr>
         <p:cNvPr id="1" name=""/>
@@ -4208,40 +3975,14 @@
       <p:grpSpPr/>
       <p:sp>
         <p:nvSpPr>
-          <p:cNvPr id="2" name="Title 1"/>
-          <p:cNvSpPr>
-            <a:spLocks noGrp="1"/>
-          </p:cNvSpPr>
-          <p:nvPr>
-            <p:ph type="title"/>
-          </p:nvPr>
-        </p:nvSpPr>
-        <p:spPr/>
-        <p:txBody>
-          <a:bodyPr/>
-          <a:lstStyle/>
-          <a:p>
-            <a:r>
-              <a:rPr sz="3800" b="1">
-                <a:solidFill>
-                  <a:srgbClr val="1F2A37"/>
-                </a:solidFill>
-              </a:rPr>
-              <a:t>Two buttons you will use every week</a:t>
-            </a:r>
-          </a:p>
-        </p:txBody>
-      </p:sp>
-      <p:sp>
-        <p:nvSpPr>
-          <p:cNvPr id="3" name="TextBox 2"/>
+          <p:cNvPr id="2" name="TextBox 1"/>
           <p:cNvSpPr txBox="1"/>
           <p:nvPr/>
         </p:nvSpPr>
         <p:spPr>
           <a:xfrm>
-            <a:off x="822960" y="1828800"/>
-            <a:ext cx="10515600" cy="4206240"/>
+            <a:off x="502920" y="274320"/>
+            <a:ext cx="11155680" cy="731520"/>
           </a:xfrm>
           <a:prstGeom prst="rect">
             <a:avLst/>
@@ -4249,38 +3990,416 @@
           <a:noFill/>
         </p:spPr>
         <p:txBody>
-          <a:bodyPr wrap="square">
+          <a:bodyPr wrap="none">
             <a:spAutoFit/>
           </a:bodyPr>
           <a:lstStyle/>
           <a:p>
-            <a:pPr>
-              <a:spcAft>
-                <a:spcPts val="1400"/>
-              </a:spcAft>
-            </a:pPr>
-            <a:r>
-              <a:rPr sz="2400">
-                <a:solidFill>
-                  <a:srgbClr val="1F2A37"/>
-                </a:solidFill>
-              </a:rPr>
-              <a:t>• Run - nothing happens until you press it</a:t>
-            </a:r>
-          </a:p>
-          <a:p>
-            <a:pPr>
-              <a:spcAft>
-                <a:spcPts val="1400"/>
-              </a:spcAft>
-            </a:pPr>
-            <a:r>
-              <a:rPr sz="2400">
-                <a:solidFill>
-                  <a:srgbClr val="1F2A37"/>
-                </a:solidFill>
-              </a:rPr>
-              <a:t>• Console - where your code talks to you</a:t>
+            <a:r>
+              <a:rPr sz="2600" b="1">
+                <a:solidFill>
+                  <a:srgbClr val="01AEFD"/>
+                </a:solidFill>
+              </a:rPr>
+              <a:t>Type this into style.css  (3 of 4)</a:t>
+            </a:r>
+          </a:p>
+        </p:txBody>
+      </p:sp>
+      <p:sp>
+        <p:nvSpPr>
+          <p:cNvPr id="3" name="TextBox 2"/>
+          <p:cNvSpPr txBox="1"/>
+          <p:nvPr/>
+        </p:nvSpPr>
+        <p:spPr>
+          <a:xfrm>
+            <a:off x="502920" y="1051560"/>
+            <a:ext cx="11155680" cy="5394960"/>
+          </a:xfrm>
+          <a:prstGeom prst="rect">
+            <a:avLst/>
+          </a:prstGeom>
+          <a:noFill/>
+        </p:spPr>
+        <p:txBody>
+          <a:bodyPr wrap="none">
+            <a:spAutoFit/>
+          </a:bodyPr>
+          <a:lstStyle/>
+          <a:p>
+            <a:pPr>
+              <a:spcAft>
+                <a:spcPts val="0"/>
+              </a:spcAft>
+            </a:pPr>
+            <a:r>
+              <a:rPr sz="1400">
+                <a:solidFill>
+                  <a:srgbClr val="6D8C97"/>
+                </a:solidFill>
+                <a:latin typeface="Consolas"/>
+              </a:rPr>
+              <a:t>  21  </a:t>
+            </a:r>
+            <a:r>
+              <a:rPr sz="1400">
+                <a:solidFill>
+                  <a:srgbClr val="7FE0A0"/>
+                </a:solidFill>
+                <a:latin typeface="Consolas"/>
+              </a:rPr>
+              <a:t>.composer { display: flex; gap: 8px; margin-top: 12px; }</a:t>
+            </a:r>
+          </a:p>
+          <a:p>
+            <a:pPr>
+              <a:spcAft>
+                <a:spcPts val="0"/>
+              </a:spcAft>
+            </a:pPr>
+            <a:r>
+              <a:rPr sz="1400">
+                <a:solidFill>
+                  <a:srgbClr val="6D8C97"/>
+                </a:solidFill>
+                <a:latin typeface="Consolas"/>
+              </a:rPr>
+              <a:t>  22  </a:t>
+            </a:r>
+            <a:r>
+              <a:rPr sz="1400">
+                <a:solidFill>
+                  <a:srgbClr val="7FE0A0"/>
+                </a:solidFill>
+                <a:latin typeface="Consolas"/>
+              </a:rPr>
+              <a:t>.composer input {</a:t>
+            </a:r>
+          </a:p>
+          <a:p>
+            <a:pPr>
+              <a:spcAft>
+                <a:spcPts val="0"/>
+              </a:spcAft>
+            </a:pPr>
+            <a:r>
+              <a:rPr sz="1400">
+                <a:solidFill>
+                  <a:srgbClr val="6D8C97"/>
+                </a:solidFill>
+                <a:latin typeface="Consolas"/>
+              </a:rPr>
+              <a:t>  23  </a:t>
+            </a:r>
+            <a:r>
+              <a:rPr sz="1400">
+                <a:solidFill>
+                  <a:srgbClr val="7FE0A0"/>
+                </a:solidFill>
+                <a:latin typeface="Consolas"/>
+              </a:rPr>
+              <a:t>  flex: 1;</a:t>
+            </a:r>
+          </a:p>
+          <a:p>
+            <a:pPr>
+              <a:spcAft>
+                <a:spcPts val="0"/>
+              </a:spcAft>
+            </a:pPr>
+            <a:r>
+              <a:rPr sz="1400">
+                <a:solidFill>
+                  <a:srgbClr val="6D8C97"/>
+                </a:solidFill>
+                <a:latin typeface="Consolas"/>
+              </a:rPr>
+              <a:t>  24  </a:t>
+            </a:r>
+            <a:r>
+              <a:rPr sz="1400">
+                <a:solidFill>
+                  <a:srgbClr val="7FE0A0"/>
+                </a:solidFill>
+                <a:latin typeface="Consolas"/>
+              </a:rPr>
+              <a:t>  padding: 11px;</a:t>
+            </a:r>
+          </a:p>
+          <a:p>
+            <a:pPr>
+              <a:spcAft>
+                <a:spcPts val="0"/>
+              </a:spcAft>
+            </a:pPr>
+            <a:r>
+              <a:rPr sz="1400">
+                <a:solidFill>
+                  <a:srgbClr val="6D8C97"/>
+                </a:solidFill>
+                <a:latin typeface="Consolas"/>
+              </a:rPr>
+              <a:t>  25  </a:t>
+            </a:r>
+            <a:r>
+              <a:rPr sz="1400">
+                <a:solidFill>
+                  <a:srgbClr val="7FE0A0"/>
+                </a:solidFill>
+                <a:latin typeface="Consolas"/>
+              </a:rPr>
+              <a:t>  border: 1px solid #dbe3ec;</a:t>
+            </a:r>
+          </a:p>
+          <a:p>
+            <a:pPr>
+              <a:spcAft>
+                <a:spcPts val="0"/>
+              </a:spcAft>
+            </a:pPr>
+            <a:r>
+              <a:rPr sz="1400">
+                <a:solidFill>
+                  <a:srgbClr val="6D8C97"/>
+                </a:solidFill>
+                <a:latin typeface="Consolas"/>
+              </a:rPr>
+              <a:t>  26  </a:t>
+            </a:r>
+            <a:r>
+              <a:rPr sz="1400">
+                <a:solidFill>
+                  <a:srgbClr val="7FE0A0"/>
+                </a:solidFill>
+                <a:latin typeface="Consolas"/>
+              </a:rPr>
+              <a:t>  border-radius: 6px;</a:t>
+            </a:r>
+          </a:p>
+          <a:p>
+            <a:pPr>
+              <a:spcAft>
+                <a:spcPts val="0"/>
+              </a:spcAft>
+            </a:pPr>
+            <a:r>
+              <a:rPr sz="1400">
+                <a:solidFill>
+                  <a:srgbClr val="6D8C97"/>
+                </a:solidFill>
+                <a:latin typeface="Consolas"/>
+              </a:rPr>
+              <a:t>  27  </a:t>
+            </a:r>
+            <a:r>
+              <a:rPr sz="1400">
+                <a:solidFill>
+                  <a:srgbClr val="7FE0A0"/>
+                </a:solidFill>
+                <a:latin typeface="Consolas"/>
+              </a:rPr>
+              <a:t>  font-size: 15px;</a:t>
+            </a:r>
+          </a:p>
+          <a:p>
+            <a:pPr>
+              <a:spcAft>
+                <a:spcPts val="0"/>
+              </a:spcAft>
+            </a:pPr>
+            <a:r>
+              <a:rPr sz="1400">
+                <a:solidFill>
+                  <a:srgbClr val="6D8C97"/>
+                </a:solidFill>
+                <a:latin typeface="Consolas"/>
+              </a:rPr>
+              <a:t>  28  </a:t>
+            </a:r>
+            <a:r>
+              <a:rPr sz="1400">
+                <a:solidFill>
+                  <a:srgbClr val="7FE0A0"/>
+                </a:solidFill>
+                <a:latin typeface="Consolas"/>
+              </a:rPr>
+              <a:t>}</a:t>
+            </a:r>
+          </a:p>
+          <a:p>
+            <a:pPr>
+              <a:spcAft>
+                <a:spcPts val="0"/>
+              </a:spcAft>
+            </a:pPr>
+            <a:r>
+              <a:rPr sz="1400">
+                <a:solidFill>
+                  <a:srgbClr val="6D8C97"/>
+                </a:solidFill>
+                <a:latin typeface="Consolas"/>
+              </a:rPr>
+              <a:t>  29  </a:t>
+            </a:r>
+            <a:r>
+              <a:rPr sz="1400">
+                <a:solidFill>
+                  <a:srgbClr val="7FE0A0"/>
+                </a:solidFill>
+                <a:latin typeface="Consolas"/>
+              </a:rPr>
+              <a:t>.composer button {</a:t>
+            </a:r>
+          </a:p>
+          <a:p>
+            <a:pPr>
+              <a:spcAft>
+                <a:spcPts val="0"/>
+              </a:spcAft>
+            </a:pPr>
+            <a:r>
+              <a:rPr sz="1400">
+                <a:solidFill>
+                  <a:srgbClr val="6D8C97"/>
+                </a:solidFill>
+                <a:latin typeface="Consolas"/>
+              </a:rPr>
+              <a:t>  30  </a:t>
+            </a:r>
+            <a:r>
+              <a:rPr sz="1400">
+                <a:solidFill>
+                  <a:srgbClr val="7FE0A0"/>
+                </a:solidFill>
+                <a:latin typeface="Consolas"/>
+              </a:rPr>
+              <a:t>  padding: 11px 18px;</a:t>
+            </a:r>
+          </a:p>
+          <a:p>
+            <a:pPr>
+              <a:spcAft>
+                <a:spcPts val="0"/>
+              </a:spcAft>
+            </a:pPr>
+            <a:r>
+              <a:rPr sz="1400">
+                <a:solidFill>
+                  <a:srgbClr val="6D8C97"/>
+                </a:solidFill>
+                <a:latin typeface="Consolas"/>
+              </a:rPr>
+              <a:t>  31  </a:t>
+            </a:r>
+            <a:r>
+              <a:rPr sz="1400">
+                <a:solidFill>
+                  <a:srgbClr val="7FE0A0"/>
+                </a:solidFill>
+                <a:latin typeface="Consolas"/>
+              </a:rPr>
+              <a:t>  border: 0;</a:t>
+            </a:r>
+          </a:p>
+          <a:p>
+            <a:pPr>
+              <a:spcAft>
+                <a:spcPts val="0"/>
+              </a:spcAft>
+            </a:pPr>
+            <a:r>
+              <a:rPr sz="1400">
+                <a:solidFill>
+                  <a:srgbClr val="6D8C97"/>
+                </a:solidFill>
+                <a:latin typeface="Consolas"/>
+              </a:rPr>
+              <a:t>  32  </a:t>
+            </a:r>
+            <a:r>
+              <a:rPr sz="1400">
+                <a:solidFill>
+                  <a:srgbClr val="7FE0A0"/>
+                </a:solidFill>
+                <a:latin typeface="Consolas"/>
+              </a:rPr>
+              <a:t>  border-radius: 6px;</a:t>
+            </a:r>
+          </a:p>
+          <a:p>
+            <a:pPr>
+              <a:spcAft>
+                <a:spcPts val="0"/>
+              </a:spcAft>
+            </a:pPr>
+            <a:r>
+              <a:rPr sz="1400">
+                <a:solidFill>
+                  <a:srgbClr val="6D8C97"/>
+                </a:solidFill>
+                <a:latin typeface="Consolas"/>
+              </a:rPr>
+              <a:t>  33  </a:t>
+            </a:r>
+            <a:r>
+              <a:rPr sz="1400">
+                <a:solidFill>
+                  <a:srgbClr val="7FE0A0"/>
+                </a:solidFill>
+                <a:latin typeface="Consolas"/>
+              </a:rPr>
+              <a:t>  background: #01aefd;</a:t>
+            </a:r>
+          </a:p>
+          <a:p>
+            <a:pPr>
+              <a:spcAft>
+                <a:spcPts val="0"/>
+              </a:spcAft>
+            </a:pPr>
+            <a:r>
+              <a:rPr sz="1400">
+                <a:solidFill>
+                  <a:srgbClr val="6D8C97"/>
+                </a:solidFill>
+                <a:latin typeface="Consolas"/>
+              </a:rPr>
+              <a:t>  34  </a:t>
+            </a:r>
+            <a:r>
+              <a:rPr sz="1400">
+                <a:solidFill>
+                  <a:srgbClr val="7FE0A0"/>
+                </a:solidFill>
+                <a:latin typeface="Consolas"/>
+              </a:rPr>
+              <a:t>  color: #ffffff;</a:t>
+            </a:r>
+          </a:p>
+          <a:p>
+            <a:pPr>
+              <a:spcAft>
+                <a:spcPts val="0"/>
+              </a:spcAft>
+            </a:pPr>
+            <a:r>
+              <a:rPr sz="1400">
+                <a:solidFill>
+                  <a:srgbClr val="6D8C97"/>
+                </a:solidFill>
+                <a:latin typeface="Consolas"/>
+              </a:rPr>
+              <a:t>  35  </a:t>
+            </a:r>
+            <a:r>
+              <a:rPr sz="1400">
+                <a:solidFill>
+                  <a:srgbClr val="7FE0A0"/>
+                </a:solidFill>
+                <a:latin typeface="Consolas"/>
+              </a:rPr>
+              <a:t>  font-size: 15px;</a:t>
             </a:r>
           </a:p>
         </p:txBody>
@@ -4339,7 +4458,7 @@
                   <a:srgbClr val="01AEFD"/>
                 </a:solidFill>
               </a:rPr>
-              <a:t>Type this into script.js</a:t>
+              <a:t>Type this into style.css  (4 of 4)</a:t>
             </a:r>
           </a:p>
         </p:txBody>
@@ -4378,7 +4497,7 @@
                 </a:solidFill>
                 <a:latin typeface="Consolas"/>
               </a:rPr>
-              <a:t>   1  </a:t>
+              <a:t>  36  </a:t>
             </a:r>
             <a:r>
               <a:rPr sz="1700">
@@ -4387,7 +4506,7 @@
                 </a:solidFill>
                 <a:latin typeface="Consolas"/>
               </a:rPr>
-              <a:t>// Week 1: prove the JavaScript file is really running.</a:t>
+              <a:t>  cursor: pointer;</a:t>
             </a:r>
           </a:p>
           <a:p>
@@ -4403,7 +4522,7 @@
                 </a:solidFill>
                 <a:latin typeface="Consolas"/>
               </a:rPr>
-              <a:t>   2  </a:t>
+              <a:t>  37  </a:t>
             </a:r>
             <a:r>
               <a:rPr sz="1700">
@@ -4412,7 +4531,7 @@
                 </a:solidFill>
                 <a:latin typeface="Consolas"/>
               </a:rPr>
-              <a:t>console.log('My AI companion is starting up.');</a:t>
+              <a:t>}</a:t>
             </a:r>
           </a:p>
         </p:txBody>
@@ -4456,7 +4575,7 @@
                   <a:srgbClr val="1F2A37"/>
                 </a:solidFill>
               </a:rPr>
-              <a:t>id = a name</a:t>
+              <a:t>The script goes at the BOTTOM</a:t>
             </a:r>
           </a:p>
         </p:txBody>
@@ -4494,7 +4613,7 @@
                   <a:srgbClr val="1F2A37"/>
                 </a:solidFill>
               </a:rPr>
-              <a:t>• &lt;div id="chat"&gt;</a:t>
+              <a:t>• The browser reads top to bottom</a:t>
             </a:r>
           </a:p>
           <a:p>
@@ -4509,7 +4628,7 @@
                   <a:srgbClr val="1F2A37"/>
                 </a:solidFill>
               </a:rPr>
-              <a:t>• Next week JavaScript uses that name to find the box</a:t>
+              <a:t>• At the top, the boxes do not exist yet</a:t>
             </a:r>
           </a:p>
           <a:p>
@@ -4524,7 +4643,22 @@
                   <a:srgbClr val="1F2A37"/>
                 </a:solidFill>
               </a:rPr>
-              <a:t>• Names must be spelled exactly the same in both files</a:t>
+              <a:t>• A script cannot find a page that has not been made</a:t>
+            </a:r>
+          </a:p>
+          <a:p>
+            <a:pPr>
+              <a:spcAft>
+                <a:spcPts val="1400"/>
+              </a:spcAft>
+            </a:pPr>
+            <a:r>
+              <a:rPr sz="2400">
+                <a:solidFill>
+                  <a:srgbClr val="1F2A37"/>
+                </a:solidFill>
+              </a:rPr>
+              <a:t>• Move it up, press Run, watch it break</a:t>
             </a:r>
           </a:p>
         </p:txBody>
@@ -4540,6 +4674,14 @@
 <file path=ppt/slides/slide16.xml><?xml version="1.0" encoding="utf-8"?>
 <p:sld xmlns:a="http://schemas.openxmlformats.org/drawingml/2006/main" xmlns:p="http://schemas.openxmlformats.org/presentationml/2006/main" xmlns:r="http://schemas.openxmlformats.org/officeDocument/2006/relationships">
   <p:cSld>
+    <p:bg>
+      <p:bgPr>
+        <a:solidFill>
+          <a:srgbClr val="102127"/>
+        </a:solidFill>
+        <a:effectLst/>
+      </p:bgPr>
+    </p:bg>
     <p:spTree>
       <p:nvGrpSpPr>
         <p:cNvPr id="1" name=""/>
@@ -4549,6 +4691,130 @@
       <p:grpSpPr/>
       <p:sp>
         <p:nvSpPr>
+          <p:cNvPr id="2" name="TextBox 1"/>
+          <p:cNvSpPr txBox="1"/>
+          <p:nvPr/>
+        </p:nvSpPr>
+        <p:spPr>
+          <a:xfrm>
+            <a:off x="502920" y="274320"/>
+            <a:ext cx="11155680" cy="731520"/>
+          </a:xfrm>
+          <a:prstGeom prst="rect">
+            <a:avLst/>
+          </a:prstGeom>
+          <a:noFill/>
+        </p:spPr>
+        <p:txBody>
+          <a:bodyPr wrap="none">
+            <a:spAutoFit/>
+          </a:bodyPr>
+          <a:lstStyle/>
+          <a:p>
+            <a:r>
+              <a:rPr sz="2600" b="1">
+                <a:solidFill>
+                  <a:srgbClr val="01AEFD"/>
+                </a:solidFill>
+              </a:rPr>
+              <a:t>Type this into index.html</a:t>
+            </a:r>
+          </a:p>
+        </p:txBody>
+      </p:sp>
+      <p:sp>
+        <p:nvSpPr>
+          <p:cNvPr id="3" name="TextBox 2"/>
+          <p:cNvSpPr txBox="1"/>
+          <p:nvPr/>
+        </p:nvSpPr>
+        <p:spPr>
+          <a:xfrm>
+            <a:off x="502920" y="1051560"/>
+            <a:ext cx="11155680" cy="5394960"/>
+          </a:xfrm>
+          <a:prstGeom prst="rect">
+            <a:avLst/>
+          </a:prstGeom>
+          <a:noFill/>
+        </p:spPr>
+        <p:txBody>
+          <a:bodyPr wrap="none">
+            <a:spAutoFit/>
+          </a:bodyPr>
+          <a:lstStyle/>
+          <a:p>
+            <a:pPr>
+              <a:spcAft>
+                <a:spcPts val="0"/>
+              </a:spcAft>
+            </a:pPr>
+            <a:r>
+              <a:rPr sz="1700">
+                <a:solidFill>
+                  <a:srgbClr val="6D8C97"/>
+                </a:solidFill>
+                <a:latin typeface="Consolas"/>
+              </a:rPr>
+              <a:t>  14  </a:t>
+            </a:r>
+            <a:r>
+              <a:rPr sz="1700">
+                <a:solidFill>
+                  <a:srgbClr val="7FE0A0"/>
+                </a:solidFill>
+                <a:latin typeface="Consolas"/>
+              </a:rPr>
+              <a:t> </a:t>
+            </a:r>
+          </a:p>
+          <a:p>
+            <a:pPr>
+              <a:spcAft>
+                <a:spcPts val="0"/>
+              </a:spcAft>
+            </a:pPr>
+            <a:r>
+              <a:rPr sz="1700">
+                <a:solidFill>
+                  <a:srgbClr val="6D8C97"/>
+                </a:solidFill>
+                <a:latin typeface="Consolas"/>
+              </a:rPr>
+              <a:t>  15  </a:t>
+            </a:r>
+            <a:r>
+              <a:rPr sz="1700">
+                <a:solidFill>
+                  <a:srgbClr val="7FE0A0"/>
+                </a:solidFill>
+                <a:latin typeface="Consolas"/>
+              </a:rPr>
+              <a:t>&lt;script src="script.js"&gt;&lt;/script&gt;</a:t>
+            </a:r>
+          </a:p>
+        </p:txBody>
+      </p:sp>
+    </p:spTree>
+  </p:cSld>
+  <p:clrMapOvr>
+    <a:masterClrMapping/>
+  </p:clrMapOvr>
+</p:sld>
+</file>
+
+<file path=ppt/slides/slide17.xml><?xml version="1.0" encoding="utf-8"?>
+<p:sld xmlns:a="http://schemas.openxmlformats.org/drawingml/2006/main" xmlns:p="http://schemas.openxmlformats.org/presentationml/2006/main" xmlns:r="http://schemas.openxmlformats.org/officeDocument/2006/relationships">
+  <p:cSld>
+    <p:spTree>
+      <p:nvGrpSpPr>
+        <p:cNvPr id="1" name=""/>
+        <p:cNvGrpSpPr/>
+        <p:nvPr/>
+      </p:nvGrpSpPr>
+      <p:grpSpPr/>
+      <p:sp>
+        <p:nvSpPr>
           <p:cNvPr id="2" name="Title 1"/>
           <p:cNvSpPr>
             <a:spLocks noGrp="1"/>
@@ -4568,7 +4834,7 @@
                   <a:srgbClr val="1F2A37"/>
                 </a:solidFill>
               </a:rPr>
-              <a:t>Your turn</a:t>
+              <a:t>Two buttons you will use every week</a:t>
             </a:r>
           </a:p>
         </p:txBody>
@@ -4601,14 +4867,228 @@
               </a:spcAft>
             </a:pPr>
             <a:r>
-              <a:rPr sz="2800">
+              <a:rPr sz="2400">
+                <a:solidFill>
+                  <a:srgbClr val="1F2A37"/>
+                </a:solidFill>
+              </a:rPr>
+              <a:t>• Run - nothing happens until you press it</a:t>
+            </a:r>
+          </a:p>
+          <a:p>
+            <a:pPr>
+              <a:spcAft>
+                <a:spcPts val="1400"/>
+              </a:spcAft>
+            </a:pPr>
+            <a:r>
+              <a:rPr sz="2400">
+                <a:solidFill>
+                  <a:srgbClr val="1F2A37"/>
+                </a:solidFill>
+              </a:rPr>
+              <a:t>• Console - where your code talks to you</a:t>
+            </a:r>
+          </a:p>
+        </p:txBody>
+      </p:sp>
+    </p:spTree>
+  </p:cSld>
+  <p:clrMapOvr>
+    <a:masterClrMapping/>
+  </p:clrMapOvr>
+</p:sld>
+</file>
+
+<file path=ppt/slides/slide18.xml><?xml version="1.0" encoding="utf-8"?>
+<p:sld xmlns:a="http://schemas.openxmlformats.org/drawingml/2006/main" xmlns:p="http://schemas.openxmlformats.org/presentationml/2006/main" xmlns:r="http://schemas.openxmlformats.org/officeDocument/2006/relationships">
+  <p:cSld>
+    <p:bg>
+      <p:bgPr>
+        <a:solidFill>
+          <a:srgbClr val="102127"/>
+        </a:solidFill>
+        <a:effectLst/>
+      </p:bgPr>
+    </p:bg>
+    <p:spTree>
+      <p:nvGrpSpPr>
+        <p:cNvPr id="1" name=""/>
+        <p:cNvGrpSpPr/>
+        <p:nvPr/>
+      </p:nvGrpSpPr>
+      <p:grpSpPr/>
+      <p:sp>
+        <p:nvSpPr>
+          <p:cNvPr id="2" name="TextBox 1"/>
+          <p:cNvSpPr txBox="1"/>
+          <p:nvPr/>
+        </p:nvSpPr>
+        <p:spPr>
+          <a:xfrm>
+            <a:off x="502920" y="274320"/>
+            <a:ext cx="11155680" cy="731520"/>
+          </a:xfrm>
+          <a:prstGeom prst="rect">
+            <a:avLst/>
+          </a:prstGeom>
+          <a:noFill/>
+        </p:spPr>
+        <p:txBody>
+          <a:bodyPr wrap="none">
+            <a:spAutoFit/>
+          </a:bodyPr>
+          <a:lstStyle/>
+          <a:p>
+            <a:r>
+              <a:rPr sz="2600" b="1">
                 <a:solidFill>
                   <a:srgbClr val="01AEFD"/>
                 </a:solidFill>
               </a:rPr>
-              <a:t>Make it yours</a:t>
-            </a:r>
-          </a:p>
+              <a:t>Type this into script.js</a:t>
+            </a:r>
+          </a:p>
+        </p:txBody>
+      </p:sp>
+      <p:sp>
+        <p:nvSpPr>
+          <p:cNvPr id="3" name="TextBox 2"/>
+          <p:cNvSpPr txBox="1"/>
+          <p:nvPr/>
+        </p:nvSpPr>
+        <p:spPr>
+          <a:xfrm>
+            <a:off x="502920" y="1051560"/>
+            <a:ext cx="11155680" cy="5394960"/>
+          </a:xfrm>
+          <a:prstGeom prst="rect">
+            <a:avLst/>
+          </a:prstGeom>
+          <a:noFill/>
+        </p:spPr>
+        <p:txBody>
+          <a:bodyPr wrap="none">
+            <a:spAutoFit/>
+          </a:bodyPr>
+          <a:lstStyle/>
+          <a:p>
+            <a:pPr>
+              <a:spcAft>
+                <a:spcPts val="0"/>
+              </a:spcAft>
+            </a:pPr>
+            <a:r>
+              <a:rPr sz="1700">
+                <a:solidFill>
+                  <a:srgbClr val="6D8C97"/>
+                </a:solidFill>
+                <a:latin typeface="Consolas"/>
+              </a:rPr>
+              <a:t>   1  </a:t>
+            </a:r>
+            <a:r>
+              <a:rPr sz="1700">
+                <a:solidFill>
+                  <a:srgbClr val="7FE0A0"/>
+                </a:solidFill>
+                <a:latin typeface="Consolas"/>
+              </a:rPr>
+              <a:t>// Week 1: prove the JavaScript file is really running.</a:t>
+            </a:r>
+          </a:p>
+          <a:p>
+            <a:pPr>
+              <a:spcAft>
+                <a:spcPts val="0"/>
+              </a:spcAft>
+            </a:pPr>
+            <a:r>
+              <a:rPr sz="1700">
+                <a:solidFill>
+                  <a:srgbClr val="6D8C97"/>
+                </a:solidFill>
+                <a:latin typeface="Consolas"/>
+              </a:rPr>
+              <a:t>   2  </a:t>
+            </a:r>
+            <a:r>
+              <a:rPr sz="1700">
+                <a:solidFill>
+                  <a:srgbClr val="7FE0A0"/>
+                </a:solidFill>
+                <a:latin typeface="Consolas"/>
+              </a:rPr>
+              <a:t>console.log('My AI companion is starting up.');</a:t>
+            </a:r>
+          </a:p>
+        </p:txBody>
+      </p:sp>
+    </p:spTree>
+  </p:cSld>
+  <p:clrMapOvr>
+    <a:masterClrMapping/>
+  </p:clrMapOvr>
+</p:sld>
+</file>
+
+<file path=ppt/slides/slide19.xml><?xml version="1.0" encoding="utf-8"?>
+<p:sld xmlns:a="http://schemas.openxmlformats.org/drawingml/2006/main" xmlns:p="http://schemas.openxmlformats.org/presentationml/2006/main" xmlns:r="http://schemas.openxmlformats.org/officeDocument/2006/relationships">
+  <p:cSld>
+    <p:spTree>
+      <p:nvGrpSpPr>
+        <p:cNvPr id="1" name=""/>
+        <p:cNvGrpSpPr/>
+        <p:nvPr/>
+      </p:nvGrpSpPr>
+      <p:grpSpPr/>
+      <p:sp>
+        <p:nvSpPr>
+          <p:cNvPr id="2" name="Title 1"/>
+          <p:cNvSpPr>
+            <a:spLocks noGrp="1"/>
+          </p:cNvSpPr>
+          <p:nvPr>
+            <p:ph type="title"/>
+          </p:nvPr>
+        </p:nvSpPr>
+        <p:spPr/>
+        <p:txBody>
+          <a:bodyPr/>
+          <a:lstStyle/>
+          <a:p>
+            <a:r>
+              <a:rPr sz="3800" b="1">
+                <a:solidFill>
+                  <a:srgbClr val="1F2A37"/>
+                </a:solidFill>
+              </a:rPr>
+              <a:t>id = a name</a:t>
+            </a:r>
+          </a:p>
+        </p:txBody>
+      </p:sp>
+      <p:sp>
+        <p:nvSpPr>
+          <p:cNvPr id="3" name="TextBox 2"/>
+          <p:cNvSpPr txBox="1"/>
+          <p:nvPr/>
+        </p:nvSpPr>
+        <p:spPr>
+          <a:xfrm>
+            <a:off x="822960" y="1828800"/>
+            <a:ext cx="10515600" cy="4206240"/>
+          </a:xfrm>
+          <a:prstGeom prst="rect">
+            <a:avLst/>
+          </a:prstGeom>
+          <a:noFill/>
+        </p:spPr>
+        <p:txBody>
+          <a:bodyPr wrap="square">
+            <a:spAutoFit/>
+          </a:bodyPr>
+          <a:lstStyle/>
           <a:p>
             <a:pPr>
               <a:spcAft>
@@ -4621,7 +5101,7 @@
                   <a:srgbClr val="1F2A37"/>
                 </a:solidFill>
               </a:rPr>
-              <a:t>• Change the title</a:t>
+              <a:t>• &lt;div id="chat"&gt;</a:t>
             </a:r>
           </a:p>
           <a:p>
@@ -4636,7 +5116,7 @@
                   <a:srgbClr val="1F2A37"/>
                 </a:solidFill>
               </a:rPr>
-              <a:t>• Change the colours</a:t>
+              <a:t>• Next week JavaScript uses that name to find the box</a:t>
             </a:r>
           </a:p>
           <a:p>
@@ -4651,7 +5131,7 @@
                   <a:srgbClr val="1F2A37"/>
                 </a:solidFill>
               </a:rPr>
-              <a:t>• Press Run</a:t>
+              <a:t>• Names must be spelled exactly the same in both files</a:t>
             </a:r>
           </a:p>
         </p:txBody>
@@ -4794,6 +5274,133 @@
                 </a:solidFill>
               </a:rPr>
               <a:t>• By week 15 it is yours</a:t>
+            </a:r>
+          </a:p>
+        </p:txBody>
+      </p:sp>
+    </p:spTree>
+  </p:cSld>
+  <p:clrMapOvr>
+    <a:masterClrMapping/>
+  </p:clrMapOvr>
+</p:sld>
+</file>
+
+<file path=ppt/slides/slide20.xml><?xml version="1.0" encoding="utf-8"?>
+<p:sld xmlns:a="http://schemas.openxmlformats.org/drawingml/2006/main" xmlns:p="http://schemas.openxmlformats.org/presentationml/2006/main" xmlns:r="http://schemas.openxmlformats.org/officeDocument/2006/relationships">
+  <p:cSld>
+    <p:spTree>
+      <p:nvGrpSpPr>
+        <p:cNvPr id="1" name=""/>
+        <p:cNvGrpSpPr/>
+        <p:nvPr/>
+      </p:nvGrpSpPr>
+      <p:grpSpPr/>
+      <p:sp>
+        <p:nvSpPr>
+          <p:cNvPr id="2" name="Title 1"/>
+          <p:cNvSpPr>
+            <a:spLocks noGrp="1"/>
+          </p:cNvSpPr>
+          <p:nvPr>
+            <p:ph type="title"/>
+          </p:nvPr>
+        </p:nvSpPr>
+        <p:spPr/>
+        <p:txBody>
+          <a:bodyPr/>
+          <a:lstStyle/>
+          <a:p>
+            <a:r>
+              <a:rPr sz="3800" b="1">
+                <a:solidFill>
+                  <a:srgbClr val="1F2A37"/>
+                </a:solidFill>
+              </a:rPr>
+              <a:t>Your turn</a:t>
+            </a:r>
+          </a:p>
+        </p:txBody>
+      </p:sp>
+      <p:sp>
+        <p:nvSpPr>
+          <p:cNvPr id="3" name="TextBox 2"/>
+          <p:cNvSpPr txBox="1"/>
+          <p:nvPr/>
+        </p:nvSpPr>
+        <p:spPr>
+          <a:xfrm>
+            <a:off x="822960" y="1828800"/>
+            <a:ext cx="10515600" cy="4206240"/>
+          </a:xfrm>
+          <a:prstGeom prst="rect">
+            <a:avLst/>
+          </a:prstGeom>
+          <a:noFill/>
+        </p:spPr>
+        <p:txBody>
+          <a:bodyPr wrap="square">
+            <a:spAutoFit/>
+          </a:bodyPr>
+          <a:lstStyle/>
+          <a:p>
+            <a:pPr>
+              <a:spcAft>
+                <a:spcPts val="1400"/>
+              </a:spcAft>
+            </a:pPr>
+            <a:r>
+              <a:rPr sz="2800">
+                <a:solidFill>
+                  <a:srgbClr val="01AEFD"/>
+                </a:solidFill>
+              </a:rPr>
+              <a:t>Make it yours</a:t>
+            </a:r>
+          </a:p>
+          <a:p>
+            <a:pPr>
+              <a:spcAft>
+                <a:spcPts val="1400"/>
+              </a:spcAft>
+            </a:pPr>
+            <a:r>
+              <a:rPr sz="2400">
+                <a:solidFill>
+                  <a:srgbClr val="1F2A37"/>
+                </a:solidFill>
+              </a:rPr>
+              <a:t>• Change the title</a:t>
+            </a:r>
+          </a:p>
+          <a:p>
+            <a:pPr>
+              <a:spcAft>
+                <a:spcPts val="1400"/>
+              </a:spcAft>
+            </a:pPr>
+            <a:r>
+              <a:rPr sz="2400">
+                <a:solidFill>
+                  <a:srgbClr val="1F2A37"/>
+                </a:solidFill>
+              </a:rPr>
+              <a:t>• Change the colours</a:t>
+            </a:r>
+          </a:p>
+          <a:p>
+            <a:pPr>
+              <a:spcAft>
+                <a:spcPts val="1400"/>
+              </a:spcAft>
+            </a:pPr>
+            <a:r>
+              <a:rPr sz="2400">
+                <a:solidFill>
+                  <a:srgbClr val="1F2A37"/>
+                </a:solidFill>
+              </a:rPr>
+              <a:t>• Press Run</a:t>
             </a:r>
           </a:p>
         </p:txBody>
@@ -5018,7 +5625,7 @@
                 </a:solidFill>
                 <a:latin typeface="Consolas"/>
               </a:rPr>
-              <a:t>   1  </a:t>
+              <a:t>   3  </a:t>
             </a:r>
             <a:r>
               <a:rPr sz="1700">
@@ -5043,7 +5650,7 @@
                 </a:solidFill>
                 <a:latin typeface="Consolas"/>
               </a:rPr>
-              <a:t>   2  </a:t>
+              <a:t>   4  </a:t>
             </a:r>
             <a:r>
               <a:rPr sz="1700">
@@ -5068,7 +5675,7 @@
                 </a:solidFill>
                 <a:latin typeface="Consolas"/>
               </a:rPr>
-              <a:t>   3  </a:t>
+              <a:t>   5  </a:t>
             </a:r>
             <a:r>
               <a:rPr sz="1700">
@@ -5093,7 +5700,7 @@
                 </a:solidFill>
                 <a:latin typeface="Consolas"/>
               </a:rPr>
-              <a:t>   4  </a:t>
+              <a:t>   6  </a:t>
             </a:r>
             <a:r>
               <a:rPr sz="1700">
@@ -5118,7 +5725,7 @@
                 </a:solidFill>
                 <a:latin typeface="Consolas"/>
               </a:rPr>
-              <a:t>   5  </a:t>
+              <a:t>   7  </a:t>
             </a:r>
             <a:r>
               <a:rPr sz="1700">
@@ -5225,7 +5832,7 @@
                 </a:solidFill>
                 <a:latin typeface="Consolas"/>
               </a:rPr>
-              <a:t>   6  </a:t>
+              <a:t>   8  </a:t>
             </a:r>
             <a:r>
               <a:rPr sz="1700">
@@ -5332,7 +5939,7 @@
                 </a:solidFill>
                 <a:latin typeface="Consolas"/>
               </a:rPr>
-              <a:t>   7  </a:t>
+              <a:t>   9  </a:t>
             </a:r>
             <a:r>
               <a:rPr sz="1700">
@@ -5357,7 +5964,7 @@
                 </a:solidFill>
                 <a:latin typeface="Consolas"/>
               </a:rPr>
-              <a:t>   8  </a:t>
+              <a:t>  10  </a:t>
             </a:r>
             <a:r>
               <a:rPr sz="1700">
@@ -5382,7 +5989,7 @@
                 </a:solidFill>
                 <a:latin typeface="Consolas"/>
               </a:rPr>
-              <a:t>   9  </a:t>
+              <a:t>  11  </a:t>
             </a:r>
             <a:r>
               <a:rPr sz="1700">
@@ -5407,7 +6014,7 @@
                 </a:solidFill>
                 <a:latin typeface="Consolas"/>
               </a:rPr>
-              <a:t>  10  </a:t>
+              <a:t>  12  </a:t>
             </a:r>
             <a:r>
               <a:rPr sz="1700">
@@ -5514,7 +6121,7 @@
                 </a:solidFill>
                 <a:latin typeface="Consolas"/>
               </a:rPr>
-              <a:t>  11  </a:t>
+              <a:t>  13  </a:t>
             </a:r>
             <a:r>
               <a:rPr sz="1700">
@@ -5567,7 +6174,7 @@
                   <a:srgbClr val="1F2A37"/>
                 </a:solidFill>
               </a:rPr>
-              <a:t>Three files</a:t>
+              <a:t>You make the other files yourself</a:t>
             </a:r>
           </a:p>
         </p:txBody>
@@ -5600,12 +6207,27 @@
               </a:spcAft>
             </a:pPr>
             <a:r>
+              <a:rPr sz="2800">
+                <a:solidFill>
+                  <a:srgbClr val="01AEFD"/>
+                </a:solidFill>
+              </a:rPr>
+              <a:t>A project starts with just index.html</a:t>
+            </a:r>
+          </a:p>
+          <a:p>
+            <a:pPr>
+              <a:spcAft>
+                <a:spcPts val="1400"/>
+              </a:spcAft>
+            </a:pPr>
+            <a:r>
               <a:rPr sz="2400">
                 <a:solidFill>
                   <a:srgbClr val="1F2A37"/>
                 </a:solidFill>
               </a:rPr>
-              <a:t>• index.html - the boxes</a:t>
+              <a:t>• + File in the Files panel</a:t>
             </a:r>
           </a:p>
           <a:p>
@@ -5620,7 +6242,7 @@
                   <a:srgbClr val="1F2A37"/>
                 </a:solidFill>
               </a:rPr>
-              <a:t>• style.css - what they look like</a:t>
+              <a:t>• style.css - what things look like</a:t>
             </a:r>
           </a:p>
           <a:p>
@@ -5635,7 +6257,22 @@
                   <a:srgbClr val="1F2A37"/>
                 </a:solidFill>
               </a:rPr>
-              <a:t>• script.js - what they do</a:t>
+              <a:t>• script.js - what things do</a:t>
+            </a:r>
+          </a:p>
+          <a:p>
+            <a:pPr>
+              <a:spcAft>
+                <a:spcPts val="1400"/>
+              </a:spcAft>
+            </a:pPr>
+            <a:r>
+              <a:rPr sz="2400">
+                <a:solidFill>
+                  <a:srgbClr val="1F2A37"/>
+                </a:solidFill>
+              </a:rPr>
+              <a:t>• Making the file is not enough. The page has to be told.</a:t>
             </a:r>
           </a:p>
         </p:txBody>
@@ -5694,7 +6331,7 @@
                   <a:srgbClr val="01AEFD"/>
                 </a:solidFill>
               </a:rPr>
-              <a:t>Type this into style.css  (1 of 4)</a:t>
+              <a:t>Type this into index.html</a:t>
             </a:r>
           </a:p>
         </p:txBody>
@@ -5742,7 +6379,7 @@
                 </a:solidFill>
                 <a:latin typeface="Consolas"/>
               </a:rPr>
-              <a:t>body {</a:t>
+              <a:t>&lt;link rel="stylesheet" href="style.css"&gt;</a:t>
             </a:r>
           </a:p>
           <a:p>
@@ -5767,107 +6404,7 @@
                 </a:solidFill>
                 <a:latin typeface="Consolas"/>
               </a:rPr>
-              <a:t>  margin: 0;</a:t>
-            </a:r>
-          </a:p>
-          <a:p>
-            <a:pPr>
-              <a:spcAft>
-                <a:spcPts val="0"/>
-              </a:spcAft>
-            </a:pPr>
-            <a:r>
-              <a:rPr sz="1700">
-                <a:solidFill>
-                  <a:srgbClr val="6D8C97"/>
-                </a:solidFill>
-                <a:latin typeface="Consolas"/>
-              </a:rPr>
-              <a:t>   3  </a:t>
-            </a:r>
-            <a:r>
-              <a:rPr sz="1700">
-                <a:solidFill>
-                  <a:srgbClr val="7FE0A0"/>
-                </a:solidFill>
-                <a:latin typeface="Consolas"/>
-              </a:rPr>
-              <a:t>  font-family: Arial, Helvetica, sans-serif;</a:t>
-            </a:r>
-          </a:p>
-          <a:p>
-            <a:pPr>
-              <a:spcAft>
-                <a:spcPts val="0"/>
-              </a:spcAft>
-            </a:pPr>
-            <a:r>
-              <a:rPr sz="1700">
-                <a:solidFill>
-                  <a:srgbClr val="6D8C97"/>
-                </a:solidFill>
-                <a:latin typeface="Consolas"/>
-              </a:rPr>
-              <a:t>   4  </a:t>
-            </a:r>
-            <a:r>
-              <a:rPr sz="1700">
-                <a:solidFill>
-                  <a:srgbClr val="7FE0A0"/>
-                </a:solidFill>
-                <a:latin typeface="Consolas"/>
-              </a:rPr>
-              <a:t>  background: #eef2f7;</a:t>
-            </a:r>
-          </a:p>
-          <a:p>
-            <a:pPr>
-              <a:spcAft>
-                <a:spcPts val="0"/>
-              </a:spcAft>
-            </a:pPr>
-            <a:r>
-              <a:rPr sz="1700">
-                <a:solidFill>
-                  <a:srgbClr val="6D8C97"/>
-                </a:solidFill>
-                <a:latin typeface="Consolas"/>
-              </a:rPr>
-              <a:t>   5  </a:t>
-            </a:r>
-            <a:r>
-              <a:rPr sz="1700">
-                <a:solidFill>
-                  <a:srgbClr val="7FE0A0"/>
-                </a:solidFill>
-                <a:latin typeface="Consolas"/>
-              </a:rPr>
-              <a:t>  color: #1f2a37;</a:t>
-            </a:r>
-          </a:p>
-          <a:p>
-            <a:pPr>
-              <a:spcAft>
-                <a:spcPts val="0"/>
-              </a:spcAft>
-            </a:pPr>
-            <a:r>
-              <a:rPr sz="1700">
-                <a:solidFill>
-                  <a:srgbClr val="6D8C97"/>
-                </a:solidFill>
-                <a:latin typeface="Consolas"/>
-              </a:rPr>
-              <a:t>   6  </a:t>
-            </a:r>
-            <a:r>
-              <a:rPr sz="1700">
-                <a:solidFill>
-                  <a:srgbClr val="7FE0A0"/>
-                </a:solidFill>
-                <a:latin typeface="Consolas"/>
-              </a:rPr>
-              <a:t>}</a:t>
+              <a:t> </a:t>
             </a:r>
           </a:p>
         </p:txBody>

--- a/ai101/slides/week-01.pptx
+++ b/ai101/slides/week-01.pptx
@@ -5020,6 +5020,131 @@
                 <a:latin typeface="Consolas"/>
               </a:rPr>
               <a:t>console.log('My AI companion is starting up.');</a:t>
+            </a:r>
+          </a:p>
+          <a:p>
+            <a:pPr>
+              <a:spcAft>
+                <a:spcPts val="0"/>
+              </a:spcAft>
+            </a:pPr>
+            <a:r>
+              <a:rPr sz="1700">
+                <a:solidFill>
+                  <a:srgbClr val="6D8C97"/>
+                </a:solidFill>
+                <a:latin typeface="Consolas"/>
+              </a:rPr>
+              <a:t>   3  </a:t>
+            </a:r>
+            <a:r>
+              <a:rPr sz="1700">
+                <a:solidFill>
+                  <a:srgbClr val="7FE0A0"/>
+                </a:solidFill>
+                <a:latin typeface="Consolas"/>
+              </a:rPr>
+              <a:t> </a:t>
+            </a:r>
+          </a:p>
+          <a:p>
+            <a:pPr>
+              <a:spcAft>
+                <a:spcPts val="0"/>
+              </a:spcAft>
+            </a:pPr>
+            <a:r>
+              <a:rPr sz="1700">
+                <a:solidFill>
+                  <a:srgbClr val="6D8C97"/>
+                </a:solidFill>
+                <a:latin typeface="Consolas"/>
+              </a:rPr>
+              <a:t>   4  </a:t>
+            </a:r>
+            <a:r>
+              <a:rPr sz="1700">
+                <a:solidFill>
+                  <a:srgbClr val="7FE0A0"/>
+                </a:solidFill>
+                <a:latin typeface="Consolas"/>
+              </a:rPr>
+              <a:t>// Can this script see the page yet? Down here, yes.</a:t>
+            </a:r>
+          </a:p>
+          <a:p>
+            <a:pPr>
+              <a:spcAft>
+                <a:spcPts val="0"/>
+              </a:spcAft>
+            </a:pPr>
+            <a:r>
+              <a:rPr sz="1700">
+                <a:solidFill>
+                  <a:srgbClr val="6D8C97"/>
+                </a:solidFill>
+                <a:latin typeface="Consolas"/>
+              </a:rPr>
+              <a:t>   5  </a:t>
+            </a:r>
+            <a:r>
+              <a:rPr sz="1700">
+                <a:solidFill>
+                  <a:srgbClr val="7FE0A0"/>
+                </a:solidFill>
+                <a:latin typeface="Consolas"/>
+              </a:rPr>
+              <a:t>// Move the &lt;script&gt; tag to the TOP of index.html and this prints false,</a:t>
+            </a:r>
+          </a:p>
+          <a:p>
+            <a:pPr>
+              <a:spcAft>
+                <a:spcPts val="0"/>
+              </a:spcAft>
+            </a:pPr>
+            <a:r>
+              <a:rPr sz="1700">
+                <a:solidFill>
+                  <a:srgbClr val="6D8C97"/>
+                </a:solidFill>
+                <a:latin typeface="Consolas"/>
+              </a:rPr>
+              <a:t>   6  </a:t>
+            </a:r>
+            <a:r>
+              <a:rPr sz="1700">
+                <a:solidFill>
+                  <a:srgbClr val="7FE0A0"/>
+                </a:solidFill>
+                <a:latin typeface="Consolas"/>
+              </a:rPr>
+              <a:t>// because the boxes have not been made yet. That is why it goes last.</a:t>
+            </a:r>
+          </a:p>
+          <a:p>
+            <a:pPr>
+              <a:spcAft>
+                <a:spcPts val="0"/>
+              </a:spcAft>
+            </a:pPr>
+            <a:r>
+              <a:rPr sz="1700">
+                <a:solidFill>
+                  <a:srgbClr val="6D8C97"/>
+                </a:solidFill>
+                <a:latin typeface="Consolas"/>
+              </a:rPr>
+              <a:t>   7  </a:t>
+            </a:r>
+            <a:r>
+              <a:rPr sz="1700">
+                <a:solidFill>
+                  <a:srgbClr val="7FE0A0"/>
+                </a:solidFill>
+                <a:latin typeface="Consolas"/>
+              </a:rPr>
+              <a:t>console.log('Can I see the chat box?', document.getElementById('chat') !== null);</a:t>
             </a:r>
           </a:p>
         </p:txBody>

--- a/ai101/slides/week-01.pptx
+++ b/ai101/slides/week-01.pptx
@@ -3483,21 +3483,6 @@
               <a:t>A small paragraph under the title. class="tag" lets CSS make it grey and small.</a:t>
             </a:r>
           </a:p>
-          <a:p>
-            <a:pPr>
-              <a:spcBef>
-                <a:spcPts val="1800"/>
-              </a:spcBef>
-            </a:pPr>
-            <a:r>
-              <a:rPr sz="1500">
-                <a:solidFill>
-                  <a:srgbClr val="6D8C97"/>
-                </a:solidFill>
-              </a:rPr>
-              <a:t>covers: The &lt;p&gt; tag</a:t>
-            </a:r>
-          </a:p>
         </p:txBody>
       </p:sp>
     </p:spTree>
@@ -3880,21 +3865,6 @@
               <a:t>An empty &lt;div&gt; with id="chat". Empty for now - your messages will fill it later.</a:t>
             </a:r>
           </a:p>
-          <a:p>
-            <a:pPr>
-              <a:spcBef>
-                <a:spcPts val="1800"/>
-              </a:spcBef>
-            </a:pPr>
-            <a:r>
-              <a:rPr sz="1500">
-                <a:solidFill>
-                  <a:srgbClr val="6D8C97"/>
-                </a:solidFill>
-              </a:rPr>
-              <a:t>covers: The &lt;div&gt; tag</a:t>
-            </a:r>
-          </a:p>
         </p:txBody>
       </p:sp>
     </p:spTree>
@@ -4151,21 +4121,6 @@
               <a:t>Opens a &lt;form&gt; with id="composer": the text box and Send button belong together.</a:t>
             </a:r>
           </a:p>
-          <a:p>
-            <a:pPr>
-              <a:spcBef>
-                <a:spcPts val="1800"/>
-              </a:spcBef>
-            </a:pPr>
-            <a:r>
-              <a:rPr sz="1500">
-                <a:solidFill>
-                  <a:srgbClr val="6D8C97"/>
-                </a:solidFill>
-              </a:rPr>
-              <a:t>covers: The &lt;form&gt; tag</a:t>
-            </a:r>
-          </a:p>
         </p:txBody>
       </p:sp>
     </p:spTree>
@@ -4422,21 +4377,6 @@
               <a:t>The &lt;input&gt; the student types in. placeholder is the faint hint; autocomplete off hides suggestions.</a:t>
             </a:r>
           </a:p>
-          <a:p>
-            <a:pPr>
-              <a:spcBef>
-                <a:spcPts val="1800"/>
-              </a:spcBef>
-            </a:pPr>
-            <a:r>
-              <a:rPr sz="1500">
-                <a:solidFill>
-                  <a:srgbClr val="6D8C97"/>
-                </a:solidFill>
-              </a:rPr>
-              <a:t>covers: The &lt;input&gt; tag</a:t>
-            </a:r>
-          </a:p>
         </p:txBody>
       </p:sp>
     </p:spTree>
@@ -4835,21 +4775,6 @@
               <a:t>The Send &lt;button&gt;. type="submit" means clicking it (or pressing Enter) sends the form.</a:t>
             </a:r>
           </a:p>
-          <a:p>
-            <a:pPr>
-              <a:spcBef>
-                <a:spcPts val="1800"/>
-              </a:spcBef>
-            </a:pPr>
-            <a:r>
-              <a:rPr sz="1500">
-                <a:solidFill>
-                  <a:srgbClr val="6D8C97"/>
-                </a:solidFill>
-              </a:rPr>
-              <a:t>covers: The &lt;button&gt; tag</a:t>
-            </a:r>
-          </a:p>
         </p:txBody>
       </p:sp>
     </p:spTree>
@@ -5500,21 +5425,6 @@
               <a:t>Loads style.css so the page uses your styles. rel says it is a stylesheet; href is the filename.</a:t>
             </a:r>
           </a:p>
-          <a:p>
-            <a:pPr>
-              <a:spcBef>
-                <a:spcPts val="1800"/>
-              </a:spcBef>
-            </a:pPr>
-            <a:r>
-              <a:rPr sz="1500">
-                <a:solidFill>
-                  <a:srgbClr val="6D8C97"/>
-                </a:solidFill>
-              </a:rPr>
-              <a:t>covers: The &lt;link&gt; tag</a:t>
-            </a:r>
-          </a:p>
         </p:txBody>
       </p:sp>
     </p:spTree>
@@ -5883,21 +5793,6 @@
               <a:t>Starts a rule for &lt;body&gt;, the whole page. Everything between { and } styles it.</a:t>
             </a:r>
           </a:p>
-          <a:p>
-            <a:pPr>
-              <a:spcBef>
-                <a:spcPts val="1800"/>
-              </a:spcBef>
-            </a:pPr>
-            <a:r>
-              <a:rPr sz="1500">
-                <a:solidFill>
-                  <a:srgbClr val="6D8C97"/>
-                </a:solidFill>
-              </a:rPr>
-              <a:t>covers: A CSS rule</a:t>
-            </a:r>
-          </a:p>
         </p:txBody>
       </p:sp>
     </p:spTree>
@@ -6281,21 +6176,6 @@
               <a:t>Removes the browser's default margin so nothing is pushed off the edge.</a:t>
             </a:r>
           </a:p>
-          <a:p>
-            <a:pPr>
-              <a:spcBef>
-                <a:spcPts val="1800"/>
-              </a:spcBef>
-            </a:pPr>
-            <a:r>
-              <a:rPr sz="1500">
-                <a:solidFill>
-                  <a:srgbClr val="6D8C97"/>
-                </a:solidFill>
-              </a:rPr>
-              <a:t>covers: margin</a:t>
-            </a:r>
-          </a:p>
         </p:txBody>
       </p:sp>
     </p:spTree>
@@ -6552,21 +6432,6 @@
               <a:t>Sets the font. The browser uses the first one it has.</a:t>
             </a:r>
           </a:p>
-          <a:p>
-            <a:pPr>
-              <a:spcBef>
-                <a:spcPts val="1800"/>
-              </a:spcBef>
-            </a:pPr>
-            <a:r>
-              <a:rPr sz="1500">
-                <a:solidFill>
-                  <a:srgbClr val="6D8C97"/>
-                </a:solidFill>
-              </a:rPr>
-              <a:t>covers: font-family</a:t>
-            </a:r>
-          </a:p>
         </p:txBody>
       </p:sp>
     </p:spTree>
@@ -6808,21 +6673,6 @@
               <a:t>The page's background colour, a soft blue-grey.</a:t>
             </a:r>
           </a:p>
-          <a:p>
-            <a:pPr>
-              <a:spcBef>
-                <a:spcPts val="1800"/>
-              </a:spcBef>
-            </a:pPr>
-            <a:r>
-              <a:rPr sz="1500">
-                <a:solidFill>
-                  <a:srgbClr val="6D8C97"/>
-                </a:solidFill>
-              </a:rPr>
-              <a:t>covers: background</a:t>
-            </a:r>
-          </a:p>
         </p:txBody>
       </p:sp>
     </p:spTree>
@@ -7064,21 +6914,6 @@
               <a:t>The default text colour, a dark near-black.</a:t>
             </a:r>
           </a:p>
-          <a:p>
-            <a:pPr>
-              <a:spcBef>
-                <a:spcPts val="1800"/>
-              </a:spcBef>
-            </a:pPr>
-            <a:r>
-              <a:rPr sz="1500">
-                <a:solidFill>
-                  <a:srgbClr val="6D8C97"/>
-                </a:solidFill>
-              </a:rPr>
-              <a:t>covers: color</a:t>
-            </a:r>
-          </a:p>
         </p:txBody>
       </p:sp>
     </p:spTree>
@@ -7331,21 +7166,6 @@
               <a:t>Starts a rule for .app - the &lt;main&gt; box we labelled earlier.</a:t>
             </a:r>
           </a:p>
-          <a:p>
-            <a:pPr>
-              <a:spcBef>
-                <a:spcPts val="1800"/>
-              </a:spcBef>
-            </a:pPr>
-            <a:r>
-              <a:rPr sz="1500">
-                <a:solidFill>
-                  <a:srgbClr val="6D8C97"/>
-                </a:solidFill>
-              </a:rPr>
-              <a:t>covers: A CSS rule</a:t>
-            </a:r>
-          </a:p>
         </p:txBody>
       </p:sp>
     </p:spTree>
@@ -7732,21 +7552,6 @@
               <a:t>It never grows wider than 620px, so lines stay easy to read.</a:t>
             </a:r>
           </a:p>
-          <a:p>
-            <a:pPr>
-              <a:spcBef>
-                <a:spcPts val="1800"/>
-              </a:spcBef>
-            </a:pPr>
-            <a:r>
-              <a:rPr sz="1500">
-                <a:solidFill>
-                  <a:srgbClr val="6D8C97"/>
-                </a:solidFill>
-              </a:rPr>
-              <a:t>covers: max-width</a:t>
-            </a:r>
-          </a:p>
         </p:txBody>
       </p:sp>
     </p:spTree>
@@ -7873,21 +7678,6 @@
               <a:t>margin: 0 auto centres it: no top/bottom margin, equal left/right.</a:t>
             </a:r>
           </a:p>
-          <a:p>
-            <a:pPr>
-              <a:spcBef>
-                <a:spcPts val="1800"/>
-              </a:spcBef>
-            </a:pPr>
-            <a:r>
-              <a:rPr sz="1500">
-                <a:solidFill>
-                  <a:srgbClr val="6D8C97"/>
-                </a:solidFill>
-              </a:rPr>
-              <a:t>covers: margin</a:t>
-            </a:r>
-          </a:p>
         </p:txBody>
       </p:sp>
     </p:spTree>
@@ -8129,21 +7919,6 @@
               <a:t>Space inside the box so text is not jammed against the edge.</a:t>
             </a:r>
           </a:p>
-          <a:p>
-            <a:pPr>
-              <a:spcBef>
-                <a:spcPts val="1800"/>
-              </a:spcBef>
-            </a:pPr>
-            <a:r>
-              <a:rPr sz="1500">
-                <a:solidFill>
-                  <a:srgbClr val="6D8C97"/>
-                </a:solidFill>
-              </a:rPr>
-              <a:t>covers: padding</a:t>
-            </a:r>
-          </a:p>
         </p:txBody>
       </p:sp>
     </p:spTree>
@@ -8511,21 +8286,6 @@
               <a:t>Styles the &lt;h1&gt; inside .top: no margin except a little below, and a 26px size. (A one-line rule.)</a:t>
             </a:r>
           </a:p>
-          <a:p>
-            <a:pPr>
-              <a:spcBef>
-                <a:spcPts val="1800"/>
-              </a:spcBef>
-            </a:pPr>
-            <a:r>
-              <a:rPr sz="1500">
-                <a:solidFill>
-                  <a:srgbClr val="6D8C97"/>
-                </a:solidFill>
-              </a:rPr>
-              <a:t>covers: margin, font-size</a:t>
-            </a:r>
-          </a:p>
         </p:txBody>
       </p:sp>
     </p:spTree>
@@ -8652,21 +8412,6 @@
               <a:t>Styles the .tag paragraph: spaced below, grey, and small.</a:t>
             </a:r>
           </a:p>
-          <a:p>
-            <a:pPr>
-              <a:spcBef>
-                <a:spcPts val="1800"/>
-              </a:spcBef>
-            </a:pPr>
-            <a:r>
-              <a:rPr sz="1500">
-                <a:solidFill>
-                  <a:srgbClr val="6D8C97"/>
-                </a:solidFill>
-              </a:rPr>
-              <a:t>covers: margin, color, font-size</a:t>
-            </a:r>
-          </a:p>
         </p:txBody>
       </p:sp>
     </p:spTree>
@@ -8793,21 +8538,6 @@
               <a:t>Starts a rule for the .chat box.</a:t>
             </a:r>
           </a:p>
-          <a:p>
-            <a:pPr>
-              <a:spcBef>
-                <a:spcPts val="1800"/>
-              </a:spcBef>
-            </a:pPr>
-            <a:r>
-              <a:rPr sz="1500">
-                <a:solidFill>
-                  <a:srgbClr val="6D8C97"/>
-                </a:solidFill>
-              </a:rPr>
-              <a:t>covers: A CSS rule</a:t>
-            </a:r>
-          </a:p>
         </p:txBody>
       </p:sp>
     </p:spTree>
@@ -9049,21 +8779,6 @@
               <a:t>Opens &lt;main&gt;, the box that holds everything. class="app" is a label CSS can target.</a:t>
             </a:r>
           </a:p>
-          <a:p>
-            <a:pPr>
-              <a:spcBef>
-                <a:spcPts val="1800"/>
-              </a:spcBef>
-            </a:pPr>
-            <a:r>
-              <a:rPr sz="1500">
-                <a:solidFill>
-                  <a:srgbClr val="6D8C97"/>
-                </a:solidFill>
-              </a:rPr>
-              <a:t>covers: The &lt;main&gt; tag</a:t>
-            </a:r>
-          </a:p>
         </p:txBody>
       </p:sp>
     </p:spTree>
@@ -9190,21 +8905,6 @@
               <a:t>Keeps it at least 260px tall so it reads as a chat area even when empty.</a:t>
             </a:r>
           </a:p>
-          <a:p>
-            <a:pPr>
-              <a:spcBef>
-                <a:spcPts val="1800"/>
-              </a:spcBef>
-            </a:pPr>
-            <a:r>
-              <a:rPr sz="1500">
-                <a:solidFill>
-                  <a:srgbClr val="6D8C97"/>
-                </a:solidFill>
-              </a:rPr>
-              <a:t>covers: min-height</a:t>
-            </a:r>
-          </a:p>
         </p:txBody>
       </p:sp>
     </p:spTree>
@@ -9331,21 +9031,6 @@
               <a:t>Space inside the chat box.</a:t>
             </a:r>
           </a:p>
-          <a:p>
-            <a:pPr>
-              <a:spcBef>
-                <a:spcPts val="1800"/>
-              </a:spcBef>
-            </a:pPr>
-            <a:r>
-              <a:rPr sz="1500">
-                <a:solidFill>
-                  <a:srgbClr val="6D8C97"/>
-                </a:solidFill>
-              </a:rPr>
-              <a:t>covers: padding</a:t>
-            </a:r>
-          </a:p>
         </p:txBody>
       </p:sp>
     </p:spTree>
@@ -9472,21 +9157,6 @@
               <a:t>A white background so messages stand out from the page.</a:t>
             </a:r>
           </a:p>
-          <a:p>
-            <a:pPr>
-              <a:spcBef>
-                <a:spcPts val="1800"/>
-              </a:spcBef>
-            </a:pPr>
-            <a:r>
-              <a:rPr sz="1500">
-                <a:solidFill>
-                  <a:srgbClr val="6D8C97"/>
-                </a:solidFill>
-              </a:rPr>
-              <a:t>covers: background</a:t>
-            </a:r>
-          </a:p>
         </p:txBody>
       </p:sp>
     </p:spTree>
@@ -9728,21 +9398,6 @@
               <a:t>A thin grey line around it.</a:t>
             </a:r>
           </a:p>
-          <a:p>
-            <a:pPr>
-              <a:spcBef>
-                <a:spcPts val="1800"/>
-              </a:spcBef>
-            </a:pPr>
-            <a:r>
-              <a:rPr sz="1500">
-                <a:solidFill>
-                  <a:srgbClr val="6D8C97"/>
-                </a:solidFill>
-              </a:rPr>
-              <a:t>covers: border</a:t>
-            </a:r>
-          </a:p>
         </p:txBody>
       </p:sp>
     </p:spTree>
@@ -9984,21 +9639,6 @@
               <a:t>Rounds the corners a little.</a:t>
             </a:r>
           </a:p>
-          <a:p>
-            <a:pPr>
-              <a:spcBef>
-                <a:spcPts val="1800"/>
-              </a:spcBef>
-            </a:pPr>
-            <a:r>
-              <a:rPr sz="1500">
-                <a:solidFill>
-                  <a:srgbClr val="6D8C97"/>
-                </a:solidFill>
-              </a:rPr>
-              <a:t>covers: border-radius</a:t>
-            </a:r>
-          </a:p>
         </p:txBody>
       </p:sp>
     </p:spTree>
@@ -10611,21 +10251,6 @@
               <a:t>Lays the form's children in a row with a small gap and a little space above. display: flex is the key part.</a:t>
             </a:r>
           </a:p>
-          <a:p>
-            <a:pPr>
-              <a:spcBef>
-                <a:spcPts val="1800"/>
-              </a:spcBef>
-            </a:pPr>
-            <a:r>
-              <a:rPr sz="1500">
-                <a:solidFill>
-                  <a:srgbClr val="6D8C97"/>
-                </a:solidFill>
-              </a:rPr>
-              <a:t>covers: display: flex, gap</a:t>
-            </a:r>
-          </a:p>
         </p:txBody>
       </p:sp>
     </p:spTree>
@@ -10752,21 +10377,6 @@
               <a:t>Starts a rule for the input inside .composer.</a:t>
             </a:r>
           </a:p>
-          <a:p>
-            <a:pPr>
-              <a:spcBef>
-                <a:spcPts val="1800"/>
-              </a:spcBef>
-            </a:pPr>
-            <a:r>
-              <a:rPr sz="1500">
-                <a:solidFill>
-                  <a:srgbClr val="6D8C97"/>
-                </a:solidFill>
-              </a:rPr>
-              <a:t>covers: A CSS rule</a:t>
-            </a:r>
-          </a:p>
         </p:txBody>
       </p:sp>
     </p:spTree>
@@ -11023,21 +10633,6 @@
               <a:t>flex: 1 makes the text box stretch to fill the space the button leaves.</a:t>
             </a:r>
           </a:p>
-          <a:p>
-            <a:pPr>
-              <a:spcBef>
-                <a:spcPts val="1800"/>
-              </a:spcBef>
-            </a:pPr>
-            <a:r>
-              <a:rPr sz="1500">
-                <a:solidFill>
-                  <a:srgbClr val="6D8C97"/>
-                </a:solidFill>
-              </a:rPr>
-              <a:t>covers: flex: 1</a:t>
-            </a:r>
-          </a:p>
         </p:txBody>
       </p:sp>
     </p:spTree>
@@ -11164,21 +10759,6 @@
               <a:t>Space inside the text box.</a:t>
             </a:r>
           </a:p>
-          <a:p>
-            <a:pPr>
-              <a:spcBef>
-                <a:spcPts val="1800"/>
-              </a:spcBef>
-            </a:pPr>
-            <a:r>
-              <a:rPr sz="1500">
-                <a:solidFill>
-                  <a:srgbClr val="6D8C97"/>
-                </a:solidFill>
-              </a:rPr>
-              <a:t>covers: padding</a:t>
-            </a:r>
-          </a:p>
         </p:txBody>
       </p:sp>
     </p:spTree>
@@ -11305,21 +10885,6 @@
               <a:t>A thin grey border to match the chat box.</a:t>
             </a:r>
           </a:p>
-          <a:p>
-            <a:pPr>
-              <a:spcBef>
-                <a:spcPts val="1800"/>
-              </a:spcBef>
-            </a:pPr>
-            <a:r>
-              <a:rPr sz="1500">
-                <a:solidFill>
-                  <a:srgbClr val="6D8C97"/>
-                </a:solidFill>
-              </a:rPr>
-              <a:t>covers: border</a:t>
-            </a:r>
-          </a:p>
         </p:txBody>
       </p:sp>
     </p:spTree>
@@ -11446,21 +11011,6 @@
               <a:t>Rounded corners.</a:t>
             </a:r>
           </a:p>
-          <a:p>
-            <a:pPr>
-              <a:spcBef>
-                <a:spcPts val="1800"/>
-              </a:spcBef>
-            </a:pPr>
-            <a:r>
-              <a:rPr sz="1500">
-                <a:solidFill>
-                  <a:srgbClr val="6D8C97"/>
-                </a:solidFill>
-              </a:rPr>
-              <a:t>covers: border-radius</a:t>
-            </a:r>
-          </a:p>
         </p:txBody>
       </p:sp>
     </p:spTree>
@@ -11587,21 +11137,6 @@
               <a:t>Comfortable text size.</a:t>
             </a:r>
           </a:p>
-          <a:p>
-            <a:pPr>
-              <a:spcBef>
-                <a:spcPts val="1800"/>
-              </a:spcBef>
-            </a:pPr>
-            <a:r>
-              <a:rPr sz="1500">
-                <a:solidFill>
-                  <a:srgbClr val="6D8C97"/>
-                </a:solidFill>
-              </a:rPr>
-              <a:t>covers: font-size</a:t>
-            </a:r>
-          </a:p>
         </p:txBody>
       </p:sp>
     </p:spTree>
@@ -11854,21 +11389,6 @@
               <a:t>Starts a rule for the button inside .composer.</a:t>
             </a:r>
           </a:p>
-          <a:p>
-            <a:pPr>
-              <a:spcBef>
-                <a:spcPts val="1800"/>
-              </a:spcBef>
-            </a:pPr>
-            <a:r>
-              <a:rPr sz="1500">
-                <a:solidFill>
-                  <a:srgbClr val="6D8C97"/>
-                </a:solidFill>
-              </a:rPr>
-              <a:t>covers: A CSS rule</a:t>
-            </a:r>
-          </a:p>
         </p:txBody>
       </p:sp>
     </p:spTree>
@@ -11995,21 +11515,6 @@
               <a:t>Opens &lt;header&gt;, the top strip. It closes a few lines down.</a:t>
             </a:r>
           </a:p>
-          <a:p>
-            <a:pPr>
-              <a:spcBef>
-                <a:spcPts val="1800"/>
-              </a:spcBef>
-            </a:pPr>
-            <a:r>
-              <a:rPr sz="1500">
-                <a:solidFill>
-                  <a:srgbClr val="6D8C97"/>
-                </a:solidFill>
-              </a:rPr>
-              <a:t>covers: The &lt;header&gt; tag</a:t>
-            </a:r>
-          </a:p>
         </p:txBody>
       </p:sp>
     </p:spTree>
@@ -12136,21 +11641,6 @@
               <a:t>Padding to make the button a comfortable size to tap.</a:t>
             </a:r>
           </a:p>
-          <a:p>
-            <a:pPr>
-              <a:spcBef>
-                <a:spcPts val="1800"/>
-              </a:spcBef>
-            </a:pPr>
-            <a:r>
-              <a:rPr sz="1500">
-                <a:solidFill>
-                  <a:srgbClr val="6D8C97"/>
-                </a:solidFill>
-              </a:rPr>
-              <a:t>covers: padding</a:t>
-            </a:r>
-          </a:p>
         </p:txBody>
       </p:sp>
     </p:spTree>
@@ -12277,21 +11767,6 @@
               <a:t>border: 0 removes the default button outline.</a:t>
             </a:r>
           </a:p>
-          <a:p>
-            <a:pPr>
-              <a:spcBef>
-                <a:spcPts val="1800"/>
-              </a:spcBef>
-            </a:pPr>
-            <a:r>
-              <a:rPr sz="1500">
-                <a:solidFill>
-                  <a:srgbClr val="6D8C97"/>
-                </a:solidFill>
-              </a:rPr>
-              <a:t>covers: border</a:t>
-            </a:r>
-          </a:p>
         </p:txBody>
       </p:sp>
     </p:spTree>
@@ -12418,21 +11893,6 @@
               <a:t>Rounded corners.</a:t>
             </a:r>
           </a:p>
-          <a:p>
-            <a:pPr>
-              <a:spcBef>
-                <a:spcPts val="1800"/>
-              </a:spcBef>
-            </a:pPr>
-            <a:r>
-              <a:rPr sz="1500">
-                <a:solidFill>
-                  <a:srgbClr val="6D8C97"/>
-                </a:solidFill>
-              </a:rPr>
-              <a:t>covers: border-radius</a:t>
-            </a:r>
-          </a:p>
         </p:txBody>
       </p:sp>
     </p:spTree>
@@ -12559,21 +12019,6 @@
               <a:t>The brand blue as its background.</a:t>
             </a:r>
           </a:p>
-          <a:p>
-            <a:pPr>
-              <a:spcBef>
-                <a:spcPts val="1800"/>
-              </a:spcBef>
-            </a:pPr>
-            <a:r>
-              <a:rPr sz="1500">
-                <a:solidFill>
-                  <a:srgbClr val="6D8C97"/>
-                </a:solidFill>
-              </a:rPr>
-              <a:t>covers: background</a:t>
-            </a:r>
-          </a:p>
         </p:txBody>
       </p:sp>
     </p:spTree>
@@ -12700,21 +12145,6 @@
               <a:t>White text on the blue.</a:t>
             </a:r>
           </a:p>
-          <a:p>
-            <a:pPr>
-              <a:spcBef>
-                <a:spcPts val="1800"/>
-              </a:spcBef>
-            </a:pPr>
-            <a:r>
-              <a:rPr sz="1500">
-                <a:solidFill>
-                  <a:srgbClr val="6D8C97"/>
-                </a:solidFill>
-              </a:rPr>
-              <a:t>covers: color</a:t>
-            </a:r>
-          </a:p>
         </p:txBody>
       </p:sp>
     </p:spTree>
@@ -12841,21 +12271,6 @@
               <a:t>Readable text size.</a:t>
             </a:r>
           </a:p>
-          <a:p>
-            <a:pPr>
-              <a:spcBef>
-                <a:spcPts val="1800"/>
-              </a:spcBef>
-            </a:pPr>
-            <a:r>
-              <a:rPr sz="1500">
-                <a:solidFill>
-                  <a:srgbClr val="6D8C97"/>
-                </a:solidFill>
-              </a:rPr>
-              <a:t>covers: font-size</a:t>
-            </a:r>
-          </a:p>
         </p:txBody>
       </p:sp>
     </p:spTree>
@@ -13112,21 +12527,6 @@
               <a:t>cursor: pointer shows a hand so it looks clickable.</a:t>
             </a:r>
           </a:p>
-          <a:p>
-            <a:pPr>
-              <a:spcBef>
-                <a:spcPts val="1800"/>
-              </a:spcBef>
-            </a:pPr>
-            <a:r>
-              <a:rPr sz="1500">
-                <a:solidFill>
-                  <a:srgbClr val="6D8C97"/>
-                </a:solidFill>
-              </a:rPr>
-              <a:t>covers: cursor</a:t>
-            </a:r>
-          </a:p>
         </p:txBody>
       </p:sp>
     </p:spTree>
@@ -13766,21 +13166,6 @@
               <a:t>Loads your JavaScript. It sits at the very bottom so every box above already exists when the code runs.</a:t>
             </a:r>
           </a:p>
-          <a:p>
-            <a:pPr>
-              <a:spcBef>
-                <a:spcPts val="1800"/>
-              </a:spcBef>
-            </a:pPr>
-            <a:r>
-              <a:rPr sz="1500">
-                <a:solidFill>
-                  <a:srgbClr val="6D8C97"/>
-                </a:solidFill>
-              </a:rPr>
-              <a:t>covers: The &lt;script&gt; tag</a:t>
-            </a:r>
-          </a:p>
         </p:txBody>
       </p:sp>
     </p:spTree>
@@ -14134,21 +13519,6 @@
               <a:t>A comment: a note for you, ignored by the computer.</a:t>
             </a:r>
           </a:p>
-          <a:p>
-            <a:pPr>
-              <a:spcBef>
-                <a:spcPts val="1800"/>
-              </a:spcBef>
-            </a:pPr>
-            <a:r>
-              <a:rPr sz="1500">
-                <a:solidFill>
-                  <a:srgbClr val="6D8C97"/>
-                </a:solidFill>
-              </a:rPr>
-              <a:t>covers: A comment</a:t>
-            </a:r>
-          </a:p>
         </p:txBody>
       </p:sp>
     </p:spTree>
@@ -14405,21 +13775,6 @@
               <a:t>console.log prints a message to the console panel - proof the file is running.</a:t>
             </a:r>
           </a:p>
-          <a:p>
-            <a:pPr>
-              <a:spcBef>
-                <a:spcPts val="1800"/>
-              </a:spcBef>
-            </a:pPr>
-            <a:r>
-              <a:rPr sz="1500">
-                <a:solidFill>
-                  <a:srgbClr val="6D8C97"/>
-                </a:solidFill>
-              </a:rPr>
-              <a:t>covers: console.log()</a:t>
-            </a:r>
-          </a:p>
         </p:txBody>
       </p:sp>
     </p:spTree>
@@ -14546,21 +13901,6 @@
               <a:t>Another comment, explaining the check below.</a:t>
             </a:r>
           </a:p>
-          <a:p>
-            <a:pPr>
-              <a:spcBef>
-                <a:spcPts val="1800"/>
-              </a:spcBef>
-            </a:pPr>
-            <a:r>
-              <a:rPr sz="1500">
-                <a:solidFill>
-                  <a:srgbClr val="6D8C97"/>
-                </a:solidFill>
-              </a:rPr>
-              <a:t>covers: A comment</a:t>
-            </a:r>
-          </a:p>
         </p:txBody>
       </p:sp>
     </p:spTree>
@@ -14687,21 +14027,6 @@
               <a:t>A comment continued: what would happen if the script ran too early.</a:t>
             </a:r>
           </a:p>
-          <a:p>
-            <a:pPr>
-              <a:spcBef>
-                <a:spcPts val="1800"/>
-              </a:spcBef>
-            </a:pPr>
-            <a:r>
-              <a:rPr sz="1500">
-                <a:solidFill>
-                  <a:srgbClr val="6D8C97"/>
-                </a:solidFill>
-              </a:rPr>
-              <a:t>covers: A comment</a:t>
-            </a:r>
-          </a:p>
         </p:txBody>
       </p:sp>
     </p:spTree>
@@ -14828,21 +14153,6 @@
               <a:t>The comment's last line: which is why the &lt;script&gt; tag goes at the bottom.</a:t>
             </a:r>
           </a:p>
-          <a:p>
-            <a:pPr>
-              <a:spcBef>
-                <a:spcPts val="1800"/>
-              </a:spcBef>
-            </a:pPr>
-            <a:r>
-              <a:rPr sz="1500">
-                <a:solidFill>
-                  <a:srgbClr val="6D8C97"/>
-                </a:solidFill>
-              </a:rPr>
-              <a:t>covers: A comment</a:t>
-            </a:r>
-          </a:p>
         </p:txBody>
       </p:sp>
     </p:spTree>
@@ -14969,21 +14279,6 @@
               <a:t>The big title of the page, inside an &lt;h1&gt;.</a:t>
             </a:r>
           </a:p>
-          <a:p>
-            <a:pPr>
-              <a:spcBef>
-                <a:spcPts val="1800"/>
-              </a:spcBef>
-            </a:pPr>
-            <a:r>
-              <a:rPr sz="1500">
-                <a:solidFill>
-                  <a:srgbClr val="6D8C97"/>
-                </a:solidFill>
-              </a:rPr>
-              <a:t>covers: The &lt;h1&gt; tag</a:t>
-            </a:r>
-          </a:p>
         </p:txBody>
       </p:sp>
     </p:spTree>
@@ -15238,21 +14533,6 @@
                 </a:solidFill>
               </a:rPr>
               <a:t>getElementById looks for the chat box; !== null is true only if it was found. Because the script is at the bottom, it prints true.</a:t>
-            </a:r>
-          </a:p>
-          <a:p>
-            <a:pPr>
-              <a:spcBef>
-                <a:spcPts val="1800"/>
-              </a:spcBef>
-            </a:pPr>
-            <a:r>
-              <a:rPr sz="1500">
-                <a:solidFill>
-                  <a:srgbClr val="6D8C97"/>
-                </a:solidFill>
-              </a:rPr>
-              <a:t>covers: console.log(), document.getElementById()</a:t>
             </a:r>
           </a:p>
         </p:txBody>

--- a/ai101/slides/week-01.pptx
+++ b/ai101/slides/week-01.pptx
@@ -116,6 +116,7 @@
     <p:sldId id="364" r:id="rId115"/>
     <p:sldId id="365" r:id="rId116"/>
     <p:sldId id="366" r:id="rId117"/>
+    <p:sldId id="367" r:id="rId118"/>
   </p:sldIdLst>
   <p:sldSz cx="12191695" cy="6858000" type="screen4x3"/>
   <p:notesSz cx="6858000" cy="9144000"/>
@@ -5688,6 +5689,151 @@
 </file>
 
 <file path=ppt/slides/slide111.xml><?xml version="1.0" encoding="utf-8"?>
+<p:sld xmlns:a="http://schemas.openxmlformats.org/drawingml/2006/main" xmlns:p="http://schemas.openxmlformats.org/presentationml/2006/main" xmlns:r="http://schemas.openxmlformats.org/officeDocument/2006/relationships">
+  <p:cSld>
+    <p:spTree>
+      <p:nvGrpSpPr>
+        <p:cNvPr id="1" name=""/>
+        <p:cNvGrpSpPr/>
+        <p:nvPr/>
+      </p:nvGrpSpPr>
+      <p:grpSpPr/>
+      <p:sp>
+        <p:nvSpPr>
+          <p:cNvPr id="2" name="Title 1"/>
+          <p:cNvSpPr>
+            <a:spLocks noGrp="1"/>
+          </p:cNvSpPr>
+          <p:nvPr>
+            <p:ph type="title"/>
+          </p:nvPr>
+        </p:nvSpPr>
+        <p:spPr/>
+        <p:txBody>
+          <a:bodyPr/>
+          <a:lstStyle/>
+          <a:p>
+            <a:r>
+              <a:rPr sz="3800" b="1">
+                <a:solidFill>
+                  <a:srgbClr val="1F2A37"/>
+                </a:solidFill>
+              </a:rPr>
+              <a:t>Checkpoint: your page</a:t>
+            </a:r>
+          </a:p>
+        </p:txBody>
+      </p:sp>
+      <p:sp>
+        <p:nvSpPr>
+          <p:cNvPr id="3" name="TextBox 2"/>
+          <p:cNvSpPr txBox="1"/>
+          <p:nvPr/>
+        </p:nvSpPr>
+        <p:spPr>
+          <a:xfrm>
+            <a:off x="868680" y="502920"/>
+            <a:ext cx="5486400" cy="457200"/>
+          </a:xfrm>
+          <a:prstGeom prst="rect">
+            <a:avLst/>
+          </a:prstGeom>
+          <a:noFill/>
+        </p:spPr>
+        <p:txBody>
+          <a:bodyPr wrap="none">
+            <a:spAutoFit/>
+          </a:bodyPr>
+          <a:lstStyle/>
+          <a:p>
+            <a:r>
+              <a:rPr sz="1500" b="1">
+                <a:solidFill>
+                  <a:srgbClr val="01AEFD"/>
+                </a:solidFill>
+              </a:rPr>
+              <a:t>CHECKPOINT - RUN IT</a:t>
+            </a:r>
+          </a:p>
+        </p:txBody>
+      </p:sp>
+      <p:sp>
+        <p:nvSpPr>
+          <p:cNvPr id="4" name="TextBox 3"/>
+          <p:cNvSpPr txBox="1"/>
+          <p:nvPr/>
+        </p:nvSpPr>
+        <p:spPr>
+          <a:xfrm>
+            <a:off x="822960" y="1828800"/>
+            <a:ext cx="10515600" cy="4206240"/>
+          </a:xfrm>
+          <a:prstGeom prst="rect">
+            <a:avLst/>
+          </a:prstGeom>
+          <a:noFill/>
+        </p:spPr>
+        <p:txBody>
+          <a:bodyPr wrap="square">
+            <a:spAutoFit/>
+          </a:bodyPr>
+          <a:lstStyle/>
+          <a:p>
+            <a:pPr>
+              <a:spcAft>
+                <a:spcPts val="1400"/>
+              </a:spcAft>
+            </a:pPr>
+            <a:r>
+              <a:rPr sz="2800">
+                <a:solidFill>
+                  <a:srgbClr val="01AEFD"/>
+                </a:solidFill>
+              </a:rPr>
+              <a:t>Press Run. You should see the title, an empty white chat box, and a text box with a blue Send button - all styled. Clicking Send does nothing yet; that is next week.</a:t>
+            </a:r>
+          </a:p>
+          <a:p>
+            <a:pPr>
+              <a:spcAft>
+                <a:spcPts val="1400"/>
+              </a:spcAft>
+            </a:pPr>
+            <a:r>
+              <a:rPr sz="2400">
+                <a:solidFill>
+                  <a:srgbClr val="1F2A37"/>
+                </a:solidFill>
+              </a:rPr>
+              <a:t>• Run it in the classroom, or press Show the output in the web deck.</a:t>
+            </a:r>
+          </a:p>
+          <a:p>
+            <a:pPr>
+              <a:spcAft>
+                <a:spcPts val="1400"/>
+              </a:spcAft>
+            </a:pPr>
+            <a:r>
+              <a:rPr sz="2400">
+                <a:solidFill>
+                  <a:srgbClr val="1F2A37"/>
+                </a:solidFill>
+              </a:rPr>
+              <a:t>• Everyone's screen should match this.</a:t>
+            </a:r>
+          </a:p>
+        </p:txBody>
+      </p:sp>
+    </p:spTree>
+  </p:cSld>
+  <p:clrMapOvr>
+    <a:masterClrMapping/>
+  </p:clrMapOvr>
+</p:sld>
+</file>
+
+<file path=ppt/slides/slide112.xml><?xml version="1.0" encoding="utf-8"?>
 <p:sld xmlns:a="http://schemas.openxmlformats.org/drawingml/2006/main" xmlns:p="http://schemas.openxmlformats.org/presentationml/2006/main" xmlns:r="http://schemas.openxmlformats.org/officeDocument/2006/relationships">
   <p:cSld>
     <p:spTree>

--- a/ai101/slides/week-01.pptx
+++ b/ai101/slides/week-01.pptx
@@ -7684,7 +7684,7 @@
                   <a:srgbClr val="1F2A37"/>
                 </a:solidFill>
               </a:rPr>
-              <a:t>• A box the student types into.</a:t>
+              <a:t>• A box you type into.</a:t>
             </a:r>
           </a:p>
           <a:p>
@@ -7864,7 +7864,7 @@
                   <a:srgbClr val="DCECEF"/>
                 </a:solidFill>
               </a:rPr>
-              <a:t>The &lt;input&gt; the student types in. placeholder is the faint hint; autocomplete off hides suggestions.</a:t>
+              <a:t>The &lt;input&gt; you type in. placeholder is the faint hint; autocomplete off hides suggestions.</a:t>
             </a:r>
           </a:p>
         </p:txBody>
@@ -14710,7 +14710,7 @@
                   <a:srgbClr val="1F2A37"/>
                 </a:solidFill>
               </a:rPr>
-              <a:t>• Everything the student sees lives inside it.</a:t>
+              <a:t>• Everything you see on the page lives inside it.</a:t>
             </a:r>
           </a:p>
         </p:txBody>

--- a/ai101/slides/week-01.pptx
+++ b/ai101/slides/week-01.pptx
@@ -117,6 +117,7 @@
     <p:sldId id="365" r:id="rId116"/>
     <p:sldId id="366" r:id="rId117"/>
     <p:sldId id="367" r:id="rId118"/>
+    <p:sldId id="368" r:id="rId119"/>
   </p:sldIdLst>
   <p:sldSz cx="12191695" cy="6858000" type="screen4x3"/>
   <p:notesSz cx="6858000" cy="9144000"/>
@@ -3432,7 +3433,7 @@
                   <a:srgbClr val="1F2A37"/>
                 </a:solidFill>
               </a:rPr>
-              <a:t>Calling a function</a:t>
+              <a:t>Strings: text in quotes</a:t>
             </a:r>
           </a:p>
         </p:txBody>
@@ -3503,7 +3504,7 @@
                   <a:srgbClr val="1F2A37"/>
                 </a:solidFill>
               </a:rPr>
-              <a:t>• A name followed by ( ) runs that function.</a:t>
+              <a:t>• Text the computer treats as data goes in quotes: 'hello'.</a:t>
             </a:r>
           </a:p>
           <a:p>
@@ -3518,7 +3519,7 @@
                   <a:srgbClr val="1F2A37"/>
                 </a:solidFill>
               </a:rPr>
-              <a:t>• Whatever is inside the ( ) is what you hand it.</a:t>
+              <a:t>• Single or double quotes both work.</a:t>
             </a:r>
           </a:p>
         </p:txBody>
@@ -3562,7 +3563,7 @@
                   <a:srgbClr val="1F2A37"/>
                 </a:solidFill>
               </a:rPr>
-              <a:t>Dot notation</a:t>
+              <a:t>Calling a function</a:t>
             </a:r>
           </a:p>
         </p:txBody>
@@ -3633,7 +3634,7 @@
                   <a:srgbClr val="1F2A37"/>
                 </a:solidFill>
               </a:rPr>
-              <a:t>• thing.name reaches INTO thing for one of its parts or actions.</a:t>
+              <a:t>• A name followed by ( ) runs that function.</a:t>
             </a:r>
           </a:p>
           <a:p>
@@ -3648,7 +3649,7 @@
                   <a:srgbClr val="1F2A37"/>
                 </a:solidFill>
               </a:rPr>
-              <a:t>• document.getElementById asks document to find something.</a:t>
+              <a:t>• Whatever is inside the ( ) is what you hand it.</a:t>
             </a:r>
           </a:p>
         </p:txBody>
@@ -3692,7 +3693,7 @@
                   <a:srgbClr val="1F2A37"/>
                 </a:solidFill>
               </a:rPr>
-              <a:t>console.log()</a:t>
+              <a:t>Dot notation</a:t>
             </a:r>
           </a:p>
         </p:txBody>
@@ -3763,7 +3764,7 @@
                   <a:srgbClr val="1F2A37"/>
                 </a:solidFill>
               </a:rPr>
-              <a:t>• A built-in that prints a message to the console panel.</a:t>
+              <a:t>• thing.name reaches INTO thing for one of its parts or actions.</a:t>
             </a:r>
           </a:p>
           <a:p>
@@ -3778,7 +3779,7 @@
                   <a:srgbClr val="1F2A37"/>
                 </a:solidFill>
               </a:rPr>
-              <a:t>• Your window into what the code is doing.</a:t>
+              <a:t>• document.getElementById asks document to find something.</a:t>
             </a:r>
           </a:p>
         </p:txBody>
@@ -3794,14 +3795,6 @@
 <file path=ppt/slides/slide103.xml><?xml version="1.0" encoding="utf-8"?>
 <p:sld xmlns:a="http://schemas.openxmlformats.org/drawingml/2006/main" xmlns:p="http://schemas.openxmlformats.org/presentationml/2006/main" xmlns:r="http://schemas.openxmlformats.org/officeDocument/2006/relationships">
   <p:cSld>
-    <p:bg>
-      <p:bgPr>
-        <a:solidFill>
-          <a:srgbClr val="102127"/>
-        </a:solidFill>
-        <a:effectLst/>
-      </p:bgPr>
-    </p:bg>
     <p:spTree>
       <p:nvGrpSpPr>
         <p:cNvPr id="1" name=""/>
@@ -3811,14 +3804,40 @@
       <p:grpSpPr/>
       <p:sp>
         <p:nvSpPr>
-          <p:cNvPr id="2" name="TextBox 1"/>
-          <p:cNvSpPr txBox="1"/>
-          <p:nvPr/>
-        </p:nvSpPr>
-        <p:spPr>
-          <a:xfrm>
-            <a:off x="502920" y="274320"/>
-            <a:ext cx="11155680" cy="548640"/>
+          <p:cNvPr id="2" name="Title 1"/>
+          <p:cNvSpPr>
+            <a:spLocks noGrp="1"/>
+          </p:cNvSpPr>
+          <p:nvPr>
+            <p:ph type="title"/>
+          </p:nvPr>
+        </p:nvSpPr>
+        <p:spPr/>
+        <p:txBody>
+          <a:bodyPr/>
+          <a:lstStyle/>
+          <a:p>
+            <a:r>
+              <a:rPr sz="3800" b="1">
+                <a:solidFill>
+                  <a:srgbClr val="1F2A37"/>
+                </a:solidFill>
+              </a:rPr>
+              <a:t>console.log()</a:t>
+            </a:r>
+          </a:p>
+        </p:txBody>
+      </p:sp>
+      <p:sp>
+        <p:nvSpPr>
+          <p:cNvPr id="3" name="TextBox 2"/>
+          <p:cNvSpPr txBox="1"/>
+          <p:nvPr/>
+        </p:nvSpPr>
+        <p:spPr>
+          <a:xfrm>
+            <a:off x="868680" y="502920"/>
+            <a:ext cx="5486400" cy="457200"/>
           </a:xfrm>
           <a:prstGeom prst="rect">
             <a:avLst/>
@@ -3832,85 +3851,12 @@
           <a:lstStyle/>
           <a:p>
             <a:r>
-              <a:rPr sz="2200" b="1">
+              <a:rPr sz="1500" b="1">
                 <a:solidFill>
                   <a:srgbClr val="01AEFD"/>
                 </a:solidFill>
               </a:rPr>
-              <a:t>Type this into script.js   -   line 2</a:t>
-            </a:r>
-          </a:p>
-        </p:txBody>
-      </p:sp>
-      <p:sp>
-        <p:nvSpPr>
-          <p:cNvPr id="3" name="TextBox 2"/>
-          <p:cNvSpPr txBox="1"/>
-          <p:nvPr/>
-        </p:nvSpPr>
-        <p:spPr>
-          <a:xfrm>
-            <a:off x="502920" y="960120"/>
-            <a:ext cx="11155680" cy="4297680"/>
-          </a:xfrm>
-          <a:prstGeom prst="rect">
-            <a:avLst/>
-          </a:prstGeom>
-          <a:noFill/>
-        </p:spPr>
-        <p:txBody>
-          <a:bodyPr wrap="none">
-            <a:spAutoFit/>
-          </a:bodyPr>
-          <a:lstStyle/>
-          <a:p>
-            <a:pPr>
-              <a:spcAft>
-                <a:spcPts val="0"/>
-              </a:spcAft>
-            </a:pPr>
-            <a:r>
-              <a:rPr sz="1800">
-                <a:solidFill>
-                  <a:srgbClr val="6D8C97"/>
-                </a:solidFill>
-                <a:latin typeface="Consolas"/>
-              </a:rPr>
-              <a:t>   1  </a:t>
-            </a:r>
-            <a:r>
-              <a:rPr sz="1800">
-                <a:solidFill>
-                  <a:srgbClr val="6D8C97"/>
-                </a:solidFill>
-                <a:latin typeface="Consolas"/>
-              </a:rPr>
-              <a:t>// Week 1: prove the JavaScript file is really running.</a:t>
-            </a:r>
-          </a:p>
-          <a:p>
-            <a:pPr>
-              <a:spcAft>
-                <a:spcPts val="0"/>
-              </a:spcAft>
-            </a:pPr>
-            <a:r>
-              <a:rPr sz="1800">
-                <a:solidFill>
-                  <a:srgbClr val="6D8C97"/>
-                </a:solidFill>
-                <a:latin typeface="Consolas"/>
-              </a:rPr>
-              <a:t>   2  </a:t>
-            </a:r>
-            <a:r>
-              <a:rPr sz="1800">
-                <a:solidFill>
-                  <a:srgbClr val="7FE0A0"/>
-                </a:solidFill>
-                <a:latin typeface="Consolas"/>
-              </a:rPr>
-              <a:t>console.log('My AI companion is starting up.');</a:t>
+              <a:t>JAVASCRIPT</a:t>
             </a:r>
           </a:p>
         </p:txBody>
@@ -3923,8 +3869,8 @@
         </p:nvSpPr>
         <p:spPr>
           <a:xfrm>
-            <a:off x="548640" y="5623560"/>
-            <a:ext cx="11064240" cy="1051560"/>
+            <a:off x="822960" y="1828800"/>
+            <a:ext cx="10515600" cy="4206240"/>
           </a:xfrm>
           <a:prstGeom prst="rect">
             <a:avLst/>
@@ -3937,13 +3883,33 @@
           </a:bodyPr>
           <a:lstStyle/>
           <a:p>
-            <a:r>
-              <a:rPr sz="2000">
-                <a:solidFill>
-                  <a:srgbClr val="DCECEF"/>
-                </a:solidFill>
-              </a:rPr>
-              <a:t>console.log prints a message to the console panel - proof the file is running.</a:t>
+            <a:pPr>
+              <a:spcAft>
+                <a:spcPts val="1400"/>
+              </a:spcAft>
+            </a:pPr>
+            <a:r>
+              <a:rPr sz="2400">
+                <a:solidFill>
+                  <a:srgbClr val="1F2A37"/>
+                </a:solidFill>
+              </a:rPr>
+              <a:t>• A built-in that prints a message to the console panel.</a:t>
+            </a:r>
+          </a:p>
+          <a:p>
+            <a:pPr>
+              <a:spcAft>
+                <a:spcPts val="1400"/>
+              </a:spcAft>
+            </a:pPr>
+            <a:r>
+              <a:rPr sz="2400">
+                <a:solidFill>
+                  <a:srgbClr val="1F2A37"/>
+                </a:solidFill>
+              </a:rPr>
+              <a:t>• Your window into what the code is doing.</a:t>
             </a:r>
           </a:p>
         </p:txBody>
@@ -4002,7 +3968,7 @@
                   <a:srgbClr val="01AEFD"/>
                 </a:solidFill>
               </a:rPr>
-              <a:t>Type this into script.js   -   line 4</a:t>
+              <a:t>Type this into script.js   -   line 2</a:t>
             </a:r>
           </a:p>
         </p:txBody>
@@ -4071,61 +4037,11 @@
             <a:r>
               <a:rPr sz="1800">
                 <a:solidFill>
-                  <a:srgbClr val="6D8C97"/>
+                  <a:srgbClr val="7FE0A0"/>
                 </a:solidFill>
                 <a:latin typeface="Consolas"/>
               </a:rPr>
               <a:t>console.log('My AI companion is starting up.');</a:t>
-            </a:r>
-          </a:p>
-          <a:p>
-            <a:pPr>
-              <a:spcAft>
-                <a:spcPts val="0"/>
-              </a:spcAft>
-            </a:pPr>
-            <a:r>
-              <a:rPr sz="1800">
-                <a:solidFill>
-                  <a:srgbClr val="6D8C97"/>
-                </a:solidFill>
-                <a:latin typeface="Consolas"/>
-              </a:rPr>
-              <a:t>   3  </a:t>
-            </a:r>
-            <a:r>
-              <a:rPr sz="1800">
-                <a:solidFill>
-                  <a:srgbClr val="6D8C97"/>
-                </a:solidFill>
-                <a:latin typeface="Consolas"/>
-              </a:rPr>
-              <a:t> </a:t>
-            </a:r>
-          </a:p>
-          <a:p>
-            <a:pPr>
-              <a:spcAft>
-                <a:spcPts val="0"/>
-              </a:spcAft>
-            </a:pPr>
-            <a:r>
-              <a:rPr sz="1800">
-                <a:solidFill>
-                  <a:srgbClr val="6D8C97"/>
-                </a:solidFill>
-                <a:latin typeface="Consolas"/>
-              </a:rPr>
-              <a:t>   4  </a:t>
-            </a:r>
-            <a:r>
-              <a:rPr sz="1800">
-                <a:solidFill>
-                  <a:srgbClr val="7FE0A0"/>
-                </a:solidFill>
-                <a:latin typeface="Consolas"/>
-              </a:rPr>
-              <a:t>// Can this script see the page yet? Down here, yes.</a:t>
             </a:r>
           </a:p>
         </p:txBody>
@@ -4158,7 +4074,7 @@
                   <a:srgbClr val="DCECEF"/>
                 </a:solidFill>
               </a:rPr>
-              <a:t>Another comment, explaining the check below.</a:t>
+              <a:t>console.log prints a message to the console panel - proof the file is running.</a:t>
             </a:r>
           </a:p>
         </p:txBody>
@@ -4217,7 +4133,7 @@
                   <a:srgbClr val="01AEFD"/>
                 </a:solidFill>
               </a:rPr>
-              <a:t>Type this into script.js   -   line 5</a:t>
+              <a:t>Type this into script.js   -   line 4</a:t>
             </a:r>
           </a:p>
         </p:txBody>
@@ -4336,36 +4252,11 @@
             <a:r>
               <a:rPr sz="1800">
                 <a:solidFill>
-                  <a:srgbClr val="6D8C97"/>
+                  <a:srgbClr val="7FE0A0"/>
                 </a:solidFill>
                 <a:latin typeface="Consolas"/>
               </a:rPr>
               <a:t>// Can this script see the page yet? Down here, yes.</a:t>
-            </a:r>
-          </a:p>
-          <a:p>
-            <a:pPr>
-              <a:spcAft>
-                <a:spcPts val="0"/>
-              </a:spcAft>
-            </a:pPr>
-            <a:r>
-              <a:rPr sz="1800">
-                <a:solidFill>
-                  <a:srgbClr val="6D8C97"/>
-                </a:solidFill>
-                <a:latin typeface="Consolas"/>
-              </a:rPr>
-              <a:t>   5  </a:t>
-            </a:r>
-            <a:r>
-              <a:rPr sz="1800">
-                <a:solidFill>
-                  <a:srgbClr val="7FE0A0"/>
-                </a:solidFill>
-                <a:latin typeface="Consolas"/>
-              </a:rPr>
-              <a:t>// Move the &lt;script&gt; tag to the TOP of index.html and this prints false,</a:t>
             </a:r>
           </a:p>
         </p:txBody>
@@ -4398,7 +4289,7 @@
                   <a:srgbClr val="DCECEF"/>
                 </a:solidFill>
               </a:rPr>
-              <a:t>A comment continued: what would happen if the script ran too early.</a:t>
+              <a:t>Another comment, explaining the check below.</a:t>
             </a:r>
           </a:p>
         </p:txBody>
@@ -4457,7 +4348,7 @@
                   <a:srgbClr val="01AEFD"/>
                 </a:solidFill>
               </a:rPr>
-              <a:t>Type this into script.js   -   line 6</a:t>
+              <a:t>Type this into script.js   -   line 5</a:t>
             </a:r>
           </a:p>
         </p:txBody>
@@ -4601,36 +4492,11 @@
             <a:r>
               <a:rPr sz="1800">
                 <a:solidFill>
-                  <a:srgbClr val="6D8C97"/>
+                  <a:srgbClr val="7FE0A0"/>
                 </a:solidFill>
                 <a:latin typeface="Consolas"/>
               </a:rPr>
               <a:t>// Move the &lt;script&gt; tag to the TOP of index.html and this prints false,</a:t>
-            </a:r>
-          </a:p>
-          <a:p>
-            <a:pPr>
-              <a:spcAft>
-                <a:spcPts val="0"/>
-              </a:spcAft>
-            </a:pPr>
-            <a:r>
-              <a:rPr sz="1800">
-                <a:solidFill>
-                  <a:srgbClr val="6D8C97"/>
-                </a:solidFill>
-                <a:latin typeface="Consolas"/>
-              </a:rPr>
-              <a:t>   6  </a:t>
-            </a:r>
-            <a:r>
-              <a:rPr sz="1800">
-                <a:solidFill>
-                  <a:srgbClr val="7FE0A0"/>
-                </a:solidFill>
-                <a:latin typeface="Consolas"/>
-              </a:rPr>
-              <a:t>// because the boxes have not been made yet. That is why it goes last.</a:t>
             </a:r>
           </a:p>
         </p:txBody>
@@ -4663,7 +4529,7 @@
                   <a:srgbClr val="DCECEF"/>
                 </a:solidFill>
               </a:rPr>
-              <a:t>The comment's last line: which is why the &lt;script&gt; tag goes at the bottom.</a:t>
+              <a:t>A comment continued: what would happen if the script ran too early.</a:t>
             </a:r>
           </a:p>
         </p:txBody>
@@ -4677,136 +4543,6 @@
 </file>
 
 <file path=ppt/slides/slide107.xml><?xml version="1.0" encoding="utf-8"?>
-<p:sld xmlns:a="http://schemas.openxmlformats.org/drawingml/2006/main" xmlns:p="http://schemas.openxmlformats.org/presentationml/2006/main" xmlns:r="http://schemas.openxmlformats.org/officeDocument/2006/relationships">
-  <p:cSld>
-    <p:spTree>
-      <p:nvGrpSpPr>
-        <p:cNvPr id="1" name=""/>
-        <p:cNvGrpSpPr/>
-        <p:nvPr/>
-      </p:nvGrpSpPr>
-      <p:grpSpPr/>
-      <p:sp>
-        <p:nvSpPr>
-          <p:cNvPr id="2" name="Title 1"/>
-          <p:cNvSpPr>
-            <a:spLocks noGrp="1"/>
-          </p:cNvSpPr>
-          <p:nvPr>
-            <p:ph type="title"/>
-          </p:nvPr>
-        </p:nvSpPr>
-        <p:spPr/>
-        <p:txBody>
-          <a:bodyPr/>
-          <a:lstStyle/>
-          <a:p>
-            <a:r>
-              <a:rPr sz="3800" b="1">
-                <a:solidFill>
-                  <a:srgbClr val="1F2A37"/>
-                </a:solidFill>
-              </a:rPr>
-              <a:t>document.getElementById()</a:t>
-            </a:r>
-          </a:p>
-        </p:txBody>
-      </p:sp>
-      <p:sp>
-        <p:nvSpPr>
-          <p:cNvPr id="3" name="TextBox 2"/>
-          <p:cNvSpPr txBox="1"/>
-          <p:nvPr/>
-        </p:nvSpPr>
-        <p:spPr>
-          <a:xfrm>
-            <a:off x="868680" y="502920"/>
-            <a:ext cx="5486400" cy="457200"/>
-          </a:xfrm>
-          <a:prstGeom prst="rect">
-            <a:avLst/>
-          </a:prstGeom>
-          <a:noFill/>
-        </p:spPr>
-        <p:txBody>
-          <a:bodyPr wrap="none">
-            <a:spAutoFit/>
-          </a:bodyPr>
-          <a:lstStyle/>
-          <a:p>
-            <a:r>
-              <a:rPr sz="1500" b="1">
-                <a:solidFill>
-                  <a:srgbClr val="01AEFD"/>
-                </a:solidFill>
-              </a:rPr>
-              <a:t>JAVASCRIPT</a:t>
-            </a:r>
-          </a:p>
-        </p:txBody>
-      </p:sp>
-      <p:sp>
-        <p:nvSpPr>
-          <p:cNvPr id="4" name="TextBox 3"/>
-          <p:cNvSpPr txBox="1"/>
-          <p:nvPr/>
-        </p:nvSpPr>
-        <p:spPr>
-          <a:xfrm>
-            <a:off x="822960" y="1828800"/>
-            <a:ext cx="10515600" cy="4206240"/>
-          </a:xfrm>
-          <a:prstGeom prst="rect">
-            <a:avLst/>
-          </a:prstGeom>
-          <a:noFill/>
-        </p:spPr>
-        <p:txBody>
-          <a:bodyPr wrap="square">
-            <a:spAutoFit/>
-          </a:bodyPr>
-          <a:lstStyle/>
-          <a:p>
-            <a:pPr>
-              <a:spcAft>
-                <a:spcPts val="1400"/>
-              </a:spcAft>
-            </a:pPr>
-            <a:r>
-              <a:rPr sz="2400">
-                <a:solidFill>
-                  <a:srgbClr val="1F2A37"/>
-                </a:solidFill>
-              </a:rPr>
-              <a:t>• A built-in that finds a box on the page by its id.</a:t>
-            </a:r>
-          </a:p>
-          <a:p>
-            <a:pPr>
-              <a:spcAft>
-                <a:spcPts val="1400"/>
-              </a:spcAft>
-            </a:pPr>
-            <a:r>
-              <a:rPr sz="2400">
-                <a:solidFill>
-                  <a:srgbClr val="1F2A37"/>
-                </a:solidFill>
-              </a:rPr>
-              <a:t>• Hands you the box, or null if it is not there.</a:t>
-            </a:r>
-          </a:p>
-        </p:txBody>
-      </p:sp>
-    </p:spTree>
-  </p:cSld>
-  <p:clrMapOvr>
-    <a:masterClrMapping/>
-  </p:clrMapOvr>
-</p:sld>
-</file>
-
-<file path=ppt/slides/slide108.xml><?xml version="1.0" encoding="utf-8"?>
 <p:sld xmlns:a="http://schemas.openxmlformats.org/drawingml/2006/main" xmlns:p="http://schemas.openxmlformats.org/presentationml/2006/main" xmlns:r="http://schemas.openxmlformats.org/officeDocument/2006/relationships">
   <p:cSld>
     <p:bg>
@@ -4852,7 +4588,7 @@
                   <a:srgbClr val="01AEFD"/>
                 </a:solidFill>
               </a:rPr>
-              <a:t>Type this into script.js   -   line 7</a:t>
+              <a:t>Type this into script.js   -   line 6</a:t>
             </a:r>
           </a:p>
         </p:txBody>
@@ -5021,36 +4757,11 @@
             <a:r>
               <a:rPr sz="1800">
                 <a:solidFill>
-                  <a:srgbClr val="6D8C97"/>
+                  <a:srgbClr val="7FE0A0"/>
                 </a:solidFill>
                 <a:latin typeface="Consolas"/>
               </a:rPr>
               <a:t>// because the boxes have not been made yet. That is why it goes last.</a:t>
-            </a:r>
-          </a:p>
-          <a:p>
-            <a:pPr>
-              <a:spcAft>
-                <a:spcPts val="0"/>
-              </a:spcAft>
-            </a:pPr>
-            <a:r>
-              <a:rPr sz="1800">
-                <a:solidFill>
-                  <a:srgbClr val="6D8C97"/>
-                </a:solidFill>
-                <a:latin typeface="Consolas"/>
-              </a:rPr>
-              <a:t>   7  </a:t>
-            </a:r>
-            <a:r>
-              <a:rPr sz="1800">
-                <a:solidFill>
-                  <a:srgbClr val="7FE0A0"/>
-                </a:solidFill>
-                <a:latin typeface="Consolas"/>
-              </a:rPr>
-              <a:t>console.log('Can I see the chat box?', document.getElementById('chat') !== null);</a:t>
             </a:r>
           </a:p>
         </p:txBody>
@@ -5083,7 +4794,137 @@
                   <a:srgbClr val="DCECEF"/>
                 </a:solidFill>
               </a:rPr>
-              <a:t>getElementById looks for the chat box; !== null is true only if it was found. Because the script is at the bottom, it prints true.</a:t>
+              <a:t>The comment's last line: which is why the &lt;script&gt; tag goes at the bottom.</a:t>
+            </a:r>
+          </a:p>
+        </p:txBody>
+      </p:sp>
+    </p:spTree>
+  </p:cSld>
+  <p:clrMapOvr>
+    <a:masterClrMapping/>
+  </p:clrMapOvr>
+</p:sld>
+</file>
+
+<file path=ppt/slides/slide108.xml><?xml version="1.0" encoding="utf-8"?>
+<p:sld xmlns:a="http://schemas.openxmlformats.org/drawingml/2006/main" xmlns:p="http://schemas.openxmlformats.org/presentationml/2006/main" xmlns:r="http://schemas.openxmlformats.org/officeDocument/2006/relationships">
+  <p:cSld>
+    <p:spTree>
+      <p:nvGrpSpPr>
+        <p:cNvPr id="1" name=""/>
+        <p:cNvGrpSpPr/>
+        <p:nvPr/>
+      </p:nvGrpSpPr>
+      <p:grpSpPr/>
+      <p:sp>
+        <p:nvSpPr>
+          <p:cNvPr id="2" name="Title 1"/>
+          <p:cNvSpPr>
+            <a:spLocks noGrp="1"/>
+          </p:cNvSpPr>
+          <p:nvPr>
+            <p:ph type="title"/>
+          </p:nvPr>
+        </p:nvSpPr>
+        <p:spPr/>
+        <p:txBody>
+          <a:bodyPr/>
+          <a:lstStyle/>
+          <a:p>
+            <a:r>
+              <a:rPr sz="3800" b="1">
+                <a:solidFill>
+                  <a:srgbClr val="1F2A37"/>
+                </a:solidFill>
+              </a:rPr>
+              <a:t>document.getElementById()</a:t>
+            </a:r>
+          </a:p>
+        </p:txBody>
+      </p:sp>
+      <p:sp>
+        <p:nvSpPr>
+          <p:cNvPr id="3" name="TextBox 2"/>
+          <p:cNvSpPr txBox="1"/>
+          <p:nvPr/>
+        </p:nvSpPr>
+        <p:spPr>
+          <a:xfrm>
+            <a:off x="868680" y="502920"/>
+            <a:ext cx="5486400" cy="457200"/>
+          </a:xfrm>
+          <a:prstGeom prst="rect">
+            <a:avLst/>
+          </a:prstGeom>
+          <a:noFill/>
+        </p:spPr>
+        <p:txBody>
+          <a:bodyPr wrap="none">
+            <a:spAutoFit/>
+          </a:bodyPr>
+          <a:lstStyle/>
+          <a:p>
+            <a:r>
+              <a:rPr sz="1500" b="1">
+                <a:solidFill>
+                  <a:srgbClr val="01AEFD"/>
+                </a:solidFill>
+              </a:rPr>
+              <a:t>JAVASCRIPT</a:t>
+            </a:r>
+          </a:p>
+        </p:txBody>
+      </p:sp>
+      <p:sp>
+        <p:nvSpPr>
+          <p:cNvPr id="4" name="TextBox 3"/>
+          <p:cNvSpPr txBox="1"/>
+          <p:nvPr/>
+        </p:nvSpPr>
+        <p:spPr>
+          <a:xfrm>
+            <a:off x="822960" y="1828800"/>
+            <a:ext cx="10515600" cy="4206240"/>
+          </a:xfrm>
+          <a:prstGeom prst="rect">
+            <a:avLst/>
+          </a:prstGeom>
+          <a:noFill/>
+        </p:spPr>
+        <p:txBody>
+          <a:bodyPr wrap="square">
+            <a:spAutoFit/>
+          </a:bodyPr>
+          <a:lstStyle/>
+          <a:p>
+            <a:pPr>
+              <a:spcAft>
+                <a:spcPts val="1400"/>
+              </a:spcAft>
+            </a:pPr>
+            <a:r>
+              <a:rPr sz="2400">
+                <a:solidFill>
+                  <a:srgbClr val="1F2A37"/>
+                </a:solidFill>
+              </a:rPr>
+              <a:t>• A built-in that finds a box on the page by its id.</a:t>
+            </a:r>
+          </a:p>
+          <a:p>
+            <a:pPr>
+              <a:spcAft>
+                <a:spcPts val="1400"/>
+              </a:spcAft>
+            </a:pPr>
+            <a:r>
+              <a:rPr sz="2400">
+                <a:solidFill>
+                  <a:srgbClr val="1F2A37"/>
+                </a:solidFill>
+              </a:rPr>
+              <a:t>• Hands you the box, or null if it is not there.</a:t>
             </a:r>
           </a:p>
         </p:txBody>
@@ -5142,7 +4983,7 @@
                   <a:srgbClr val="01AEFD"/>
                 </a:solidFill>
               </a:rPr>
-              <a:t>All together in script.js</a:t>
+              <a:t>Type this into script.js   -   line 7</a:t>
             </a:r>
           </a:p>
         </p:txBody>
@@ -5186,7 +5027,7 @@
             <a:r>
               <a:rPr sz="1800">
                 <a:solidFill>
-                  <a:srgbClr val="7FE0A0"/>
+                  <a:srgbClr val="6D8C97"/>
                 </a:solidFill>
                 <a:latin typeface="Consolas"/>
               </a:rPr>
@@ -5211,7 +5052,7 @@
             <a:r>
               <a:rPr sz="1800">
                 <a:solidFill>
-                  <a:srgbClr val="7FE0A0"/>
+                  <a:srgbClr val="6D8C97"/>
                 </a:solidFill>
                 <a:latin typeface="Consolas"/>
               </a:rPr>
@@ -5236,7 +5077,7 @@
             <a:r>
               <a:rPr sz="1800">
                 <a:solidFill>
-                  <a:srgbClr val="7FE0A0"/>
+                  <a:srgbClr val="6D8C97"/>
                 </a:solidFill>
                 <a:latin typeface="Consolas"/>
               </a:rPr>
@@ -5261,7 +5102,7 @@
             <a:r>
               <a:rPr sz="1800">
                 <a:solidFill>
-                  <a:srgbClr val="7FE0A0"/>
+                  <a:srgbClr val="6D8C97"/>
                 </a:solidFill>
                 <a:latin typeface="Consolas"/>
               </a:rPr>
@@ -5286,7 +5127,7 @@
             <a:r>
               <a:rPr sz="1800">
                 <a:solidFill>
-                  <a:srgbClr val="7FE0A0"/>
+                  <a:srgbClr val="6D8C97"/>
                 </a:solidFill>
                 <a:latin typeface="Consolas"/>
               </a:rPr>
@@ -5311,7 +5152,7 @@
             <a:r>
               <a:rPr sz="1800">
                 <a:solidFill>
-                  <a:srgbClr val="7FE0A0"/>
+                  <a:srgbClr val="6D8C97"/>
                 </a:solidFill>
                 <a:latin typeface="Consolas"/>
               </a:rPr>
@@ -5373,7 +5214,7 @@
                   <a:srgbClr val="DCECEF"/>
                 </a:solidFill>
               </a:rPr>
-              <a:t>That is the whole piece. Check yours looks the same before moving on.</a:t>
+              <a:t>getElementById looks for the chat box; !== null is true only if it was found. Because the script is at the bottom, it prints true.</a:t>
             </a:r>
           </a:p>
         </p:txBody>
@@ -5579,6 +5420,14 @@
 <file path=ppt/slides/slide110.xml><?xml version="1.0" encoding="utf-8"?>
 <p:sld xmlns:a="http://schemas.openxmlformats.org/drawingml/2006/main" xmlns:p="http://schemas.openxmlformats.org/presentationml/2006/main" xmlns:r="http://schemas.openxmlformats.org/officeDocument/2006/relationships">
   <p:cSld>
+    <p:bg>
+      <p:bgPr>
+        <a:solidFill>
+          <a:srgbClr val="102127"/>
+        </a:solidFill>
+        <a:effectLst/>
+      </p:bgPr>
+    </p:bg>
     <p:spTree>
       <p:nvGrpSpPr>
         <p:cNvPr id="1" name=""/>
@@ -5588,26 +5437,33 @@
       <p:grpSpPr/>
       <p:sp>
         <p:nvSpPr>
-          <p:cNvPr id="2" name="Title 1"/>
-          <p:cNvSpPr>
-            <a:spLocks noGrp="1"/>
-          </p:cNvSpPr>
-          <p:nvPr>
-            <p:ph type="title"/>
-          </p:nvPr>
-        </p:nvSpPr>
-        <p:spPr/>
-        <p:txBody>
-          <a:bodyPr/>
-          <a:lstStyle/>
-          <a:p>
-            <a:r>
-              <a:rPr sz="3800" b="1">
-                <a:solidFill>
-                  <a:srgbClr val="1F2A37"/>
-                </a:solidFill>
-              </a:rPr>
-              <a:t>id = a name</a:t>
+          <p:cNvPr id="2" name="TextBox 1"/>
+          <p:cNvSpPr txBox="1"/>
+          <p:nvPr/>
+        </p:nvSpPr>
+        <p:spPr>
+          <a:xfrm>
+            <a:off x="502920" y="274320"/>
+            <a:ext cx="11155680" cy="548640"/>
+          </a:xfrm>
+          <a:prstGeom prst="rect">
+            <a:avLst/>
+          </a:prstGeom>
+          <a:noFill/>
+        </p:spPr>
+        <p:txBody>
+          <a:bodyPr wrap="none">
+            <a:spAutoFit/>
+          </a:bodyPr>
+          <a:lstStyle/>
+          <a:p>
+            <a:r>
+              <a:rPr sz="2200" b="1">
+                <a:solidFill>
+                  <a:srgbClr val="01AEFD"/>
+                </a:solidFill>
+              </a:rPr>
+              <a:t>All together in script.js</a:t>
             </a:r>
           </a:p>
         </p:txBody>
@@ -5620,8 +5476,206 @@
         </p:nvSpPr>
         <p:spPr>
           <a:xfrm>
-            <a:off x="822960" y="1828800"/>
-            <a:ext cx="10515600" cy="4206240"/>
+            <a:off x="502920" y="960120"/>
+            <a:ext cx="11155680" cy="4297680"/>
+          </a:xfrm>
+          <a:prstGeom prst="rect">
+            <a:avLst/>
+          </a:prstGeom>
+          <a:noFill/>
+        </p:spPr>
+        <p:txBody>
+          <a:bodyPr wrap="none">
+            <a:spAutoFit/>
+          </a:bodyPr>
+          <a:lstStyle/>
+          <a:p>
+            <a:pPr>
+              <a:spcAft>
+                <a:spcPts val="0"/>
+              </a:spcAft>
+            </a:pPr>
+            <a:r>
+              <a:rPr sz="1800">
+                <a:solidFill>
+                  <a:srgbClr val="6D8C97"/>
+                </a:solidFill>
+                <a:latin typeface="Consolas"/>
+              </a:rPr>
+              <a:t>   1  </a:t>
+            </a:r>
+            <a:r>
+              <a:rPr sz="1800">
+                <a:solidFill>
+                  <a:srgbClr val="7FE0A0"/>
+                </a:solidFill>
+                <a:latin typeface="Consolas"/>
+              </a:rPr>
+              <a:t>// Week 1: prove the JavaScript file is really running.</a:t>
+            </a:r>
+          </a:p>
+          <a:p>
+            <a:pPr>
+              <a:spcAft>
+                <a:spcPts val="0"/>
+              </a:spcAft>
+            </a:pPr>
+            <a:r>
+              <a:rPr sz="1800">
+                <a:solidFill>
+                  <a:srgbClr val="6D8C97"/>
+                </a:solidFill>
+                <a:latin typeface="Consolas"/>
+              </a:rPr>
+              <a:t>   2  </a:t>
+            </a:r>
+            <a:r>
+              <a:rPr sz="1800">
+                <a:solidFill>
+                  <a:srgbClr val="7FE0A0"/>
+                </a:solidFill>
+                <a:latin typeface="Consolas"/>
+              </a:rPr>
+              <a:t>console.log('My AI companion is starting up.');</a:t>
+            </a:r>
+          </a:p>
+          <a:p>
+            <a:pPr>
+              <a:spcAft>
+                <a:spcPts val="0"/>
+              </a:spcAft>
+            </a:pPr>
+            <a:r>
+              <a:rPr sz="1800">
+                <a:solidFill>
+                  <a:srgbClr val="6D8C97"/>
+                </a:solidFill>
+                <a:latin typeface="Consolas"/>
+              </a:rPr>
+              <a:t>   3  </a:t>
+            </a:r>
+            <a:r>
+              <a:rPr sz="1800">
+                <a:solidFill>
+                  <a:srgbClr val="7FE0A0"/>
+                </a:solidFill>
+                <a:latin typeface="Consolas"/>
+              </a:rPr>
+              <a:t> </a:t>
+            </a:r>
+          </a:p>
+          <a:p>
+            <a:pPr>
+              <a:spcAft>
+                <a:spcPts val="0"/>
+              </a:spcAft>
+            </a:pPr>
+            <a:r>
+              <a:rPr sz="1800">
+                <a:solidFill>
+                  <a:srgbClr val="6D8C97"/>
+                </a:solidFill>
+                <a:latin typeface="Consolas"/>
+              </a:rPr>
+              <a:t>   4  </a:t>
+            </a:r>
+            <a:r>
+              <a:rPr sz="1800">
+                <a:solidFill>
+                  <a:srgbClr val="7FE0A0"/>
+                </a:solidFill>
+                <a:latin typeface="Consolas"/>
+              </a:rPr>
+              <a:t>// Can this script see the page yet? Down here, yes.</a:t>
+            </a:r>
+          </a:p>
+          <a:p>
+            <a:pPr>
+              <a:spcAft>
+                <a:spcPts val="0"/>
+              </a:spcAft>
+            </a:pPr>
+            <a:r>
+              <a:rPr sz="1800">
+                <a:solidFill>
+                  <a:srgbClr val="6D8C97"/>
+                </a:solidFill>
+                <a:latin typeface="Consolas"/>
+              </a:rPr>
+              <a:t>   5  </a:t>
+            </a:r>
+            <a:r>
+              <a:rPr sz="1800">
+                <a:solidFill>
+                  <a:srgbClr val="7FE0A0"/>
+                </a:solidFill>
+                <a:latin typeface="Consolas"/>
+              </a:rPr>
+              <a:t>// Move the &lt;script&gt; tag to the TOP of index.html and this prints false,</a:t>
+            </a:r>
+          </a:p>
+          <a:p>
+            <a:pPr>
+              <a:spcAft>
+                <a:spcPts val="0"/>
+              </a:spcAft>
+            </a:pPr>
+            <a:r>
+              <a:rPr sz="1800">
+                <a:solidFill>
+                  <a:srgbClr val="6D8C97"/>
+                </a:solidFill>
+                <a:latin typeface="Consolas"/>
+              </a:rPr>
+              <a:t>   6  </a:t>
+            </a:r>
+            <a:r>
+              <a:rPr sz="1800">
+                <a:solidFill>
+                  <a:srgbClr val="7FE0A0"/>
+                </a:solidFill>
+                <a:latin typeface="Consolas"/>
+              </a:rPr>
+              <a:t>// because the boxes have not been made yet. That is why it goes last.</a:t>
+            </a:r>
+          </a:p>
+          <a:p>
+            <a:pPr>
+              <a:spcAft>
+                <a:spcPts val="0"/>
+              </a:spcAft>
+            </a:pPr>
+            <a:r>
+              <a:rPr sz="1800">
+                <a:solidFill>
+                  <a:srgbClr val="6D8C97"/>
+                </a:solidFill>
+                <a:latin typeface="Consolas"/>
+              </a:rPr>
+              <a:t>   7  </a:t>
+            </a:r>
+            <a:r>
+              <a:rPr sz="1800">
+                <a:solidFill>
+                  <a:srgbClr val="7FE0A0"/>
+                </a:solidFill>
+                <a:latin typeface="Consolas"/>
+              </a:rPr>
+              <a:t>console.log('Can I see the chat box?', document.getElementById('chat') !== null);</a:t>
+            </a:r>
+          </a:p>
+        </p:txBody>
+      </p:sp>
+      <p:sp>
+        <p:nvSpPr>
+          <p:cNvPr id="4" name="TextBox 3"/>
+          <p:cNvSpPr txBox="1"/>
+          <p:nvPr/>
+        </p:nvSpPr>
+        <p:spPr>
+          <a:xfrm>
+            <a:off x="548640" y="5623560"/>
+            <a:ext cx="11064240" cy="1051560"/>
           </a:xfrm>
           <a:prstGeom prst="rect">
             <a:avLst/>
@@ -5634,48 +5688,13 @@
           </a:bodyPr>
           <a:lstStyle/>
           <a:p>
-            <a:pPr>
-              <a:spcAft>
-                <a:spcPts val="1400"/>
-              </a:spcAft>
-            </a:pPr>
-            <a:r>
-              <a:rPr sz="2400">
-                <a:solidFill>
-                  <a:srgbClr val="1F2A37"/>
-                </a:solidFill>
-              </a:rPr>
-              <a:t>• &lt;div id="chat"&gt;</a:t>
-            </a:r>
-          </a:p>
-          <a:p>
-            <a:pPr>
-              <a:spcAft>
-                <a:spcPts val="1400"/>
-              </a:spcAft>
-            </a:pPr>
-            <a:r>
-              <a:rPr sz="2400">
-                <a:solidFill>
-                  <a:srgbClr val="1F2A37"/>
-                </a:solidFill>
-              </a:rPr>
-              <a:t>• Next week JavaScript uses that name to find the box</a:t>
-            </a:r>
-          </a:p>
-          <a:p>
-            <a:pPr>
-              <a:spcAft>
-                <a:spcPts val="1400"/>
-              </a:spcAft>
-            </a:pPr>
-            <a:r>
-              <a:rPr sz="2400">
-                <a:solidFill>
-                  <a:srgbClr val="1F2A37"/>
-                </a:solidFill>
-              </a:rPr>
-              <a:t>• Names must be spelled exactly the same in both files</a:t>
+            <a:r>
+              <a:rPr sz="2000">
+                <a:solidFill>
+                  <a:srgbClr val="DCECEF"/>
+                </a:solidFill>
+              </a:rPr>
+              <a:t>That is the whole piece. Check yours looks the same before moving on.</a:t>
             </a:r>
           </a:p>
         </p:txBody>
@@ -5719,7 +5738,7 @@
                   <a:srgbClr val="1F2A37"/>
                 </a:solidFill>
               </a:rPr>
-              <a:t>Checkpoint: your page</a:t>
+              <a:t>id = a name</a:t>
             </a:r>
           </a:p>
         </p:txBody>
@@ -5727,39 +5746,6 @@
       <p:sp>
         <p:nvSpPr>
           <p:cNvPr id="3" name="TextBox 2"/>
-          <p:cNvSpPr txBox="1"/>
-          <p:nvPr/>
-        </p:nvSpPr>
-        <p:spPr>
-          <a:xfrm>
-            <a:off x="868680" y="502920"/>
-            <a:ext cx="5486400" cy="457200"/>
-          </a:xfrm>
-          <a:prstGeom prst="rect">
-            <a:avLst/>
-          </a:prstGeom>
-          <a:noFill/>
-        </p:spPr>
-        <p:txBody>
-          <a:bodyPr wrap="none">
-            <a:spAutoFit/>
-          </a:bodyPr>
-          <a:lstStyle/>
-          <a:p>
-            <a:r>
-              <a:rPr sz="1500" b="1">
-                <a:solidFill>
-                  <a:srgbClr val="01AEFD"/>
-                </a:solidFill>
-              </a:rPr>
-              <a:t>CHECKPOINT - RUN IT</a:t>
-            </a:r>
-          </a:p>
-        </p:txBody>
-      </p:sp>
-      <p:sp>
-        <p:nvSpPr>
-          <p:cNvPr id="4" name="TextBox 3"/>
           <p:cNvSpPr txBox="1"/>
           <p:nvPr/>
         </p:nvSpPr>
@@ -5785,12 +5771,12 @@
               </a:spcAft>
             </a:pPr>
             <a:r>
-              <a:rPr sz="2800">
-                <a:solidFill>
-                  <a:srgbClr val="01AEFD"/>
-                </a:solidFill>
-              </a:rPr>
-              <a:t>Press Run. You should see the title, an empty white chat box, and a text box with a blue Send button - all styled. Clicking Send does nothing yet; that is next week.</a:t>
+              <a:rPr sz="2400">
+                <a:solidFill>
+                  <a:srgbClr val="1F2A37"/>
+                </a:solidFill>
+              </a:rPr>
+              <a:t>• &lt;div id="chat"&gt;</a:t>
             </a:r>
           </a:p>
           <a:p>
@@ -5805,7 +5791,7 @@
                   <a:srgbClr val="1F2A37"/>
                 </a:solidFill>
               </a:rPr>
-              <a:t>• Run it in the classroom, or press Show the output in the web deck.</a:t>
+              <a:t>• Next week JavaScript uses that name to find the box</a:t>
             </a:r>
           </a:p>
           <a:p>
@@ -5820,7 +5806,7 @@
                   <a:srgbClr val="1F2A37"/>
                 </a:solidFill>
               </a:rPr>
-              <a:t>• Everyone's screen should match this.</a:t>
+              <a:t>• Names must be spelled exactly the same in both files</a:t>
             </a:r>
           </a:p>
         </p:txBody>
@@ -5834,6 +5820,151 @@
 </file>
 
 <file path=ppt/slides/slide112.xml><?xml version="1.0" encoding="utf-8"?>
+<p:sld xmlns:a="http://schemas.openxmlformats.org/drawingml/2006/main" xmlns:p="http://schemas.openxmlformats.org/presentationml/2006/main" xmlns:r="http://schemas.openxmlformats.org/officeDocument/2006/relationships">
+  <p:cSld>
+    <p:spTree>
+      <p:nvGrpSpPr>
+        <p:cNvPr id="1" name=""/>
+        <p:cNvGrpSpPr/>
+        <p:nvPr/>
+      </p:nvGrpSpPr>
+      <p:grpSpPr/>
+      <p:sp>
+        <p:nvSpPr>
+          <p:cNvPr id="2" name="Title 1"/>
+          <p:cNvSpPr>
+            <a:spLocks noGrp="1"/>
+          </p:cNvSpPr>
+          <p:nvPr>
+            <p:ph type="title"/>
+          </p:nvPr>
+        </p:nvSpPr>
+        <p:spPr/>
+        <p:txBody>
+          <a:bodyPr/>
+          <a:lstStyle/>
+          <a:p>
+            <a:r>
+              <a:rPr sz="3800" b="1">
+                <a:solidFill>
+                  <a:srgbClr val="1F2A37"/>
+                </a:solidFill>
+              </a:rPr>
+              <a:t>Checkpoint: your page</a:t>
+            </a:r>
+          </a:p>
+        </p:txBody>
+      </p:sp>
+      <p:sp>
+        <p:nvSpPr>
+          <p:cNvPr id="3" name="TextBox 2"/>
+          <p:cNvSpPr txBox="1"/>
+          <p:nvPr/>
+        </p:nvSpPr>
+        <p:spPr>
+          <a:xfrm>
+            <a:off x="868680" y="502920"/>
+            <a:ext cx="5486400" cy="457200"/>
+          </a:xfrm>
+          <a:prstGeom prst="rect">
+            <a:avLst/>
+          </a:prstGeom>
+          <a:noFill/>
+        </p:spPr>
+        <p:txBody>
+          <a:bodyPr wrap="none">
+            <a:spAutoFit/>
+          </a:bodyPr>
+          <a:lstStyle/>
+          <a:p>
+            <a:r>
+              <a:rPr sz="1500" b="1">
+                <a:solidFill>
+                  <a:srgbClr val="01AEFD"/>
+                </a:solidFill>
+              </a:rPr>
+              <a:t>CHECKPOINT - RUN IT</a:t>
+            </a:r>
+          </a:p>
+        </p:txBody>
+      </p:sp>
+      <p:sp>
+        <p:nvSpPr>
+          <p:cNvPr id="4" name="TextBox 3"/>
+          <p:cNvSpPr txBox="1"/>
+          <p:nvPr/>
+        </p:nvSpPr>
+        <p:spPr>
+          <a:xfrm>
+            <a:off x="822960" y="1828800"/>
+            <a:ext cx="10515600" cy="4206240"/>
+          </a:xfrm>
+          <a:prstGeom prst="rect">
+            <a:avLst/>
+          </a:prstGeom>
+          <a:noFill/>
+        </p:spPr>
+        <p:txBody>
+          <a:bodyPr wrap="square">
+            <a:spAutoFit/>
+          </a:bodyPr>
+          <a:lstStyle/>
+          <a:p>
+            <a:pPr>
+              <a:spcAft>
+                <a:spcPts val="1400"/>
+              </a:spcAft>
+            </a:pPr>
+            <a:r>
+              <a:rPr sz="2800">
+                <a:solidFill>
+                  <a:srgbClr val="01AEFD"/>
+                </a:solidFill>
+              </a:rPr>
+              <a:t>Press Run. You should see the title, an empty white chat box, and a text box with a blue Send button - all styled. Clicking Send does nothing yet; that is next week.</a:t>
+            </a:r>
+          </a:p>
+          <a:p>
+            <a:pPr>
+              <a:spcAft>
+                <a:spcPts val="1400"/>
+              </a:spcAft>
+            </a:pPr>
+            <a:r>
+              <a:rPr sz="2400">
+                <a:solidFill>
+                  <a:srgbClr val="1F2A37"/>
+                </a:solidFill>
+              </a:rPr>
+              <a:t>• Run it in the classroom, or press Show the output in the web deck.</a:t>
+            </a:r>
+          </a:p>
+          <a:p>
+            <a:pPr>
+              <a:spcAft>
+                <a:spcPts val="1400"/>
+              </a:spcAft>
+            </a:pPr>
+            <a:r>
+              <a:rPr sz="2400">
+                <a:solidFill>
+                  <a:srgbClr val="1F2A37"/>
+                </a:solidFill>
+              </a:rPr>
+              <a:t>• Everyone's screen should match this.</a:t>
+            </a:r>
+          </a:p>
+        </p:txBody>
+      </p:sp>
+    </p:spTree>
+  </p:cSld>
+  <p:clrMapOvr>
+    <a:masterClrMapping/>
+  </p:clrMapOvr>
+</p:sld>
+</file>
+
+<file path=ppt/slides/slide113.xml><?xml version="1.0" encoding="utf-8"?>
 <p:sld xmlns:a="http://schemas.openxmlformats.org/drawingml/2006/main" xmlns:p="http://schemas.openxmlformats.org/presentationml/2006/main" xmlns:r="http://schemas.openxmlformats.org/officeDocument/2006/relationships">
   <p:cSld>
     <p:spTree>
@@ -18336,14 +18467,6 @@
 <file path=ppt/slides/slide72.xml><?xml version="1.0" encoding="utf-8"?>
 <p:sld xmlns:a="http://schemas.openxmlformats.org/drawingml/2006/main" xmlns:p="http://schemas.openxmlformats.org/presentationml/2006/main" xmlns:r="http://schemas.openxmlformats.org/officeDocument/2006/relationships">
   <p:cSld>
-    <p:bg>
-      <p:bgPr>
-        <a:solidFill>
-          <a:srgbClr val="102127"/>
-        </a:solidFill>
-        <a:effectLst/>
-      </p:bgPr>
-    </p:bg>
     <p:spTree>
       <p:nvGrpSpPr>
         <p:cNvPr id="1" name=""/>
@@ -18353,14 +18476,40 @@
       <p:grpSpPr/>
       <p:sp>
         <p:nvSpPr>
-          <p:cNvPr id="2" name="TextBox 1"/>
-          <p:cNvSpPr txBox="1"/>
-          <p:nvPr/>
-        </p:nvSpPr>
-        <p:spPr>
-          <a:xfrm>
-            <a:off x="502920" y="274320"/>
-            <a:ext cx="11155680" cy="548640"/>
+          <p:cNvPr id="2" name="Title 1"/>
+          <p:cNvSpPr>
+            <a:spLocks noGrp="1"/>
+          </p:cNvSpPr>
+          <p:nvPr>
+            <p:ph type="title"/>
+          </p:nvPr>
+        </p:nvSpPr>
+        <p:spPr/>
+        <p:txBody>
+          <a:bodyPr/>
+          <a:lstStyle/>
+          <a:p>
+            <a:r>
+              <a:rPr sz="3800" b="1">
+                <a:solidFill>
+                  <a:srgbClr val="1F2A37"/>
+                </a:solidFill>
+              </a:rPr>
+              <a:t>margin-top</a:t>
+            </a:r>
+          </a:p>
+        </p:txBody>
+      </p:sp>
+      <p:sp>
+        <p:nvSpPr>
+          <p:cNvPr id="3" name="TextBox 2"/>
+          <p:cNvSpPr txBox="1"/>
+          <p:nvPr/>
+        </p:nvSpPr>
+        <p:spPr>
+          <a:xfrm>
+            <a:off x="868680" y="502920"/>
+            <a:ext cx="5486400" cy="457200"/>
           </a:xfrm>
           <a:prstGeom prst="rect">
             <a:avLst/>
@@ -18374,60 +18523,12 @@
           <a:lstStyle/>
           <a:p>
             <a:r>
-              <a:rPr sz="2200" b="1">
+              <a:rPr sz="1500" b="1">
                 <a:solidFill>
                   <a:srgbClr val="01AEFD"/>
                 </a:solidFill>
               </a:rPr>
-              <a:t>Type this into style.css   -   line 21</a:t>
-            </a:r>
-          </a:p>
-        </p:txBody>
-      </p:sp>
-      <p:sp>
-        <p:nvSpPr>
-          <p:cNvPr id="3" name="TextBox 2"/>
-          <p:cNvSpPr txBox="1"/>
-          <p:nvPr/>
-        </p:nvSpPr>
-        <p:spPr>
-          <a:xfrm>
-            <a:off x="502920" y="960120"/>
-            <a:ext cx="11155680" cy="4297680"/>
-          </a:xfrm>
-          <a:prstGeom prst="rect">
-            <a:avLst/>
-          </a:prstGeom>
-          <a:noFill/>
-        </p:spPr>
-        <p:txBody>
-          <a:bodyPr wrap="none">
-            <a:spAutoFit/>
-          </a:bodyPr>
-          <a:lstStyle/>
-          <a:p>
-            <a:pPr>
-              <a:spcAft>
-                <a:spcPts val="0"/>
-              </a:spcAft>
-            </a:pPr>
-            <a:r>
-              <a:rPr sz="1800">
-                <a:solidFill>
-                  <a:srgbClr val="6D8C97"/>
-                </a:solidFill>
-                <a:latin typeface="Consolas"/>
-              </a:rPr>
-              <a:t>  21  </a:t>
-            </a:r>
-            <a:r>
-              <a:rPr sz="1800">
-                <a:solidFill>
-                  <a:srgbClr val="7FE0A0"/>
-                </a:solidFill>
-                <a:latin typeface="Consolas"/>
-              </a:rPr>
-              <a:t>.composer { display: flex; gap: 8px; margin-top: 12px; }</a:t>
+              <a:t>CSS</a:t>
             </a:r>
           </a:p>
         </p:txBody>
@@ -18440,8 +18541,8 @@
         </p:nvSpPr>
         <p:spPr>
           <a:xfrm>
-            <a:off x="548640" y="5623560"/>
-            <a:ext cx="11064240" cy="1051560"/>
+            <a:off x="822960" y="1828800"/>
+            <a:ext cx="10515600" cy="4206240"/>
           </a:xfrm>
           <a:prstGeom prst="rect">
             <a:avLst/>
@@ -18454,13 +18555,18 @@
           </a:bodyPr>
           <a:lstStyle/>
           <a:p>
-            <a:r>
-              <a:rPr sz="2000">
-                <a:solidFill>
-                  <a:srgbClr val="DCECEF"/>
-                </a:solidFill>
-              </a:rPr>
-              <a:t>Lays the form's children in a row with a small gap and a little space above. display: flex is the key part.</a:t>
+            <a:pPr>
+              <a:spcAft>
+                <a:spcPts val="1400"/>
+              </a:spcAft>
+            </a:pPr>
+            <a:r>
+              <a:rPr sz="2400">
+                <a:solidFill>
+                  <a:srgbClr val="1F2A37"/>
+                </a:solidFill>
+              </a:rPr>
+              <a:t>• Space above the box, pushing it down from what is above it.</a:t>
             </a:r>
           </a:p>
         </p:txBody>
@@ -18519,7 +18625,7 @@
                   <a:srgbClr val="01AEFD"/>
                 </a:solidFill>
               </a:rPr>
-              <a:t>Type this into style.css   -   line 22</a:t>
+              <a:t>Type this into style.css   -   line 21</a:t>
             </a:r>
           </a:p>
         </p:txBody>
@@ -18563,36 +18669,11 @@
             <a:r>
               <a:rPr sz="1800">
                 <a:solidFill>
-                  <a:srgbClr val="6D8C97"/>
+                  <a:srgbClr val="7FE0A0"/>
                 </a:solidFill>
                 <a:latin typeface="Consolas"/>
               </a:rPr>
               <a:t>.composer { display: flex; gap: 8px; margin-top: 12px; }</a:t>
-            </a:r>
-          </a:p>
-          <a:p>
-            <a:pPr>
-              <a:spcAft>
-                <a:spcPts val="0"/>
-              </a:spcAft>
-            </a:pPr>
-            <a:r>
-              <a:rPr sz="1800">
-                <a:solidFill>
-                  <a:srgbClr val="6D8C97"/>
-                </a:solidFill>
-                <a:latin typeface="Consolas"/>
-              </a:rPr>
-              <a:t>  22  </a:t>
-            </a:r>
-            <a:r>
-              <a:rPr sz="1800">
-                <a:solidFill>
-                  <a:srgbClr val="7FE0A0"/>
-                </a:solidFill>
-                <a:latin typeface="Consolas"/>
-              </a:rPr>
-              <a:t>.composer input {</a:t>
             </a:r>
           </a:p>
         </p:txBody>
@@ -18625,7 +18706,7 @@
                   <a:srgbClr val="DCECEF"/>
                 </a:solidFill>
               </a:rPr>
-              <a:t>Starts a rule for the input inside .composer.</a:t>
+              <a:t>Lays the form's children in a row with a small gap and a little space above. display: flex is the key part.</a:t>
             </a:r>
           </a:p>
         </p:txBody>
@@ -18639,136 +18720,6 @@
 </file>
 
 <file path=ppt/slides/slide74.xml><?xml version="1.0" encoding="utf-8"?>
-<p:sld xmlns:a="http://schemas.openxmlformats.org/drawingml/2006/main" xmlns:p="http://schemas.openxmlformats.org/presentationml/2006/main" xmlns:r="http://schemas.openxmlformats.org/officeDocument/2006/relationships">
-  <p:cSld>
-    <p:spTree>
-      <p:nvGrpSpPr>
-        <p:cNvPr id="1" name=""/>
-        <p:cNvGrpSpPr/>
-        <p:nvPr/>
-      </p:nvGrpSpPr>
-      <p:grpSpPr/>
-      <p:sp>
-        <p:nvSpPr>
-          <p:cNvPr id="2" name="Title 1"/>
-          <p:cNvSpPr>
-            <a:spLocks noGrp="1"/>
-          </p:cNvSpPr>
-          <p:nvPr>
-            <p:ph type="title"/>
-          </p:nvPr>
-        </p:nvSpPr>
-        <p:spPr/>
-        <p:txBody>
-          <a:bodyPr/>
-          <a:lstStyle/>
-          <a:p>
-            <a:r>
-              <a:rPr sz="3800" b="1">
-                <a:solidFill>
-                  <a:srgbClr val="1F2A37"/>
-                </a:solidFill>
-              </a:rPr>
-              <a:t>flex: 1</a:t>
-            </a:r>
-          </a:p>
-        </p:txBody>
-      </p:sp>
-      <p:sp>
-        <p:nvSpPr>
-          <p:cNvPr id="3" name="TextBox 2"/>
-          <p:cNvSpPr txBox="1"/>
-          <p:nvPr/>
-        </p:nvSpPr>
-        <p:spPr>
-          <a:xfrm>
-            <a:off x="868680" y="502920"/>
-            <a:ext cx="5486400" cy="457200"/>
-          </a:xfrm>
-          <a:prstGeom prst="rect">
-            <a:avLst/>
-          </a:prstGeom>
-          <a:noFill/>
-        </p:spPr>
-        <p:txBody>
-          <a:bodyPr wrap="none">
-            <a:spAutoFit/>
-          </a:bodyPr>
-          <a:lstStyle/>
-          <a:p>
-            <a:r>
-              <a:rPr sz="1500" b="1">
-                <a:solidFill>
-                  <a:srgbClr val="01AEFD"/>
-                </a:solidFill>
-              </a:rPr>
-              <a:t>CSS</a:t>
-            </a:r>
-          </a:p>
-        </p:txBody>
-      </p:sp>
-      <p:sp>
-        <p:nvSpPr>
-          <p:cNvPr id="4" name="TextBox 3"/>
-          <p:cNvSpPr txBox="1"/>
-          <p:nvPr/>
-        </p:nvSpPr>
-        <p:spPr>
-          <a:xfrm>
-            <a:off x="822960" y="1828800"/>
-            <a:ext cx="10515600" cy="4206240"/>
-          </a:xfrm>
-          <a:prstGeom prst="rect">
-            <a:avLst/>
-          </a:prstGeom>
-          <a:noFill/>
-        </p:spPr>
-        <p:txBody>
-          <a:bodyPr wrap="square">
-            <a:spAutoFit/>
-          </a:bodyPr>
-          <a:lstStyle/>
-          <a:p>
-            <a:pPr>
-              <a:spcAft>
-                <a:spcPts val="1400"/>
-              </a:spcAft>
-            </a:pPr>
-            <a:r>
-              <a:rPr sz="2400">
-                <a:solidFill>
-                  <a:srgbClr val="1F2A37"/>
-                </a:solidFill>
-              </a:rPr>
-              <a:t>• Tells one flex child to stretch and fill the leftover space.</a:t>
-            </a:r>
-          </a:p>
-          <a:p>
-            <a:pPr>
-              <a:spcAft>
-                <a:spcPts val="1400"/>
-              </a:spcAft>
-            </a:pPr>
-            <a:r>
-              <a:rPr sz="2400">
-                <a:solidFill>
-                  <a:srgbClr val="1F2A37"/>
-                </a:solidFill>
-              </a:rPr>
-              <a:t>• The text box grows; the button stays its own size.</a:t>
-            </a:r>
-          </a:p>
-        </p:txBody>
-      </p:sp>
-    </p:spTree>
-  </p:cSld>
-  <p:clrMapOvr>
-    <a:masterClrMapping/>
-  </p:clrMapOvr>
-</p:sld>
-</file>
-
-<file path=ppt/slides/slide75.xml><?xml version="1.0" encoding="utf-8"?>
 <p:sld xmlns:a="http://schemas.openxmlformats.org/drawingml/2006/main" xmlns:p="http://schemas.openxmlformats.org/presentationml/2006/main" xmlns:r="http://schemas.openxmlformats.org/officeDocument/2006/relationships">
   <p:cSld>
     <p:bg>
@@ -18814,7 +18765,7 @@
                   <a:srgbClr val="01AEFD"/>
                 </a:solidFill>
               </a:rPr>
-              <a:t>Type this into style.css   -   line 23</a:t>
+              <a:t>Type this into style.css   -   line 22</a:t>
             </a:r>
           </a:p>
         </p:txBody>
@@ -18883,36 +18834,11 @@
             <a:r>
               <a:rPr sz="1800">
                 <a:solidFill>
-                  <a:srgbClr val="6D8C97"/>
+                  <a:srgbClr val="7FE0A0"/>
                 </a:solidFill>
                 <a:latin typeface="Consolas"/>
               </a:rPr>
               <a:t>.composer input {</a:t>
-            </a:r>
-          </a:p>
-          <a:p>
-            <a:pPr>
-              <a:spcAft>
-                <a:spcPts val="0"/>
-              </a:spcAft>
-            </a:pPr>
-            <a:r>
-              <a:rPr sz="1800">
-                <a:solidFill>
-                  <a:srgbClr val="6D8C97"/>
-                </a:solidFill>
-                <a:latin typeface="Consolas"/>
-              </a:rPr>
-              <a:t>  23  </a:t>
-            </a:r>
-            <a:r>
-              <a:rPr sz="1800">
-                <a:solidFill>
-                  <a:srgbClr val="7FE0A0"/>
-                </a:solidFill>
-                <a:latin typeface="Consolas"/>
-              </a:rPr>
-              <a:t>  flex: 1;</a:t>
             </a:r>
           </a:p>
         </p:txBody>
@@ -18945,7 +18871,137 @@
                   <a:srgbClr val="DCECEF"/>
                 </a:solidFill>
               </a:rPr>
-              <a:t>flex: 1 makes the text box stretch to fill the space the button leaves.</a:t>
+              <a:t>Starts a rule for the input inside .composer.</a:t>
+            </a:r>
+          </a:p>
+        </p:txBody>
+      </p:sp>
+    </p:spTree>
+  </p:cSld>
+  <p:clrMapOvr>
+    <a:masterClrMapping/>
+  </p:clrMapOvr>
+</p:sld>
+</file>
+
+<file path=ppt/slides/slide75.xml><?xml version="1.0" encoding="utf-8"?>
+<p:sld xmlns:a="http://schemas.openxmlformats.org/drawingml/2006/main" xmlns:p="http://schemas.openxmlformats.org/presentationml/2006/main" xmlns:r="http://schemas.openxmlformats.org/officeDocument/2006/relationships">
+  <p:cSld>
+    <p:spTree>
+      <p:nvGrpSpPr>
+        <p:cNvPr id="1" name=""/>
+        <p:cNvGrpSpPr/>
+        <p:nvPr/>
+      </p:nvGrpSpPr>
+      <p:grpSpPr/>
+      <p:sp>
+        <p:nvSpPr>
+          <p:cNvPr id="2" name="Title 1"/>
+          <p:cNvSpPr>
+            <a:spLocks noGrp="1"/>
+          </p:cNvSpPr>
+          <p:nvPr>
+            <p:ph type="title"/>
+          </p:nvPr>
+        </p:nvSpPr>
+        <p:spPr/>
+        <p:txBody>
+          <a:bodyPr/>
+          <a:lstStyle/>
+          <a:p>
+            <a:r>
+              <a:rPr sz="3800" b="1">
+                <a:solidFill>
+                  <a:srgbClr val="1F2A37"/>
+                </a:solidFill>
+              </a:rPr>
+              <a:t>flex: 1</a:t>
+            </a:r>
+          </a:p>
+        </p:txBody>
+      </p:sp>
+      <p:sp>
+        <p:nvSpPr>
+          <p:cNvPr id="3" name="TextBox 2"/>
+          <p:cNvSpPr txBox="1"/>
+          <p:nvPr/>
+        </p:nvSpPr>
+        <p:spPr>
+          <a:xfrm>
+            <a:off x="868680" y="502920"/>
+            <a:ext cx="5486400" cy="457200"/>
+          </a:xfrm>
+          <a:prstGeom prst="rect">
+            <a:avLst/>
+          </a:prstGeom>
+          <a:noFill/>
+        </p:spPr>
+        <p:txBody>
+          <a:bodyPr wrap="none">
+            <a:spAutoFit/>
+          </a:bodyPr>
+          <a:lstStyle/>
+          <a:p>
+            <a:r>
+              <a:rPr sz="1500" b="1">
+                <a:solidFill>
+                  <a:srgbClr val="01AEFD"/>
+                </a:solidFill>
+              </a:rPr>
+              <a:t>CSS</a:t>
+            </a:r>
+          </a:p>
+        </p:txBody>
+      </p:sp>
+      <p:sp>
+        <p:nvSpPr>
+          <p:cNvPr id="4" name="TextBox 3"/>
+          <p:cNvSpPr txBox="1"/>
+          <p:nvPr/>
+        </p:nvSpPr>
+        <p:spPr>
+          <a:xfrm>
+            <a:off x="822960" y="1828800"/>
+            <a:ext cx="10515600" cy="4206240"/>
+          </a:xfrm>
+          <a:prstGeom prst="rect">
+            <a:avLst/>
+          </a:prstGeom>
+          <a:noFill/>
+        </p:spPr>
+        <p:txBody>
+          <a:bodyPr wrap="square">
+            <a:spAutoFit/>
+          </a:bodyPr>
+          <a:lstStyle/>
+          <a:p>
+            <a:pPr>
+              <a:spcAft>
+                <a:spcPts val="1400"/>
+              </a:spcAft>
+            </a:pPr>
+            <a:r>
+              <a:rPr sz="2400">
+                <a:solidFill>
+                  <a:srgbClr val="1F2A37"/>
+                </a:solidFill>
+              </a:rPr>
+              <a:t>• Tells one flex child to stretch and fill the leftover space.</a:t>
+            </a:r>
+          </a:p>
+          <a:p>
+            <a:pPr>
+              <a:spcAft>
+                <a:spcPts val="1400"/>
+              </a:spcAft>
+            </a:pPr>
+            <a:r>
+              <a:rPr sz="2400">
+                <a:solidFill>
+                  <a:srgbClr val="1F2A37"/>
+                </a:solidFill>
+              </a:rPr>
+              <a:t>• The text box grows; the button stays its own size.</a:t>
             </a:r>
           </a:p>
         </p:txBody>
@@ -19004,7 +19060,7 @@
                   <a:srgbClr val="01AEFD"/>
                 </a:solidFill>
               </a:rPr>
-              <a:t>Type this into style.css   -   line 24</a:t>
+              <a:t>Type this into style.css   -   line 23</a:t>
             </a:r>
           </a:p>
         </p:txBody>
@@ -19098,36 +19154,11 @@
             <a:r>
               <a:rPr sz="1800">
                 <a:solidFill>
-                  <a:srgbClr val="6D8C97"/>
+                  <a:srgbClr val="7FE0A0"/>
                 </a:solidFill>
                 <a:latin typeface="Consolas"/>
               </a:rPr>
               <a:t>  flex: 1;</a:t>
-            </a:r>
-          </a:p>
-          <a:p>
-            <a:pPr>
-              <a:spcAft>
-                <a:spcPts val="0"/>
-              </a:spcAft>
-            </a:pPr>
-            <a:r>
-              <a:rPr sz="1800">
-                <a:solidFill>
-                  <a:srgbClr val="6D8C97"/>
-                </a:solidFill>
-                <a:latin typeface="Consolas"/>
-              </a:rPr>
-              <a:t>  24  </a:t>
-            </a:r>
-            <a:r>
-              <a:rPr sz="1800">
-                <a:solidFill>
-                  <a:srgbClr val="7FE0A0"/>
-                </a:solidFill>
-                <a:latin typeface="Consolas"/>
-              </a:rPr>
-              <a:t>  padding: 11px;</a:t>
             </a:r>
           </a:p>
         </p:txBody>
@@ -19160,7 +19191,7 @@
                   <a:srgbClr val="DCECEF"/>
                 </a:solidFill>
               </a:rPr>
-              <a:t>Space inside the text box.</a:t>
+              <a:t>flex: 1 makes the text box stretch to fill the space the button leaves.</a:t>
             </a:r>
           </a:p>
         </p:txBody>
@@ -19219,7 +19250,7 @@
                   <a:srgbClr val="01AEFD"/>
                 </a:solidFill>
               </a:rPr>
-              <a:t>Type this into style.css   -   line 25</a:t>
+              <a:t>Type this into style.css   -   line 24</a:t>
             </a:r>
           </a:p>
         </p:txBody>
@@ -19338,36 +19369,11 @@
             <a:r>
               <a:rPr sz="1800">
                 <a:solidFill>
-                  <a:srgbClr val="6D8C97"/>
+                  <a:srgbClr val="7FE0A0"/>
                 </a:solidFill>
                 <a:latin typeface="Consolas"/>
               </a:rPr>
               <a:t>  padding: 11px;</a:t>
-            </a:r>
-          </a:p>
-          <a:p>
-            <a:pPr>
-              <a:spcAft>
-                <a:spcPts val="0"/>
-              </a:spcAft>
-            </a:pPr>
-            <a:r>
-              <a:rPr sz="1800">
-                <a:solidFill>
-                  <a:srgbClr val="6D8C97"/>
-                </a:solidFill>
-                <a:latin typeface="Consolas"/>
-              </a:rPr>
-              <a:t>  25  </a:t>
-            </a:r>
-            <a:r>
-              <a:rPr sz="1800">
-                <a:solidFill>
-                  <a:srgbClr val="7FE0A0"/>
-                </a:solidFill>
-                <a:latin typeface="Consolas"/>
-              </a:rPr>
-              <a:t>  border: 1px solid #dbe3ec;</a:t>
             </a:r>
           </a:p>
         </p:txBody>
@@ -19400,7 +19406,7 @@
                   <a:srgbClr val="DCECEF"/>
                 </a:solidFill>
               </a:rPr>
-              <a:t>A thin grey border to match the chat box.</a:t>
+              <a:t>Space inside the text box.</a:t>
             </a:r>
           </a:p>
         </p:txBody>
@@ -19459,7 +19465,7 @@
                   <a:srgbClr val="01AEFD"/>
                 </a:solidFill>
               </a:rPr>
-              <a:t>Type this into style.css   -   line 26</a:t>
+              <a:t>Type this into style.css   -   line 25</a:t>
             </a:r>
           </a:p>
         </p:txBody>
@@ -19603,36 +19609,11 @@
             <a:r>
               <a:rPr sz="1800">
                 <a:solidFill>
-                  <a:srgbClr val="6D8C97"/>
+                  <a:srgbClr val="7FE0A0"/>
                 </a:solidFill>
                 <a:latin typeface="Consolas"/>
               </a:rPr>
               <a:t>  border: 1px solid #dbe3ec;</a:t>
-            </a:r>
-          </a:p>
-          <a:p>
-            <a:pPr>
-              <a:spcAft>
-                <a:spcPts val="0"/>
-              </a:spcAft>
-            </a:pPr>
-            <a:r>
-              <a:rPr sz="1800">
-                <a:solidFill>
-                  <a:srgbClr val="6D8C97"/>
-                </a:solidFill>
-                <a:latin typeface="Consolas"/>
-              </a:rPr>
-              <a:t>  26  </a:t>
-            </a:r>
-            <a:r>
-              <a:rPr sz="1800">
-                <a:solidFill>
-                  <a:srgbClr val="7FE0A0"/>
-                </a:solidFill>
-                <a:latin typeface="Consolas"/>
-              </a:rPr>
-              <a:t>  border-radius: 6px;</a:t>
             </a:r>
           </a:p>
         </p:txBody>
@@ -19665,7 +19646,7 @@
                   <a:srgbClr val="DCECEF"/>
                 </a:solidFill>
               </a:rPr>
-              <a:t>Rounded corners.</a:t>
+              <a:t>A thin grey border to match the chat box.</a:t>
             </a:r>
           </a:p>
         </p:txBody>
@@ -19724,7 +19705,7 @@
                   <a:srgbClr val="01AEFD"/>
                 </a:solidFill>
               </a:rPr>
-              <a:t>Type this into style.css   -   line 27</a:t>
+              <a:t>Type this into style.css   -   line 26</a:t>
             </a:r>
           </a:p>
         </p:txBody>
@@ -19893,36 +19874,11 @@
             <a:r>
               <a:rPr sz="1800">
                 <a:solidFill>
-                  <a:srgbClr val="6D8C97"/>
+                  <a:srgbClr val="7FE0A0"/>
                 </a:solidFill>
                 <a:latin typeface="Consolas"/>
               </a:rPr>
               <a:t>  border-radius: 6px;</a:t>
-            </a:r>
-          </a:p>
-          <a:p>
-            <a:pPr>
-              <a:spcAft>
-                <a:spcPts val="0"/>
-              </a:spcAft>
-            </a:pPr>
-            <a:r>
-              <a:rPr sz="1800">
-                <a:solidFill>
-                  <a:srgbClr val="6D8C97"/>
-                </a:solidFill>
-                <a:latin typeface="Consolas"/>
-              </a:rPr>
-              <a:t>  27  </a:t>
-            </a:r>
-            <a:r>
-              <a:rPr sz="1800">
-                <a:solidFill>
-                  <a:srgbClr val="7FE0A0"/>
-                </a:solidFill>
-                <a:latin typeface="Consolas"/>
-              </a:rPr>
-              <a:t>  font-size: 15px;</a:t>
             </a:r>
           </a:p>
         </p:txBody>
@@ -19955,7 +19911,7 @@
                   <a:srgbClr val="DCECEF"/>
                 </a:solidFill>
               </a:rPr>
-              <a:t>Comfortable text size.</a:t>
+              <a:t>Rounded corners.</a:t>
             </a:r>
           </a:p>
         </p:txBody>
@@ -20129,7 +20085,7 @@
                   <a:srgbClr val="01AEFD"/>
                 </a:solidFill>
               </a:rPr>
-              <a:t>Type this into style.css   -   line 28</a:t>
+              <a:t>Type this into style.css   -   line 27</a:t>
             </a:r>
           </a:p>
         </p:txBody>
@@ -20323,36 +20279,11 @@
             <a:r>
               <a:rPr sz="1800">
                 <a:solidFill>
-                  <a:srgbClr val="6D8C97"/>
+                  <a:srgbClr val="7FE0A0"/>
                 </a:solidFill>
                 <a:latin typeface="Consolas"/>
               </a:rPr>
               <a:t>  font-size: 15px;</a:t>
-            </a:r>
-          </a:p>
-          <a:p>
-            <a:pPr>
-              <a:spcAft>
-                <a:spcPts val="0"/>
-              </a:spcAft>
-            </a:pPr>
-            <a:r>
-              <a:rPr sz="1800">
-                <a:solidFill>
-                  <a:srgbClr val="6D8C97"/>
-                </a:solidFill>
-                <a:latin typeface="Consolas"/>
-              </a:rPr>
-              <a:t>  28  </a:t>
-            </a:r>
-            <a:r>
-              <a:rPr sz="1800">
-                <a:solidFill>
-                  <a:srgbClr val="7FE0A0"/>
-                </a:solidFill>
-                <a:latin typeface="Consolas"/>
-              </a:rPr>
-              <a:t>}</a:t>
             </a:r>
           </a:p>
         </p:txBody>
@@ -20385,7 +20316,7 @@
                   <a:srgbClr val="DCECEF"/>
                 </a:solidFill>
               </a:rPr>
-              <a:t>Closes the input rule.</a:t>
+              <a:t>Comfortable text size.</a:t>
             </a:r>
           </a:p>
         </p:txBody>
@@ -20444,7 +20375,7 @@
                   <a:srgbClr val="01AEFD"/>
                 </a:solidFill>
               </a:rPr>
-              <a:t>Type this into style.css   -   line 29</a:t>
+              <a:t>Type this into style.css   -   line 28</a:t>
             </a:r>
           </a:p>
         </p:txBody>
@@ -20663,36 +20594,11 @@
             <a:r>
               <a:rPr sz="1800">
                 <a:solidFill>
-                  <a:srgbClr val="6D8C97"/>
+                  <a:srgbClr val="7FE0A0"/>
                 </a:solidFill>
                 <a:latin typeface="Consolas"/>
               </a:rPr>
               <a:t>}</a:t>
-            </a:r>
-          </a:p>
-          <a:p>
-            <a:pPr>
-              <a:spcAft>
-                <a:spcPts val="0"/>
-              </a:spcAft>
-            </a:pPr>
-            <a:r>
-              <a:rPr sz="1800">
-                <a:solidFill>
-                  <a:srgbClr val="6D8C97"/>
-                </a:solidFill>
-                <a:latin typeface="Consolas"/>
-              </a:rPr>
-              <a:t>  29  </a:t>
-            </a:r>
-            <a:r>
-              <a:rPr sz="1800">
-                <a:solidFill>
-                  <a:srgbClr val="7FE0A0"/>
-                </a:solidFill>
-                <a:latin typeface="Consolas"/>
-              </a:rPr>
-              <a:t>.composer button {</a:t>
             </a:r>
           </a:p>
         </p:txBody>
@@ -20725,7 +20631,7 @@
                   <a:srgbClr val="DCECEF"/>
                 </a:solidFill>
               </a:rPr>
-              <a:t>Starts a rule for the button inside .composer.</a:t>
+              <a:t>Closes the input rule.</a:t>
             </a:r>
           </a:p>
         </p:txBody>
@@ -20784,7 +20690,7 @@
                   <a:srgbClr val="01AEFD"/>
                 </a:solidFill>
               </a:rPr>
-              <a:t>Type this into style.css   -   line 30</a:t>
+              <a:t>Type this into style.css   -   line 29</a:t>
             </a:r>
           </a:p>
         </p:txBody>
@@ -21028,36 +20934,11 @@
             <a:r>
               <a:rPr sz="1800">
                 <a:solidFill>
-                  <a:srgbClr val="6D8C97"/>
+                  <a:srgbClr val="7FE0A0"/>
                 </a:solidFill>
                 <a:latin typeface="Consolas"/>
               </a:rPr>
               <a:t>.composer button {</a:t>
-            </a:r>
-          </a:p>
-          <a:p>
-            <a:pPr>
-              <a:spcAft>
-                <a:spcPts val="0"/>
-              </a:spcAft>
-            </a:pPr>
-            <a:r>
-              <a:rPr sz="1800">
-                <a:solidFill>
-                  <a:srgbClr val="6D8C97"/>
-                </a:solidFill>
-                <a:latin typeface="Consolas"/>
-              </a:rPr>
-              <a:t>  30  </a:t>
-            </a:r>
-            <a:r>
-              <a:rPr sz="1800">
-                <a:solidFill>
-                  <a:srgbClr val="7FE0A0"/>
-                </a:solidFill>
-                <a:latin typeface="Consolas"/>
-              </a:rPr>
-              <a:t>  padding: 11px 18px;</a:t>
             </a:r>
           </a:p>
         </p:txBody>
@@ -21090,7 +20971,7 @@
                   <a:srgbClr val="DCECEF"/>
                 </a:solidFill>
               </a:rPr>
-              <a:t>Padding to make the button a comfortable size to tap.</a:t>
+              <a:t>Starts a rule for the button inside .composer.</a:t>
             </a:r>
           </a:p>
         </p:txBody>
@@ -21149,7 +21030,7 @@
                   <a:srgbClr val="01AEFD"/>
                 </a:solidFill>
               </a:rPr>
-              <a:t>Type this into style.css   -   line 31</a:t>
+              <a:t>Type this into style.css   -   line 30</a:t>
             </a:r>
           </a:p>
         </p:txBody>
@@ -21182,7 +21063,7 @@
               </a:spcAft>
             </a:pPr>
             <a:r>
-              <a:rPr sz="1300">
+              <a:rPr sz="1800">
                 <a:solidFill>
                   <a:srgbClr val="6D8C97"/>
                 </a:solidFill>
@@ -21191,7 +21072,7 @@
               <a:t>  21  </a:t>
             </a:r>
             <a:r>
-              <a:rPr sz="1300">
+              <a:rPr sz="1800">
                 <a:solidFill>
                   <a:srgbClr val="6D8C97"/>
                 </a:solidFill>
@@ -21207,7 +21088,7 @@
               </a:spcAft>
             </a:pPr>
             <a:r>
-              <a:rPr sz="1300">
+              <a:rPr sz="1800">
                 <a:solidFill>
                   <a:srgbClr val="6D8C97"/>
                 </a:solidFill>
@@ -21216,7 +21097,7 @@
               <a:t>  22  </a:t>
             </a:r>
             <a:r>
-              <a:rPr sz="1300">
+              <a:rPr sz="1800">
                 <a:solidFill>
                   <a:srgbClr val="6D8C97"/>
                 </a:solidFill>
@@ -21232,7 +21113,7 @@
               </a:spcAft>
             </a:pPr>
             <a:r>
-              <a:rPr sz="1300">
+              <a:rPr sz="1800">
                 <a:solidFill>
                   <a:srgbClr val="6D8C97"/>
                 </a:solidFill>
@@ -21241,7 +21122,7 @@
               <a:t>  23  </a:t>
             </a:r>
             <a:r>
-              <a:rPr sz="1300">
+              <a:rPr sz="1800">
                 <a:solidFill>
                   <a:srgbClr val="6D8C97"/>
                 </a:solidFill>
@@ -21257,7 +21138,7 @@
               </a:spcAft>
             </a:pPr>
             <a:r>
-              <a:rPr sz="1300">
+              <a:rPr sz="1800">
                 <a:solidFill>
                   <a:srgbClr val="6D8C97"/>
                 </a:solidFill>
@@ -21266,7 +21147,7 @@
               <a:t>  24  </a:t>
             </a:r>
             <a:r>
-              <a:rPr sz="1300">
+              <a:rPr sz="1800">
                 <a:solidFill>
                   <a:srgbClr val="6D8C97"/>
                 </a:solidFill>
@@ -21282,7 +21163,7 @@
               </a:spcAft>
             </a:pPr>
             <a:r>
-              <a:rPr sz="1300">
+              <a:rPr sz="1800">
                 <a:solidFill>
                   <a:srgbClr val="6D8C97"/>
                 </a:solidFill>
@@ -21291,7 +21172,7 @@
               <a:t>  25  </a:t>
             </a:r>
             <a:r>
-              <a:rPr sz="1300">
+              <a:rPr sz="1800">
                 <a:solidFill>
                   <a:srgbClr val="6D8C97"/>
                 </a:solidFill>
@@ -21307,7 +21188,7 @@
               </a:spcAft>
             </a:pPr>
             <a:r>
-              <a:rPr sz="1300">
+              <a:rPr sz="1800">
                 <a:solidFill>
                   <a:srgbClr val="6D8C97"/>
                 </a:solidFill>
@@ -21316,7 +21197,7 @@
               <a:t>  26  </a:t>
             </a:r>
             <a:r>
-              <a:rPr sz="1300">
+              <a:rPr sz="1800">
                 <a:solidFill>
                   <a:srgbClr val="6D8C97"/>
                 </a:solidFill>
@@ -21332,7 +21213,7 @@
               </a:spcAft>
             </a:pPr>
             <a:r>
-              <a:rPr sz="1300">
+              <a:rPr sz="1800">
                 <a:solidFill>
                   <a:srgbClr val="6D8C97"/>
                 </a:solidFill>
@@ -21341,7 +21222,7 @@
               <a:t>  27  </a:t>
             </a:r>
             <a:r>
-              <a:rPr sz="1300">
+              <a:rPr sz="1800">
                 <a:solidFill>
                   <a:srgbClr val="6D8C97"/>
                 </a:solidFill>
@@ -21357,7 +21238,7 @@
               </a:spcAft>
             </a:pPr>
             <a:r>
-              <a:rPr sz="1300">
+              <a:rPr sz="1800">
                 <a:solidFill>
                   <a:srgbClr val="6D8C97"/>
                 </a:solidFill>
@@ -21366,7 +21247,7 @@
               <a:t>  28  </a:t>
             </a:r>
             <a:r>
-              <a:rPr sz="1300">
+              <a:rPr sz="1800">
                 <a:solidFill>
                   <a:srgbClr val="6D8C97"/>
                 </a:solidFill>
@@ -21382,7 +21263,7 @@
               </a:spcAft>
             </a:pPr>
             <a:r>
-              <a:rPr sz="1300">
+              <a:rPr sz="1800">
                 <a:solidFill>
                   <a:srgbClr val="6D8C97"/>
                 </a:solidFill>
@@ -21391,7 +21272,7 @@
               <a:t>  29  </a:t>
             </a:r>
             <a:r>
-              <a:rPr sz="1300">
+              <a:rPr sz="1800">
                 <a:solidFill>
                   <a:srgbClr val="6D8C97"/>
                 </a:solidFill>
@@ -21407,7 +21288,7 @@
               </a:spcAft>
             </a:pPr>
             <a:r>
-              <a:rPr sz="1300">
+              <a:rPr sz="1800">
                 <a:solidFill>
                   <a:srgbClr val="6D8C97"/>
                 </a:solidFill>
@@ -21416,38 +21297,13 @@
               <a:t>  30  </a:t>
             </a:r>
             <a:r>
-              <a:rPr sz="1300">
-                <a:solidFill>
-                  <a:srgbClr val="6D8C97"/>
+              <a:rPr sz="1800">
+                <a:solidFill>
+                  <a:srgbClr val="7FE0A0"/>
                 </a:solidFill>
                 <a:latin typeface="Consolas"/>
               </a:rPr>
               <a:t>  padding: 11px 18px;</a:t>
-            </a:r>
-          </a:p>
-          <a:p>
-            <a:pPr>
-              <a:spcAft>
-                <a:spcPts val="0"/>
-              </a:spcAft>
-            </a:pPr>
-            <a:r>
-              <a:rPr sz="1300">
-                <a:solidFill>
-                  <a:srgbClr val="6D8C97"/>
-                </a:solidFill>
-                <a:latin typeface="Consolas"/>
-              </a:rPr>
-              <a:t>  31  </a:t>
-            </a:r>
-            <a:r>
-              <a:rPr sz="1300">
-                <a:solidFill>
-                  <a:srgbClr val="7FE0A0"/>
-                </a:solidFill>
-                <a:latin typeface="Consolas"/>
-              </a:rPr>
-              <a:t>  border: 0;</a:t>
             </a:r>
           </a:p>
         </p:txBody>
@@ -21480,7 +21336,7 @@
                   <a:srgbClr val="DCECEF"/>
                 </a:solidFill>
               </a:rPr>
-              <a:t>border: 0 removes the default button outline.</a:t>
+              <a:t>Padding to make the button a comfortable size to tap.</a:t>
             </a:r>
           </a:p>
         </p:txBody>
@@ -21539,7 +21395,7 @@
                   <a:srgbClr val="01AEFD"/>
                 </a:solidFill>
               </a:rPr>
-              <a:t>Type this into style.css   -   line 32</a:t>
+              <a:t>Type this into style.css   -   line 31</a:t>
             </a:r>
           </a:p>
         </p:txBody>
@@ -21833,36 +21689,11 @@
             <a:r>
               <a:rPr sz="1300">
                 <a:solidFill>
-                  <a:srgbClr val="6D8C97"/>
+                  <a:srgbClr val="7FE0A0"/>
                 </a:solidFill>
                 <a:latin typeface="Consolas"/>
               </a:rPr>
               <a:t>  border: 0;</a:t>
-            </a:r>
-          </a:p>
-          <a:p>
-            <a:pPr>
-              <a:spcAft>
-                <a:spcPts val="0"/>
-              </a:spcAft>
-            </a:pPr>
-            <a:r>
-              <a:rPr sz="1300">
-                <a:solidFill>
-                  <a:srgbClr val="6D8C97"/>
-                </a:solidFill>
-                <a:latin typeface="Consolas"/>
-              </a:rPr>
-              <a:t>  32  </a:t>
-            </a:r>
-            <a:r>
-              <a:rPr sz="1300">
-                <a:solidFill>
-                  <a:srgbClr val="7FE0A0"/>
-                </a:solidFill>
-                <a:latin typeface="Consolas"/>
-              </a:rPr>
-              <a:t>  border-radius: 6px;</a:t>
             </a:r>
           </a:p>
         </p:txBody>
@@ -21895,7 +21726,7 @@
                   <a:srgbClr val="DCECEF"/>
                 </a:solidFill>
               </a:rPr>
-              <a:t>Rounded corners.</a:t>
+              <a:t>border: 0 removes the default button outline.</a:t>
             </a:r>
           </a:p>
         </p:txBody>
@@ -21954,7 +21785,7 @@
                   <a:srgbClr val="01AEFD"/>
                 </a:solidFill>
               </a:rPr>
-              <a:t>Type this into style.css   -   line 33</a:t>
+              <a:t>Type this into style.css   -   line 32</a:t>
             </a:r>
           </a:p>
         </p:txBody>
@@ -22273,36 +22104,11 @@
             <a:r>
               <a:rPr sz="1300">
                 <a:solidFill>
-                  <a:srgbClr val="6D8C97"/>
+                  <a:srgbClr val="7FE0A0"/>
                 </a:solidFill>
                 <a:latin typeface="Consolas"/>
               </a:rPr>
               <a:t>  border-radius: 6px;</a:t>
-            </a:r>
-          </a:p>
-          <a:p>
-            <a:pPr>
-              <a:spcAft>
-                <a:spcPts val="0"/>
-              </a:spcAft>
-            </a:pPr>
-            <a:r>
-              <a:rPr sz="1300">
-                <a:solidFill>
-                  <a:srgbClr val="6D8C97"/>
-                </a:solidFill>
-                <a:latin typeface="Consolas"/>
-              </a:rPr>
-              <a:t>  33  </a:t>
-            </a:r>
-            <a:r>
-              <a:rPr sz="1300">
-                <a:solidFill>
-                  <a:srgbClr val="7FE0A0"/>
-                </a:solidFill>
-                <a:latin typeface="Consolas"/>
-              </a:rPr>
-              <a:t>  background: #01aefd;</a:t>
             </a:r>
           </a:p>
         </p:txBody>
@@ -22335,7 +22141,7 @@
                   <a:srgbClr val="DCECEF"/>
                 </a:solidFill>
               </a:rPr>
-              <a:t>The brand blue as its background.</a:t>
+              <a:t>Rounded corners.</a:t>
             </a:r>
           </a:p>
         </p:txBody>
@@ -22394,7 +22200,7 @@
                   <a:srgbClr val="01AEFD"/>
                 </a:solidFill>
               </a:rPr>
-              <a:t>Type this into style.css   -   line 34</a:t>
+              <a:t>Type this into style.css   -   line 33</a:t>
             </a:r>
           </a:p>
         </p:txBody>
@@ -22738,36 +22544,11 @@
             <a:r>
               <a:rPr sz="1300">
                 <a:solidFill>
-                  <a:srgbClr val="6D8C97"/>
+                  <a:srgbClr val="7FE0A0"/>
                 </a:solidFill>
                 <a:latin typeface="Consolas"/>
               </a:rPr>
               <a:t>  background: #01aefd;</a:t>
-            </a:r>
-          </a:p>
-          <a:p>
-            <a:pPr>
-              <a:spcAft>
-                <a:spcPts val="0"/>
-              </a:spcAft>
-            </a:pPr>
-            <a:r>
-              <a:rPr sz="1300">
-                <a:solidFill>
-                  <a:srgbClr val="6D8C97"/>
-                </a:solidFill>
-                <a:latin typeface="Consolas"/>
-              </a:rPr>
-              <a:t>  34  </a:t>
-            </a:r>
-            <a:r>
-              <a:rPr sz="1300">
-                <a:solidFill>
-                  <a:srgbClr val="7FE0A0"/>
-                </a:solidFill>
-                <a:latin typeface="Consolas"/>
-              </a:rPr>
-              <a:t>  color: #ffffff;</a:t>
             </a:r>
           </a:p>
         </p:txBody>
@@ -22800,7 +22581,7 @@
                   <a:srgbClr val="DCECEF"/>
                 </a:solidFill>
               </a:rPr>
-              <a:t>White text on the blue.</a:t>
+              <a:t>The brand blue as its background.</a:t>
             </a:r>
           </a:p>
         </p:txBody>
@@ -22859,7 +22640,7 @@
                   <a:srgbClr val="01AEFD"/>
                 </a:solidFill>
               </a:rPr>
-              <a:t>Type this into style.css   -   line 35</a:t>
+              <a:t>Type this into style.css   -   line 34</a:t>
             </a:r>
           </a:p>
         </p:txBody>
@@ -23228,36 +23009,11 @@
             <a:r>
               <a:rPr sz="1300">
                 <a:solidFill>
-                  <a:srgbClr val="6D8C97"/>
+                  <a:srgbClr val="7FE0A0"/>
                 </a:solidFill>
                 <a:latin typeface="Consolas"/>
               </a:rPr>
               <a:t>  color: #ffffff;</a:t>
-            </a:r>
-          </a:p>
-          <a:p>
-            <a:pPr>
-              <a:spcAft>
-                <a:spcPts val="0"/>
-              </a:spcAft>
-            </a:pPr>
-            <a:r>
-              <a:rPr sz="1300">
-                <a:solidFill>
-                  <a:srgbClr val="6D8C97"/>
-                </a:solidFill>
-                <a:latin typeface="Consolas"/>
-              </a:rPr>
-              <a:t>  35  </a:t>
-            </a:r>
-            <a:r>
-              <a:rPr sz="1300">
-                <a:solidFill>
-                  <a:srgbClr val="7FE0A0"/>
-                </a:solidFill>
-                <a:latin typeface="Consolas"/>
-              </a:rPr>
-              <a:t>  font-size: 15px;</a:t>
             </a:r>
           </a:p>
         </p:txBody>
@@ -23290,7 +23046,7 @@
                   <a:srgbClr val="DCECEF"/>
                 </a:solidFill>
               </a:rPr>
-              <a:t>Readable text size.</a:t>
+              <a:t>White text on the blue.</a:t>
             </a:r>
           </a:p>
         </p:txBody>
@@ -23304,136 +23060,6 @@
 </file>
 
 <file path=ppt/slides/slide88.xml><?xml version="1.0" encoding="utf-8"?>
-<p:sld xmlns:a="http://schemas.openxmlformats.org/drawingml/2006/main" xmlns:p="http://schemas.openxmlformats.org/presentationml/2006/main" xmlns:r="http://schemas.openxmlformats.org/officeDocument/2006/relationships">
-  <p:cSld>
-    <p:spTree>
-      <p:nvGrpSpPr>
-        <p:cNvPr id="1" name=""/>
-        <p:cNvGrpSpPr/>
-        <p:nvPr/>
-      </p:nvGrpSpPr>
-      <p:grpSpPr/>
-      <p:sp>
-        <p:nvSpPr>
-          <p:cNvPr id="2" name="Title 1"/>
-          <p:cNvSpPr>
-            <a:spLocks noGrp="1"/>
-          </p:cNvSpPr>
-          <p:nvPr>
-            <p:ph type="title"/>
-          </p:nvPr>
-        </p:nvSpPr>
-        <p:spPr/>
-        <p:txBody>
-          <a:bodyPr/>
-          <a:lstStyle/>
-          <a:p>
-            <a:r>
-              <a:rPr sz="3800" b="1">
-                <a:solidFill>
-                  <a:srgbClr val="1F2A37"/>
-                </a:solidFill>
-              </a:rPr>
-              <a:t>cursor</a:t>
-            </a:r>
-          </a:p>
-        </p:txBody>
-      </p:sp>
-      <p:sp>
-        <p:nvSpPr>
-          <p:cNvPr id="3" name="TextBox 2"/>
-          <p:cNvSpPr txBox="1"/>
-          <p:nvPr/>
-        </p:nvSpPr>
-        <p:spPr>
-          <a:xfrm>
-            <a:off x="868680" y="502920"/>
-            <a:ext cx="5486400" cy="457200"/>
-          </a:xfrm>
-          <a:prstGeom prst="rect">
-            <a:avLst/>
-          </a:prstGeom>
-          <a:noFill/>
-        </p:spPr>
-        <p:txBody>
-          <a:bodyPr wrap="none">
-            <a:spAutoFit/>
-          </a:bodyPr>
-          <a:lstStyle/>
-          <a:p>
-            <a:r>
-              <a:rPr sz="1500" b="1">
-                <a:solidFill>
-                  <a:srgbClr val="01AEFD"/>
-                </a:solidFill>
-              </a:rPr>
-              <a:t>CSS</a:t>
-            </a:r>
-          </a:p>
-        </p:txBody>
-      </p:sp>
-      <p:sp>
-        <p:nvSpPr>
-          <p:cNvPr id="4" name="TextBox 3"/>
-          <p:cNvSpPr txBox="1"/>
-          <p:nvPr/>
-        </p:nvSpPr>
-        <p:spPr>
-          <a:xfrm>
-            <a:off x="822960" y="1828800"/>
-            <a:ext cx="10515600" cy="4206240"/>
-          </a:xfrm>
-          <a:prstGeom prst="rect">
-            <a:avLst/>
-          </a:prstGeom>
-          <a:noFill/>
-        </p:spPr>
-        <p:txBody>
-          <a:bodyPr wrap="square">
-            <a:spAutoFit/>
-          </a:bodyPr>
-          <a:lstStyle/>
-          <a:p>
-            <a:pPr>
-              <a:spcAft>
-                <a:spcPts val="1400"/>
-              </a:spcAft>
-            </a:pPr>
-            <a:r>
-              <a:rPr sz="2400">
-                <a:solidFill>
-                  <a:srgbClr val="1F2A37"/>
-                </a:solidFill>
-              </a:rPr>
-              <a:t>• The mouse-pointer shape.</a:t>
-            </a:r>
-          </a:p>
-          <a:p>
-            <a:pPr>
-              <a:spcAft>
-                <a:spcPts val="1400"/>
-              </a:spcAft>
-            </a:pPr>
-            <a:r>
-              <a:rPr sz="2400">
-                <a:solidFill>
-                  <a:srgbClr val="1F2A37"/>
-                </a:solidFill>
-              </a:rPr>
-              <a:t>• pointer shows a hand, so it looks clickable.</a:t>
-            </a:r>
-          </a:p>
-        </p:txBody>
-      </p:sp>
-    </p:spTree>
-  </p:cSld>
-  <p:clrMapOvr>
-    <a:masterClrMapping/>
-  </p:clrMapOvr>
-</p:sld>
-</file>
-
-<file path=ppt/slides/slide89.xml><?xml version="1.0" encoding="utf-8"?>
 <p:sld xmlns:a="http://schemas.openxmlformats.org/drawingml/2006/main" xmlns:p="http://schemas.openxmlformats.org/presentationml/2006/main" xmlns:r="http://schemas.openxmlformats.org/officeDocument/2006/relationships">
   <p:cSld>
     <p:bg>
@@ -23479,7 +23105,7 @@
                   <a:srgbClr val="01AEFD"/>
                 </a:solidFill>
               </a:rPr>
-              <a:t>Type this into style.css   -   line 36</a:t>
+              <a:t>Type this into style.css   -   line 35</a:t>
             </a:r>
           </a:p>
         </p:txBody>
@@ -23873,36 +23499,11 @@
             <a:r>
               <a:rPr sz="1300">
                 <a:solidFill>
-                  <a:srgbClr val="6D8C97"/>
+                  <a:srgbClr val="7FE0A0"/>
                 </a:solidFill>
                 <a:latin typeface="Consolas"/>
               </a:rPr>
               <a:t>  font-size: 15px;</a:t>
-            </a:r>
-          </a:p>
-          <a:p>
-            <a:pPr>
-              <a:spcAft>
-                <a:spcPts val="0"/>
-              </a:spcAft>
-            </a:pPr>
-            <a:r>
-              <a:rPr sz="1300">
-                <a:solidFill>
-                  <a:srgbClr val="6D8C97"/>
-                </a:solidFill>
-                <a:latin typeface="Consolas"/>
-              </a:rPr>
-              <a:t>  36  </a:t>
-            </a:r>
-            <a:r>
-              <a:rPr sz="1300">
-                <a:solidFill>
-                  <a:srgbClr val="7FE0A0"/>
-                </a:solidFill>
-                <a:latin typeface="Consolas"/>
-              </a:rPr>
-              <a:t>  cursor: pointer;</a:t>
             </a:r>
           </a:p>
         </p:txBody>
@@ -23935,7 +23536,137 @@
                   <a:srgbClr val="DCECEF"/>
                 </a:solidFill>
               </a:rPr>
-              <a:t>cursor: pointer shows a hand so it looks clickable.</a:t>
+              <a:t>Readable text size.</a:t>
+            </a:r>
+          </a:p>
+        </p:txBody>
+      </p:sp>
+    </p:spTree>
+  </p:cSld>
+  <p:clrMapOvr>
+    <a:masterClrMapping/>
+  </p:clrMapOvr>
+</p:sld>
+</file>
+
+<file path=ppt/slides/slide89.xml><?xml version="1.0" encoding="utf-8"?>
+<p:sld xmlns:a="http://schemas.openxmlformats.org/drawingml/2006/main" xmlns:p="http://schemas.openxmlformats.org/presentationml/2006/main" xmlns:r="http://schemas.openxmlformats.org/officeDocument/2006/relationships">
+  <p:cSld>
+    <p:spTree>
+      <p:nvGrpSpPr>
+        <p:cNvPr id="1" name=""/>
+        <p:cNvGrpSpPr/>
+        <p:nvPr/>
+      </p:nvGrpSpPr>
+      <p:grpSpPr/>
+      <p:sp>
+        <p:nvSpPr>
+          <p:cNvPr id="2" name="Title 1"/>
+          <p:cNvSpPr>
+            <a:spLocks noGrp="1"/>
+          </p:cNvSpPr>
+          <p:nvPr>
+            <p:ph type="title"/>
+          </p:nvPr>
+        </p:nvSpPr>
+        <p:spPr/>
+        <p:txBody>
+          <a:bodyPr/>
+          <a:lstStyle/>
+          <a:p>
+            <a:r>
+              <a:rPr sz="3800" b="1">
+                <a:solidFill>
+                  <a:srgbClr val="1F2A37"/>
+                </a:solidFill>
+              </a:rPr>
+              <a:t>cursor</a:t>
+            </a:r>
+          </a:p>
+        </p:txBody>
+      </p:sp>
+      <p:sp>
+        <p:nvSpPr>
+          <p:cNvPr id="3" name="TextBox 2"/>
+          <p:cNvSpPr txBox="1"/>
+          <p:nvPr/>
+        </p:nvSpPr>
+        <p:spPr>
+          <a:xfrm>
+            <a:off x="868680" y="502920"/>
+            <a:ext cx="5486400" cy="457200"/>
+          </a:xfrm>
+          <a:prstGeom prst="rect">
+            <a:avLst/>
+          </a:prstGeom>
+          <a:noFill/>
+        </p:spPr>
+        <p:txBody>
+          <a:bodyPr wrap="none">
+            <a:spAutoFit/>
+          </a:bodyPr>
+          <a:lstStyle/>
+          <a:p>
+            <a:r>
+              <a:rPr sz="1500" b="1">
+                <a:solidFill>
+                  <a:srgbClr val="01AEFD"/>
+                </a:solidFill>
+              </a:rPr>
+              <a:t>CSS</a:t>
+            </a:r>
+          </a:p>
+        </p:txBody>
+      </p:sp>
+      <p:sp>
+        <p:nvSpPr>
+          <p:cNvPr id="4" name="TextBox 3"/>
+          <p:cNvSpPr txBox="1"/>
+          <p:nvPr/>
+        </p:nvSpPr>
+        <p:spPr>
+          <a:xfrm>
+            <a:off x="822960" y="1828800"/>
+            <a:ext cx="10515600" cy="4206240"/>
+          </a:xfrm>
+          <a:prstGeom prst="rect">
+            <a:avLst/>
+          </a:prstGeom>
+          <a:noFill/>
+        </p:spPr>
+        <p:txBody>
+          <a:bodyPr wrap="square">
+            <a:spAutoFit/>
+          </a:bodyPr>
+          <a:lstStyle/>
+          <a:p>
+            <a:pPr>
+              <a:spcAft>
+                <a:spcPts val="1400"/>
+              </a:spcAft>
+            </a:pPr>
+            <a:r>
+              <a:rPr sz="2400">
+                <a:solidFill>
+                  <a:srgbClr val="1F2A37"/>
+                </a:solidFill>
+              </a:rPr>
+              <a:t>• The mouse-pointer shape.</a:t>
+            </a:r>
+          </a:p>
+          <a:p>
+            <a:pPr>
+              <a:spcAft>
+                <a:spcPts val="1400"/>
+              </a:spcAft>
+            </a:pPr>
+            <a:r>
+              <a:rPr sz="2400">
+                <a:solidFill>
+                  <a:srgbClr val="1F2A37"/>
+                </a:solidFill>
+              </a:rPr>
+              <a:t>• pointer shows a hand, so it looks clickable.</a:t>
             </a:r>
           </a:p>
         </p:txBody>
@@ -24159,7 +23890,7 @@
                   <a:srgbClr val="01AEFD"/>
                 </a:solidFill>
               </a:rPr>
-              <a:t>Type this into style.css   -   line 37</a:t>
+              <a:t>Type this into style.css   -   line 36</a:t>
             </a:r>
           </a:p>
         </p:txBody>
@@ -24578,36 +24309,11 @@
             <a:r>
               <a:rPr sz="1300">
                 <a:solidFill>
-                  <a:srgbClr val="6D8C97"/>
+                  <a:srgbClr val="7FE0A0"/>
                 </a:solidFill>
                 <a:latin typeface="Consolas"/>
               </a:rPr>
               <a:t>  cursor: pointer;</a:t>
-            </a:r>
-          </a:p>
-          <a:p>
-            <a:pPr>
-              <a:spcAft>
-                <a:spcPts val="0"/>
-              </a:spcAft>
-            </a:pPr>
-            <a:r>
-              <a:rPr sz="1300">
-                <a:solidFill>
-                  <a:srgbClr val="6D8C97"/>
-                </a:solidFill>
-                <a:latin typeface="Consolas"/>
-              </a:rPr>
-              <a:t>  37  </a:t>
-            </a:r>
-            <a:r>
-              <a:rPr sz="1300">
-                <a:solidFill>
-                  <a:srgbClr val="7FE0A0"/>
-                </a:solidFill>
-                <a:latin typeface="Consolas"/>
-              </a:rPr>
-              <a:t>}</a:t>
             </a:r>
           </a:p>
         </p:txBody>
@@ -24640,7 +24346,7 @@
                   <a:srgbClr val="DCECEF"/>
                 </a:solidFill>
               </a:rPr>
-              <a:t>Closes the button rule.</a:t>
+              <a:t>cursor: pointer shows a hand so it looks clickable.</a:t>
             </a:r>
           </a:p>
         </p:txBody>
@@ -24699,7 +24405,7 @@
                   <a:srgbClr val="01AEFD"/>
                 </a:solidFill>
               </a:rPr>
-              <a:t>All together in style.css</a:t>
+              <a:t>Type this into style.css   -   line 37</a:t>
             </a:r>
           </a:p>
         </p:txBody>
@@ -24743,7 +24449,7 @@
             <a:r>
               <a:rPr sz="1300">
                 <a:solidFill>
-                  <a:srgbClr val="7FE0A0"/>
+                  <a:srgbClr val="6D8C97"/>
                 </a:solidFill>
                 <a:latin typeface="Consolas"/>
               </a:rPr>
@@ -24768,7 +24474,7 @@
             <a:r>
               <a:rPr sz="1300">
                 <a:solidFill>
-                  <a:srgbClr val="7FE0A0"/>
+                  <a:srgbClr val="6D8C97"/>
                 </a:solidFill>
                 <a:latin typeface="Consolas"/>
               </a:rPr>
@@ -24793,7 +24499,7 @@
             <a:r>
               <a:rPr sz="1300">
                 <a:solidFill>
-                  <a:srgbClr val="7FE0A0"/>
+                  <a:srgbClr val="6D8C97"/>
                 </a:solidFill>
                 <a:latin typeface="Consolas"/>
               </a:rPr>
@@ -24818,7 +24524,7 @@
             <a:r>
               <a:rPr sz="1300">
                 <a:solidFill>
-                  <a:srgbClr val="7FE0A0"/>
+                  <a:srgbClr val="6D8C97"/>
                 </a:solidFill>
                 <a:latin typeface="Consolas"/>
               </a:rPr>
@@ -24843,7 +24549,7 @@
             <a:r>
               <a:rPr sz="1300">
                 <a:solidFill>
-                  <a:srgbClr val="7FE0A0"/>
+                  <a:srgbClr val="6D8C97"/>
                 </a:solidFill>
                 <a:latin typeface="Consolas"/>
               </a:rPr>
@@ -24868,7 +24574,7 @@
             <a:r>
               <a:rPr sz="1300">
                 <a:solidFill>
-                  <a:srgbClr val="7FE0A0"/>
+                  <a:srgbClr val="6D8C97"/>
                 </a:solidFill>
                 <a:latin typeface="Consolas"/>
               </a:rPr>
@@ -24893,7 +24599,7 @@
             <a:r>
               <a:rPr sz="1300">
                 <a:solidFill>
-                  <a:srgbClr val="7FE0A0"/>
+                  <a:srgbClr val="6D8C97"/>
                 </a:solidFill>
                 <a:latin typeface="Consolas"/>
               </a:rPr>
@@ -24918,7 +24624,7 @@
             <a:r>
               <a:rPr sz="1300">
                 <a:solidFill>
-                  <a:srgbClr val="7FE0A0"/>
+                  <a:srgbClr val="6D8C97"/>
                 </a:solidFill>
                 <a:latin typeface="Consolas"/>
               </a:rPr>
@@ -24943,7 +24649,7 @@
             <a:r>
               <a:rPr sz="1300">
                 <a:solidFill>
-                  <a:srgbClr val="7FE0A0"/>
+                  <a:srgbClr val="6D8C97"/>
                 </a:solidFill>
                 <a:latin typeface="Consolas"/>
               </a:rPr>
@@ -24968,7 +24674,7 @@
             <a:r>
               <a:rPr sz="1300">
                 <a:solidFill>
-                  <a:srgbClr val="7FE0A0"/>
+                  <a:srgbClr val="6D8C97"/>
                 </a:solidFill>
                 <a:latin typeface="Consolas"/>
               </a:rPr>
@@ -24993,7 +24699,7 @@
             <a:r>
               <a:rPr sz="1300">
                 <a:solidFill>
-                  <a:srgbClr val="7FE0A0"/>
+                  <a:srgbClr val="6D8C97"/>
                 </a:solidFill>
                 <a:latin typeface="Consolas"/>
               </a:rPr>
@@ -25018,7 +24724,7 @@
             <a:r>
               <a:rPr sz="1300">
                 <a:solidFill>
-                  <a:srgbClr val="7FE0A0"/>
+                  <a:srgbClr val="6D8C97"/>
                 </a:solidFill>
                 <a:latin typeface="Consolas"/>
               </a:rPr>
@@ -25043,7 +24749,7 @@
             <a:r>
               <a:rPr sz="1300">
                 <a:solidFill>
-                  <a:srgbClr val="7FE0A0"/>
+                  <a:srgbClr val="6D8C97"/>
                 </a:solidFill>
                 <a:latin typeface="Consolas"/>
               </a:rPr>
@@ -25068,7 +24774,7 @@
             <a:r>
               <a:rPr sz="1300">
                 <a:solidFill>
-                  <a:srgbClr val="7FE0A0"/>
+                  <a:srgbClr val="6D8C97"/>
                 </a:solidFill>
                 <a:latin typeface="Consolas"/>
               </a:rPr>
@@ -25093,7 +24799,7 @@
             <a:r>
               <a:rPr sz="1300">
                 <a:solidFill>
-                  <a:srgbClr val="7FE0A0"/>
+                  <a:srgbClr val="6D8C97"/>
                 </a:solidFill>
                 <a:latin typeface="Consolas"/>
               </a:rPr>
@@ -25118,7 +24824,7 @@
             <a:r>
               <a:rPr sz="1300">
                 <a:solidFill>
-                  <a:srgbClr val="7FE0A0"/>
+                  <a:srgbClr val="6D8C97"/>
                 </a:solidFill>
                 <a:latin typeface="Consolas"/>
               </a:rPr>
@@ -25180,7 +24886,7 @@
                   <a:srgbClr val="DCECEF"/>
                 </a:solidFill>
               </a:rPr>
-              <a:t>That is the whole piece. Check yours looks the same before moving on.</a:t>
+              <a:t>Closes the button rule.</a:t>
             </a:r>
           </a:p>
         </p:txBody>
@@ -25196,6 +24902,14 @@
 <file path=ppt/slides/slide92.xml><?xml version="1.0" encoding="utf-8"?>
 <p:sld xmlns:a="http://schemas.openxmlformats.org/drawingml/2006/main" xmlns:p="http://schemas.openxmlformats.org/presentationml/2006/main" xmlns:r="http://schemas.openxmlformats.org/officeDocument/2006/relationships">
   <p:cSld>
+    <p:bg>
+      <p:bgPr>
+        <a:solidFill>
+          <a:srgbClr val="102127"/>
+        </a:solidFill>
+        <a:effectLst/>
+      </p:bgPr>
+    </p:bg>
     <p:spTree>
       <p:nvGrpSpPr>
         <p:cNvPr id="1" name=""/>
@@ -25205,26 +24919,33 @@
       <p:grpSpPr/>
       <p:sp>
         <p:nvSpPr>
-          <p:cNvPr id="2" name="Title 1"/>
-          <p:cNvSpPr>
-            <a:spLocks noGrp="1"/>
-          </p:cNvSpPr>
-          <p:nvPr>
-            <p:ph type="title"/>
-          </p:nvPr>
-        </p:nvSpPr>
-        <p:spPr/>
-        <p:txBody>
-          <a:bodyPr/>
-          <a:lstStyle/>
-          <a:p>
-            <a:r>
-              <a:rPr sz="3800" b="1">
-                <a:solidFill>
-                  <a:srgbClr val="1F2A37"/>
-                </a:solidFill>
-              </a:rPr>
-              <a:t>The script goes at the BOTTOM</a:t>
+          <p:cNvPr id="2" name="TextBox 1"/>
+          <p:cNvSpPr txBox="1"/>
+          <p:nvPr/>
+        </p:nvSpPr>
+        <p:spPr>
+          <a:xfrm>
+            <a:off x="502920" y="274320"/>
+            <a:ext cx="11155680" cy="548640"/>
+          </a:xfrm>
+          <a:prstGeom prst="rect">
+            <a:avLst/>
+          </a:prstGeom>
+          <a:noFill/>
+        </p:spPr>
+        <p:txBody>
+          <a:bodyPr wrap="none">
+            <a:spAutoFit/>
+          </a:bodyPr>
+          <a:lstStyle/>
+          <a:p>
+            <a:r>
+              <a:rPr sz="2200" b="1">
+                <a:solidFill>
+                  <a:srgbClr val="01AEFD"/>
+                </a:solidFill>
+              </a:rPr>
+              <a:t>All together in style.css</a:t>
             </a:r>
           </a:p>
         </p:txBody>
@@ -25237,8 +24958,456 @@
         </p:nvSpPr>
         <p:spPr>
           <a:xfrm>
-            <a:off x="822960" y="1828800"/>
-            <a:ext cx="10515600" cy="4206240"/>
+            <a:off x="502920" y="960120"/>
+            <a:ext cx="11155680" cy="4297680"/>
+          </a:xfrm>
+          <a:prstGeom prst="rect">
+            <a:avLst/>
+          </a:prstGeom>
+          <a:noFill/>
+        </p:spPr>
+        <p:txBody>
+          <a:bodyPr wrap="none">
+            <a:spAutoFit/>
+          </a:bodyPr>
+          <a:lstStyle/>
+          <a:p>
+            <a:pPr>
+              <a:spcAft>
+                <a:spcPts val="0"/>
+              </a:spcAft>
+            </a:pPr>
+            <a:r>
+              <a:rPr sz="1300">
+                <a:solidFill>
+                  <a:srgbClr val="6D8C97"/>
+                </a:solidFill>
+                <a:latin typeface="Consolas"/>
+              </a:rPr>
+              <a:t>  21  </a:t>
+            </a:r>
+            <a:r>
+              <a:rPr sz="1300">
+                <a:solidFill>
+                  <a:srgbClr val="7FE0A0"/>
+                </a:solidFill>
+                <a:latin typeface="Consolas"/>
+              </a:rPr>
+              <a:t>.composer { display: flex; gap: 8px; margin-top: 12px; }</a:t>
+            </a:r>
+          </a:p>
+          <a:p>
+            <a:pPr>
+              <a:spcAft>
+                <a:spcPts val="0"/>
+              </a:spcAft>
+            </a:pPr>
+            <a:r>
+              <a:rPr sz="1300">
+                <a:solidFill>
+                  <a:srgbClr val="6D8C97"/>
+                </a:solidFill>
+                <a:latin typeface="Consolas"/>
+              </a:rPr>
+              <a:t>  22  </a:t>
+            </a:r>
+            <a:r>
+              <a:rPr sz="1300">
+                <a:solidFill>
+                  <a:srgbClr val="7FE0A0"/>
+                </a:solidFill>
+                <a:latin typeface="Consolas"/>
+              </a:rPr>
+              <a:t>.composer input {</a:t>
+            </a:r>
+          </a:p>
+          <a:p>
+            <a:pPr>
+              <a:spcAft>
+                <a:spcPts val="0"/>
+              </a:spcAft>
+            </a:pPr>
+            <a:r>
+              <a:rPr sz="1300">
+                <a:solidFill>
+                  <a:srgbClr val="6D8C97"/>
+                </a:solidFill>
+                <a:latin typeface="Consolas"/>
+              </a:rPr>
+              <a:t>  23  </a:t>
+            </a:r>
+            <a:r>
+              <a:rPr sz="1300">
+                <a:solidFill>
+                  <a:srgbClr val="7FE0A0"/>
+                </a:solidFill>
+                <a:latin typeface="Consolas"/>
+              </a:rPr>
+              <a:t>  flex: 1;</a:t>
+            </a:r>
+          </a:p>
+          <a:p>
+            <a:pPr>
+              <a:spcAft>
+                <a:spcPts val="0"/>
+              </a:spcAft>
+            </a:pPr>
+            <a:r>
+              <a:rPr sz="1300">
+                <a:solidFill>
+                  <a:srgbClr val="6D8C97"/>
+                </a:solidFill>
+                <a:latin typeface="Consolas"/>
+              </a:rPr>
+              <a:t>  24  </a:t>
+            </a:r>
+            <a:r>
+              <a:rPr sz="1300">
+                <a:solidFill>
+                  <a:srgbClr val="7FE0A0"/>
+                </a:solidFill>
+                <a:latin typeface="Consolas"/>
+              </a:rPr>
+              <a:t>  padding: 11px;</a:t>
+            </a:r>
+          </a:p>
+          <a:p>
+            <a:pPr>
+              <a:spcAft>
+                <a:spcPts val="0"/>
+              </a:spcAft>
+            </a:pPr>
+            <a:r>
+              <a:rPr sz="1300">
+                <a:solidFill>
+                  <a:srgbClr val="6D8C97"/>
+                </a:solidFill>
+                <a:latin typeface="Consolas"/>
+              </a:rPr>
+              <a:t>  25  </a:t>
+            </a:r>
+            <a:r>
+              <a:rPr sz="1300">
+                <a:solidFill>
+                  <a:srgbClr val="7FE0A0"/>
+                </a:solidFill>
+                <a:latin typeface="Consolas"/>
+              </a:rPr>
+              <a:t>  border: 1px solid #dbe3ec;</a:t>
+            </a:r>
+          </a:p>
+          <a:p>
+            <a:pPr>
+              <a:spcAft>
+                <a:spcPts val="0"/>
+              </a:spcAft>
+            </a:pPr>
+            <a:r>
+              <a:rPr sz="1300">
+                <a:solidFill>
+                  <a:srgbClr val="6D8C97"/>
+                </a:solidFill>
+                <a:latin typeface="Consolas"/>
+              </a:rPr>
+              <a:t>  26  </a:t>
+            </a:r>
+            <a:r>
+              <a:rPr sz="1300">
+                <a:solidFill>
+                  <a:srgbClr val="7FE0A0"/>
+                </a:solidFill>
+                <a:latin typeface="Consolas"/>
+              </a:rPr>
+              <a:t>  border-radius: 6px;</a:t>
+            </a:r>
+          </a:p>
+          <a:p>
+            <a:pPr>
+              <a:spcAft>
+                <a:spcPts val="0"/>
+              </a:spcAft>
+            </a:pPr>
+            <a:r>
+              <a:rPr sz="1300">
+                <a:solidFill>
+                  <a:srgbClr val="6D8C97"/>
+                </a:solidFill>
+                <a:latin typeface="Consolas"/>
+              </a:rPr>
+              <a:t>  27  </a:t>
+            </a:r>
+            <a:r>
+              <a:rPr sz="1300">
+                <a:solidFill>
+                  <a:srgbClr val="7FE0A0"/>
+                </a:solidFill>
+                <a:latin typeface="Consolas"/>
+              </a:rPr>
+              <a:t>  font-size: 15px;</a:t>
+            </a:r>
+          </a:p>
+          <a:p>
+            <a:pPr>
+              <a:spcAft>
+                <a:spcPts val="0"/>
+              </a:spcAft>
+            </a:pPr>
+            <a:r>
+              <a:rPr sz="1300">
+                <a:solidFill>
+                  <a:srgbClr val="6D8C97"/>
+                </a:solidFill>
+                <a:latin typeface="Consolas"/>
+              </a:rPr>
+              <a:t>  28  </a:t>
+            </a:r>
+            <a:r>
+              <a:rPr sz="1300">
+                <a:solidFill>
+                  <a:srgbClr val="7FE0A0"/>
+                </a:solidFill>
+                <a:latin typeface="Consolas"/>
+              </a:rPr>
+              <a:t>}</a:t>
+            </a:r>
+          </a:p>
+          <a:p>
+            <a:pPr>
+              <a:spcAft>
+                <a:spcPts val="0"/>
+              </a:spcAft>
+            </a:pPr>
+            <a:r>
+              <a:rPr sz="1300">
+                <a:solidFill>
+                  <a:srgbClr val="6D8C97"/>
+                </a:solidFill>
+                <a:latin typeface="Consolas"/>
+              </a:rPr>
+              <a:t>  29  </a:t>
+            </a:r>
+            <a:r>
+              <a:rPr sz="1300">
+                <a:solidFill>
+                  <a:srgbClr val="7FE0A0"/>
+                </a:solidFill>
+                <a:latin typeface="Consolas"/>
+              </a:rPr>
+              <a:t>.composer button {</a:t>
+            </a:r>
+          </a:p>
+          <a:p>
+            <a:pPr>
+              <a:spcAft>
+                <a:spcPts val="0"/>
+              </a:spcAft>
+            </a:pPr>
+            <a:r>
+              <a:rPr sz="1300">
+                <a:solidFill>
+                  <a:srgbClr val="6D8C97"/>
+                </a:solidFill>
+                <a:latin typeface="Consolas"/>
+              </a:rPr>
+              <a:t>  30  </a:t>
+            </a:r>
+            <a:r>
+              <a:rPr sz="1300">
+                <a:solidFill>
+                  <a:srgbClr val="7FE0A0"/>
+                </a:solidFill>
+                <a:latin typeface="Consolas"/>
+              </a:rPr>
+              <a:t>  padding: 11px 18px;</a:t>
+            </a:r>
+          </a:p>
+          <a:p>
+            <a:pPr>
+              <a:spcAft>
+                <a:spcPts val="0"/>
+              </a:spcAft>
+            </a:pPr>
+            <a:r>
+              <a:rPr sz="1300">
+                <a:solidFill>
+                  <a:srgbClr val="6D8C97"/>
+                </a:solidFill>
+                <a:latin typeface="Consolas"/>
+              </a:rPr>
+              <a:t>  31  </a:t>
+            </a:r>
+            <a:r>
+              <a:rPr sz="1300">
+                <a:solidFill>
+                  <a:srgbClr val="7FE0A0"/>
+                </a:solidFill>
+                <a:latin typeface="Consolas"/>
+              </a:rPr>
+              <a:t>  border: 0;</a:t>
+            </a:r>
+          </a:p>
+          <a:p>
+            <a:pPr>
+              <a:spcAft>
+                <a:spcPts val="0"/>
+              </a:spcAft>
+            </a:pPr>
+            <a:r>
+              <a:rPr sz="1300">
+                <a:solidFill>
+                  <a:srgbClr val="6D8C97"/>
+                </a:solidFill>
+                <a:latin typeface="Consolas"/>
+              </a:rPr>
+              <a:t>  32  </a:t>
+            </a:r>
+            <a:r>
+              <a:rPr sz="1300">
+                <a:solidFill>
+                  <a:srgbClr val="7FE0A0"/>
+                </a:solidFill>
+                <a:latin typeface="Consolas"/>
+              </a:rPr>
+              <a:t>  border-radius: 6px;</a:t>
+            </a:r>
+          </a:p>
+          <a:p>
+            <a:pPr>
+              <a:spcAft>
+                <a:spcPts val="0"/>
+              </a:spcAft>
+            </a:pPr>
+            <a:r>
+              <a:rPr sz="1300">
+                <a:solidFill>
+                  <a:srgbClr val="6D8C97"/>
+                </a:solidFill>
+                <a:latin typeface="Consolas"/>
+              </a:rPr>
+              <a:t>  33  </a:t>
+            </a:r>
+            <a:r>
+              <a:rPr sz="1300">
+                <a:solidFill>
+                  <a:srgbClr val="7FE0A0"/>
+                </a:solidFill>
+                <a:latin typeface="Consolas"/>
+              </a:rPr>
+              <a:t>  background: #01aefd;</a:t>
+            </a:r>
+          </a:p>
+          <a:p>
+            <a:pPr>
+              <a:spcAft>
+                <a:spcPts val="0"/>
+              </a:spcAft>
+            </a:pPr>
+            <a:r>
+              <a:rPr sz="1300">
+                <a:solidFill>
+                  <a:srgbClr val="6D8C97"/>
+                </a:solidFill>
+                <a:latin typeface="Consolas"/>
+              </a:rPr>
+              <a:t>  34  </a:t>
+            </a:r>
+            <a:r>
+              <a:rPr sz="1300">
+                <a:solidFill>
+                  <a:srgbClr val="7FE0A0"/>
+                </a:solidFill>
+                <a:latin typeface="Consolas"/>
+              </a:rPr>
+              <a:t>  color: #ffffff;</a:t>
+            </a:r>
+          </a:p>
+          <a:p>
+            <a:pPr>
+              <a:spcAft>
+                <a:spcPts val="0"/>
+              </a:spcAft>
+            </a:pPr>
+            <a:r>
+              <a:rPr sz="1300">
+                <a:solidFill>
+                  <a:srgbClr val="6D8C97"/>
+                </a:solidFill>
+                <a:latin typeface="Consolas"/>
+              </a:rPr>
+              <a:t>  35  </a:t>
+            </a:r>
+            <a:r>
+              <a:rPr sz="1300">
+                <a:solidFill>
+                  <a:srgbClr val="7FE0A0"/>
+                </a:solidFill>
+                <a:latin typeface="Consolas"/>
+              </a:rPr>
+              <a:t>  font-size: 15px;</a:t>
+            </a:r>
+          </a:p>
+          <a:p>
+            <a:pPr>
+              <a:spcAft>
+                <a:spcPts val="0"/>
+              </a:spcAft>
+            </a:pPr>
+            <a:r>
+              <a:rPr sz="1300">
+                <a:solidFill>
+                  <a:srgbClr val="6D8C97"/>
+                </a:solidFill>
+                <a:latin typeface="Consolas"/>
+              </a:rPr>
+              <a:t>  36  </a:t>
+            </a:r>
+            <a:r>
+              <a:rPr sz="1300">
+                <a:solidFill>
+                  <a:srgbClr val="7FE0A0"/>
+                </a:solidFill>
+                <a:latin typeface="Consolas"/>
+              </a:rPr>
+              <a:t>  cursor: pointer;</a:t>
+            </a:r>
+          </a:p>
+          <a:p>
+            <a:pPr>
+              <a:spcAft>
+                <a:spcPts val="0"/>
+              </a:spcAft>
+            </a:pPr>
+            <a:r>
+              <a:rPr sz="1300">
+                <a:solidFill>
+                  <a:srgbClr val="6D8C97"/>
+                </a:solidFill>
+                <a:latin typeface="Consolas"/>
+              </a:rPr>
+              <a:t>  37  </a:t>
+            </a:r>
+            <a:r>
+              <a:rPr sz="1300">
+                <a:solidFill>
+                  <a:srgbClr val="7FE0A0"/>
+                </a:solidFill>
+                <a:latin typeface="Consolas"/>
+              </a:rPr>
+              <a:t>}</a:t>
+            </a:r>
+          </a:p>
+        </p:txBody>
+      </p:sp>
+      <p:sp>
+        <p:nvSpPr>
+          <p:cNvPr id="4" name="TextBox 3"/>
+          <p:cNvSpPr txBox="1"/>
+          <p:nvPr/>
+        </p:nvSpPr>
+        <p:spPr>
+          <a:xfrm>
+            <a:off x="548640" y="5623560"/>
+            <a:ext cx="11064240" cy="1051560"/>
           </a:xfrm>
           <a:prstGeom prst="rect">
             <a:avLst/>
@@ -25251,63 +25420,13 @@
           </a:bodyPr>
           <a:lstStyle/>
           <a:p>
-            <a:pPr>
-              <a:spcAft>
-                <a:spcPts val="1400"/>
-              </a:spcAft>
-            </a:pPr>
-            <a:r>
-              <a:rPr sz="2400">
-                <a:solidFill>
-                  <a:srgbClr val="1F2A37"/>
-                </a:solidFill>
-              </a:rPr>
-              <a:t>• The browser reads top to bottom</a:t>
-            </a:r>
-          </a:p>
-          <a:p>
-            <a:pPr>
-              <a:spcAft>
-                <a:spcPts val="1400"/>
-              </a:spcAft>
-            </a:pPr>
-            <a:r>
-              <a:rPr sz="2400">
-                <a:solidFill>
-                  <a:srgbClr val="1F2A37"/>
-                </a:solidFill>
-              </a:rPr>
-              <a:t>• At the top, the boxes do not exist yet</a:t>
-            </a:r>
-          </a:p>
-          <a:p>
-            <a:pPr>
-              <a:spcAft>
-                <a:spcPts val="1400"/>
-              </a:spcAft>
-            </a:pPr>
-            <a:r>
-              <a:rPr sz="2400">
-                <a:solidFill>
-                  <a:srgbClr val="1F2A37"/>
-                </a:solidFill>
-              </a:rPr>
-              <a:t>• A script cannot find a page that has not been made</a:t>
-            </a:r>
-          </a:p>
-          <a:p>
-            <a:pPr>
-              <a:spcAft>
-                <a:spcPts val="1400"/>
-              </a:spcAft>
-            </a:pPr>
-            <a:r>
-              <a:rPr sz="2400">
-                <a:solidFill>
-                  <a:srgbClr val="1F2A37"/>
-                </a:solidFill>
-              </a:rPr>
-              <a:t>• Move it up, press Run, watch it break</a:t>
+            <a:r>
+              <a:rPr sz="2000">
+                <a:solidFill>
+                  <a:srgbClr val="DCECEF"/>
+                </a:solidFill>
+              </a:rPr>
+              <a:t>That is the whole piece. Check yours looks the same before moving on.</a:t>
             </a:r>
           </a:p>
         </p:txBody>
@@ -25351,7 +25470,7 @@
                   <a:srgbClr val="1F2A37"/>
                 </a:solidFill>
               </a:rPr>
-              <a:t>The &lt;script&gt; tag</a:t>
+              <a:t>The script goes at the BOTTOM</a:t>
             </a:r>
           </a:p>
         </p:txBody>
@@ -25359,39 +25478,6 @@
       <p:sp>
         <p:nvSpPr>
           <p:cNvPr id="3" name="TextBox 2"/>
-          <p:cNvSpPr txBox="1"/>
-          <p:nvPr/>
-        </p:nvSpPr>
-        <p:spPr>
-          <a:xfrm>
-            <a:off x="868680" y="502920"/>
-            <a:ext cx="5486400" cy="457200"/>
-          </a:xfrm>
-          <a:prstGeom prst="rect">
-            <a:avLst/>
-          </a:prstGeom>
-          <a:noFill/>
-        </p:spPr>
-        <p:txBody>
-          <a:bodyPr wrap="none">
-            <a:spAutoFit/>
-          </a:bodyPr>
-          <a:lstStyle/>
-          <a:p>
-            <a:r>
-              <a:rPr sz="1500" b="1">
-                <a:solidFill>
-                  <a:srgbClr val="01AEFD"/>
-                </a:solidFill>
-              </a:rPr>
-              <a:t>HTML</a:t>
-            </a:r>
-          </a:p>
-        </p:txBody>
-      </p:sp>
-      <p:sp>
-        <p:nvSpPr>
-          <p:cNvPr id="4" name="TextBox 3"/>
           <p:cNvSpPr txBox="1"/>
           <p:nvPr/>
         </p:nvSpPr>
@@ -25422,7 +25508,7 @@
                   <a:srgbClr val="1F2A37"/>
                 </a:solidFill>
               </a:rPr>
-              <a:t>• Loads script.js, the code that makes the page do things.</a:t>
+              <a:t>• The browser reads top to bottom</a:t>
             </a:r>
           </a:p>
           <a:p>
@@ -25437,7 +25523,37 @@
                   <a:srgbClr val="1F2A37"/>
                 </a:solidFill>
               </a:rPr>
-              <a:t>• It goes LAST so the boxes exist before the code looks for them.</a:t>
+              <a:t>• At the top, the boxes do not exist yet</a:t>
+            </a:r>
+          </a:p>
+          <a:p>
+            <a:pPr>
+              <a:spcAft>
+                <a:spcPts val="1400"/>
+              </a:spcAft>
+            </a:pPr>
+            <a:r>
+              <a:rPr sz="2400">
+                <a:solidFill>
+                  <a:srgbClr val="1F2A37"/>
+                </a:solidFill>
+              </a:rPr>
+              <a:t>• A script cannot find a page that has not been made</a:t>
+            </a:r>
+          </a:p>
+          <a:p>
+            <a:pPr>
+              <a:spcAft>
+                <a:spcPts val="1400"/>
+              </a:spcAft>
+            </a:pPr>
+            <a:r>
+              <a:rPr sz="2400">
+                <a:solidFill>
+                  <a:srgbClr val="1F2A37"/>
+                </a:solidFill>
+              </a:rPr>
+              <a:t>• Move it up, press Run, watch it break</a:t>
             </a:r>
           </a:p>
         </p:txBody>
@@ -25451,6 +25567,136 @@
 </file>
 
 <file path=ppt/slides/slide94.xml><?xml version="1.0" encoding="utf-8"?>
+<p:sld xmlns:a="http://schemas.openxmlformats.org/drawingml/2006/main" xmlns:p="http://schemas.openxmlformats.org/presentationml/2006/main" xmlns:r="http://schemas.openxmlformats.org/officeDocument/2006/relationships">
+  <p:cSld>
+    <p:spTree>
+      <p:nvGrpSpPr>
+        <p:cNvPr id="1" name=""/>
+        <p:cNvGrpSpPr/>
+        <p:nvPr/>
+      </p:nvGrpSpPr>
+      <p:grpSpPr/>
+      <p:sp>
+        <p:nvSpPr>
+          <p:cNvPr id="2" name="Title 1"/>
+          <p:cNvSpPr>
+            <a:spLocks noGrp="1"/>
+          </p:cNvSpPr>
+          <p:nvPr>
+            <p:ph type="title"/>
+          </p:nvPr>
+        </p:nvSpPr>
+        <p:spPr/>
+        <p:txBody>
+          <a:bodyPr/>
+          <a:lstStyle/>
+          <a:p>
+            <a:r>
+              <a:rPr sz="3800" b="1">
+                <a:solidFill>
+                  <a:srgbClr val="1F2A37"/>
+                </a:solidFill>
+              </a:rPr>
+              <a:t>The &lt;script&gt; tag</a:t>
+            </a:r>
+          </a:p>
+        </p:txBody>
+      </p:sp>
+      <p:sp>
+        <p:nvSpPr>
+          <p:cNvPr id="3" name="TextBox 2"/>
+          <p:cNvSpPr txBox="1"/>
+          <p:nvPr/>
+        </p:nvSpPr>
+        <p:spPr>
+          <a:xfrm>
+            <a:off x="868680" y="502920"/>
+            <a:ext cx="5486400" cy="457200"/>
+          </a:xfrm>
+          <a:prstGeom prst="rect">
+            <a:avLst/>
+          </a:prstGeom>
+          <a:noFill/>
+        </p:spPr>
+        <p:txBody>
+          <a:bodyPr wrap="none">
+            <a:spAutoFit/>
+          </a:bodyPr>
+          <a:lstStyle/>
+          <a:p>
+            <a:r>
+              <a:rPr sz="1500" b="1">
+                <a:solidFill>
+                  <a:srgbClr val="01AEFD"/>
+                </a:solidFill>
+              </a:rPr>
+              <a:t>HTML</a:t>
+            </a:r>
+          </a:p>
+        </p:txBody>
+      </p:sp>
+      <p:sp>
+        <p:nvSpPr>
+          <p:cNvPr id="4" name="TextBox 3"/>
+          <p:cNvSpPr txBox="1"/>
+          <p:nvPr/>
+        </p:nvSpPr>
+        <p:spPr>
+          <a:xfrm>
+            <a:off x="822960" y="1828800"/>
+            <a:ext cx="10515600" cy="4206240"/>
+          </a:xfrm>
+          <a:prstGeom prst="rect">
+            <a:avLst/>
+          </a:prstGeom>
+          <a:noFill/>
+        </p:spPr>
+        <p:txBody>
+          <a:bodyPr wrap="square">
+            <a:spAutoFit/>
+          </a:bodyPr>
+          <a:lstStyle/>
+          <a:p>
+            <a:pPr>
+              <a:spcAft>
+                <a:spcPts val="1400"/>
+              </a:spcAft>
+            </a:pPr>
+            <a:r>
+              <a:rPr sz="2400">
+                <a:solidFill>
+                  <a:srgbClr val="1F2A37"/>
+                </a:solidFill>
+              </a:rPr>
+              <a:t>• Loads script.js, the code that makes the page do things.</a:t>
+            </a:r>
+          </a:p>
+          <a:p>
+            <a:pPr>
+              <a:spcAft>
+                <a:spcPts val="1400"/>
+              </a:spcAft>
+            </a:pPr>
+            <a:r>
+              <a:rPr sz="2400">
+                <a:solidFill>
+                  <a:srgbClr val="1F2A37"/>
+                </a:solidFill>
+              </a:rPr>
+              <a:t>• It goes LAST so the boxes exist before the code looks for them.</a:t>
+            </a:r>
+          </a:p>
+        </p:txBody>
+      </p:sp>
+    </p:spTree>
+  </p:cSld>
+  <p:clrMapOvr>
+    <a:masterClrMapping/>
+  </p:clrMapOvr>
+</p:sld>
+</file>
+
+<file path=ppt/slides/slide95.xml><?xml version="1.0" encoding="utf-8"?>
 <p:sld xmlns:a="http://schemas.openxmlformats.org/drawingml/2006/main" xmlns:p="http://schemas.openxmlformats.org/presentationml/2006/main" xmlns:r="http://schemas.openxmlformats.org/officeDocument/2006/relationships">
   <p:cSld>
     <p:bg>
@@ -25603,103 +25849,6 @@
                 </a:solidFill>
               </a:rPr>
               <a:t>Loads your JavaScript. It sits at the very bottom so every box above already exists when the code runs.</a:t>
-            </a:r>
-          </a:p>
-        </p:txBody>
-      </p:sp>
-    </p:spTree>
-  </p:cSld>
-  <p:clrMapOvr>
-    <a:masterClrMapping/>
-  </p:clrMapOvr>
-</p:sld>
-</file>
-
-<file path=ppt/slides/slide95.xml><?xml version="1.0" encoding="utf-8"?>
-<p:sld xmlns:a="http://schemas.openxmlformats.org/drawingml/2006/main" xmlns:p="http://schemas.openxmlformats.org/presentationml/2006/main" xmlns:r="http://schemas.openxmlformats.org/officeDocument/2006/relationships">
-  <p:cSld>
-    <p:spTree>
-      <p:nvGrpSpPr>
-        <p:cNvPr id="1" name=""/>
-        <p:cNvGrpSpPr/>
-        <p:nvPr/>
-      </p:nvGrpSpPr>
-      <p:grpSpPr/>
-      <p:sp>
-        <p:nvSpPr>
-          <p:cNvPr id="2" name="Title 1"/>
-          <p:cNvSpPr>
-            <a:spLocks noGrp="1"/>
-          </p:cNvSpPr>
-          <p:nvPr>
-            <p:ph type="title"/>
-          </p:nvPr>
-        </p:nvSpPr>
-        <p:spPr/>
-        <p:txBody>
-          <a:bodyPr/>
-          <a:lstStyle/>
-          <a:p>
-            <a:r>
-              <a:rPr sz="3800" b="1">
-                <a:solidFill>
-                  <a:srgbClr val="1F2A37"/>
-                </a:solidFill>
-              </a:rPr>
-              <a:t>Two buttons you will use every week</a:t>
-            </a:r>
-          </a:p>
-        </p:txBody>
-      </p:sp>
-      <p:sp>
-        <p:nvSpPr>
-          <p:cNvPr id="3" name="TextBox 2"/>
-          <p:cNvSpPr txBox="1"/>
-          <p:nvPr/>
-        </p:nvSpPr>
-        <p:spPr>
-          <a:xfrm>
-            <a:off x="822960" y="1828800"/>
-            <a:ext cx="10515600" cy="4206240"/>
-          </a:xfrm>
-          <a:prstGeom prst="rect">
-            <a:avLst/>
-          </a:prstGeom>
-          <a:noFill/>
-        </p:spPr>
-        <p:txBody>
-          <a:bodyPr wrap="square">
-            <a:spAutoFit/>
-          </a:bodyPr>
-          <a:lstStyle/>
-          <a:p>
-            <a:pPr>
-              <a:spcAft>
-                <a:spcPts val="1400"/>
-              </a:spcAft>
-            </a:pPr>
-            <a:r>
-              <a:rPr sz="2400">
-                <a:solidFill>
-                  <a:srgbClr val="1F2A37"/>
-                </a:solidFill>
-              </a:rPr>
-              <a:t>• Run - nothing happens until you press it</a:t>
-            </a:r>
-          </a:p>
-          <a:p>
-            <a:pPr>
-              <a:spcAft>
-                <a:spcPts val="1400"/>
-              </a:spcAft>
-            </a:pPr>
-            <a:r>
-              <a:rPr sz="2400">
-                <a:solidFill>
-                  <a:srgbClr val="1F2A37"/>
-                </a:solidFill>
-              </a:rPr>
-              <a:t>• Console - where your code talks to you</a:t>
             </a:r>
           </a:p>
         </p:txBody>
@@ -25743,7 +25892,7 @@
                   <a:srgbClr val="1F2A37"/>
                 </a:solidFill>
               </a:rPr>
-              <a:t>A comment</a:t>
+              <a:t>Two buttons you will use every week</a:t>
             </a:r>
           </a:p>
         </p:txBody>
@@ -25751,39 +25900,6 @@
       <p:sp>
         <p:nvSpPr>
           <p:cNvPr id="3" name="TextBox 2"/>
-          <p:cNvSpPr txBox="1"/>
-          <p:nvPr/>
-        </p:nvSpPr>
-        <p:spPr>
-          <a:xfrm>
-            <a:off x="868680" y="502920"/>
-            <a:ext cx="5486400" cy="457200"/>
-          </a:xfrm>
-          <a:prstGeom prst="rect">
-            <a:avLst/>
-          </a:prstGeom>
-          <a:noFill/>
-        </p:spPr>
-        <p:txBody>
-          <a:bodyPr wrap="none">
-            <a:spAutoFit/>
-          </a:bodyPr>
-          <a:lstStyle/>
-          <a:p>
-            <a:r>
-              <a:rPr sz="1500" b="1">
-                <a:solidFill>
-                  <a:srgbClr val="01AEFD"/>
-                </a:solidFill>
-              </a:rPr>
-              <a:t>JAVASCRIPT</a:t>
-            </a:r>
-          </a:p>
-        </p:txBody>
-      </p:sp>
-      <p:sp>
-        <p:nvSpPr>
-          <p:cNvPr id="4" name="TextBox 3"/>
           <p:cNvSpPr txBox="1"/>
           <p:nvPr/>
         </p:nvSpPr>
@@ -25814,7 +25930,7 @@
                   <a:srgbClr val="1F2A37"/>
                 </a:solidFill>
               </a:rPr>
-              <a:t>• A line starting with // that the computer ignores.</a:t>
+              <a:t>• Run - nothing happens until you press it</a:t>
             </a:r>
           </a:p>
           <a:p>
@@ -25829,7 +25945,7 @@
                   <a:srgbClr val="1F2A37"/>
                 </a:solidFill>
               </a:rPr>
-              <a:t>• It is a note for the humans reading the code.</a:t>
+              <a:t>• Console - where your code talks to you</a:t>
             </a:r>
           </a:p>
         </p:txBody>
@@ -25843,6 +25959,136 @@
 </file>
 
 <file path=ppt/slides/slide97.xml><?xml version="1.0" encoding="utf-8"?>
+<p:sld xmlns:a="http://schemas.openxmlformats.org/drawingml/2006/main" xmlns:p="http://schemas.openxmlformats.org/presentationml/2006/main" xmlns:r="http://schemas.openxmlformats.org/officeDocument/2006/relationships">
+  <p:cSld>
+    <p:spTree>
+      <p:nvGrpSpPr>
+        <p:cNvPr id="1" name=""/>
+        <p:cNvGrpSpPr/>
+        <p:nvPr/>
+      </p:nvGrpSpPr>
+      <p:grpSpPr/>
+      <p:sp>
+        <p:nvSpPr>
+          <p:cNvPr id="2" name="Title 1"/>
+          <p:cNvSpPr>
+            <a:spLocks noGrp="1"/>
+          </p:cNvSpPr>
+          <p:nvPr>
+            <p:ph type="title"/>
+          </p:nvPr>
+        </p:nvSpPr>
+        <p:spPr/>
+        <p:txBody>
+          <a:bodyPr/>
+          <a:lstStyle/>
+          <a:p>
+            <a:r>
+              <a:rPr sz="3800" b="1">
+                <a:solidFill>
+                  <a:srgbClr val="1F2A37"/>
+                </a:solidFill>
+              </a:rPr>
+              <a:t>A comment</a:t>
+            </a:r>
+          </a:p>
+        </p:txBody>
+      </p:sp>
+      <p:sp>
+        <p:nvSpPr>
+          <p:cNvPr id="3" name="TextBox 2"/>
+          <p:cNvSpPr txBox="1"/>
+          <p:nvPr/>
+        </p:nvSpPr>
+        <p:spPr>
+          <a:xfrm>
+            <a:off x="868680" y="502920"/>
+            <a:ext cx="5486400" cy="457200"/>
+          </a:xfrm>
+          <a:prstGeom prst="rect">
+            <a:avLst/>
+          </a:prstGeom>
+          <a:noFill/>
+        </p:spPr>
+        <p:txBody>
+          <a:bodyPr wrap="none">
+            <a:spAutoFit/>
+          </a:bodyPr>
+          <a:lstStyle/>
+          <a:p>
+            <a:r>
+              <a:rPr sz="1500" b="1">
+                <a:solidFill>
+                  <a:srgbClr val="01AEFD"/>
+                </a:solidFill>
+              </a:rPr>
+              <a:t>JAVASCRIPT</a:t>
+            </a:r>
+          </a:p>
+        </p:txBody>
+      </p:sp>
+      <p:sp>
+        <p:nvSpPr>
+          <p:cNvPr id="4" name="TextBox 3"/>
+          <p:cNvSpPr txBox="1"/>
+          <p:nvPr/>
+        </p:nvSpPr>
+        <p:spPr>
+          <a:xfrm>
+            <a:off x="822960" y="1828800"/>
+            <a:ext cx="10515600" cy="4206240"/>
+          </a:xfrm>
+          <a:prstGeom prst="rect">
+            <a:avLst/>
+          </a:prstGeom>
+          <a:noFill/>
+        </p:spPr>
+        <p:txBody>
+          <a:bodyPr wrap="square">
+            <a:spAutoFit/>
+          </a:bodyPr>
+          <a:lstStyle/>
+          <a:p>
+            <a:pPr>
+              <a:spcAft>
+                <a:spcPts val="1400"/>
+              </a:spcAft>
+            </a:pPr>
+            <a:r>
+              <a:rPr sz="2400">
+                <a:solidFill>
+                  <a:srgbClr val="1F2A37"/>
+                </a:solidFill>
+              </a:rPr>
+              <a:t>• A line starting with // that the computer ignores.</a:t>
+            </a:r>
+          </a:p>
+          <a:p>
+            <a:pPr>
+              <a:spcAft>
+                <a:spcPts val="1400"/>
+              </a:spcAft>
+            </a:pPr>
+            <a:r>
+              <a:rPr sz="2400">
+                <a:solidFill>
+                  <a:srgbClr val="1F2A37"/>
+                </a:solidFill>
+              </a:rPr>
+              <a:t>• It is a note for the humans reading the code.</a:t>
+            </a:r>
+          </a:p>
+        </p:txBody>
+      </p:sp>
+    </p:spTree>
+  </p:cSld>
+  <p:clrMapOvr>
+    <a:masterClrMapping/>
+  </p:clrMapOvr>
+</p:sld>
+</file>
+
+<file path=ppt/slides/slide98.xml><?xml version="1.0" encoding="utf-8"?>
 <p:sld xmlns:a="http://schemas.openxmlformats.org/drawingml/2006/main" xmlns:p="http://schemas.openxmlformats.org/presentationml/2006/main" xmlns:r="http://schemas.openxmlformats.org/officeDocument/2006/relationships">
   <p:cSld>
     <p:bg>
@@ -25970,136 +26216,6 @@
                 </a:solidFill>
               </a:rPr>
               <a:t>A comment: a note for you, ignored by the computer.</a:t>
-            </a:r>
-          </a:p>
-        </p:txBody>
-      </p:sp>
-    </p:spTree>
-  </p:cSld>
-  <p:clrMapOvr>
-    <a:masterClrMapping/>
-  </p:clrMapOvr>
-</p:sld>
-</file>
-
-<file path=ppt/slides/slide98.xml><?xml version="1.0" encoding="utf-8"?>
-<p:sld xmlns:a="http://schemas.openxmlformats.org/drawingml/2006/main" xmlns:p="http://schemas.openxmlformats.org/presentationml/2006/main" xmlns:r="http://schemas.openxmlformats.org/officeDocument/2006/relationships">
-  <p:cSld>
-    <p:spTree>
-      <p:nvGrpSpPr>
-        <p:cNvPr id="1" name=""/>
-        <p:cNvGrpSpPr/>
-        <p:nvPr/>
-      </p:nvGrpSpPr>
-      <p:grpSpPr/>
-      <p:sp>
-        <p:nvSpPr>
-          <p:cNvPr id="2" name="Title 1"/>
-          <p:cNvSpPr>
-            <a:spLocks noGrp="1"/>
-          </p:cNvSpPr>
-          <p:nvPr>
-            <p:ph type="title"/>
-          </p:nvPr>
-        </p:nvSpPr>
-        <p:spPr/>
-        <p:txBody>
-          <a:bodyPr/>
-          <a:lstStyle/>
-          <a:p>
-            <a:r>
-              <a:rPr sz="3800" b="1">
-                <a:solidFill>
-                  <a:srgbClr val="1F2A37"/>
-                </a:solidFill>
-              </a:rPr>
-              <a:t>A line of JavaScript</a:t>
-            </a:r>
-          </a:p>
-        </p:txBody>
-      </p:sp>
-      <p:sp>
-        <p:nvSpPr>
-          <p:cNvPr id="3" name="TextBox 2"/>
-          <p:cNvSpPr txBox="1"/>
-          <p:nvPr/>
-        </p:nvSpPr>
-        <p:spPr>
-          <a:xfrm>
-            <a:off x="868680" y="502920"/>
-            <a:ext cx="5486400" cy="457200"/>
-          </a:xfrm>
-          <a:prstGeom prst="rect">
-            <a:avLst/>
-          </a:prstGeom>
-          <a:noFill/>
-        </p:spPr>
-        <p:txBody>
-          <a:bodyPr wrap="none">
-            <a:spAutoFit/>
-          </a:bodyPr>
-          <a:lstStyle/>
-          <a:p>
-            <a:r>
-              <a:rPr sz="1500" b="1">
-                <a:solidFill>
-                  <a:srgbClr val="01AEFD"/>
-                </a:solidFill>
-              </a:rPr>
-              <a:t>JAVASCRIPT</a:t>
-            </a:r>
-          </a:p>
-        </p:txBody>
-      </p:sp>
-      <p:sp>
-        <p:nvSpPr>
-          <p:cNvPr id="4" name="TextBox 3"/>
-          <p:cNvSpPr txBox="1"/>
-          <p:nvPr/>
-        </p:nvSpPr>
-        <p:spPr>
-          <a:xfrm>
-            <a:off x="822960" y="1828800"/>
-            <a:ext cx="10515600" cy="4206240"/>
-          </a:xfrm>
-          <a:prstGeom prst="rect">
-            <a:avLst/>
-          </a:prstGeom>
-          <a:noFill/>
-        </p:spPr>
-        <p:txBody>
-          <a:bodyPr wrap="square">
-            <a:spAutoFit/>
-          </a:bodyPr>
-          <a:lstStyle/>
-          <a:p>
-            <a:pPr>
-              <a:spcAft>
-                <a:spcPts val="1400"/>
-              </a:spcAft>
-            </a:pPr>
-            <a:r>
-              <a:rPr sz="2400">
-                <a:solidFill>
-                  <a:srgbClr val="1F2A37"/>
-                </a:solidFill>
-              </a:rPr>
-              <a:t>• Most lines are one instruction, usually ending in a semicolon ;</a:t>
-            </a:r>
-          </a:p>
-          <a:p>
-            <a:pPr>
-              <a:spcAft>
-                <a:spcPts val="1400"/>
-              </a:spcAft>
-            </a:pPr>
-            <a:r>
-              <a:rPr sz="2400">
-                <a:solidFill>
-                  <a:srgbClr val="1F2A37"/>
-                </a:solidFill>
-              </a:rPr>
-              <a:t>• The computer runs them top to bottom.</a:t>
             </a:r>
           </a:p>
         </p:txBody>
@@ -26143,7 +26259,7 @@
                   <a:srgbClr val="1F2A37"/>
                 </a:solidFill>
               </a:rPr>
-              <a:t>Strings: text in quotes</a:t>
+              <a:t>A line of JavaScript</a:t>
             </a:r>
           </a:p>
         </p:txBody>
@@ -26214,7 +26330,7 @@
                   <a:srgbClr val="1F2A37"/>
                 </a:solidFill>
               </a:rPr>
-              <a:t>• Text the computer treats as data goes in quotes: 'hello'.</a:t>
+              <a:t>• Most lines are one instruction, usually ending in a semicolon ;</a:t>
             </a:r>
           </a:p>
           <a:p>
@@ -26229,7 +26345,7 @@
                   <a:srgbClr val="1F2A37"/>
                 </a:solidFill>
               </a:rPr>
-              <a:t>• Single or double quotes both work.</a:t>
+              <a:t>• The computer runs them top to bottom.</a:t>
             </a:r>
           </a:p>
         </p:txBody>

--- a/ai101/slides/week-01.pptx
+++ b/ai101/slides/week-01.pptx
@@ -8885,7 +8885,7 @@
                   <a:srgbClr val="DCECEF"/>
                 </a:solidFill>
               </a:rPr>
-              <a:t>Closes &lt;/main&gt;. The visible page is complete.</a:t>
+              <a:t>A &lt;footer&gt; for the bottom of the page. class="credits" styles it.</a:t>
             </a:r>
           </a:p>
         </p:txBody>

--- a/ai101/slides/week-01.pptx
+++ b/ai101/slides/week-01.pptx
@@ -8885,7 +8885,7 @@
                   <a:srgbClr val="DCECEF"/>
                 </a:solidFill>
               </a:rPr>
-              <a:t>A &lt;footer&gt; for the bottom of the page. class="credits" styles it.</a:t>
+              <a:t>Closes &lt;/main&gt;. The visible page is complete.</a:t>
             </a:r>
           </a:p>
         </p:txBody>

--- a/ai101/slides/week-01.pptx
+++ b/ai101/slides/week-01.pptx
@@ -18250,7 +18250,7 @@
                   <a:srgbClr val="1F2A37"/>
                 </a:solidFill>
               </a:rPr>
-              <a:t>display: flex</a:t>
+              <a:t>display</a:t>
             </a:r>
           </a:p>
         </p:txBody>
@@ -18915,7 +18915,7 @@
                   <a:srgbClr val="1F2A37"/>
                 </a:solidFill>
               </a:rPr>
-              <a:t>flex: 1</a:t>
+              <a:t>flex</a:t>
             </a:r>
           </a:p>
         </p:txBody>

--- a/ai101/slides/week-01.pptx
+++ b/ai101/slides/week-01.pptx
@@ -146,6 +146,14 @@
     <p:sldId id="394" r:id="rId145"/>
     <p:sldId id="395" r:id="rId146"/>
     <p:sldId id="396" r:id="rId147"/>
+    <p:sldId id="397" r:id="rId148"/>
+    <p:sldId id="398" r:id="rId149"/>
+    <p:sldId id="399" r:id="rId150"/>
+    <p:sldId id="400" r:id="rId151"/>
+    <p:sldId id="401" r:id="rId152"/>
+    <p:sldId id="402" r:id="rId153"/>
+    <p:sldId id="403" r:id="rId154"/>
+    <p:sldId id="404" r:id="rId155"/>
   </p:sldIdLst>
   <p:sldSz cx="12191695" cy="6858000" type="screen4x3"/>
   <p:notesSz cx="6858000" cy="9144000"/>
@@ -11688,7 +11696,7 @@
                   <a:srgbClr val="1F2A37"/>
                 </a:solidFill>
               </a:rPr>
-              <a:t>The script goes at the BOTTOM</a:t>
+              <a:t>In &lt;button&gt;Send&lt;/button&gt;, what is 'Send'?</a:t>
             </a:r>
           </a:p>
         </p:txBody>
@@ -11696,6 +11704,39 @@
       <p:sp>
         <p:nvSpPr>
           <p:cNvPr id="3" name="TextBox 2"/>
+          <p:cNvSpPr txBox="1"/>
+          <p:nvPr/>
+        </p:nvSpPr>
+        <p:spPr>
+          <a:xfrm>
+            <a:off x="868680" y="502920"/>
+            <a:ext cx="5486400" cy="457200"/>
+          </a:xfrm>
+          <a:prstGeom prst="rect">
+            <a:avLst/>
+          </a:prstGeom>
+          <a:noFill/>
+        </p:spPr>
+        <p:txBody>
+          <a:bodyPr wrap="none">
+            <a:spAutoFit/>
+          </a:bodyPr>
+          <a:lstStyle/>
+          <a:p>
+            <a:r>
+              <a:rPr sz="1500" b="1">
+                <a:solidFill>
+                  <a:srgbClr val="01AEFD"/>
+                </a:solidFill>
+              </a:rPr>
+              <a:t>QUICK CHECK</a:t>
+            </a:r>
+          </a:p>
+        </p:txBody>
+      </p:sp>
+      <p:sp>
+        <p:nvSpPr>
+          <p:cNvPr id="4" name="TextBox 3"/>
           <p:cNvSpPr txBox="1"/>
           <p:nvPr/>
         </p:nvSpPr>
@@ -11726,7 +11767,7 @@
                   <a:srgbClr val="1F2A37"/>
                 </a:solidFill>
               </a:rPr>
-              <a:t>• The browser reads top to bottom</a:t>
+              <a:t>• A. The content shown on the button</a:t>
             </a:r>
           </a:p>
           <a:p>
@@ -11741,7 +11782,7 @@
                   <a:srgbClr val="1F2A37"/>
                 </a:solidFill>
               </a:rPr>
-              <a:t>• At the top, the boxes do not exist yet</a:t>
+              <a:t>• B. The tag's name</a:t>
             </a:r>
           </a:p>
           <a:p>
@@ -11756,7 +11797,7 @@
                   <a:srgbClr val="1F2A37"/>
                 </a:solidFill>
               </a:rPr>
-              <a:t>• A script cannot find a page that has not been made</a:t>
+              <a:t>• C. An attribute</a:t>
             </a:r>
           </a:p>
           <a:p>
@@ -11771,7 +11812,22 @@
                   <a:srgbClr val="1F2A37"/>
                 </a:solidFill>
               </a:rPr>
-              <a:t>• Move it up, press Run, watch it break</a:t>
+              <a:t>• D. A CSS class</a:t>
+            </a:r>
+          </a:p>
+          <a:p>
+            <a:pPr>
+              <a:spcAft>
+                <a:spcPts val="1400"/>
+              </a:spcAft>
+            </a:pPr>
+            <a:r>
+              <a:rPr sz="2400">
+                <a:solidFill>
+                  <a:srgbClr val="1F2A37"/>
+                </a:solidFill>
+              </a:rPr>
+              <a:t>• Pick one - the answer is on the next slide.</a:t>
             </a:r>
           </a:p>
         </p:txBody>
@@ -11815,7 +11871,7 @@
                   <a:srgbClr val="1F2A37"/>
                 </a:solidFill>
               </a:rPr>
-              <a:t>The &lt;script&gt; tag</a:t>
+              <a:t>In &lt;button&gt;Send&lt;/button&gt;, what is 'Send'?</a:t>
             </a:r>
           </a:p>
         </p:txBody>
@@ -11848,7 +11904,7 @@
                   <a:srgbClr val="01AEFD"/>
                 </a:solidFill>
               </a:rPr>
-              <a:t>HTML</a:t>
+              <a:t>ANSWER</a:t>
             </a:r>
           </a:p>
         </p:txBody>
@@ -11886,7 +11942,7 @@
                   <a:srgbClr val="1F2A37"/>
                 </a:solidFill>
               </a:rPr>
-              <a:t>• Loads script.js, the code that makes the page do things.</a:t>
+              <a:t>• A. The content shown on the button (correct)</a:t>
             </a:r>
           </a:p>
           <a:p>
@@ -11901,7 +11957,52 @@
                   <a:srgbClr val="1F2A37"/>
                 </a:solidFill>
               </a:rPr>
-              <a:t>• It goes LAST so the boxes exist before the code looks for them.</a:t>
+              <a:t>• B. The tag's name</a:t>
+            </a:r>
+          </a:p>
+          <a:p>
+            <a:pPr>
+              <a:spcAft>
+                <a:spcPts val="1400"/>
+              </a:spcAft>
+            </a:pPr>
+            <a:r>
+              <a:rPr sz="2400">
+                <a:solidFill>
+                  <a:srgbClr val="1F2A37"/>
+                </a:solidFill>
+              </a:rPr>
+              <a:t>• C. An attribute</a:t>
+            </a:r>
+          </a:p>
+          <a:p>
+            <a:pPr>
+              <a:spcAft>
+                <a:spcPts val="1400"/>
+              </a:spcAft>
+            </a:pPr>
+            <a:r>
+              <a:rPr sz="2400">
+                <a:solidFill>
+                  <a:srgbClr val="1F2A37"/>
+                </a:solidFill>
+              </a:rPr>
+              <a:t>• D. A CSS class</a:t>
+            </a:r>
+          </a:p>
+          <a:p>
+            <a:pPr>
+              <a:spcAft>
+                <a:spcPts val="1400"/>
+              </a:spcAft>
+            </a:pPr>
+            <a:r>
+              <a:rPr sz="2400">
+                <a:solidFill>
+                  <a:srgbClr val="1F2A37"/>
+                </a:solidFill>
+              </a:rPr>
+              <a:t>• Whatever sits between the opening and closing tags is the content.</a:t>
             </a:r>
           </a:p>
         </p:txBody>
@@ -11917,14 +12018,6 @@
 <file path=ppt/slides/slide122.xml><?xml version="1.0" encoding="utf-8"?>
 <p:sld xmlns:a="http://schemas.openxmlformats.org/drawingml/2006/main" xmlns:p="http://schemas.openxmlformats.org/presentationml/2006/main" xmlns:r="http://schemas.openxmlformats.org/officeDocument/2006/relationships">
   <p:cSld>
-    <p:bg>
-      <p:bgPr>
-        <a:solidFill>
-          <a:srgbClr val="102127"/>
-        </a:solidFill>
-        <a:effectLst/>
-      </p:bgPr>
-    </p:bg>
     <p:spTree>
       <p:nvGrpSpPr>
         <p:cNvPr id="1" name=""/>
@@ -11934,14 +12027,40 @@
       <p:grpSpPr/>
       <p:sp>
         <p:nvSpPr>
-          <p:cNvPr id="2" name="TextBox 1"/>
+          <p:cNvPr id="2" name="Title 1"/>
+          <p:cNvSpPr>
+            <a:spLocks noGrp="1"/>
+          </p:cNvSpPr>
+          <p:nvPr>
+            <p:ph type="title"/>
+          </p:nvPr>
+        </p:nvSpPr>
+        <p:spPr/>
+        <p:txBody>
+          <a:bodyPr/>
+          <a:lstStyle/>
+          <a:p>
+            <a:r>
+              <a:rPr sz="3800" b="1">
+                <a:solidFill>
+                  <a:srgbClr val="1F2A37"/>
+                </a:solidFill>
+              </a:rPr>
+              <a:t>In  body { background: #0d1b21; }  what is 'background'?</a:t>
+            </a:r>
+          </a:p>
+        </p:txBody>
+      </p:sp>
+      <p:sp>
+        <p:nvSpPr>
+          <p:cNvPr id="3" name="TextBox 2"/>
           <p:cNvSpPr txBox="1"/>
           <p:nvPr/>
         </p:nvSpPr>
         <p:spPr>
           <a:xfrm>
-            <a:off x="502920" y="274320"/>
-            <a:ext cx="11155680" cy="548640"/>
+            <a:off x="868680" y="502920"/>
+            <a:ext cx="5486400" cy="457200"/>
           </a:xfrm>
           <a:prstGeom prst="rect">
             <a:avLst/>
@@ -11955,85 +12074,12 @@
           <a:lstStyle/>
           <a:p>
             <a:r>
-              <a:rPr sz="2200" b="1">
+              <a:rPr sz="1500" b="1">
                 <a:solidFill>
                   <a:srgbClr val="01AEFD"/>
                 </a:solidFill>
               </a:rPr>
-              <a:t>Type this into index.html   -   line 15</a:t>
-            </a:r>
-          </a:p>
-        </p:txBody>
-      </p:sp>
-      <p:sp>
-        <p:nvSpPr>
-          <p:cNvPr id="3" name="TextBox 2"/>
-          <p:cNvSpPr txBox="1"/>
-          <p:nvPr/>
-        </p:nvSpPr>
-        <p:spPr>
-          <a:xfrm>
-            <a:off x="502920" y="960120"/>
-            <a:ext cx="11155680" cy="4297680"/>
-          </a:xfrm>
-          <a:prstGeom prst="rect">
-            <a:avLst/>
-          </a:prstGeom>
-          <a:noFill/>
-        </p:spPr>
-        <p:txBody>
-          <a:bodyPr wrap="none">
-            <a:spAutoFit/>
-          </a:bodyPr>
-          <a:lstStyle/>
-          <a:p>
-            <a:pPr>
-              <a:spcAft>
-                <a:spcPts val="0"/>
-              </a:spcAft>
-            </a:pPr>
-            <a:r>
-              <a:rPr sz="1800">
-                <a:solidFill>
-                  <a:srgbClr val="6D8C97"/>
-                </a:solidFill>
-                <a:latin typeface="Consolas"/>
-              </a:rPr>
-              <a:t>  14  </a:t>
-            </a:r>
-            <a:r>
-              <a:rPr sz="1800">
-                <a:solidFill>
-                  <a:srgbClr val="6D8C97"/>
-                </a:solidFill>
-                <a:latin typeface="Consolas"/>
-              </a:rPr>
-              <a:t> </a:t>
-            </a:r>
-          </a:p>
-          <a:p>
-            <a:pPr>
-              <a:spcAft>
-                <a:spcPts val="0"/>
-              </a:spcAft>
-            </a:pPr>
-            <a:r>
-              <a:rPr sz="1800">
-                <a:solidFill>
-                  <a:srgbClr val="6D8C97"/>
-                </a:solidFill>
-                <a:latin typeface="Consolas"/>
-              </a:rPr>
-              <a:t>  15  </a:t>
-            </a:r>
-            <a:r>
-              <a:rPr sz="1800">
-                <a:solidFill>
-                  <a:srgbClr val="7FE0A0"/>
-                </a:solidFill>
-                <a:latin typeface="Consolas"/>
-              </a:rPr>
-              <a:t>&lt;script src="script.js"&gt;&lt;/script&gt;</a:t>
+              <a:t>QUICK CHECK</a:t>
             </a:r>
           </a:p>
         </p:txBody>
@@ -12046,8 +12092,8 @@
         </p:nvSpPr>
         <p:spPr>
           <a:xfrm>
-            <a:off x="548640" y="5623560"/>
-            <a:ext cx="11064240" cy="1051560"/>
+            <a:off x="822960" y="1828800"/>
+            <a:ext cx="10515600" cy="4206240"/>
           </a:xfrm>
           <a:prstGeom prst="rect">
             <a:avLst/>
@@ -12060,13 +12106,78 @@
           </a:bodyPr>
           <a:lstStyle/>
           <a:p>
-            <a:r>
-              <a:rPr sz="2000">
-                <a:solidFill>
-                  <a:srgbClr val="DCECEF"/>
-                </a:solidFill>
-              </a:rPr>
-              <a:t>Loads your JavaScript. It sits at the very bottom so every box above already exists when the code runs.</a:t>
+            <a:pPr>
+              <a:spcAft>
+                <a:spcPts val="1400"/>
+              </a:spcAft>
+            </a:pPr>
+            <a:r>
+              <a:rPr sz="2400">
+                <a:solidFill>
+                  <a:srgbClr val="1F2A37"/>
+                </a:solidFill>
+              </a:rPr>
+              <a:t>• A. The selector</a:t>
+            </a:r>
+          </a:p>
+          <a:p>
+            <a:pPr>
+              <a:spcAft>
+                <a:spcPts val="1400"/>
+              </a:spcAft>
+            </a:pPr>
+            <a:r>
+              <a:rPr sz="2400">
+                <a:solidFill>
+                  <a:srgbClr val="1F2A37"/>
+                </a:solidFill>
+              </a:rPr>
+              <a:t>• B. The property being set</a:t>
+            </a:r>
+          </a:p>
+          <a:p>
+            <a:pPr>
+              <a:spcAft>
+                <a:spcPts val="1400"/>
+              </a:spcAft>
+            </a:pPr>
+            <a:r>
+              <a:rPr sz="2400">
+                <a:solidFill>
+                  <a:srgbClr val="1F2A37"/>
+                </a:solidFill>
+              </a:rPr>
+              <a:t>• C. The value</a:t>
+            </a:r>
+          </a:p>
+          <a:p>
+            <a:pPr>
+              <a:spcAft>
+                <a:spcPts val="1400"/>
+              </a:spcAft>
+            </a:pPr>
+            <a:r>
+              <a:rPr sz="2400">
+                <a:solidFill>
+                  <a:srgbClr val="1F2A37"/>
+                </a:solidFill>
+              </a:rPr>
+              <a:t>• D. A comment</a:t>
+            </a:r>
+          </a:p>
+          <a:p>
+            <a:pPr>
+              <a:spcAft>
+                <a:spcPts val="1400"/>
+              </a:spcAft>
+            </a:pPr>
+            <a:r>
+              <a:rPr sz="2400">
+                <a:solidFill>
+                  <a:srgbClr val="1F2A37"/>
+                </a:solidFill>
+              </a:rPr>
+              <a:t>• Pick one - the answer is on the next slide.</a:t>
             </a:r>
           </a:p>
         </p:txBody>
@@ -12110,7 +12221,7 @@
                   <a:srgbClr val="1F2A37"/>
                 </a:solidFill>
               </a:rPr>
-              <a:t>Two buttons you will use every week</a:t>
+              <a:t>In  body { background: #0d1b21; }  what is 'background'?</a:t>
             </a:r>
           </a:p>
         </p:txBody>
@@ -12118,6 +12229,39 @@
       <p:sp>
         <p:nvSpPr>
           <p:cNvPr id="3" name="TextBox 2"/>
+          <p:cNvSpPr txBox="1"/>
+          <p:nvPr/>
+        </p:nvSpPr>
+        <p:spPr>
+          <a:xfrm>
+            <a:off x="868680" y="502920"/>
+            <a:ext cx="5486400" cy="457200"/>
+          </a:xfrm>
+          <a:prstGeom prst="rect">
+            <a:avLst/>
+          </a:prstGeom>
+          <a:noFill/>
+        </p:spPr>
+        <p:txBody>
+          <a:bodyPr wrap="none">
+            <a:spAutoFit/>
+          </a:bodyPr>
+          <a:lstStyle/>
+          <a:p>
+            <a:r>
+              <a:rPr sz="1500" b="1">
+                <a:solidFill>
+                  <a:srgbClr val="01AEFD"/>
+                </a:solidFill>
+              </a:rPr>
+              <a:t>ANSWER</a:t>
+            </a:r>
+          </a:p>
+        </p:txBody>
+      </p:sp>
+      <p:sp>
+        <p:nvSpPr>
+          <p:cNvPr id="4" name="TextBox 3"/>
           <p:cNvSpPr txBox="1"/>
           <p:nvPr/>
         </p:nvSpPr>
@@ -12148,7 +12292,7 @@
                   <a:srgbClr val="1F2A37"/>
                 </a:solidFill>
               </a:rPr>
-              <a:t>• Run - nothing happens until you press it</a:t>
+              <a:t>• A. The selector</a:t>
             </a:r>
           </a:p>
           <a:p>
@@ -12163,7 +12307,52 @@
                   <a:srgbClr val="1F2A37"/>
                 </a:solidFill>
               </a:rPr>
-              <a:t>• Console - where your code talks to you</a:t>
+              <a:t>• B. The property being set (correct)</a:t>
+            </a:r>
+          </a:p>
+          <a:p>
+            <a:pPr>
+              <a:spcAft>
+                <a:spcPts val="1400"/>
+              </a:spcAft>
+            </a:pPr>
+            <a:r>
+              <a:rPr sz="2400">
+                <a:solidFill>
+                  <a:srgbClr val="1F2A37"/>
+                </a:solidFill>
+              </a:rPr>
+              <a:t>• C. The value</a:t>
+            </a:r>
+          </a:p>
+          <a:p>
+            <a:pPr>
+              <a:spcAft>
+                <a:spcPts val="1400"/>
+              </a:spcAft>
+            </a:pPr>
+            <a:r>
+              <a:rPr sz="2400">
+                <a:solidFill>
+                  <a:srgbClr val="1F2A37"/>
+                </a:solidFill>
+              </a:rPr>
+              <a:t>• D. A comment</a:t>
+            </a:r>
+          </a:p>
+          <a:p>
+            <a:pPr>
+              <a:spcAft>
+                <a:spcPts val="1400"/>
+              </a:spcAft>
+            </a:pPr>
+            <a:r>
+              <a:rPr sz="2400">
+                <a:solidFill>
+                  <a:srgbClr val="1F2A37"/>
+                </a:solidFill>
+              </a:rPr>
+              <a:t>• A rule is  selector { property: value; }  - background is the property.</a:t>
             </a:r>
           </a:p>
         </p:txBody>
@@ -12207,7 +12396,7 @@
                   <a:srgbClr val="1F2A37"/>
                 </a:solidFill>
               </a:rPr>
-              <a:t>A comment</a:t>
+              <a:t>Which selector targets elements with class="app"?</a:t>
             </a:r>
           </a:p>
         </p:txBody>
@@ -12240,7 +12429,7 @@
                   <a:srgbClr val="01AEFD"/>
                 </a:solidFill>
               </a:rPr>
-              <a:t>JAVASCRIPT</a:t>
+              <a:t>QUICK CHECK</a:t>
             </a:r>
           </a:p>
         </p:txBody>
@@ -12278,7 +12467,7 @@
                   <a:srgbClr val="1F2A37"/>
                 </a:solidFill>
               </a:rPr>
-              <a:t>• A line starting with // that the computer ignores.</a:t>
+              <a:t>• A. .app</a:t>
             </a:r>
           </a:p>
           <a:p>
@@ -12293,7 +12482,52 @@
                   <a:srgbClr val="1F2A37"/>
                 </a:solidFill>
               </a:rPr>
-              <a:t>• It is a note for the humans reading the code.</a:t>
+              <a:t>• B. app</a:t>
+            </a:r>
+          </a:p>
+          <a:p>
+            <a:pPr>
+              <a:spcAft>
+                <a:spcPts val="1400"/>
+              </a:spcAft>
+            </a:pPr>
+            <a:r>
+              <a:rPr sz="2400">
+                <a:solidFill>
+                  <a:srgbClr val="1F2A37"/>
+                </a:solidFill>
+              </a:rPr>
+              <a:t>• C. #app</a:t>
+            </a:r>
+          </a:p>
+          <a:p>
+            <a:pPr>
+              <a:spcAft>
+                <a:spcPts val="1400"/>
+              </a:spcAft>
+            </a:pPr>
+            <a:r>
+              <a:rPr sz="2400">
+                <a:solidFill>
+                  <a:srgbClr val="1F2A37"/>
+                </a:solidFill>
+              </a:rPr>
+              <a:t>• D. *app</a:t>
+            </a:r>
+          </a:p>
+          <a:p>
+            <a:pPr>
+              <a:spcAft>
+                <a:spcPts val="1400"/>
+              </a:spcAft>
+            </a:pPr>
+            <a:r>
+              <a:rPr sz="2400">
+                <a:solidFill>
+                  <a:srgbClr val="1F2A37"/>
+                </a:solidFill>
+              </a:rPr>
+              <a:t>• Pick one - the answer is on the next slide.</a:t>
             </a:r>
           </a:p>
         </p:txBody>
@@ -12309,14 +12543,6 @@
 <file path=ppt/slides/slide125.xml><?xml version="1.0" encoding="utf-8"?>
 <p:sld xmlns:a="http://schemas.openxmlformats.org/drawingml/2006/main" xmlns:p="http://schemas.openxmlformats.org/presentationml/2006/main" xmlns:r="http://schemas.openxmlformats.org/officeDocument/2006/relationships">
   <p:cSld>
-    <p:bg>
-      <p:bgPr>
-        <a:solidFill>
-          <a:srgbClr val="102127"/>
-        </a:solidFill>
-        <a:effectLst/>
-      </p:bgPr>
-    </p:bg>
     <p:spTree>
       <p:nvGrpSpPr>
         <p:cNvPr id="1" name=""/>
@@ -12326,14 +12552,40 @@
       <p:grpSpPr/>
       <p:sp>
         <p:nvSpPr>
-          <p:cNvPr id="2" name="TextBox 1"/>
+          <p:cNvPr id="2" name="Title 1"/>
+          <p:cNvSpPr>
+            <a:spLocks noGrp="1"/>
+          </p:cNvSpPr>
+          <p:nvPr>
+            <p:ph type="title"/>
+          </p:nvPr>
+        </p:nvSpPr>
+        <p:spPr/>
+        <p:txBody>
+          <a:bodyPr/>
+          <a:lstStyle/>
+          <a:p>
+            <a:r>
+              <a:rPr sz="3800" b="1">
+                <a:solidFill>
+                  <a:srgbClr val="1F2A37"/>
+                </a:solidFill>
+              </a:rPr>
+              <a:t>Which selector targets elements with class="app"?</a:t>
+            </a:r>
+          </a:p>
+        </p:txBody>
+      </p:sp>
+      <p:sp>
+        <p:nvSpPr>
+          <p:cNvPr id="3" name="TextBox 2"/>
           <p:cNvSpPr txBox="1"/>
           <p:nvPr/>
         </p:nvSpPr>
         <p:spPr>
           <a:xfrm>
-            <a:off x="502920" y="274320"/>
-            <a:ext cx="11155680" cy="548640"/>
+            <a:off x="868680" y="502920"/>
+            <a:ext cx="5486400" cy="457200"/>
           </a:xfrm>
           <a:prstGeom prst="rect">
             <a:avLst/>
@@ -12347,60 +12599,12 @@
           <a:lstStyle/>
           <a:p>
             <a:r>
-              <a:rPr sz="2200" b="1">
+              <a:rPr sz="1500" b="1">
                 <a:solidFill>
                   <a:srgbClr val="01AEFD"/>
                 </a:solidFill>
               </a:rPr>
-              <a:t>Type this into script.js   -   line 1</a:t>
-            </a:r>
-          </a:p>
-        </p:txBody>
-      </p:sp>
-      <p:sp>
-        <p:nvSpPr>
-          <p:cNvPr id="3" name="TextBox 2"/>
-          <p:cNvSpPr txBox="1"/>
-          <p:nvPr/>
-        </p:nvSpPr>
-        <p:spPr>
-          <a:xfrm>
-            <a:off x="502920" y="960120"/>
-            <a:ext cx="11155680" cy="4297680"/>
-          </a:xfrm>
-          <a:prstGeom prst="rect">
-            <a:avLst/>
-          </a:prstGeom>
-          <a:noFill/>
-        </p:spPr>
-        <p:txBody>
-          <a:bodyPr wrap="none">
-            <a:spAutoFit/>
-          </a:bodyPr>
-          <a:lstStyle/>
-          <a:p>
-            <a:pPr>
-              <a:spcAft>
-                <a:spcPts val="0"/>
-              </a:spcAft>
-            </a:pPr>
-            <a:r>
-              <a:rPr sz="1800">
-                <a:solidFill>
-                  <a:srgbClr val="6D8C97"/>
-                </a:solidFill>
-                <a:latin typeface="Consolas"/>
-              </a:rPr>
-              <a:t>   1  </a:t>
-            </a:r>
-            <a:r>
-              <a:rPr sz="1800">
-                <a:solidFill>
-                  <a:srgbClr val="7FE0A0"/>
-                </a:solidFill>
-                <a:latin typeface="Consolas"/>
-              </a:rPr>
-              <a:t>// Week 1: prove the JavaScript file is really running.</a:t>
+              <a:t>ANSWER</a:t>
             </a:r>
           </a:p>
         </p:txBody>
@@ -12413,8 +12617,8 @@
         </p:nvSpPr>
         <p:spPr>
           <a:xfrm>
-            <a:off x="548640" y="5623560"/>
-            <a:ext cx="11064240" cy="1051560"/>
+            <a:off x="822960" y="1828800"/>
+            <a:ext cx="10515600" cy="4206240"/>
           </a:xfrm>
           <a:prstGeom prst="rect">
             <a:avLst/>
@@ -12427,13 +12631,78 @@
           </a:bodyPr>
           <a:lstStyle/>
           <a:p>
-            <a:r>
-              <a:rPr sz="2000">
-                <a:solidFill>
-                  <a:srgbClr val="DCECEF"/>
-                </a:solidFill>
-              </a:rPr>
-              <a:t>A comment: a note for you, ignored by the computer.</a:t>
+            <a:pPr>
+              <a:spcAft>
+                <a:spcPts val="1400"/>
+              </a:spcAft>
+            </a:pPr>
+            <a:r>
+              <a:rPr sz="2400">
+                <a:solidFill>
+                  <a:srgbClr val="1F2A37"/>
+                </a:solidFill>
+              </a:rPr>
+              <a:t>• A. .app (correct)</a:t>
+            </a:r>
+          </a:p>
+          <a:p>
+            <a:pPr>
+              <a:spcAft>
+                <a:spcPts val="1400"/>
+              </a:spcAft>
+            </a:pPr>
+            <a:r>
+              <a:rPr sz="2400">
+                <a:solidFill>
+                  <a:srgbClr val="1F2A37"/>
+                </a:solidFill>
+              </a:rPr>
+              <a:t>• B. app</a:t>
+            </a:r>
+          </a:p>
+          <a:p>
+            <a:pPr>
+              <a:spcAft>
+                <a:spcPts val="1400"/>
+              </a:spcAft>
+            </a:pPr>
+            <a:r>
+              <a:rPr sz="2400">
+                <a:solidFill>
+                  <a:srgbClr val="1F2A37"/>
+                </a:solidFill>
+              </a:rPr>
+              <a:t>• C. #app</a:t>
+            </a:r>
+          </a:p>
+          <a:p>
+            <a:pPr>
+              <a:spcAft>
+                <a:spcPts val="1400"/>
+              </a:spcAft>
+            </a:pPr>
+            <a:r>
+              <a:rPr sz="2400">
+                <a:solidFill>
+                  <a:srgbClr val="1F2A37"/>
+                </a:solidFill>
+              </a:rPr>
+              <a:t>• D. *app</a:t>
+            </a:r>
+          </a:p>
+          <a:p>
+            <a:pPr>
+              <a:spcAft>
+                <a:spcPts val="1400"/>
+              </a:spcAft>
+            </a:pPr>
+            <a:r>
+              <a:rPr sz="2400">
+                <a:solidFill>
+                  <a:srgbClr val="1F2A37"/>
+                </a:solidFill>
+              </a:rPr>
+              <a:t>• A class selector starts with a dot.</a:t>
             </a:r>
           </a:p>
         </p:txBody>
@@ -12477,7 +12746,7 @@
                   <a:srgbClr val="1F2A37"/>
                 </a:solidFill>
               </a:rPr>
-              <a:t>A line of JavaScript</a:t>
+              <a:t>What does  display: flex;  do to a box's children?</a:t>
             </a:r>
           </a:p>
         </p:txBody>
@@ -12510,7 +12779,7 @@
                   <a:srgbClr val="01AEFD"/>
                 </a:solidFill>
               </a:rPr>
-              <a:t>JAVASCRIPT</a:t>
+              <a:t>QUICK CHECK</a:t>
             </a:r>
           </a:p>
         </p:txBody>
@@ -12548,7 +12817,7 @@
                   <a:srgbClr val="1F2A37"/>
                 </a:solidFill>
               </a:rPr>
-              <a:t>• Most lines are one instruction, usually ending in a semicolon ;</a:t>
+              <a:t>• A. Lines them up in a row</a:t>
             </a:r>
           </a:p>
           <a:p>
@@ -12563,7 +12832,52 @@
                   <a:srgbClr val="1F2A37"/>
                 </a:solidFill>
               </a:rPr>
-              <a:t>• The computer runs them top to bottom.</a:t>
+              <a:t>• B. Hides them</a:t>
+            </a:r>
+          </a:p>
+          <a:p>
+            <a:pPr>
+              <a:spcAft>
+                <a:spcPts val="1400"/>
+              </a:spcAft>
+            </a:pPr>
+            <a:r>
+              <a:rPr sz="2400">
+                <a:solidFill>
+                  <a:srgbClr val="1F2A37"/>
+                </a:solidFill>
+              </a:rPr>
+              <a:t>• C. Makes them bold</a:t>
+            </a:r>
+          </a:p>
+          <a:p>
+            <a:pPr>
+              <a:spcAft>
+                <a:spcPts val="1400"/>
+              </a:spcAft>
+            </a:pPr>
+            <a:r>
+              <a:rPr sz="2400">
+                <a:solidFill>
+                  <a:srgbClr val="1F2A37"/>
+                </a:solidFill>
+              </a:rPr>
+              <a:t>• D. Deletes them</a:t>
+            </a:r>
+          </a:p>
+          <a:p>
+            <a:pPr>
+              <a:spcAft>
+                <a:spcPts val="1400"/>
+              </a:spcAft>
+            </a:pPr>
+            <a:r>
+              <a:rPr sz="2400">
+                <a:solidFill>
+                  <a:srgbClr val="1F2A37"/>
+                </a:solidFill>
+              </a:rPr>
+              <a:t>• Pick one - the answer is on the next slide.</a:t>
             </a:r>
           </a:p>
         </p:txBody>
@@ -12607,7 +12921,7 @@
                   <a:srgbClr val="1F2A37"/>
                 </a:solidFill>
               </a:rPr>
-              <a:t>Strings: text in quotes</a:t>
+              <a:t>What does  display: flex;  do to a box's children?</a:t>
             </a:r>
           </a:p>
         </p:txBody>
@@ -12640,7 +12954,7 @@
                   <a:srgbClr val="01AEFD"/>
                 </a:solidFill>
               </a:rPr>
-              <a:t>JAVASCRIPT</a:t>
+              <a:t>ANSWER</a:t>
             </a:r>
           </a:p>
         </p:txBody>
@@ -12678,7 +12992,7 @@
                   <a:srgbClr val="1F2A37"/>
                 </a:solidFill>
               </a:rPr>
-              <a:t>• Text the computer treats as data goes in quotes: 'hello'.</a:t>
+              <a:t>• A. Lines them up in a row (correct)</a:t>
             </a:r>
           </a:p>
           <a:p>
@@ -12693,7 +13007,52 @@
                   <a:srgbClr val="1F2A37"/>
                 </a:solidFill>
               </a:rPr>
-              <a:t>• Single or double quotes both work.</a:t>
+              <a:t>• B. Hides them</a:t>
+            </a:r>
+          </a:p>
+          <a:p>
+            <a:pPr>
+              <a:spcAft>
+                <a:spcPts val="1400"/>
+              </a:spcAft>
+            </a:pPr>
+            <a:r>
+              <a:rPr sz="2400">
+                <a:solidFill>
+                  <a:srgbClr val="1F2A37"/>
+                </a:solidFill>
+              </a:rPr>
+              <a:t>• C. Makes them bold</a:t>
+            </a:r>
+          </a:p>
+          <a:p>
+            <a:pPr>
+              <a:spcAft>
+                <a:spcPts val="1400"/>
+              </a:spcAft>
+            </a:pPr>
+            <a:r>
+              <a:rPr sz="2400">
+                <a:solidFill>
+                  <a:srgbClr val="1F2A37"/>
+                </a:solidFill>
+              </a:rPr>
+              <a:t>• D. Deletes them</a:t>
+            </a:r>
+          </a:p>
+          <a:p>
+            <a:pPr>
+              <a:spcAft>
+                <a:spcPts val="1400"/>
+              </a:spcAft>
+            </a:pPr>
+            <a:r>
+              <a:rPr sz="2400">
+                <a:solidFill>
+                  <a:srgbClr val="1F2A37"/>
+                </a:solidFill>
+              </a:rPr>
+              <a:t>• flex lays a box's children out in a row (or a column).</a:t>
             </a:r>
           </a:p>
         </p:txBody>
@@ -12737,7 +13096,7 @@
                   <a:srgbClr val="1F2A37"/>
                 </a:solidFill>
               </a:rPr>
-              <a:t>Calling a function</a:t>
+              <a:t>The script goes at the BOTTOM</a:t>
             </a:r>
           </a:p>
         </p:txBody>
@@ -12745,39 +13104,6 @@
       <p:sp>
         <p:nvSpPr>
           <p:cNvPr id="3" name="TextBox 2"/>
-          <p:cNvSpPr txBox="1"/>
-          <p:nvPr/>
-        </p:nvSpPr>
-        <p:spPr>
-          <a:xfrm>
-            <a:off x="868680" y="502920"/>
-            <a:ext cx="5486400" cy="457200"/>
-          </a:xfrm>
-          <a:prstGeom prst="rect">
-            <a:avLst/>
-          </a:prstGeom>
-          <a:noFill/>
-        </p:spPr>
-        <p:txBody>
-          <a:bodyPr wrap="none">
-            <a:spAutoFit/>
-          </a:bodyPr>
-          <a:lstStyle/>
-          <a:p>
-            <a:r>
-              <a:rPr sz="1500" b="1">
-                <a:solidFill>
-                  <a:srgbClr val="01AEFD"/>
-                </a:solidFill>
-              </a:rPr>
-              <a:t>JAVASCRIPT</a:t>
-            </a:r>
-          </a:p>
-        </p:txBody>
-      </p:sp>
-      <p:sp>
-        <p:nvSpPr>
-          <p:cNvPr id="4" name="TextBox 3"/>
           <p:cNvSpPr txBox="1"/>
           <p:nvPr/>
         </p:nvSpPr>
@@ -12808,7 +13134,7 @@
                   <a:srgbClr val="1F2A37"/>
                 </a:solidFill>
               </a:rPr>
-              <a:t>• A name followed by ( ) runs that function.</a:t>
+              <a:t>• The browser reads top to bottom</a:t>
             </a:r>
           </a:p>
           <a:p>
@@ -12823,7 +13149,37 @@
                   <a:srgbClr val="1F2A37"/>
                 </a:solidFill>
               </a:rPr>
-              <a:t>• Whatever is inside the ( ) is what you hand it.</a:t>
+              <a:t>• At the top, the boxes do not exist yet</a:t>
+            </a:r>
+          </a:p>
+          <a:p>
+            <a:pPr>
+              <a:spcAft>
+                <a:spcPts val="1400"/>
+              </a:spcAft>
+            </a:pPr>
+            <a:r>
+              <a:rPr sz="2400">
+                <a:solidFill>
+                  <a:srgbClr val="1F2A37"/>
+                </a:solidFill>
+              </a:rPr>
+              <a:t>• A script cannot find a page that has not been made</a:t>
+            </a:r>
+          </a:p>
+          <a:p>
+            <a:pPr>
+              <a:spcAft>
+                <a:spcPts val="1400"/>
+              </a:spcAft>
+            </a:pPr>
+            <a:r>
+              <a:rPr sz="2400">
+                <a:solidFill>
+                  <a:srgbClr val="1F2A37"/>
+                </a:solidFill>
+              </a:rPr>
+              <a:t>• Move it up, press Run, watch it break</a:t>
             </a:r>
           </a:p>
         </p:txBody>
@@ -12867,7 +13223,7 @@
                   <a:srgbClr val="1F2A37"/>
                 </a:solidFill>
               </a:rPr>
-              <a:t>Dot notation</a:t>
+              <a:t>The &lt;script&gt; tag</a:t>
             </a:r>
           </a:p>
         </p:txBody>
@@ -12900,7 +13256,7 @@
                   <a:srgbClr val="01AEFD"/>
                 </a:solidFill>
               </a:rPr>
-              <a:t>JAVASCRIPT</a:t>
+              <a:t>HTML</a:t>
             </a:r>
           </a:p>
         </p:txBody>
@@ -12938,7 +13294,7 @@
                   <a:srgbClr val="1F2A37"/>
                 </a:solidFill>
               </a:rPr>
-              <a:t>• thing.name reaches INTO thing for one of its parts or actions.</a:t>
+              <a:t>• Loads script.js, the code that makes the page do things.</a:t>
             </a:r>
           </a:p>
           <a:p>
@@ -12953,7 +13309,7 @@
                   <a:srgbClr val="1F2A37"/>
                 </a:solidFill>
               </a:rPr>
-              <a:t>• document.getElementById asks document to find something.</a:t>
+              <a:t>• It goes LAST so the boxes exist before the code looks for them.</a:t>
             </a:r>
           </a:p>
         </p:txBody>
@@ -13134,136 +13490,6 @@
 <file path=ppt/slides/slide130.xml><?xml version="1.0" encoding="utf-8"?>
 <p:sld xmlns:a="http://schemas.openxmlformats.org/drawingml/2006/main" xmlns:p="http://schemas.openxmlformats.org/presentationml/2006/main" xmlns:r="http://schemas.openxmlformats.org/officeDocument/2006/relationships">
   <p:cSld>
-    <p:spTree>
-      <p:nvGrpSpPr>
-        <p:cNvPr id="1" name=""/>
-        <p:cNvGrpSpPr/>
-        <p:nvPr/>
-      </p:nvGrpSpPr>
-      <p:grpSpPr/>
-      <p:sp>
-        <p:nvSpPr>
-          <p:cNvPr id="2" name="Title 1"/>
-          <p:cNvSpPr>
-            <a:spLocks noGrp="1"/>
-          </p:cNvSpPr>
-          <p:nvPr>
-            <p:ph type="title"/>
-          </p:nvPr>
-        </p:nvSpPr>
-        <p:spPr/>
-        <p:txBody>
-          <a:bodyPr/>
-          <a:lstStyle/>
-          <a:p>
-            <a:r>
-              <a:rPr sz="3800" b="1">
-                <a:solidFill>
-                  <a:srgbClr val="1F2A37"/>
-                </a:solidFill>
-              </a:rPr>
-              <a:t>console.log()</a:t>
-            </a:r>
-          </a:p>
-        </p:txBody>
-      </p:sp>
-      <p:sp>
-        <p:nvSpPr>
-          <p:cNvPr id="3" name="TextBox 2"/>
-          <p:cNvSpPr txBox="1"/>
-          <p:nvPr/>
-        </p:nvSpPr>
-        <p:spPr>
-          <a:xfrm>
-            <a:off x="868680" y="502920"/>
-            <a:ext cx="5486400" cy="457200"/>
-          </a:xfrm>
-          <a:prstGeom prst="rect">
-            <a:avLst/>
-          </a:prstGeom>
-          <a:noFill/>
-        </p:spPr>
-        <p:txBody>
-          <a:bodyPr wrap="none">
-            <a:spAutoFit/>
-          </a:bodyPr>
-          <a:lstStyle/>
-          <a:p>
-            <a:r>
-              <a:rPr sz="1500" b="1">
-                <a:solidFill>
-                  <a:srgbClr val="01AEFD"/>
-                </a:solidFill>
-              </a:rPr>
-              <a:t>JAVASCRIPT</a:t>
-            </a:r>
-          </a:p>
-        </p:txBody>
-      </p:sp>
-      <p:sp>
-        <p:nvSpPr>
-          <p:cNvPr id="4" name="TextBox 3"/>
-          <p:cNvSpPr txBox="1"/>
-          <p:nvPr/>
-        </p:nvSpPr>
-        <p:spPr>
-          <a:xfrm>
-            <a:off x="822960" y="1828800"/>
-            <a:ext cx="10515600" cy="4206240"/>
-          </a:xfrm>
-          <a:prstGeom prst="rect">
-            <a:avLst/>
-          </a:prstGeom>
-          <a:noFill/>
-        </p:spPr>
-        <p:txBody>
-          <a:bodyPr wrap="square">
-            <a:spAutoFit/>
-          </a:bodyPr>
-          <a:lstStyle/>
-          <a:p>
-            <a:pPr>
-              <a:spcAft>
-                <a:spcPts val="1400"/>
-              </a:spcAft>
-            </a:pPr>
-            <a:r>
-              <a:rPr sz="2400">
-                <a:solidFill>
-                  <a:srgbClr val="1F2A37"/>
-                </a:solidFill>
-              </a:rPr>
-              <a:t>• A built-in that prints a message to the console panel.</a:t>
-            </a:r>
-          </a:p>
-          <a:p>
-            <a:pPr>
-              <a:spcAft>
-                <a:spcPts val="1400"/>
-              </a:spcAft>
-            </a:pPr>
-            <a:r>
-              <a:rPr sz="2400">
-                <a:solidFill>
-                  <a:srgbClr val="1F2A37"/>
-                </a:solidFill>
-              </a:rPr>
-              <a:t>• Your window into what the code is doing.</a:t>
-            </a:r>
-          </a:p>
-        </p:txBody>
-      </p:sp>
-    </p:spTree>
-  </p:cSld>
-  <p:clrMapOvr>
-    <a:masterClrMapping/>
-  </p:clrMapOvr>
-</p:sld>
-</file>
-
-<file path=ppt/slides/slide131.xml><?xml version="1.0" encoding="utf-8"?>
-<p:sld xmlns:a="http://schemas.openxmlformats.org/drawingml/2006/main" xmlns:p="http://schemas.openxmlformats.org/presentationml/2006/main" xmlns:r="http://schemas.openxmlformats.org/officeDocument/2006/relationships">
-  <p:cSld>
     <p:bg>
       <p:bgPr>
         <a:solidFill>
@@ -13307,7 +13533,7 @@
                   <a:srgbClr val="01AEFD"/>
                 </a:solidFill>
               </a:rPr>
-              <a:t>Type this into script.js   -   line 2</a:t>
+              <a:t>Type this into index.html   -   line 15</a:t>
             </a:r>
           </a:p>
         </p:txBody>
@@ -13346,7 +13572,7 @@
                 </a:solidFill>
                 <a:latin typeface="Consolas"/>
               </a:rPr>
-              <a:t>   1  </a:t>
+              <a:t>  14  </a:t>
             </a:r>
             <a:r>
               <a:rPr sz="1800">
@@ -13355,7 +13581,7 @@
                 </a:solidFill>
                 <a:latin typeface="Consolas"/>
               </a:rPr>
-              <a:t>// Week 1: prove the JavaScript file is really running.</a:t>
+              <a:t> </a:t>
             </a:r>
           </a:p>
           <a:p>
@@ -13371,7 +13597,7 @@
                 </a:solidFill>
                 <a:latin typeface="Consolas"/>
               </a:rPr>
-              <a:t>   2  </a:t>
+              <a:t>  15  </a:t>
             </a:r>
             <a:r>
               <a:rPr sz="1800">
@@ -13380,7 +13606,7 @@
                 </a:solidFill>
                 <a:latin typeface="Consolas"/>
               </a:rPr>
-              <a:t>console.log('My AI companion is starting up.');</a:t>
+              <a:t>&lt;script src="script.js"&gt;&lt;/script&gt;</a:t>
             </a:r>
           </a:p>
         </p:txBody>
@@ -13413,7 +13639,104 @@
                   <a:srgbClr val="DCECEF"/>
                 </a:solidFill>
               </a:rPr>
-              <a:t>console.log prints a message to the console panel - proof the file is running.</a:t>
+              <a:t>Loads your JavaScript. It sits at the very bottom so every box above already exists when the code runs.</a:t>
+            </a:r>
+          </a:p>
+        </p:txBody>
+      </p:sp>
+    </p:spTree>
+  </p:cSld>
+  <p:clrMapOvr>
+    <a:masterClrMapping/>
+  </p:clrMapOvr>
+</p:sld>
+</file>
+
+<file path=ppt/slides/slide131.xml><?xml version="1.0" encoding="utf-8"?>
+<p:sld xmlns:a="http://schemas.openxmlformats.org/drawingml/2006/main" xmlns:p="http://schemas.openxmlformats.org/presentationml/2006/main" xmlns:r="http://schemas.openxmlformats.org/officeDocument/2006/relationships">
+  <p:cSld>
+    <p:spTree>
+      <p:nvGrpSpPr>
+        <p:cNvPr id="1" name=""/>
+        <p:cNvGrpSpPr/>
+        <p:nvPr/>
+      </p:nvGrpSpPr>
+      <p:grpSpPr/>
+      <p:sp>
+        <p:nvSpPr>
+          <p:cNvPr id="2" name="Title 1"/>
+          <p:cNvSpPr>
+            <a:spLocks noGrp="1"/>
+          </p:cNvSpPr>
+          <p:nvPr>
+            <p:ph type="title"/>
+          </p:nvPr>
+        </p:nvSpPr>
+        <p:spPr/>
+        <p:txBody>
+          <a:bodyPr/>
+          <a:lstStyle/>
+          <a:p>
+            <a:r>
+              <a:rPr sz="3800" b="1">
+                <a:solidFill>
+                  <a:srgbClr val="1F2A37"/>
+                </a:solidFill>
+              </a:rPr>
+              <a:t>Two buttons you will use every week</a:t>
+            </a:r>
+          </a:p>
+        </p:txBody>
+      </p:sp>
+      <p:sp>
+        <p:nvSpPr>
+          <p:cNvPr id="3" name="TextBox 2"/>
+          <p:cNvSpPr txBox="1"/>
+          <p:nvPr/>
+        </p:nvSpPr>
+        <p:spPr>
+          <a:xfrm>
+            <a:off x="822960" y="1828800"/>
+            <a:ext cx="10515600" cy="4206240"/>
+          </a:xfrm>
+          <a:prstGeom prst="rect">
+            <a:avLst/>
+          </a:prstGeom>
+          <a:noFill/>
+        </p:spPr>
+        <p:txBody>
+          <a:bodyPr wrap="square">
+            <a:spAutoFit/>
+          </a:bodyPr>
+          <a:lstStyle/>
+          <a:p>
+            <a:pPr>
+              <a:spcAft>
+                <a:spcPts val="1400"/>
+              </a:spcAft>
+            </a:pPr>
+            <a:r>
+              <a:rPr sz="2400">
+                <a:solidFill>
+                  <a:srgbClr val="1F2A37"/>
+                </a:solidFill>
+              </a:rPr>
+              <a:t>• Run - nothing happens until you press it</a:t>
+            </a:r>
+          </a:p>
+          <a:p>
+            <a:pPr>
+              <a:spcAft>
+                <a:spcPts val="1400"/>
+              </a:spcAft>
+            </a:pPr>
+            <a:r>
+              <a:rPr sz="2400">
+                <a:solidFill>
+                  <a:srgbClr val="1F2A37"/>
+                </a:solidFill>
+              </a:rPr>
+              <a:t>• Console - where your code talks to you</a:t>
             </a:r>
           </a:p>
         </p:txBody>
@@ -13429,14 +13752,6 @@
 <file path=ppt/slides/slide132.xml><?xml version="1.0" encoding="utf-8"?>
 <p:sld xmlns:a="http://schemas.openxmlformats.org/drawingml/2006/main" xmlns:p="http://schemas.openxmlformats.org/presentationml/2006/main" xmlns:r="http://schemas.openxmlformats.org/officeDocument/2006/relationships">
   <p:cSld>
-    <p:bg>
-      <p:bgPr>
-        <a:solidFill>
-          <a:srgbClr val="102127"/>
-        </a:solidFill>
-        <a:effectLst/>
-      </p:bgPr>
-    </p:bg>
     <p:spTree>
       <p:nvGrpSpPr>
         <p:cNvPr id="1" name=""/>
@@ -13446,14 +13761,40 @@
       <p:grpSpPr/>
       <p:sp>
         <p:nvSpPr>
-          <p:cNvPr id="2" name="TextBox 1"/>
+          <p:cNvPr id="2" name="Title 1"/>
+          <p:cNvSpPr>
+            <a:spLocks noGrp="1"/>
+          </p:cNvSpPr>
+          <p:nvPr>
+            <p:ph type="title"/>
+          </p:nvPr>
+        </p:nvSpPr>
+        <p:spPr/>
+        <p:txBody>
+          <a:bodyPr/>
+          <a:lstStyle/>
+          <a:p>
+            <a:r>
+              <a:rPr sz="3800" b="1">
+                <a:solidFill>
+                  <a:srgbClr val="1F2A37"/>
+                </a:solidFill>
+              </a:rPr>
+              <a:t>A comment</a:t>
+            </a:r>
+          </a:p>
+        </p:txBody>
+      </p:sp>
+      <p:sp>
+        <p:nvSpPr>
+          <p:cNvPr id="3" name="TextBox 2"/>
           <p:cNvSpPr txBox="1"/>
           <p:nvPr/>
         </p:nvSpPr>
         <p:spPr>
           <a:xfrm>
-            <a:off x="502920" y="274320"/>
-            <a:ext cx="11155680" cy="548640"/>
+            <a:off x="868680" y="502920"/>
+            <a:ext cx="5486400" cy="457200"/>
           </a:xfrm>
           <a:prstGeom prst="rect">
             <a:avLst/>
@@ -13467,135 +13808,12 @@
           <a:lstStyle/>
           <a:p>
             <a:r>
-              <a:rPr sz="2200" b="1">
+              <a:rPr sz="1500" b="1">
                 <a:solidFill>
                   <a:srgbClr val="01AEFD"/>
                 </a:solidFill>
               </a:rPr>
-              <a:t>Type this into script.js   -   line 4</a:t>
-            </a:r>
-          </a:p>
-        </p:txBody>
-      </p:sp>
-      <p:sp>
-        <p:nvSpPr>
-          <p:cNvPr id="3" name="TextBox 2"/>
-          <p:cNvSpPr txBox="1"/>
-          <p:nvPr/>
-        </p:nvSpPr>
-        <p:spPr>
-          <a:xfrm>
-            <a:off x="502920" y="960120"/>
-            <a:ext cx="11155680" cy="4297680"/>
-          </a:xfrm>
-          <a:prstGeom prst="rect">
-            <a:avLst/>
-          </a:prstGeom>
-          <a:noFill/>
-        </p:spPr>
-        <p:txBody>
-          <a:bodyPr wrap="none">
-            <a:spAutoFit/>
-          </a:bodyPr>
-          <a:lstStyle/>
-          <a:p>
-            <a:pPr>
-              <a:spcAft>
-                <a:spcPts val="0"/>
-              </a:spcAft>
-            </a:pPr>
-            <a:r>
-              <a:rPr sz="1800">
-                <a:solidFill>
-                  <a:srgbClr val="6D8C97"/>
-                </a:solidFill>
-                <a:latin typeface="Consolas"/>
-              </a:rPr>
-              <a:t>   1  </a:t>
-            </a:r>
-            <a:r>
-              <a:rPr sz="1800">
-                <a:solidFill>
-                  <a:srgbClr val="6D8C97"/>
-                </a:solidFill>
-                <a:latin typeface="Consolas"/>
-              </a:rPr>
-              <a:t>// Week 1: prove the JavaScript file is really running.</a:t>
-            </a:r>
-          </a:p>
-          <a:p>
-            <a:pPr>
-              <a:spcAft>
-                <a:spcPts val="0"/>
-              </a:spcAft>
-            </a:pPr>
-            <a:r>
-              <a:rPr sz="1800">
-                <a:solidFill>
-                  <a:srgbClr val="6D8C97"/>
-                </a:solidFill>
-                <a:latin typeface="Consolas"/>
-              </a:rPr>
-              <a:t>   2  </a:t>
-            </a:r>
-            <a:r>
-              <a:rPr sz="1800">
-                <a:solidFill>
-                  <a:srgbClr val="6D8C97"/>
-                </a:solidFill>
-                <a:latin typeface="Consolas"/>
-              </a:rPr>
-              <a:t>console.log('My AI companion is starting up.');</a:t>
-            </a:r>
-          </a:p>
-          <a:p>
-            <a:pPr>
-              <a:spcAft>
-                <a:spcPts val="0"/>
-              </a:spcAft>
-            </a:pPr>
-            <a:r>
-              <a:rPr sz="1800">
-                <a:solidFill>
-                  <a:srgbClr val="6D8C97"/>
-                </a:solidFill>
-                <a:latin typeface="Consolas"/>
-              </a:rPr>
-              <a:t>   3  </a:t>
-            </a:r>
-            <a:r>
-              <a:rPr sz="1800">
-                <a:solidFill>
-                  <a:srgbClr val="6D8C97"/>
-                </a:solidFill>
-                <a:latin typeface="Consolas"/>
-              </a:rPr>
-              <a:t> </a:t>
-            </a:r>
-          </a:p>
-          <a:p>
-            <a:pPr>
-              <a:spcAft>
-                <a:spcPts val="0"/>
-              </a:spcAft>
-            </a:pPr>
-            <a:r>
-              <a:rPr sz="1800">
-                <a:solidFill>
-                  <a:srgbClr val="6D8C97"/>
-                </a:solidFill>
-                <a:latin typeface="Consolas"/>
-              </a:rPr>
-              <a:t>   4  </a:t>
-            </a:r>
-            <a:r>
-              <a:rPr sz="1800">
-                <a:solidFill>
-                  <a:srgbClr val="7FE0A0"/>
-                </a:solidFill>
-                <a:latin typeface="Consolas"/>
-              </a:rPr>
-              <a:t>// Can this script see the page yet? Down here, yes.</a:t>
+              <a:t>JAVASCRIPT</a:t>
             </a:r>
           </a:p>
         </p:txBody>
@@ -13608,8 +13826,8 @@
         </p:nvSpPr>
         <p:spPr>
           <a:xfrm>
-            <a:off x="548640" y="5623560"/>
-            <a:ext cx="11064240" cy="1051560"/>
+            <a:off x="822960" y="1828800"/>
+            <a:ext cx="10515600" cy="4206240"/>
           </a:xfrm>
           <a:prstGeom prst="rect">
             <a:avLst/>
@@ -13622,13 +13840,33 @@
           </a:bodyPr>
           <a:lstStyle/>
           <a:p>
-            <a:r>
-              <a:rPr sz="2000">
-                <a:solidFill>
-                  <a:srgbClr val="DCECEF"/>
-                </a:solidFill>
-              </a:rPr>
-              <a:t>Another comment, explaining the check below.</a:t>
+            <a:pPr>
+              <a:spcAft>
+                <a:spcPts val="1400"/>
+              </a:spcAft>
+            </a:pPr>
+            <a:r>
+              <a:rPr sz="2400">
+                <a:solidFill>
+                  <a:srgbClr val="1F2A37"/>
+                </a:solidFill>
+              </a:rPr>
+              <a:t>• A line starting with // that the computer ignores.</a:t>
+            </a:r>
+          </a:p>
+          <a:p>
+            <a:pPr>
+              <a:spcAft>
+                <a:spcPts val="1400"/>
+              </a:spcAft>
+            </a:pPr>
+            <a:r>
+              <a:rPr sz="2400">
+                <a:solidFill>
+                  <a:srgbClr val="1F2A37"/>
+                </a:solidFill>
+              </a:rPr>
+              <a:t>• It is a note for the humans reading the code.</a:t>
             </a:r>
           </a:p>
         </p:txBody>
@@ -13687,7 +13925,7 @@
                   <a:srgbClr val="01AEFD"/>
                 </a:solidFill>
               </a:rPr>
-              <a:t>Type this into script.js   -   line 5</a:t>
+              <a:t>Type this into script.js   -   line 1</a:t>
             </a:r>
           </a:p>
         </p:txBody>
@@ -13731,111 +13969,11 @@
             <a:r>
               <a:rPr sz="1800">
                 <a:solidFill>
-                  <a:srgbClr val="6D8C97"/>
+                  <a:srgbClr val="7FE0A0"/>
                 </a:solidFill>
                 <a:latin typeface="Consolas"/>
               </a:rPr>
               <a:t>// Week 1: prove the JavaScript file is really running.</a:t>
-            </a:r>
-          </a:p>
-          <a:p>
-            <a:pPr>
-              <a:spcAft>
-                <a:spcPts val="0"/>
-              </a:spcAft>
-            </a:pPr>
-            <a:r>
-              <a:rPr sz="1800">
-                <a:solidFill>
-                  <a:srgbClr val="6D8C97"/>
-                </a:solidFill>
-                <a:latin typeface="Consolas"/>
-              </a:rPr>
-              <a:t>   2  </a:t>
-            </a:r>
-            <a:r>
-              <a:rPr sz="1800">
-                <a:solidFill>
-                  <a:srgbClr val="6D8C97"/>
-                </a:solidFill>
-                <a:latin typeface="Consolas"/>
-              </a:rPr>
-              <a:t>console.log('My AI companion is starting up.');</a:t>
-            </a:r>
-          </a:p>
-          <a:p>
-            <a:pPr>
-              <a:spcAft>
-                <a:spcPts val="0"/>
-              </a:spcAft>
-            </a:pPr>
-            <a:r>
-              <a:rPr sz="1800">
-                <a:solidFill>
-                  <a:srgbClr val="6D8C97"/>
-                </a:solidFill>
-                <a:latin typeface="Consolas"/>
-              </a:rPr>
-              <a:t>   3  </a:t>
-            </a:r>
-            <a:r>
-              <a:rPr sz="1800">
-                <a:solidFill>
-                  <a:srgbClr val="6D8C97"/>
-                </a:solidFill>
-                <a:latin typeface="Consolas"/>
-              </a:rPr>
-              <a:t> </a:t>
-            </a:r>
-          </a:p>
-          <a:p>
-            <a:pPr>
-              <a:spcAft>
-                <a:spcPts val="0"/>
-              </a:spcAft>
-            </a:pPr>
-            <a:r>
-              <a:rPr sz="1800">
-                <a:solidFill>
-                  <a:srgbClr val="6D8C97"/>
-                </a:solidFill>
-                <a:latin typeface="Consolas"/>
-              </a:rPr>
-              <a:t>   4  </a:t>
-            </a:r>
-            <a:r>
-              <a:rPr sz="1800">
-                <a:solidFill>
-                  <a:srgbClr val="6D8C97"/>
-                </a:solidFill>
-                <a:latin typeface="Consolas"/>
-              </a:rPr>
-              <a:t>// Can this script see the page yet? Down here, yes.</a:t>
-            </a:r>
-          </a:p>
-          <a:p>
-            <a:pPr>
-              <a:spcAft>
-                <a:spcPts val="0"/>
-              </a:spcAft>
-            </a:pPr>
-            <a:r>
-              <a:rPr sz="1800">
-                <a:solidFill>
-                  <a:srgbClr val="6D8C97"/>
-                </a:solidFill>
-                <a:latin typeface="Consolas"/>
-              </a:rPr>
-              <a:t>   5  </a:t>
-            </a:r>
-            <a:r>
-              <a:rPr sz="1800">
-                <a:solidFill>
-                  <a:srgbClr val="7FE0A0"/>
-                </a:solidFill>
-                <a:latin typeface="Consolas"/>
-              </a:rPr>
-              <a:t>// Move the &lt;script&gt; tag to the TOP of index.html and this prints false,</a:t>
             </a:r>
           </a:p>
         </p:txBody>
@@ -13868,7 +14006,7 @@
                   <a:srgbClr val="DCECEF"/>
                 </a:solidFill>
               </a:rPr>
-              <a:t>A comment continued: what would happen if the script ran too early.</a:t>
+              <a:t>A comment: a note for you, ignored by the computer.</a:t>
             </a:r>
           </a:p>
         </p:txBody>
@@ -13884,14 +14022,6 @@
 <file path=ppt/slides/slide134.xml><?xml version="1.0" encoding="utf-8"?>
 <p:sld xmlns:a="http://schemas.openxmlformats.org/drawingml/2006/main" xmlns:p="http://schemas.openxmlformats.org/presentationml/2006/main" xmlns:r="http://schemas.openxmlformats.org/officeDocument/2006/relationships">
   <p:cSld>
-    <p:bg>
-      <p:bgPr>
-        <a:solidFill>
-          <a:srgbClr val="102127"/>
-        </a:solidFill>
-        <a:effectLst/>
-      </p:bgPr>
-    </p:bg>
     <p:spTree>
       <p:nvGrpSpPr>
         <p:cNvPr id="1" name=""/>
@@ -13901,14 +14031,40 @@
       <p:grpSpPr/>
       <p:sp>
         <p:nvSpPr>
-          <p:cNvPr id="2" name="TextBox 1"/>
+          <p:cNvPr id="2" name="Title 1"/>
+          <p:cNvSpPr>
+            <a:spLocks noGrp="1"/>
+          </p:cNvSpPr>
+          <p:nvPr>
+            <p:ph type="title"/>
+          </p:nvPr>
+        </p:nvSpPr>
+        <p:spPr/>
+        <p:txBody>
+          <a:bodyPr/>
+          <a:lstStyle/>
+          <a:p>
+            <a:r>
+              <a:rPr sz="3800" b="1">
+                <a:solidFill>
+                  <a:srgbClr val="1F2A37"/>
+                </a:solidFill>
+              </a:rPr>
+              <a:t>A line of JavaScript</a:t>
+            </a:r>
+          </a:p>
+        </p:txBody>
+      </p:sp>
+      <p:sp>
+        <p:nvSpPr>
+          <p:cNvPr id="3" name="TextBox 2"/>
           <p:cNvSpPr txBox="1"/>
           <p:nvPr/>
         </p:nvSpPr>
         <p:spPr>
           <a:xfrm>
-            <a:off x="502920" y="274320"/>
-            <a:ext cx="11155680" cy="548640"/>
+            <a:off x="868680" y="502920"/>
+            <a:ext cx="5486400" cy="457200"/>
           </a:xfrm>
           <a:prstGeom prst="rect">
             <a:avLst/>
@@ -13922,185 +14078,12 @@
           <a:lstStyle/>
           <a:p>
             <a:r>
-              <a:rPr sz="2200" b="1">
+              <a:rPr sz="1500" b="1">
                 <a:solidFill>
                   <a:srgbClr val="01AEFD"/>
                 </a:solidFill>
               </a:rPr>
-              <a:t>Type this into script.js   -   line 6</a:t>
-            </a:r>
-          </a:p>
-        </p:txBody>
-      </p:sp>
-      <p:sp>
-        <p:nvSpPr>
-          <p:cNvPr id="3" name="TextBox 2"/>
-          <p:cNvSpPr txBox="1"/>
-          <p:nvPr/>
-        </p:nvSpPr>
-        <p:spPr>
-          <a:xfrm>
-            <a:off x="502920" y="960120"/>
-            <a:ext cx="11155680" cy="4297680"/>
-          </a:xfrm>
-          <a:prstGeom prst="rect">
-            <a:avLst/>
-          </a:prstGeom>
-          <a:noFill/>
-        </p:spPr>
-        <p:txBody>
-          <a:bodyPr wrap="none">
-            <a:spAutoFit/>
-          </a:bodyPr>
-          <a:lstStyle/>
-          <a:p>
-            <a:pPr>
-              <a:spcAft>
-                <a:spcPts val="0"/>
-              </a:spcAft>
-            </a:pPr>
-            <a:r>
-              <a:rPr sz="1800">
-                <a:solidFill>
-                  <a:srgbClr val="6D8C97"/>
-                </a:solidFill>
-                <a:latin typeface="Consolas"/>
-              </a:rPr>
-              <a:t>   1  </a:t>
-            </a:r>
-            <a:r>
-              <a:rPr sz="1800">
-                <a:solidFill>
-                  <a:srgbClr val="6D8C97"/>
-                </a:solidFill>
-                <a:latin typeface="Consolas"/>
-              </a:rPr>
-              <a:t>// Week 1: prove the JavaScript file is really running.</a:t>
-            </a:r>
-          </a:p>
-          <a:p>
-            <a:pPr>
-              <a:spcAft>
-                <a:spcPts val="0"/>
-              </a:spcAft>
-            </a:pPr>
-            <a:r>
-              <a:rPr sz="1800">
-                <a:solidFill>
-                  <a:srgbClr val="6D8C97"/>
-                </a:solidFill>
-                <a:latin typeface="Consolas"/>
-              </a:rPr>
-              <a:t>   2  </a:t>
-            </a:r>
-            <a:r>
-              <a:rPr sz="1800">
-                <a:solidFill>
-                  <a:srgbClr val="6D8C97"/>
-                </a:solidFill>
-                <a:latin typeface="Consolas"/>
-              </a:rPr>
-              <a:t>console.log('My AI companion is starting up.');</a:t>
-            </a:r>
-          </a:p>
-          <a:p>
-            <a:pPr>
-              <a:spcAft>
-                <a:spcPts val="0"/>
-              </a:spcAft>
-            </a:pPr>
-            <a:r>
-              <a:rPr sz="1800">
-                <a:solidFill>
-                  <a:srgbClr val="6D8C97"/>
-                </a:solidFill>
-                <a:latin typeface="Consolas"/>
-              </a:rPr>
-              <a:t>   3  </a:t>
-            </a:r>
-            <a:r>
-              <a:rPr sz="1800">
-                <a:solidFill>
-                  <a:srgbClr val="6D8C97"/>
-                </a:solidFill>
-                <a:latin typeface="Consolas"/>
-              </a:rPr>
-              <a:t> </a:t>
-            </a:r>
-          </a:p>
-          <a:p>
-            <a:pPr>
-              <a:spcAft>
-                <a:spcPts val="0"/>
-              </a:spcAft>
-            </a:pPr>
-            <a:r>
-              <a:rPr sz="1800">
-                <a:solidFill>
-                  <a:srgbClr val="6D8C97"/>
-                </a:solidFill>
-                <a:latin typeface="Consolas"/>
-              </a:rPr>
-              <a:t>   4  </a:t>
-            </a:r>
-            <a:r>
-              <a:rPr sz="1800">
-                <a:solidFill>
-                  <a:srgbClr val="6D8C97"/>
-                </a:solidFill>
-                <a:latin typeface="Consolas"/>
-              </a:rPr>
-              <a:t>// Can this script see the page yet? Down here, yes.</a:t>
-            </a:r>
-          </a:p>
-          <a:p>
-            <a:pPr>
-              <a:spcAft>
-                <a:spcPts val="0"/>
-              </a:spcAft>
-            </a:pPr>
-            <a:r>
-              <a:rPr sz="1800">
-                <a:solidFill>
-                  <a:srgbClr val="6D8C97"/>
-                </a:solidFill>
-                <a:latin typeface="Consolas"/>
-              </a:rPr>
-              <a:t>   5  </a:t>
-            </a:r>
-            <a:r>
-              <a:rPr sz="1800">
-                <a:solidFill>
-                  <a:srgbClr val="6D8C97"/>
-                </a:solidFill>
-                <a:latin typeface="Consolas"/>
-              </a:rPr>
-              <a:t>// Move the &lt;script&gt; tag to the TOP of index.html and this prints false,</a:t>
-            </a:r>
-          </a:p>
-          <a:p>
-            <a:pPr>
-              <a:spcAft>
-                <a:spcPts val="0"/>
-              </a:spcAft>
-            </a:pPr>
-            <a:r>
-              <a:rPr sz="1800">
-                <a:solidFill>
-                  <a:srgbClr val="6D8C97"/>
-                </a:solidFill>
-                <a:latin typeface="Consolas"/>
-              </a:rPr>
-              <a:t>   6  </a:t>
-            </a:r>
-            <a:r>
-              <a:rPr sz="1800">
-                <a:solidFill>
-                  <a:srgbClr val="7FE0A0"/>
-                </a:solidFill>
-                <a:latin typeface="Consolas"/>
-              </a:rPr>
-              <a:t>// because the boxes have not been made yet. That is why it goes last.</a:t>
+              <a:t>JAVASCRIPT</a:t>
             </a:r>
           </a:p>
         </p:txBody>
@@ -14113,8 +14096,8 @@
         </p:nvSpPr>
         <p:spPr>
           <a:xfrm>
-            <a:off x="548640" y="5623560"/>
-            <a:ext cx="11064240" cy="1051560"/>
+            <a:off x="822960" y="1828800"/>
+            <a:ext cx="10515600" cy="4206240"/>
           </a:xfrm>
           <a:prstGeom prst="rect">
             <a:avLst/>
@@ -14127,13 +14110,33 @@
           </a:bodyPr>
           <a:lstStyle/>
           <a:p>
-            <a:r>
-              <a:rPr sz="2000">
-                <a:solidFill>
-                  <a:srgbClr val="DCECEF"/>
-                </a:solidFill>
-              </a:rPr>
-              <a:t>The comment's last line: which is why the &lt;script&gt; tag goes at the bottom.</a:t>
+            <a:pPr>
+              <a:spcAft>
+                <a:spcPts val="1400"/>
+              </a:spcAft>
+            </a:pPr>
+            <a:r>
+              <a:rPr sz="2400">
+                <a:solidFill>
+                  <a:srgbClr val="1F2A37"/>
+                </a:solidFill>
+              </a:rPr>
+              <a:t>• Most lines are one instruction, usually ending in a semicolon ;</a:t>
+            </a:r>
+          </a:p>
+          <a:p>
+            <a:pPr>
+              <a:spcAft>
+                <a:spcPts val="1400"/>
+              </a:spcAft>
+            </a:pPr>
+            <a:r>
+              <a:rPr sz="2400">
+                <a:solidFill>
+                  <a:srgbClr val="1F2A37"/>
+                </a:solidFill>
+              </a:rPr>
+              <a:t>• The computer runs them top to bottom.</a:t>
             </a:r>
           </a:p>
         </p:txBody>
@@ -14177,7 +14180,7 @@
                   <a:srgbClr val="1F2A37"/>
                 </a:solidFill>
               </a:rPr>
-              <a:t>document.getElementById()</a:t>
+              <a:t>Strings: text in quotes</a:t>
             </a:r>
           </a:p>
         </p:txBody>
@@ -14248,7 +14251,7 @@
                   <a:srgbClr val="1F2A37"/>
                 </a:solidFill>
               </a:rPr>
-              <a:t>• A built-in that finds a box on the page by its id.</a:t>
+              <a:t>• Text the computer treats as data goes in quotes: 'hello'.</a:t>
             </a:r>
           </a:p>
           <a:p>
@@ -14263,7 +14266,7 @@
                   <a:srgbClr val="1F2A37"/>
                 </a:solidFill>
               </a:rPr>
-              <a:t>• Hands you the box, or null if it is not there.</a:t>
+              <a:t>• Single or double quotes both work.</a:t>
             </a:r>
           </a:p>
         </p:txBody>
@@ -14279,14 +14282,6 @@
 <file path=ppt/slides/slide136.xml><?xml version="1.0" encoding="utf-8"?>
 <p:sld xmlns:a="http://schemas.openxmlformats.org/drawingml/2006/main" xmlns:p="http://schemas.openxmlformats.org/presentationml/2006/main" xmlns:r="http://schemas.openxmlformats.org/officeDocument/2006/relationships">
   <p:cSld>
-    <p:bg>
-      <p:bgPr>
-        <a:solidFill>
-          <a:srgbClr val="F4F8FB"/>
-        </a:solidFill>
-        <a:effectLst/>
-      </p:bgPr>
-    </p:bg>
     <p:spTree>
       <p:nvGrpSpPr>
         <p:cNvPr id="1" name=""/>
@@ -14296,14 +14291,40 @@
       <p:grpSpPr/>
       <p:sp>
         <p:nvSpPr>
-          <p:cNvPr id="2" name="TextBox 1"/>
+          <p:cNvPr id="2" name="Title 1"/>
+          <p:cNvSpPr>
+            <a:spLocks noGrp="1"/>
+          </p:cNvSpPr>
+          <p:nvPr>
+            <p:ph type="title"/>
+          </p:nvPr>
+        </p:nvSpPr>
+        <p:spPr/>
+        <p:txBody>
+          <a:bodyPr/>
+          <a:lstStyle/>
+          <a:p>
+            <a:r>
+              <a:rPr sz="3800" b="1">
+                <a:solidFill>
+                  <a:srgbClr val="1F2A37"/>
+                </a:solidFill>
+              </a:rPr>
+              <a:t>Calling a function</a:t>
+            </a:r>
+          </a:p>
+        </p:txBody>
+      </p:sp>
+      <p:sp>
+        <p:nvSpPr>
+          <p:cNvPr id="3" name="TextBox 2"/>
           <p:cNvSpPr txBox="1"/>
           <p:nvPr/>
         </p:nvSpPr>
         <p:spPr>
           <a:xfrm>
-            <a:off x="822960" y="365760"/>
-            <a:ext cx="7315200" cy="365760"/>
+            <a:off x="868680" y="502920"/>
+            <a:ext cx="5486400" cy="457200"/>
           </a:xfrm>
           <a:prstGeom prst="rect">
             <a:avLst/>
@@ -14317,543 +14338,26 @@
           <a:lstStyle/>
           <a:p>
             <a:r>
-              <a:rPr sz="1400" b="1">
+              <a:rPr sz="1500" b="1">
                 <a:solidFill>
                   <a:srgbClr val="01AEFD"/>
                 </a:solidFill>
               </a:rPr>
-              <a:t>ON THE PAGE</a:t>
-            </a:r>
-          </a:p>
-        </p:txBody>
-      </p:sp>
-      <p:sp>
-        <p:nvSpPr>
-          <p:cNvPr id="3" name="TextBox 2"/>
+              <a:t>JAVASCRIPT</a:t>
+            </a:r>
+          </a:p>
+        </p:txBody>
+      </p:sp>
+      <p:sp>
+        <p:nvSpPr>
+          <p:cNvPr id="4" name="TextBox 3"/>
           <p:cNvSpPr txBox="1"/>
           <p:nvPr/>
         </p:nvSpPr>
         <p:spPr>
           <a:xfrm>
-            <a:off x="822960" y="658368"/>
-            <a:ext cx="10515600" cy="731520"/>
-          </a:xfrm>
-          <a:prstGeom prst="rect">
-            <a:avLst/>
-          </a:prstGeom>
-          <a:noFill/>
-        </p:spPr>
-        <p:txBody>
-          <a:bodyPr wrap="none">
-            <a:spAutoFit/>
-          </a:bodyPr>
-          <a:lstStyle/>
-          <a:p>
-            <a:r>
-              <a:rPr sz="3200" b="1">
-                <a:solidFill>
-                  <a:srgbClr val="1F2A37"/>
-                </a:solidFill>
-              </a:rPr>
-              <a:t>document.getElementById()</a:t>
-            </a:r>
-          </a:p>
-        </p:txBody>
-      </p:sp>
-      <p:sp>
-        <p:nvSpPr>
-          <p:cNvPr id="4" name="Rounded Rectangle 3"/>
-          <p:cNvSpPr/>
-          <p:nvPr/>
-        </p:nvSpPr>
-        <p:spPr>
-          <a:xfrm>
-            <a:off x="3454237" y="1641896"/>
-            <a:ext cx="5249387" cy="3918021"/>
-          </a:xfrm>
-          <a:prstGeom prst="roundRect">
-            <a:avLst/>
-          </a:prstGeom>
-          <a:solidFill>
-            <a:srgbClr val="0F1F27"/>
-          </a:solidFill>
-          <a:ln>
-            <a:noFill/>
-          </a:ln>
-          <a:effectLst/>
-        </p:spPr>
-        <p:style>
-          <a:lnRef idx="1">
-            <a:schemeClr val="accent1"/>
-          </a:lnRef>
-          <a:fillRef idx="3">
-            <a:schemeClr val="accent1"/>
-          </a:fillRef>
-          <a:effectRef idx="2">
-            <a:schemeClr val="accent1"/>
-          </a:effectRef>
-          <a:fontRef idx="minor">
-            <a:schemeClr val="lt1"/>
-          </a:fontRef>
-        </p:style>
-        <p:txBody>
-          <a:bodyPr rtlCol="0" anchor="ctr"/>
-          <a:lstStyle/>
-          <a:p>
-            <a:pPr algn="ctr"/>
-          </a:p>
-        </p:txBody>
-      </p:sp>
-      <p:sp>
-        <p:nvSpPr>
-          <p:cNvPr id="5" name="Rounded Rectangle 4"/>
-          <p:cNvSpPr/>
-          <p:nvPr/>
-        </p:nvSpPr>
-        <p:spPr>
-          <a:xfrm>
-            <a:off x="3606393" y="2022287"/>
-            <a:ext cx="4945075" cy="437448"/>
-          </a:xfrm>
-          <a:prstGeom prst="roundRect">
-            <a:avLst/>
-          </a:prstGeom>
-          <a:solidFill>
-            <a:srgbClr val="16303A"/>
-          </a:solidFill>
-          <a:ln>
-            <a:noFill/>
-          </a:ln>
-          <a:effectLst/>
-        </p:spPr>
-        <p:style>
-          <a:lnRef idx="1">
-            <a:schemeClr val="accent1"/>
-          </a:lnRef>
-          <a:fillRef idx="3">
-            <a:schemeClr val="accent1"/>
-          </a:fillRef>
-          <a:effectRef idx="2">
-            <a:schemeClr val="accent1"/>
-          </a:effectRef>
-          <a:fontRef idx="minor">
-            <a:schemeClr val="lt1"/>
-          </a:fontRef>
-        </p:style>
-        <p:txBody>
-          <a:bodyPr rtlCol="0" anchor="ctr"/>
-          <a:lstStyle/>
-          <a:p>
-            <a:pPr algn="ctr"/>
-          </a:p>
-        </p:txBody>
-      </p:sp>
-      <p:sp>
-        <p:nvSpPr>
-          <p:cNvPr id="6" name="Rounded Rectangle 5"/>
-          <p:cNvSpPr/>
-          <p:nvPr/>
-        </p:nvSpPr>
-        <p:spPr>
-          <a:xfrm>
-            <a:off x="3720510" y="2155423"/>
-            <a:ext cx="1426463" cy="190195"/>
-          </a:xfrm>
-          <a:prstGeom prst="roundRect">
-            <a:avLst/>
-          </a:prstGeom>
-          <a:solidFill>
-            <a:srgbClr val="4A6B78"/>
-          </a:solidFill>
-          <a:ln>
-            <a:noFill/>
-          </a:ln>
-          <a:effectLst/>
-        </p:spPr>
-        <p:style>
-          <a:lnRef idx="1">
-            <a:schemeClr val="accent1"/>
-          </a:lnRef>
-          <a:fillRef idx="3">
-            <a:schemeClr val="accent1"/>
-          </a:fillRef>
-          <a:effectRef idx="2">
-            <a:schemeClr val="accent1"/>
-          </a:effectRef>
-          <a:fontRef idx="minor">
-            <a:schemeClr val="lt1"/>
-          </a:fontRef>
-        </p:style>
-        <p:txBody>
-          <a:bodyPr rtlCol="0" anchor="ctr"/>
-          <a:lstStyle/>
-          <a:p>
-            <a:pPr algn="ctr"/>
-          </a:p>
-        </p:txBody>
-      </p:sp>
-      <p:sp>
-        <p:nvSpPr>
-          <p:cNvPr id="7" name="Rounded Rectangle 6"/>
-          <p:cNvSpPr/>
-          <p:nvPr/>
-        </p:nvSpPr>
-        <p:spPr>
-          <a:xfrm>
-            <a:off x="3606393" y="2554833"/>
-            <a:ext cx="4945075" cy="1806854"/>
-          </a:xfrm>
-          <a:prstGeom prst="roundRect">
-            <a:avLst/>
-          </a:prstGeom>
-          <a:solidFill>
-            <a:srgbClr val="0B171D"/>
-          </a:solidFill>
-          <a:ln>
-            <a:noFill/>
-          </a:ln>
-          <a:effectLst/>
-        </p:spPr>
-        <p:style>
-          <a:lnRef idx="1">
-            <a:schemeClr val="accent1"/>
-          </a:lnRef>
-          <a:fillRef idx="3">
-            <a:schemeClr val="accent1"/>
-          </a:fillRef>
-          <a:effectRef idx="2">
-            <a:schemeClr val="accent1"/>
-          </a:effectRef>
-          <a:fontRef idx="minor">
-            <a:schemeClr val="lt1"/>
-          </a:fontRef>
-        </p:style>
-        <p:txBody>
-          <a:bodyPr rtlCol="0" anchor="ctr"/>
-          <a:lstStyle/>
-          <a:p>
-            <a:pPr algn="ctr"/>
-          </a:p>
-        </p:txBody>
-      </p:sp>
-      <p:sp>
-        <p:nvSpPr>
-          <p:cNvPr id="8" name="Rounded Rectangle 7"/>
-          <p:cNvSpPr/>
-          <p:nvPr/>
-        </p:nvSpPr>
-        <p:spPr>
-          <a:xfrm>
-            <a:off x="3720510" y="2668950"/>
-            <a:ext cx="2852927" cy="399409"/>
-          </a:xfrm>
-          <a:prstGeom prst="roundRect">
-            <a:avLst/>
-          </a:prstGeom>
-          <a:solidFill>
-            <a:srgbClr val="1B3540"/>
-          </a:solidFill>
-          <a:ln>
-            <a:noFill/>
-          </a:ln>
-          <a:effectLst/>
-        </p:spPr>
-        <p:style>
-          <a:lnRef idx="1">
-            <a:schemeClr val="accent1"/>
-          </a:lnRef>
-          <a:fillRef idx="3">
-            <a:schemeClr val="accent1"/>
-          </a:fillRef>
-          <a:effectRef idx="2">
-            <a:schemeClr val="accent1"/>
-          </a:effectRef>
-          <a:fontRef idx="minor">
-            <a:schemeClr val="lt1"/>
-          </a:fontRef>
-        </p:style>
-        <p:txBody>
-          <a:bodyPr rtlCol="0" anchor="ctr"/>
-          <a:lstStyle/>
-          <a:p>
-            <a:pPr algn="ctr"/>
-          </a:p>
-        </p:txBody>
-      </p:sp>
-      <p:sp>
-        <p:nvSpPr>
-          <p:cNvPr id="9" name="Rounded Rectangle 8"/>
-          <p:cNvSpPr/>
-          <p:nvPr/>
-        </p:nvSpPr>
-        <p:spPr>
-          <a:xfrm>
-            <a:off x="5584423" y="3182477"/>
-            <a:ext cx="2852927" cy="399409"/>
-          </a:xfrm>
-          <a:prstGeom prst="roundRect">
-            <a:avLst/>
-          </a:prstGeom>
-          <a:solidFill>
-            <a:srgbClr val="123A32"/>
-          </a:solidFill>
-          <a:ln>
-            <a:noFill/>
-          </a:ln>
-          <a:effectLst/>
-        </p:spPr>
-        <p:style>
-          <a:lnRef idx="1">
-            <a:schemeClr val="accent1"/>
-          </a:lnRef>
-          <a:fillRef idx="3">
-            <a:schemeClr val="accent1"/>
-          </a:fillRef>
-          <a:effectRef idx="2">
-            <a:schemeClr val="accent1"/>
-          </a:effectRef>
-          <a:fontRef idx="minor">
-            <a:schemeClr val="lt1"/>
-          </a:fontRef>
-        </p:style>
-        <p:txBody>
-          <a:bodyPr rtlCol="0" anchor="ctr"/>
-          <a:lstStyle/>
-          <a:p>
-            <a:pPr algn="ctr"/>
-          </a:p>
-        </p:txBody>
-      </p:sp>
-      <p:sp>
-        <p:nvSpPr>
-          <p:cNvPr id="10" name="Rounded Rectangle 9"/>
-          <p:cNvSpPr/>
-          <p:nvPr/>
-        </p:nvSpPr>
-        <p:spPr>
-          <a:xfrm>
-            <a:off x="3720510" y="3696004"/>
-            <a:ext cx="3138220" cy="399409"/>
-          </a:xfrm>
-          <a:prstGeom prst="roundRect">
-            <a:avLst/>
-          </a:prstGeom>
-          <a:solidFill>
-            <a:srgbClr val="1B3540"/>
-          </a:solidFill>
-          <a:ln>
-            <a:noFill/>
-          </a:ln>
-          <a:effectLst/>
-        </p:spPr>
-        <p:style>
-          <a:lnRef idx="1">
-            <a:schemeClr val="accent1"/>
-          </a:lnRef>
-          <a:fillRef idx="3">
-            <a:schemeClr val="accent1"/>
-          </a:fillRef>
-          <a:effectRef idx="2">
-            <a:schemeClr val="accent1"/>
-          </a:effectRef>
-          <a:fontRef idx="minor">
-            <a:schemeClr val="lt1"/>
-          </a:fontRef>
-        </p:style>
-        <p:txBody>
-          <a:bodyPr rtlCol="0" anchor="ctr"/>
-          <a:lstStyle/>
-          <a:p>
-            <a:pPr algn="ctr"/>
-          </a:p>
-        </p:txBody>
-      </p:sp>
-      <p:sp>
-        <p:nvSpPr>
-          <p:cNvPr id="11" name="Rounded Rectangle 10"/>
-          <p:cNvSpPr/>
-          <p:nvPr/>
-        </p:nvSpPr>
-        <p:spPr>
-          <a:xfrm>
-            <a:off x="3701491" y="4856195"/>
-            <a:ext cx="3899001" cy="323331"/>
-          </a:xfrm>
-          <a:prstGeom prst="roundRect">
-            <a:avLst/>
-          </a:prstGeom>
-          <a:solidFill>
-            <a:srgbClr val="16303A"/>
-          </a:solidFill>
-          <a:ln>
-            <a:noFill/>
-          </a:ln>
-          <a:effectLst/>
-        </p:spPr>
-        <p:style>
-          <a:lnRef idx="1">
-            <a:schemeClr val="accent1"/>
-          </a:lnRef>
-          <a:fillRef idx="3">
-            <a:schemeClr val="accent1"/>
-          </a:fillRef>
-          <a:effectRef idx="2">
-            <a:schemeClr val="accent1"/>
-          </a:effectRef>
-          <a:fontRef idx="minor">
-            <a:schemeClr val="lt1"/>
-          </a:fontRef>
-        </p:style>
-        <p:txBody>
-          <a:bodyPr rtlCol="0" anchor="ctr"/>
-          <a:lstStyle/>
-          <a:p>
-            <a:pPr algn="ctr"/>
-          </a:p>
-        </p:txBody>
-      </p:sp>
-      <p:sp>
-        <p:nvSpPr>
-          <p:cNvPr id="12" name="Rounded Rectangle 11"/>
-          <p:cNvSpPr/>
-          <p:nvPr/>
-        </p:nvSpPr>
-        <p:spPr>
-          <a:xfrm>
-            <a:off x="7695590" y="4856195"/>
-            <a:ext cx="779800" cy="323331"/>
-          </a:xfrm>
-          <a:prstGeom prst="roundRect">
-            <a:avLst/>
-          </a:prstGeom>
-          <a:solidFill>
-            <a:srgbClr val="01AEFD"/>
-          </a:solidFill>
-          <a:ln>
-            <a:noFill/>
-          </a:ln>
-          <a:effectLst/>
-        </p:spPr>
-        <p:style>
-          <a:lnRef idx="1">
-            <a:schemeClr val="accent1"/>
-          </a:lnRef>
-          <a:fillRef idx="3">
-            <a:schemeClr val="accent1"/>
-          </a:fillRef>
-          <a:effectRef idx="2">
-            <a:schemeClr val="accent1"/>
-          </a:effectRef>
-          <a:fontRef idx="minor">
-            <a:schemeClr val="lt1"/>
-          </a:fontRef>
-        </p:style>
-        <p:txBody>
-          <a:bodyPr rtlCol="0" anchor="ctr"/>
-          <a:lstStyle/>
-          <a:p>
-            <a:pPr algn="ctr"/>
-          </a:p>
-        </p:txBody>
-      </p:sp>
-      <p:sp>
-        <p:nvSpPr>
-          <p:cNvPr id="13" name="Rounded Rectangle 12"/>
-          <p:cNvSpPr/>
-          <p:nvPr/>
-        </p:nvSpPr>
-        <p:spPr>
-          <a:xfrm>
-            <a:off x="3720510" y="5407761"/>
-            <a:ext cx="1616659" cy="95097"/>
-          </a:xfrm>
-          <a:prstGeom prst="roundRect">
-            <a:avLst/>
-          </a:prstGeom>
-          <a:solidFill>
-            <a:srgbClr val="2A4550"/>
-          </a:solidFill>
-          <a:ln>
-            <a:noFill/>
-          </a:ln>
-          <a:effectLst/>
-        </p:spPr>
-        <p:style>
-          <a:lnRef idx="1">
-            <a:schemeClr val="accent1"/>
-          </a:lnRef>
-          <a:fillRef idx="3">
-            <a:schemeClr val="accent1"/>
-          </a:fillRef>
-          <a:effectRef idx="2">
-            <a:schemeClr val="accent1"/>
-          </a:effectRef>
-          <a:fontRef idx="minor">
-            <a:schemeClr val="lt1"/>
-          </a:fontRef>
-        </p:style>
-        <p:txBody>
-          <a:bodyPr rtlCol="0" anchor="ctr"/>
-          <a:lstStyle/>
-          <a:p>
-            <a:pPr algn="ctr"/>
-          </a:p>
-        </p:txBody>
-      </p:sp>
-      <p:sp>
-        <p:nvSpPr>
-          <p:cNvPr id="14" name="Rounded Rectangle 13"/>
-          <p:cNvSpPr/>
-          <p:nvPr/>
-        </p:nvSpPr>
-        <p:spPr>
-          <a:xfrm>
-            <a:off x="3663452" y="4818156"/>
-            <a:ext cx="3975079" cy="399409"/>
-          </a:xfrm>
-          <a:prstGeom prst="roundRect">
-            <a:avLst/>
-          </a:prstGeom>
-          <a:noFill/>
-          <a:ln w="44450">
-            <a:solidFill>
-              <a:srgbClr val="FFD633"/>
-            </a:solidFill>
-          </a:ln>
-          <a:effectLst/>
-        </p:spPr>
-        <p:style>
-          <a:lnRef idx="1">
-            <a:schemeClr val="accent1"/>
-          </a:lnRef>
-          <a:fillRef idx="3">
-            <a:schemeClr val="accent1"/>
-          </a:fillRef>
-          <a:effectRef idx="2">
-            <a:schemeClr val="accent1"/>
-          </a:effectRef>
-          <a:fontRef idx="minor">
-            <a:schemeClr val="lt1"/>
-          </a:fontRef>
-        </p:style>
-        <p:txBody>
-          <a:bodyPr rtlCol="0" anchor="ctr"/>
-          <a:lstStyle/>
-          <a:p>
-            <a:pPr algn="ctr"/>
-          </a:p>
-        </p:txBody>
-      </p:sp>
-      <p:sp>
-        <p:nvSpPr>
-          <p:cNvPr id="15" name="TextBox 14"/>
-          <p:cNvSpPr txBox="1"/>
-          <p:nvPr/>
-        </p:nvSpPr>
-        <p:spPr>
-          <a:xfrm>
-            <a:off x="822960" y="6172200"/>
-            <a:ext cx="10515600" cy="548640"/>
+            <a:off x="822960" y="1828800"/>
+            <a:ext cx="10515600" cy="4206240"/>
           </a:xfrm>
           <a:prstGeom prst="rect">
             <a:avLst/>
@@ -14866,13 +14370,33 @@
           </a:bodyPr>
           <a:lstStyle/>
           <a:p>
-            <a:r>
-              <a:rPr sz="2000">
-                <a:solidFill>
-                  <a:srgbClr val="0A6299"/>
-                </a:solidFill>
-              </a:rPr>
-              <a:t>getElementById grabs an element like this box.</a:t>
+            <a:pPr>
+              <a:spcAft>
+                <a:spcPts val="1400"/>
+              </a:spcAft>
+            </a:pPr>
+            <a:r>
+              <a:rPr sz="2400">
+                <a:solidFill>
+                  <a:srgbClr val="1F2A37"/>
+                </a:solidFill>
+              </a:rPr>
+              <a:t>• A name followed by ( ) runs that function.</a:t>
+            </a:r>
+          </a:p>
+          <a:p>
+            <a:pPr>
+              <a:spcAft>
+                <a:spcPts val="1400"/>
+              </a:spcAft>
+            </a:pPr>
+            <a:r>
+              <a:rPr sz="2400">
+                <a:solidFill>
+                  <a:srgbClr val="1F2A37"/>
+                </a:solidFill>
+              </a:rPr>
+              <a:t>• Whatever is inside the ( ) is what you hand it.</a:t>
             </a:r>
           </a:p>
         </p:txBody>
@@ -14886,6 +14410,266 @@
 </file>
 
 <file path=ppt/slides/slide137.xml><?xml version="1.0" encoding="utf-8"?>
+<p:sld xmlns:a="http://schemas.openxmlformats.org/drawingml/2006/main" xmlns:p="http://schemas.openxmlformats.org/presentationml/2006/main" xmlns:r="http://schemas.openxmlformats.org/officeDocument/2006/relationships">
+  <p:cSld>
+    <p:spTree>
+      <p:nvGrpSpPr>
+        <p:cNvPr id="1" name=""/>
+        <p:cNvGrpSpPr/>
+        <p:nvPr/>
+      </p:nvGrpSpPr>
+      <p:grpSpPr/>
+      <p:sp>
+        <p:nvSpPr>
+          <p:cNvPr id="2" name="Title 1"/>
+          <p:cNvSpPr>
+            <a:spLocks noGrp="1"/>
+          </p:cNvSpPr>
+          <p:nvPr>
+            <p:ph type="title"/>
+          </p:nvPr>
+        </p:nvSpPr>
+        <p:spPr/>
+        <p:txBody>
+          <a:bodyPr/>
+          <a:lstStyle/>
+          <a:p>
+            <a:r>
+              <a:rPr sz="3800" b="1">
+                <a:solidFill>
+                  <a:srgbClr val="1F2A37"/>
+                </a:solidFill>
+              </a:rPr>
+              <a:t>Dot notation</a:t>
+            </a:r>
+          </a:p>
+        </p:txBody>
+      </p:sp>
+      <p:sp>
+        <p:nvSpPr>
+          <p:cNvPr id="3" name="TextBox 2"/>
+          <p:cNvSpPr txBox="1"/>
+          <p:nvPr/>
+        </p:nvSpPr>
+        <p:spPr>
+          <a:xfrm>
+            <a:off x="868680" y="502920"/>
+            <a:ext cx="5486400" cy="457200"/>
+          </a:xfrm>
+          <a:prstGeom prst="rect">
+            <a:avLst/>
+          </a:prstGeom>
+          <a:noFill/>
+        </p:spPr>
+        <p:txBody>
+          <a:bodyPr wrap="none">
+            <a:spAutoFit/>
+          </a:bodyPr>
+          <a:lstStyle/>
+          <a:p>
+            <a:r>
+              <a:rPr sz="1500" b="1">
+                <a:solidFill>
+                  <a:srgbClr val="01AEFD"/>
+                </a:solidFill>
+              </a:rPr>
+              <a:t>JAVASCRIPT</a:t>
+            </a:r>
+          </a:p>
+        </p:txBody>
+      </p:sp>
+      <p:sp>
+        <p:nvSpPr>
+          <p:cNvPr id="4" name="TextBox 3"/>
+          <p:cNvSpPr txBox="1"/>
+          <p:nvPr/>
+        </p:nvSpPr>
+        <p:spPr>
+          <a:xfrm>
+            <a:off x="822960" y="1828800"/>
+            <a:ext cx="10515600" cy="4206240"/>
+          </a:xfrm>
+          <a:prstGeom prst="rect">
+            <a:avLst/>
+          </a:prstGeom>
+          <a:noFill/>
+        </p:spPr>
+        <p:txBody>
+          <a:bodyPr wrap="square">
+            <a:spAutoFit/>
+          </a:bodyPr>
+          <a:lstStyle/>
+          <a:p>
+            <a:pPr>
+              <a:spcAft>
+                <a:spcPts val="1400"/>
+              </a:spcAft>
+            </a:pPr>
+            <a:r>
+              <a:rPr sz="2400">
+                <a:solidFill>
+                  <a:srgbClr val="1F2A37"/>
+                </a:solidFill>
+              </a:rPr>
+              <a:t>• thing.name reaches INTO thing for one of its parts or actions.</a:t>
+            </a:r>
+          </a:p>
+          <a:p>
+            <a:pPr>
+              <a:spcAft>
+                <a:spcPts val="1400"/>
+              </a:spcAft>
+            </a:pPr>
+            <a:r>
+              <a:rPr sz="2400">
+                <a:solidFill>
+                  <a:srgbClr val="1F2A37"/>
+                </a:solidFill>
+              </a:rPr>
+              <a:t>• document.getElementById asks document to find something.</a:t>
+            </a:r>
+          </a:p>
+        </p:txBody>
+      </p:sp>
+    </p:spTree>
+  </p:cSld>
+  <p:clrMapOvr>
+    <a:masterClrMapping/>
+  </p:clrMapOvr>
+</p:sld>
+</file>
+
+<file path=ppt/slides/slide138.xml><?xml version="1.0" encoding="utf-8"?>
+<p:sld xmlns:a="http://schemas.openxmlformats.org/drawingml/2006/main" xmlns:p="http://schemas.openxmlformats.org/presentationml/2006/main" xmlns:r="http://schemas.openxmlformats.org/officeDocument/2006/relationships">
+  <p:cSld>
+    <p:spTree>
+      <p:nvGrpSpPr>
+        <p:cNvPr id="1" name=""/>
+        <p:cNvGrpSpPr/>
+        <p:nvPr/>
+      </p:nvGrpSpPr>
+      <p:grpSpPr/>
+      <p:sp>
+        <p:nvSpPr>
+          <p:cNvPr id="2" name="Title 1"/>
+          <p:cNvSpPr>
+            <a:spLocks noGrp="1"/>
+          </p:cNvSpPr>
+          <p:nvPr>
+            <p:ph type="title"/>
+          </p:nvPr>
+        </p:nvSpPr>
+        <p:spPr/>
+        <p:txBody>
+          <a:bodyPr/>
+          <a:lstStyle/>
+          <a:p>
+            <a:r>
+              <a:rPr sz="3800" b="1">
+                <a:solidFill>
+                  <a:srgbClr val="1F2A37"/>
+                </a:solidFill>
+              </a:rPr>
+              <a:t>console.log()</a:t>
+            </a:r>
+          </a:p>
+        </p:txBody>
+      </p:sp>
+      <p:sp>
+        <p:nvSpPr>
+          <p:cNvPr id="3" name="TextBox 2"/>
+          <p:cNvSpPr txBox="1"/>
+          <p:nvPr/>
+        </p:nvSpPr>
+        <p:spPr>
+          <a:xfrm>
+            <a:off x="868680" y="502920"/>
+            <a:ext cx="5486400" cy="457200"/>
+          </a:xfrm>
+          <a:prstGeom prst="rect">
+            <a:avLst/>
+          </a:prstGeom>
+          <a:noFill/>
+        </p:spPr>
+        <p:txBody>
+          <a:bodyPr wrap="none">
+            <a:spAutoFit/>
+          </a:bodyPr>
+          <a:lstStyle/>
+          <a:p>
+            <a:r>
+              <a:rPr sz="1500" b="1">
+                <a:solidFill>
+                  <a:srgbClr val="01AEFD"/>
+                </a:solidFill>
+              </a:rPr>
+              <a:t>JAVASCRIPT</a:t>
+            </a:r>
+          </a:p>
+        </p:txBody>
+      </p:sp>
+      <p:sp>
+        <p:nvSpPr>
+          <p:cNvPr id="4" name="TextBox 3"/>
+          <p:cNvSpPr txBox="1"/>
+          <p:nvPr/>
+        </p:nvSpPr>
+        <p:spPr>
+          <a:xfrm>
+            <a:off x="822960" y="1828800"/>
+            <a:ext cx="10515600" cy="4206240"/>
+          </a:xfrm>
+          <a:prstGeom prst="rect">
+            <a:avLst/>
+          </a:prstGeom>
+          <a:noFill/>
+        </p:spPr>
+        <p:txBody>
+          <a:bodyPr wrap="square">
+            <a:spAutoFit/>
+          </a:bodyPr>
+          <a:lstStyle/>
+          <a:p>
+            <a:pPr>
+              <a:spcAft>
+                <a:spcPts val="1400"/>
+              </a:spcAft>
+            </a:pPr>
+            <a:r>
+              <a:rPr sz="2400">
+                <a:solidFill>
+                  <a:srgbClr val="1F2A37"/>
+                </a:solidFill>
+              </a:rPr>
+              <a:t>• A built-in that prints a message to the console panel.</a:t>
+            </a:r>
+          </a:p>
+          <a:p>
+            <a:pPr>
+              <a:spcAft>
+                <a:spcPts val="1400"/>
+              </a:spcAft>
+            </a:pPr>
+            <a:r>
+              <a:rPr sz="2400">
+                <a:solidFill>
+                  <a:srgbClr val="1F2A37"/>
+                </a:solidFill>
+              </a:rPr>
+              <a:t>• Your window into what the code is doing.</a:t>
+            </a:r>
+          </a:p>
+        </p:txBody>
+      </p:sp>
+    </p:spTree>
+  </p:cSld>
+  <p:clrMapOvr>
+    <a:masterClrMapping/>
+  </p:clrMapOvr>
+</p:sld>
+</file>
+
+<file path=ppt/slides/slide139.xml><?xml version="1.0" encoding="utf-8"?>
 <p:sld xmlns:a="http://schemas.openxmlformats.org/drawingml/2006/main" xmlns:p="http://schemas.openxmlformats.org/presentationml/2006/main" xmlns:r="http://schemas.openxmlformats.org/officeDocument/2006/relationships">
   <p:cSld>
     <p:bg>
@@ -14931,7 +14715,7 @@
                   <a:srgbClr val="01AEFD"/>
                 </a:solidFill>
               </a:rPr>
-              <a:t>Type this into script.js   -   line 7</a:t>
+              <a:t>Type this into script.js   -   line 2</a:t>
             </a:r>
           </a:p>
         </p:txBody>
@@ -15000,136 +14784,11 @@
             <a:r>
               <a:rPr sz="1800">
                 <a:solidFill>
-                  <a:srgbClr val="6D8C97"/>
+                  <a:srgbClr val="7FE0A0"/>
                 </a:solidFill>
                 <a:latin typeface="Consolas"/>
               </a:rPr>
               <a:t>console.log('My AI companion is starting up.');</a:t>
-            </a:r>
-          </a:p>
-          <a:p>
-            <a:pPr>
-              <a:spcAft>
-                <a:spcPts val="0"/>
-              </a:spcAft>
-            </a:pPr>
-            <a:r>
-              <a:rPr sz="1800">
-                <a:solidFill>
-                  <a:srgbClr val="6D8C97"/>
-                </a:solidFill>
-                <a:latin typeface="Consolas"/>
-              </a:rPr>
-              <a:t>   3  </a:t>
-            </a:r>
-            <a:r>
-              <a:rPr sz="1800">
-                <a:solidFill>
-                  <a:srgbClr val="6D8C97"/>
-                </a:solidFill>
-                <a:latin typeface="Consolas"/>
-              </a:rPr>
-              <a:t> </a:t>
-            </a:r>
-          </a:p>
-          <a:p>
-            <a:pPr>
-              <a:spcAft>
-                <a:spcPts val="0"/>
-              </a:spcAft>
-            </a:pPr>
-            <a:r>
-              <a:rPr sz="1800">
-                <a:solidFill>
-                  <a:srgbClr val="6D8C97"/>
-                </a:solidFill>
-                <a:latin typeface="Consolas"/>
-              </a:rPr>
-              <a:t>   4  </a:t>
-            </a:r>
-            <a:r>
-              <a:rPr sz="1800">
-                <a:solidFill>
-                  <a:srgbClr val="6D8C97"/>
-                </a:solidFill>
-                <a:latin typeface="Consolas"/>
-              </a:rPr>
-              <a:t>// Can this script see the page yet? Down here, yes.</a:t>
-            </a:r>
-          </a:p>
-          <a:p>
-            <a:pPr>
-              <a:spcAft>
-                <a:spcPts val="0"/>
-              </a:spcAft>
-            </a:pPr>
-            <a:r>
-              <a:rPr sz="1800">
-                <a:solidFill>
-                  <a:srgbClr val="6D8C97"/>
-                </a:solidFill>
-                <a:latin typeface="Consolas"/>
-              </a:rPr>
-              <a:t>   5  </a:t>
-            </a:r>
-            <a:r>
-              <a:rPr sz="1800">
-                <a:solidFill>
-                  <a:srgbClr val="6D8C97"/>
-                </a:solidFill>
-                <a:latin typeface="Consolas"/>
-              </a:rPr>
-              <a:t>// Move the &lt;script&gt; tag to the TOP of index.html and this prints false,</a:t>
-            </a:r>
-          </a:p>
-          <a:p>
-            <a:pPr>
-              <a:spcAft>
-                <a:spcPts val="0"/>
-              </a:spcAft>
-            </a:pPr>
-            <a:r>
-              <a:rPr sz="1800">
-                <a:solidFill>
-                  <a:srgbClr val="6D8C97"/>
-                </a:solidFill>
-                <a:latin typeface="Consolas"/>
-              </a:rPr>
-              <a:t>   6  </a:t>
-            </a:r>
-            <a:r>
-              <a:rPr sz="1800">
-                <a:solidFill>
-                  <a:srgbClr val="6D8C97"/>
-                </a:solidFill>
-                <a:latin typeface="Consolas"/>
-              </a:rPr>
-              <a:t>// because the boxes have not been made yet. That is why it goes last.</a:t>
-            </a:r>
-          </a:p>
-          <a:p>
-            <a:pPr>
-              <a:spcAft>
-                <a:spcPts val="0"/>
-              </a:spcAft>
-            </a:pPr>
-            <a:r>
-              <a:rPr sz="1800">
-                <a:solidFill>
-                  <a:srgbClr val="6D8C97"/>
-                </a:solidFill>
-                <a:latin typeface="Consolas"/>
-              </a:rPr>
-              <a:t>   7  </a:t>
-            </a:r>
-            <a:r>
-              <a:rPr sz="1800">
-                <a:solidFill>
-                  <a:srgbClr val="7FE0A0"/>
-                </a:solidFill>
-                <a:latin typeface="Consolas"/>
-              </a:rPr>
-              <a:t>console.log('Can I see the chat box?', document.getElementById('chat') !== null);</a:t>
             </a:r>
           </a:p>
         </p:txBody>
@@ -15162,409 +14821,7 @@
                   <a:srgbClr val="DCECEF"/>
                 </a:solidFill>
               </a:rPr>
-              <a:t>getElementById looks for the chat box; !== null is true only if it was found. Because the script is at the bottom, it prints true.</a:t>
-            </a:r>
-          </a:p>
-        </p:txBody>
-      </p:sp>
-    </p:spTree>
-  </p:cSld>
-  <p:clrMapOvr>
-    <a:masterClrMapping/>
-  </p:clrMapOvr>
-</p:sld>
-</file>
-
-<file path=ppt/slides/slide138.xml><?xml version="1.0" encoding="utf-8"?>
-<p:sld xmlns:a="http://schemas.openxmlformats.org/drawingml/2006/main" xmlns:p="http://schemas.openxmlformats.org/presentationml/2006/main" xmlns:r="http://schemas.openxmlformats.org/officeDocument/2006/relationships">
-  <p:cSld>
-    <p:bg>
-      <p:bgPr>
-        <a:solidFill>
-          <a:srgbClr val="102127"/>
-        </a:solidFill>
-        <a:effectLst/>
-      </p:bgPr>
-    </p:bg>
-    <p:spTree>
-      <p:nvGrpSpPr>
-        <p:cNvPr id="1" name=""/>
-        <p:cNvGrpSpPr/>
-        <p:nvPr/>
-      </p:nvGrpSpPr>
-      <p:grpSpPr/>
-      <p:sp>
-        <p:nvSpPr>
-          <p:cNvPr id="2" name="TextBox 1"/>
-          <p:cNvSpPr txBox="1"/>
-          <p:nvPr/>
-        </p:nvSpPr>
-        <p:spPr>
-          <a:xfrm>
-            <a:off x="502920" y="274320"/>
-            <a:ext cx="11155680" cy="548640"/>
-          </a:xfrm>
-          <a:prstGeom prst="rect">
-            <a:avLst/>
-          </a:prstGeom>
-          <a:noFill/>
-        </p:spPr>
-        <p:txBody>
-          <a:bodyPr wrap="none">
-            <a:spAutoFit/>
-          </a:bodyPr>
-          <a:lstStyle/>
-          <a:p>
-            <a:r>
-              <a:rPr sz="2200" b="1">
-                <a:solidFill>
-                  <a:srgbClr val="01AEFD"/>
-                </a:solidFill>
-              </a:rPr>
-              <a:t>All together in script.js</a:t>
-            </a:r>
-          </a:p>
-        </p:txBody>
-      </p:sp>
-      <p:sp>
-        <p:nvSpPr>
-          <p:cNvPr id="3" name="TextBox 2"/>
-          <p:cNvSpPr txBox="1"/>
-          <p:nvPr/>
-        </p:nvSpPr>
-        <p:spPr>
-          <a:xfrm>
-            <a:off x="502920" y="960120"/>
-            <a:ext cx="11155680" cy="4297680"/>
-          </a:xfrm>
-          <a:prstGeom prst="rect">
-            <a:avLst/>
-          </a:prstGeom>
-          <a:noFill/>
-        </p:spPr>
-        <p:txBody>
-          <a:bodyPr wrap="none">
-            <a:spAutoFit/>
-          </a:bodyPr>
-          <a:lstStyle/>
-          <a:p>
-            <a:pPr>
-              <a:spcAft>
-                <a:spcPts val="0"/>
-              </a:spcAft>
-            </a:pPr>
-            <a:r>
-              <a:rPr sz="1800">
-                <a:solidFill>
-                  <a:srgbClr val="6D8C97"/>
-                </a:solidFill>
-                <a:latin typeface="Consolas"/>
-              </a:rPr>
-              <a:t>   1  </a:t>
-            </a:r>
-            <a:r>
-              <a:rPr sz="1800">
-                <a:solidFill>
-                  <a:srgbClr val="7FE0A0"/>
-                </a:solidFill>
-                <a:latin typeface="Consolas"/>
-              </a:rPr>
-              <a:t>// Week 1: prove the JavaScript file is really running.</a:t>
-            </a:r>
-          </a:p>
-          <a:p>
-            <a:pPr>
-              <a:spcAft>
-                <a:spcPts val="0"/>
-              </a:spcAft>
-            </a:pPr>
-            <a:r>
-              <a:rPr sz="1800">
-                <a:solidFill>
-                  <a:srgbClr val="6D8C97"/>
-                </a:solidFill>
-                <a:latin typeface="Consolas"/>
-              </a:rPr>
-              <a:t>   2  </a:t>
-            </a:r>
-            <a:r>
-              <a:rPr sz="1800">
-                <a:solidFill>
-                  <a:srgbClr val="7FE0A0"/>
-                </a:solidFill>
-                <a:latin typeface="Consolas"/>
-              </a:rPr>
-              <a:t>console.log('My AI companion is starting up.');</a:t>
-            </a:r>
-          </a:p>
-          <a:p>
-            <a:pPr>
-              <a:spcAft>
-                <a:spcPts val="0"/>
-              </a:spcAft>
-            </a:pPr>
-            <a:r>
-              <a:rPr sz="1800">
-                <a:solidFill>
-                  <a:srgbClr val="6D8C97"/>
-                </a:solidFill>
-                <a:latin typeface="Consolas"/>
-              </a:rPr>
-              <a:t>   3  </a:t>
-            </a:r>
-            <a:r>
-              <a:rPr sz="1800">
-                <a:solidFill>
-                  <a:srgbClr val="7FE0A0"/>
-                </a:solidFill>
-                <a:latin typeface="Consolas"/>
-              </a:rPr>
-              <a:t> </a:t>
-            </a:r>
-          </a:p>
-          <a:p>
-            <a:pPr>
-              <a:spcAft>
-                <a:spcPts val="0"/>
-              </a:spcAft>
-            </a:pPr>
-            <a:r>
-              <a:rPr sz="1800">
-                <a:solidFill>
-                  <a:srgbClr val="6D8C97"/>
-                </a:solidFill>
-                <a:latin typeface="Consolas"/>
-              </a:rPr>
-              <a:t>   4  </a:t>
-            </a:r>
-            <a:r>
-              <a:rPr sz="1800">
-                <a:solidFill>
-                  <a:srgbClr val="7FE0A0"/>
-                </a:solidFill>
-                <a:latin typeface="Consolas"/>
-              </a:rPr>
-              <a:t>// Can this script see the page yet? Down here, yes.</a:t>
-            </a:r>
-          </a:p>
-          <a:p>
-            <a:pPr>
-              <a:spcAft>
-                <a:spcPts val="0"/>
-              </a:spcAft>
-            </a:pPr>
-            <a:r>
-              <a:rPr sz="1800">
-                <a:solidFill>
-                  <a:srgbClr val="6D8C97"/>
-                </a:solidFill>
-                <a:latin typeface="Consolas"/>
-              </a:rPr>
-              <a:t>   5  </a:t>
-            </a:r>
-            <a:r>
-              <a:rPr sz="1800">
-                <a:solidFill>
-                  <a:srgbClr val="7FE0A0"/>
-                </a:solidFill>
-                <a:latin typeface="Consolas"/>
-              </a:rPr>
-              <a:t>// Move the &lt;script&gt; tag to the TOP of index.html and this prints false,</a:t>
-            </a:r>
-          </a:p>
-          <a:p>
-            <a:pPr>
-              <a:spcAft>
-                <a:spcPts val="0"/>
-              </a:spcAft>
-            </a:pPr>
-            <a:r>
-              <a:rPr sz="1800">
-                <a:solidFill>
-                  <a:srgbClr val="6D8C97"/>
-                </a:solidFill>
-                <a:latin typeface="Consolas"/>
-              </a:rPr>
-              <a:t>   6  </a:t>
-            </a:r>
-            <a:r>
-              <a:rPr sz="1800">
-                <a:solidFill>
-                  <a:srgbClr val="7FE0A0"/>
-                </a:solidFill>
-                <a:latin typeface="Consolas"/>
-              </a:rPr>
-              <a:t>// because the boxes have not been made yet. That is why it goes last.</a:t>
-            </a:r>
-          </a:p>
-          <a:p>
-            <a:pPr>
-              <a:spcAft>
-                <a:spcPts val="0"/>
-              </a:spcAft>
-            </a:pPr>
-            <a:r>
-              <a:rPr sz="1800">
-                <a:solidFill>
-                  <a:srgbClr val="6D8C97"/>
-                </a:solidFill>
-                <a:latin typeface="Consolas"/>
-              </a:rPr>
-              <a:t>   7  </a:t>
-            </a:r>
-            <a:r>
-              <a:rPr sz="1800">
-                <a:solidFill>
-                  <a:srgbClr val="7FE0A0"/>
-                </a:solidFill>
-                <a:latin typeface="Consolas"/>
-              </a:rPr>
-              <a:t>console.log('Can I see the chat box?', document.getElementById('chat') !== null);</a:t>
-            </a:r>
-          </a:p>
-        </p:txBody>
-      </p:sp>
-      <p:sp>
-        <p:nvSpPr>
-          <p:cNvPr id="4" name="TextBox 3"/>
-          <p:cNvSpPr txBox="1"/>
-          <p:nvPr/>
-        </p:nvSpPr>
-        <p:spPr>
-          <a:xfrm>
-            <a:off x="548640" y="5623560"/>
-            <a:ext cx="11064240" cy="1051560"/>
-          </a:xfrm>
-          <a:prstGeom prst="rect">
-            <a:avLst/>
-          </a:prstGeom>
-          <a:noFill/>
-        </p:spPr>
-        <p:txBody>
-          <a:bodyPr wrap="square">
-            <a:spAutoFit/>
-          </a:bodyPr>
-          <a:lstStyle/>
-          <a:p>
-            <a:r>
-              <a:rPr sz="2000">
-                <a:solidFill>
-                  <a:srgbClr val="DCECEF"/>
-                </a:solidFill>
-              </a:rPr>
-              <a:t>That is the whole piece. Check yours looks the same before moving on.</a:t>
-            </a:r>
-          </a:p>
-        </p:txBody>
-      </p:sp>
-    </p:spTree>
-  </p:cSld>
-  <p:clrMapOvr>
-    <a:masterClrMapping/>
-  </p:clrMapOvr>
-</p:sld>
-</file>
-
-<file path=ppt/slides/slide139.xml><?xml version="1.0" encoding="utf-8"?>
-<p:sld xmlns:a="http://schemas.openxmlformats.org/drawingml/2006/main" xmlns:p="http://schemas.openxmlformats.org/presentationml/2006/main" xmlns:r="http://schemas.openxmlformats.org/officeDocument/2006/relationships">
-  <p:cSld>
-    <p:spTree>
-      <p:nvGrpSpPr>
-        <p:cNvPr id="1" name=""/>
-        <p:cNvGrpSpPr/>
-        <p:nvPr/>
-      </p:nvGrpSpPr>
-      <p:grpSpPr/>
-      <p:sp>
-        <p:nvSpPr>
-          <p:cNvPr id="2" name="Title 1"/>
-          <p:cNvSpPr>
-            <a:spLocks noGrp="1"/>
-          </p:cNvSpPr>
-          <p:nvPr>
-            <p:ph type="title"/>
-          </p:nvPr>
-        </p:nvSpPr>
-        <p:spPr/>
-        <p:txBody>
-          <a:bodyPr/>
-          <a:lstStyle/>
-          <a:p>
-            <a:r>
-              <a:rPr sz="3800" b="1">
-                <a:solidFill>
-                  <a:srgbClr val="1F2A37"/>
-                </a:solidFill>
-              </a:rPr>
-              <a:t>id = a name</a:t>
-            </a:r>
-          </a:p>
-        </p:txBody>
-      </p:sp>
-      <p:sp>
-        <p:nvSpPr>
-          <p:cNvPr id="3" name="TextBox 2"/>
-          <p:cNvSpPr txBox="1"/>
-          <p:nvPr/>
-        </p:nvSpPr>
-        <p:spPr>
-          <a:xfrm>
-            <a:off x="822960" y="1828800"/>
-            <a:ext cx="10515600" cy="4206240"/>
-          </a:xfrm>
-          <a:prstGeom prst="rect">
-            <a:avLst/>
-          </a:prstGeom>
-          <a:noFill/>
-        </p:spPr>
-        <p:txBody>
-          <a:bodyPr wrap="square">
-            <a:spAutoFit/>
-          </a:bodyPr>
-          <a:lstStyle/>
-          <a:p>
-            <a:pPr>
-              <a:spcAft>
-                <a:spcPts val="1400"/>
-              </a:spcAft>
-            </a:pPr>
-            <a:r>
-              <a:rPr sz="2400">
-                <a:solidFill>
-                  <a:srgbClr val="1F2A37"/>
-                </a:solidFill>
-              </a:rPr>
-              <a:t>• &lt;div id="chat"&gt;</a:t>
-            </a:r>
-          </a:p>
-          <a:p>
-            <a:pPr>
-              <a:spcAft>
-                <a:spcPts val="1400"/>
-              </a:spcAft>
-            </a:pPr>
-            <a:r>
-              <a:rPr sz="2400">
-                <a:solidFill>
-                  <a:srgbClr val="1F2A37"/>
-                </a:solidFill>
-              </a:rPr>
-              <a:t>• Next week JavaScript uses that name to find the box</a:t>
-            </a:r>
-          </a:p>
-          <a:p>
-            <a:pPr>
-              <a:spcAft>
-                <a:spcPts val="1400"/>
-              </a:spcAft>
-            </a:pPr>
-            <a:r>
-              <a:rPr sz="2400">
-                <a:solidFill>
-                  <a:srgbClr val="1F2A37"/>
-                </a:solidFill>
-              </a:rPr>
-              <a:t>• Names must be spelled exactly the same in both files</a:t>
+              <a:t>console.log prints a message to the console panel - proof the file is running.</a:t>
             </a:r>
           </a:p>
         </p:txBody>
@@ -15710,6 +14967,14 @@
 <file path=ppt/slides/slide140.xml><?xml version="1.0" encoding="utf-8"?>
 <p:sld xmlns:a="http://schemas.openxmlformats.org/drawingml/2006/main" xmlns:p="http://schemas.openxmlformats.org/presentationml/2006/main" xmlns:r="http://schemas.openxmlformats.org/officeDocument/2006/relationships">
   <p:cSld>
+    <p:bg>
+      <p:bgPr>
+        <a:solidFill>
+          <a:srgbClr val="102127"/>
+        </a:solidFill>
+        <a:effectLst/>
+      </p:bgPr>
+    </p:bg>
     <p:spTree>
       <p:nvGrpSpPr>
         <p:cNvPr id="1" name=""/>
@@ -15719,40 +14984,14 @@
       <p:grpSpPr/>
       <p:sp>
         <p:nvSpPr>
-          <p:cNvPr id="2" name="Title 1"/>
-          <p:cNvSpPr>
-            <a:spLocks noGrp="1"/>
-          </p:cNvSpPr>
-          <p:nvPr>
-            <p:ph type="title"/>
-          </p:nvPr>
-        </p:nvSpPr>
-        <p:spPr/>
-        <p:txBody>
-          <a:bodyPr/>
-          <a:lstStyle/>
-          <a:p>
-            <a:r>
-              <a:rPr sz="3800" b="1">
-                <a:solidFill>
-                  <a:srgbClr val="1F2A37"/>
-                </a:solidFill>
-              </a:rPr>
-              <a:t>Checkpoint: your page</a:t>
-            </a:r>
-          </a:p>
-        </p:txBody>
-      </p:sp>
-      <p:sp>
-        <p:nvSpPr>
-          <p:cNvPr id="3" name="TextBox 2"/>
+          <p:cNvPr id="2" name="TextBox 1"/>
           <p:cNvSpPr txBox="1"/>
           <p:nvPr/>
         </p:nvSpPr>
         <p:spPr>
           <a:xfrm>
-            <a:off x="868680" y="502920"/>
-            <a:ext cx="5486400" cy="457200"/>
+            <a:off x="502920" y="274320"/>
+            <a:ext cx="11155680" cy="548640"/>
           </a:xfrm>
           <a:prstGeom prst="rect">
             <a:avLst/>
@@ -15766,12 +15005,135 @@
           <a:lstStyle/>
           <a:p>
             <a:r>
-              <a:rPr sz="1500" b="1">
+              <a:rPr sz="2200" b="1">
                 <a:solidFill>
                   <a:srgbClr val="01AEFD"/>
                 </a:solidFill>
               </a:rPr>
-              <a:t>CHECKPOINT - RUN IT</a:t>
+              <a:t>Type this into script.js   -   line 4</a:t>
+            </a:r>
+          </a:p>
+        </p:txBody>
+      </p:sp>
+      <p:sp>
+        <p:nvSpPr>
+          <p:cNvPr id="3" name="TextBox 2"/>
+          <p:cNvSpPr txBox="1"/>
+          <p:nvPr/>
+        </p:nvSpPr>
+        <p:spPr>
+          <a:xfrm>
+            <a:off x="502920" y="960120"/>
+            <a:ext cx="11155680" cy="4297680"/>
+          </a:xfrm>
+          <a:prstGeom prst="rect">
+            <a:avLst/>
+          </a:prstGeom>
+          <a:noFill/>
+        </p:spPr>
+        <p:txBody>
+          <a:bodyPr wrap="none">
+            <a:spAutoFit/>
+          </a:bodyPr>
+          <a:lstStyle/>
+          <a:p>
+            <a:pPr>
+              <a:spcAft>
+                <a:spcPts val="0"/>
+              </a:spcAft>
+            </a:pPr>
+            <a:r>
+              <a:rPr sz="1800">
+                <a:solidFill>
+                  <a:srgbClr val="6D8C97"/>
+                </a:solidFill>
+                <a:latin typeface="Consolas"/>
+              </a:rPr>
+              <a:t>   1  </a:t>
+            </a:r>
+            <a:r>
+              <a:rPr sz="1800">
+                <a:solidFill>
+                  <a:srgbClr val="6D8C97"/>
+                </a:solidFill>
+                <a:latin typeface="Consolas"/>
+              </a:rPr>
+              <a:t>// Week 1: prove the JavaScript file is really running.</a:t>
+            </a:r>
+          </a:p>
+          <a:p>
+            <a:pPr>
+              <a:spcAft>
+                <a:spcPts val="0"/>
+              </a:spcAft>
+            </a:pPr>
+            <a:r>
+              <a:rPr sz="1800">
+                <a:solidFill>
+                  <a:srgbClr val="6D8C97"/>
+                </a:solidFill>
+                <a:latin typeface="Consolas"/>
+              </a:rPr>
+              <a:t>   2  </a:t>
+            </a:r>
+            <a:r>
+              <a:rPr sz="1800">
+                <a:solidFill>
+                  <a:srgbClr val="6D8C97"/>
+                </a:solidFill>
+                <a:latin typeface="Consolas"/>
+              </a:rPr>
+              <a:t>console.log('My AI companion is starting up.');</a:t>
+            </a:r>
+          </a:p>
+          <a:p>
+            <a:pPr>
+              <a:spcAft>
+                <a:spcPts val="0"/>
+              </a:spcAft>
+            </a:pPr>
+            <a:r>
+              <a:rPr sz="1800">
+                <a:solidFill>
+                  <a:srgbClr val="6D8C97"/>
+                </a:solidFill>
+                <a:latin typeface="Consolas"/>
+              </a:rPr>
+              <a:t>   3  </a:t>
+            </a:r>
+            <a:r>
+              <a:rPr sz="1800">
+                <a:solidFill>
+                  <a:srgbClr val="6D8C97"/>
+                </a:solidFill>
+                <a:latin typeface="Consolas"/>
+              </a:rPr>
+              <a:t> </a:t>
+            </a:r>
+          </a:p>
+          <a:p>
+            <a:pPr>
+              <a:spcAft>
+                <a:spcPts val="0"/>
+              </a:spcAft>
+            </a:pPr>
+            <a:r>
+              <a:rPr sz="1800">
+                <a:solidFill>
+                  <a:srgbClr val="6D8C97"/>
+                </a:solidFill>
+                <a:latin typeface="Consolas"/>
+              </a:rPr>
+              <a:t>   4  </a:t>
+            </a:r>
+            <a:r>
+              <a:rPr sz="1800">
+                <a:solidFill>
+                  <a:srgbClr val="7FE0A0"/>
+                </a:solidFill>
+                <a:latin typeface="Consolas"/>
+              </a:rPr>
+              <a:t>// Can this script see the page yet? Down here, yes.</a:t>
             </a:r>
           </a:p>
         </p:txBody>
@@ -15784,8 +15146,8 @@
         </p:nvSpPr>
         <p:spPr>
           <a:xfrm>
-            <a:off x="822960" y="1828800"/>
-            <a:ext cx="10515600" cy="4206240"/>
+            <a:off x="548640" y="5623560"/>
+            <a:ext cx="11064240" cy="1051560"/>
           </a:xfrm>
           <a:prstGeom prst="rect">
             <a:avLst/>
@@ -15798,48 +15160,13 @@
           </a:bodyPr>
           <a:lstStyle/>
           <a:p>
-            <a:pPr>
-              <a:spcAft>
-                <a:spcPts val="1400"/>
-              </a:spcAft>
-            </a:pPr>
-            <a:r>
-              <a:rPr sz="2800">
-                <a:solidFill>
-                  <a:srgbClr val="01AEFD"/>
-                </a:solidFill>
-              </a:rPr>
-              <a:t>Press Run. You should see the title, an empty white chat box, and a text box with a blue Send button - all styled. Clicking Send does nothing yet; that is next week.</a:t>
-            </a:r>
-          </a:p>
-          <a:p>
-            <a:pPr>
-              <a:spcAft>
-                <a:spcPts val="1400"/>
-              </a:spcAft>
-            </a:pPr>
-            <a:r>
-              <a:rPr sz="2400">
-                <a:solidFill>
-                  <a:srgbClr val="1F2A37"/>
-                </a:solidFill>
-              </a:rPr>
-              <a:t>• Run it in the classroom, or press Show the output in the web deck.</a:t>
-            </a:r>
-          </a:p>
-          <a:p>
-            <a:pPr>
-              <a:spcAft>
-                <a:spcPts val="1400"/>
-              </a:spcAft>
-            </a:pPr>
-            <a:r>
-              <a:rPr sz="2400">
-                <a:solidFill>
-                  <a:srgbClr val="1F2A37"/>
-                </a:solidFill>
-              </a:rPr>
-              <a:t>• Everyone's screen should match this.</a:t>
+            <a:r>
+              <a:rPr sz="2000">
+                <a:solidFill>
+                  <a:srgbClr val="DCECEF"/>
+                </a:solidFill>
+              </a:rPr>
+              <a:t>Another comment, explaining the check below.</a:t>
             </a:r>
           </a:p>
         </p:txBody>
@@ -15853,6 +15180,2087 @@
 </file>
 
 <file path=ppt/slides/slide141.xml><?xml version="1.0" encoding="utf-8"?>
+<p:sld xmlns:a="http://schemas.openxmlformats.org/drawingml/2006/main" xmlns:p="http://schemas.openxmlformats.org/presentationml/2006/main" xmlns:r="http://schemas.openxmlformats.org/officeDocument/2006/relationships">
+  <p:cSld>
+    <p:bg>
+      <p:bgPr>
+        <a:solidFill>
+          <a:srgbClr val="102127"/>
+        </a:solidFill>
+        <a:effectLst/>
+      </p:bgPr>
+    </p:bg>
+    <p:spTree>
+      <p:nvGrpSpPr>
+        <p:cNvPr id="1" name=""/>
+        <p:cNvGrpSpPr/>
+        <p:nvPr/>
+      </p:nvGrpSpPr>
+      <p:grpSpPr/>
+      <p:sp>
+        <p:nvSpPr>
+          <p:cNvPr id="2" name="TextBox 1"/>
+          <p:cNvSpPr txBox="1"/>
+          <p:nvPr/>
+        </p:nvSpPr>
+        <p:spPr>
+          <a:xfrm>
+            <a:off x="502920" y="274320"/>
+            <a:ext cx="11155680" cy="548640"/>
+          </a:xfrm>
+          <a:prstGeom prst="rect">
+            <a:avLst/>
+          </a:prstGeom>
+          <a:noFill/>
+        </p:spPr>
+        <p:txBody>
+          <a:bodyPr wrap="none">
+            <a:spAutoFit/>
+          </a:bodyPr>
+          <a:lstStyle/>
+          <a:p>
+            <a:r>
+              <a:rPr sz="2200" b="1">
+                <a:solidFill>
+                  <a:srgbClr val="01AEFD"/>
+                </a:solidFill>
+              </a:rPr>
+              <a:t>Type this into script.js   -   line 5</a:t>
+            </a:r>
+          </a:p>
+        </p:txBody>
+      </p:sp>
+      <p:sp>
+        <p:nvSpPr>
+          <p:cNvPr id="3" name="TextBox 2"/>
+          <p:cNvSpPr txBox="1"/>
+          <p:nvPr/>
+        </p:nvSpPr>
+        <p:spPr>
+          <a:xfrm>
+            <a:off x="502920" y="960120"/>
+            <a:ext cx="11155680" cy="4297680"/>
+          </a:xfrm>
+          <a:prstGeom prst="rect">
+            <a:avLst/>
+          </a:prstGeom>
+          <a:noFill/>
+        </p:spPr>
+        <p:txBody>
+          <a:bodyPr wrap="none">
+            <a:spAutoFit/>
+          </a:bodyPr>
+          <a:lstStyle/>
+          <a:p>
+            <a:pPr>
+              <a:spcAft>
+                <a:spcPts val="0"/>
+              </a:spcAft>
+            </a:pPr>
+            <a:r>
+              <a:rPr sz="1800">
+                <a:solidFill>
+                  <a:srgbClr val="6D8C97"/>
+                </a:solidFill>
+                <a:latin typeface="Consolas"/>
+              </a:rPr>
+              <a:t>   1  </a:t>
+            </a:r>
+            <a:r>
+              <a:rPr sz="1800">
+                <a:solidFill>
+                  <a:srgbClr val="6D8C97"/>
+                </a:solidFill>
+                <a:latin typeface="Consolas"/>
+              </a:rPr>
+              <a:t>// Week 1: prove the JavaScript file is really running.</a:t>
+            </a:r>
+          </a:p>
+          <a:p>
+            <a:pPr>
+              <a:spcAft>
+                <a:spcPts val="0"/>
+              </a:spcAft>
+            </a:pPr>
+            <a:r>
+              <a:rPr sz="1800">
+                <a:solidFill>
+                  <a:srgbClr val="6D8C97"/>
+                </a:solidFill>
+                <a:latin typeface="Consolas"/>
+              </a:rPr>
+              <a:t>   2  </a:t>
+            </a:r>
+            <a:r>
+              <a:rPr sz="1800">
+                <a:solidFill>
+                  <a:srgbClr val="6D8C97"/>
+                </a:solidFill>
+                <a:latin typeface="Consolas"/>
+              </a:rPr>
+              <a:t>console.log('My AI companion is starting up.');</a:t>
+            </a:r>
+          </a:p>
+          <a:p>
+            <a:pPr>
+              <a:spcAft>
+                <a:spcPts val="0"/>
+              </a:spcAft>
+            </a:pPr>
+            <a:r>
+              <a:rPr sz="1800">
+                <a:solidFill>
+                  <a:srgbClr val="6D8C97"/>
+                </a:solidFill>
+                <a:latin typeface="Consolas"/>
+              </a:rPr>
+              <a:t>   3  </a:t>
+            </a:r>
+            <a:r>
+              <a:rPr sz="1800">
+                <a:solidFill>
+                  <a:srgbClr val="6D8C97"/>
+                </a:solidFill>
+                <a:latin typeface="Consolas"/>
+              </a:rPr>
+              <a:t> </a:t>
+            </a:r>
+          </a:p>
+          <a:p>
+            <a:pPr>
+              <a:spcAft>
+                <a:spcPts val="0"/>
+              </a:spcAft>
+            </a:pPr>
+            <a:r>
+              <a:rPr sz="1800">
+                <a:solidFill>
+                  <a:srgbClr val="6D8C97"/>
+                </a:solidFill>
+                <a:latin typeface="Consolas"/>
+              </a:rPr>
+              <a:t>   4  </a:t>
+            </a:r>
+            <a:r>
+              <a:rPr sz="1800">
+                <a:solidFill>
+                  <a:srgbClr val="6D8C97"/>
+                </a:solidFill>
+                <a:latin typeface="Consolas"/>
+              </a:rPr>
+              <a:t>// Can this script see the page yet? Down here, yes.</a:t>
+            </a:r>
+          </a:p>
+          <a:p>
+            <a:pPr>
+              <a:spcAft>
+                <a:spcPts val="0"/>
+              </a:spcAft>
+            </a:pPr>
+            <a:r>
+              <a:rPr sz="1800">
+                <a:solidFill>
+                  <a:srgbClr val="6D8C97"/>
+                </a:solidFill>
+                <a:latin typeface="Consolas"/>
+              </a:rPr>
+              <a:t>   5  </a:t>
+            </a:r>
+            <a:r>
+              <a:rPr sz="1800">
+                <a:solidFill>
+                  <a:srgbClr val="7FE0A0"/>
+                </a:solidFill>
+                <a:latin typeface="Consolas"/>
+              </a:rPr>
+              <a:t>// Move the &lt;script&gt; tag to the TOP of index.html and this prints false,</a:t>
+            </a:r>
+          </a:p>
+        </p:txBody>
+      </p:sp>
+      <p:sp>
+        <p:nvSpPr>
+          <p:cNvPr id="4" name="TextBox 3"/>
+          <p:cNvSpPr txBox="1"/>
+          <p:nvPr/>
+        </p:nvSpPr>
+        <p:spPr>
+          <a:xfrm>
+            <a:off x="548640" y="5623560"/>
+            <a:ext cx="11064240" cy="1051560"/>
+          </a:xfrm>
+          <a:prstGeom prst="rect">
+            <a:avLst/>
+          </a:prstGeom>
+          <a:noFill/>
+        </p:spPr>
+        <p:txBody>
+          <a:bodyPr wrap="square">
+            <a:spAutoFit/>
+          </a:bodyPr>
+          <a:lstStyle/>
+          <a:p>
+            <a:r>
+              <a:rPr sz="2000">
+                <a:solidFill>
+                  <a:srgbClr val="DCECEF"/>
+                </a:solidFill>
+              </a:rPr>
+              <a:t>A comment continued: what would happen if the script ran too early.</a:t>
+            </a:r>
+          </a:p>
+        </p:txBody>
+      </p:sp>
+    </p:spTree>
+  </p:cSld>
+  <p:clrMapOvr>
+    <a:masterClrMapping/>
+  </p:clrMapOvr>
+</p:sld>
+</file>
+
+<file path=ppt/slides/slide142.xml><?xml version="1.0" encoding="utf-8"?>
+<p:sld xmlns:a="http://schemas.openxmlformats.org/drawingml/2006/main" xmlns:p="http://schemas.openxmlformats.org/presentationml/2006/main" xmlns:r="http://schemas.openxmlformats.org/officeDocument/2006/relationships">
+  <p:cSld>
+    <p:bg>
+      <p:bgPr>
+        <a:solidFill>
+          <a:srgbClr val="102127"/>
+        </a:solidFill>
+        <a:effectLst/>
+      </p:bgPr>
+    </p:bg>
+    <p:spTree>
+      <p:nvGrpSpPr>
+        <p:cNvPr id="1" name=""/>
+        <p:cNvGrpSpPr/>
+        <p:nvPr/>
+      </p:nvGrpSpPr>
+      <p:grpSpPr/>
+      <p:sp>
+        <p:nvSpPr>
+          <p:cNvPr id="2" name="TextBox 1"/>
+          <p:cNvSpPr txBox="1"/>
+          <p:nvPr/>
+        </p:nvSpPr>
+        <p:spPr>
+          <a:xfrm>
+            <a:off x="502920" y="274320"/>
+            <a:ext cx="11155680" cy="548640"/>
+          </a:xfrm>
+          <a:prstGeom prst="rect">
+            <a:avLst/>
+          </a:prstGeom>
+          <a:noFill/>
+        </p:spPr>
+        <p:txBody>
+          <a:bodyPr wrap="none">
+            <a:spAutoFit/>
+          </a:bodyPr>
+          <a:lstStyle/>
+          <a:p>
+            <a:r>
+              <a:rPr sz="2200" b="1">
+                <a:solidFill>
+                  <a:srgbClr val="01AEFD"/>
+                </a:solidFill>
+              </a:rPr>
+              <a:t>Type this into script.js   -   line 6</a:t>
+            </a:r>
+          </a:p>
+        </p:txBody>
+      </p:sp>
+      <p:sp>
+        <p:nvSpPr>
+          <p:cNvPr id="3" name="TextBox 2"/>
+          <p:cNvSpPr txBox="1"/>
+          <p:nvPr/>
+        </p:nvSpPr>
+        <p:spPr>
+          <a:xfrm>
+            <a:off x="502920" y="960120"/>
+            <a:ext cx="11155680" cy="4297680"/>
+          </a:xfrm>
+          <a:prstGeom prst="rect">
+            <a:avLst/>
+          </a:prstGeom>
+          <a:noFill/>
+        </p:spPr>
+        <p:txBody>
+          <a:bodyPr wrap="none">
+            <a:spAutoFit/>
+          </a:bodyPr>
+          <a:lstStyle/>
+          <a:p>
+            <a:pPr>
+              <a:spcAft>
+                <a:spcPts val="0"/>
+              </a:spcAft>
+            </a:pPr>
+            <a:r>
+              <a:rPr sz="1800">
+                <a:solidFill>
+                  <a:srgbClr val="6D8C97"/>
+                </a:solidFill>
+                <a:latin typeface="Consolas"/>
+              </a:rPr>
+              <a:t>   1  </a:t>
+            </a:r>
+            <a:r>
+              <a:rPr sz="1800">
+                <a:solidFill>
+                  <a:srgbClr val="6D8C97"/>
+                </a:solidFill>
+                <a:latin typeface="Consolas"/>
+              </a:rPr>
+              <a:t>// Week 1: prove the JavaScript file is really running.</a:t>
+            </a:r>
+          </a:p>
+          <a:p>
+            <a:pPr>
+              <a:spcAft>
+                <a:spcPts val="0"/>
+              </a:spcAft>
+            </a:pPr>
+            <a:r>
+              <a:rPr sz="1800">
+                <a:solidFill>
+                  <a:srgbClr val="6D8C97"/>
+                </a:solidFill>
+                <a:latin typeface="Consolas"/>
+              </a:rPr>
+              <a:t>   2  </a:t>
+            </a:r>
+            <a:r>
+              <a:rPr sz="1800">
+                <a:solidFill>
+                  <a:srgbClr val="6D8C97"/>
+                </a:solidFill>
+                <a:latin typeface="Consolas"/>
+              </a:rPr>
+              <a:t>console.log('My AI companion is starting up.');</a:t>
+            </a:r>
+          </a:p>
+          <a:p>
+            <a:pPr>
+              <a:spcAft>
+                <a:spcPts val="0"/>
+              </a:spcAft>
+            </a:pPr>
+            <a:r>
+              <a:rPr sz="1800">
+                <a:solidFill>
+                  <a:srgbClr val="6D8C97"/>
+                </a:solidFill>
+                <a:latin typeface="Consolas"/>
+              </a:rPr>
+              <a:t>   3  </a:t>
+            </a:r>
+            <a:r>
+              <a:rPr sz="1800">
+                <a:solidFill>
+                  <a:srgbClr val="6D8C97"/>
+                </a:solidFill>
+                <a:latin typeface="Consolas"/>
+              </a:rPr>
+              <a:t> </a:t>
+            </a:r>
+          </a:p>
+          <a:p>
+            <a:pPr>
+              <a:spcAft>
+                <a:spcPts val="0"/>
+              </a:spcAft>
+            </a:pPr>
+            <a:r>
+              <a:rPr sz="1800">
+                <a:solidFill>
+                  <a:srgbClr val="6D8C97"/>
+                </a:solidFill>
+                <a:latin typeface="Consolas"/>
+              </a:rPr>
+              <a:t>   4  </a:t>
+            </a:r>
+            <a:r>
+              <a:rPr sz="1800">
+                <a:solidFill>
+                  <a:srgbClr val="6D8C97"/>
+                </a:solidFill>
+                <a:latin typeface="Consolas"/>
+              </a:rPr>
+              <a:t>// Can this script see the page yet? Down here, yes.</a:t>
+            </a:r>
+          </a:p>
+          <a:p>
+            <a:pPr>
+              <a:spcAft>
+                <a:spcPts val="0"/>
+              </a:spcAft>
+            </a:pPr>
+            <a:r>
+              <a:rPr sz="1800">
+                <a:solidFill>
+                  <a:srgbClr val="6D8C97"/>
+                </a:solidFill>
+                <a:latin typeface="Consolas"/>
+              </a:rPr>
+              <a:t>   5  </a:t>
+            </a:r>
+            <a:r>
+              <a:rPr sz="1800">
+                <a:solidFill>
+                  <a:srgbClr val="6D8C97"/>
+                </a:solidFill>
+                <a:latin typeface="Consolas"/>
+              </a:rPr>
+              <a:t>// Move the &lt;script&gt; tag to the TOP of index.html and this prints false,</a:t>
+            </a:r>
+          </a:p>
+          <a:p>
+            <a:pPr>
+              <a:spcAft>
+                <a:spcPts val="0"/>
+              </a:spcAft>
+            </a:pPr>
+            <a:r>
+              <a:rPr sz="1800">
+                <a:solidFill>
+                  <a:srgbClr val="6D8C97"/>
+                </a:solidFill>
+                <a:latin typeface="Consolas"/>
+              </a:rPr>
+              <a:t>   6  </a:t>
+            </a:r>
+            <a:r>
+              <a:rPr sz="1800">
+                <a:solidFill>
+                  <a:srgbClr val="7FE0A0"/>
+                </a:solidFill>
+                <a:latin typeface="Consolas"/>
+              </a:rPr>
+              <a:t>// because the boxes have not been made yet. That is why it goes last.</a:t>
+            </a:r>
+          </a:p>
+        </p:txBody>
+      </p:sp>
+      <p:sp>
+        <p:nvSpPr>
+          <p:cNvPr id="4" name="TextBox 3"/>
+          <p:cNvSpPr txBox="1"/>
+          <p:nvPr/>
+        </p:nvSpPr>
+        <p:spPr>
+          <a:xfrm>
+            <a:off x="548640" y="5623560"/>
+            <a:ext cx="11064240" cy="1051560"/>
+          </a:xfrm>
+          <a:prstGeom prst="rect">
+            <a:avLst/>
+          </a:prstGeom>
+          <a:noFill/>
+        </p:spPr>
+        <p:txBody>
+          <a:bodyPr wrap="square">
+            <a:spAutoFit/>
+          </a:bodyPr>
+          <a:lstStyle/>
+          <a:p>
+            <a:r>
+              <a:rPr sz="2000">
+                <a:solidFill>
+                  <a:srgbClr val="DCECEF"/>
+                </a:solidFill>
+              </a:rPr>
+              <a:t>The comment's last line: which is why the &lt;script&gt; tag goes at the bottom.</a:t>
+            </a:r>
+          </a:p>
+        </p:txBody>
+      </p:sp>
+    </p:spTree>
+  </p:cSld>
+  <p:clrMapOvr>
+    <a:masterClrMapping/>
+  </p:clrMapOvr>
+</p:sld>
+</file>
+
+<file path=ppt/slides/slide143.xml><?xml version="1.0" encoding="utf-8"?>
+<p:sld xmlns:a="http://schemas.openxmlformats.org/drawingml/2006/main" xmlns:p="http://schemas.openxmlformats.org/presentationml/2006/main" xmlns:r="http://schemas.openxmlformats.org/officeDocument/2006/relationships">
+  <p:cSld>
+    <p:spTree>
+      <p:nvGrpSpPr>
+        <p:cNvPr id="1" name=""/>
+        <p:cNvGrpSpPr/>
+        <p:nvPr/>
+      </p:nvGrpSpPr>
+      <p:grpSpPr/>
+      <p:sp>
+        <p:nvSpPr>
+          <p:cNvPr id="2" name="Title 1"/>
+          <p:cNvSpPr>
+            <a:spLocks noGrp="1"/>
+          </p:cNvSpPr>
+          <p:nvPr>
+            <p:ph type="title"/>
+          </p:nvPr>
+        </p:nvSpPr>
+        <p:spPr/>
+        <p:txBody>
+          <a:bodyPr/>
+          <a:lstStyle/>
+          <a:p>
+            <a:r>
+              <a:rPr sz="3800" b="1">
+                <a:solidFill>
+                  <a:srgbClr val="1F2A37"/>
+                </a:solidFill>
+              </a:rPr>
+              <a:t>document.getElementById()</a:t>
+            </a:r>
+          </a:p>
+        </p:txBody>
+      </p:sp>
+      <p:sp>
+        <p:nvSpPr>
+          <p:cNvPr id="3" name="TextBox 2"/>
+          <p:cNvSpPr txBox="1"/>
+          <p:nvPr/>
+        </p:nvSpPr>
+        <p:spPr>
+          <a:xfrm>
+            <a:off x="868680" y="502920"/>
+            <a:ext cx="5486400" cy="457200"/>
+          </a:xfrm>
+          <a:prstGeom prst="rect">
+            <a:avLst/>
+          </a:prstGeom>
+          <a:noFill/>
+        </p:spPr>
+        <p:txBody>
+          <a:bodyPr wrap="none">
+            <a:spAutoFit/>
+          </a:bodyPr>
+          <a:lstStyle/>
+          <a:p>
+            <a:r>
+              <a:rPr sz="1500" b="1">
+                <a:solidFill>
+                  <a:srgbClr val="01AEFD"/>
+                </a:solidFill>
+              </a:rPr>
+              <a:t>JAVASCRIPT</a:t>
+            </a:r>
+          </a:p>
+        </p:txBody>
+      </p:sp>
+      <p:sp>
+        <p:nvSpPr>
+          <p:cNvPr id="4" name="TextBox 3"/>
+          <p:cNvSpPr txBox="1"/>
+          <p:nvPr/>
+        </p:nvSpPr>
+        <p:spPr>
+          <a:xfrm>
+            <a:off x="822960" y="1828800"/>
+            <a:ext cx="10515600" cy="4206240"/>
+          </a:xfrm>
+          <a:prstGeom prst="rect">
+            <a:avLst/>
+          </a:prstGeom>
+          <a:noFill/>
+        </p:spPr>
+        <p:txBody>
+          <a:bodyPr wrap="square">
+            <a:spAutoFit/>
+          </a:bodyPr>
+          <a:lstStyle/>
+          <a:p>
+            <a:pPr>
+              <a:spcAft>
+                <a:spcPts val="1400"/>
+              </a:spcAft>
+            </a:pPr>
+            <a:r>
+              <a:rPr sz="2400">
+                <a:solidFill>
+                  <a:srgbClr val="1F2A37"/>
+                </a:solidFill>
+              </a:rPr>
+              <a:t>• A built-in that finds a box on the page by its id.</a:t>
+            </a:r>
+          </a:p>
+          <a:p>
+            <a:pPr>
+              <a:spcAft>
+                <a:spcPts val="1400"/>
+              </a:spcAft>
+            </a:pPr>
+            <a:r>
+              <a:rPr sz="2400">
+                <a:solidFill>
+                  <a:srgbClr val="1F2A37"/>
+                </a:solidFill>
+              </a:rPr>
+              <a:t>• Hands you the box, or null if it is not there.</a:t>
+            </a:r>
+          </a:p>
+        </p:txBody>
+      </p:sp>
+    </p:spTree>
+  </p:cSld>
+  <p:clrMapOvr>
+    <a:masterClrMapping/>
+  </p:clrMapOvr>
+</p:sld>
+</file>
+
+<file path=ppt/slides/slide144.xml><?xml version="1.0" encoding="utf-8"?>
+<p:sld xmlns:a="http://schemas.openxmlformats.org/drawingml/2006/main" xmlns:p="http://schemas.openxmlformats.org/presentationml/2006/main" xmlns:r="http://schemas.openxmlformats.org/officeDocument/2006/relationships">
+  <p:cSld>
+    <p:bg>
+      <p:bgPr>
+        <a:solidFill>
+          <a:srgbClr val="F4F8FB"/>
+        </a:solidFill>
+        <a:effectLst/>
+      </p:bgPr>
+    </p:bg>
+    <p:spTree>
+      <p:nvGrpSpPr>
+        <p:cNvPr id="1" name=""/>
+        <p:cNvGrpSpPr/>
+        <p:nvPr/>
+      </p:nvGrpSpPr>
+      <p:grpSpPr/>
+      <p:sp>
+        <p:nvSpPr>
+          <p:cNvPr id="2" name="TextBox 1"/>
+          <p:cNvSpPr txBox="1"/>
+          <p:nvPr/>
+        </p:nvSpPr>
+        <p:spPr>
+          <a:xfrm>
+            <a:off x="822960" y="365760"/>
+            <a:ext cx="7315200" cy="365760"/>
+          </a:xfrm>
+          <a:prstGeom prst="rect">
+            <a:avLst/>
+          </a:prstGeom>
+          <a:noFill/>
+        </p:spPr>
+        <p:txBody>
+          <a:bodyPr wrap="none">
+            <a:spAutoFit/>
+          </a:bodyPr>
+          <a:lstStyle/>
+          <a:p>
+            <a:r>
+              <a:rPr sz="1400" b="1">
+                <a:solidFill>
+                  <a:srgbClr val="01AEFD"/>
+                </a:solidFill>
+              </a:rPr>
+              <a:t>ON THE PAGE</a:t>
+            </a:r>
+          </a:p>
+        </p:txBody>
+      </p:sp>
+      <p:sp>
+        <p:nvSpPr>
+          <p:cNvPr id="3" name="TextBox 2"/>
+          <p:cNvSpPr txBox="1"/>
+          <p:nvPr/>
+        </p:nvSpPr>
+        <p:spPr>
+          <a:xfrm>
+            <a:off x="822960" y="658368"/>
+            <a:ext cx="10515600" cy="731520"/>
+          </a:xfrm>
+          <a:prstGeom prst="rect">
+            <a:avLst/>
+          </a:prstGeom>
+          <a:noFill/>
+        </p:spPr>
+        <p:txBody>
+          <a:bodyPr wrap="none">
+            <a:spAutoFit/>
+          </a:bodyPr>
+          <a:lstStyle/>
+          <a:p>
+            <a:r>
+              <a:rPr sz="3200" b="1">
+                <a:solidFill>
+                  <a:srgbClr val="1F2A37"/>
+                </a:solidFill>
+              </a:rPr>
+              <a:t>document.getElementById()</a:t>
+            </a:r>
+          </a:p>
+        </p:txBody>
+      </p:sp>
+      <p:sp>
+        <p:nvSpPr>
+          <p:cNvPr id="4" name="Rounded Rectangle 3"/>
+          <p:cNvSpPr/>
+          <p:nvPr/>
+        </p:nvSpPr>
+        <p:spPr>
+          <a:xfrm>
+            <a:off x="3454237" y="1641896"/>
+            <a:ext cx="5249387" cy="3918021"/>
+          </a:xfrm>
+          <a:prstGeom prst="roundRect">
+            <a:avLst/>
+          </a:prstGeom>
+          <a:solidFill>
+            <a:srgbClr val="0F1F27"/>
+          </a:solidFill>
+          <a:ln>
+            <a:noFill/>
+          </a:ln>
+          <a:effectLst/>
+        </p:spPr>
+        <p:style>
+          <a:lnRef idx="1">
+            <a:schemeClr val="accent1"/>
+          </a:lnRef>
+          <a:fillRef idx="3">
+            <a:schemeClr val="accent1"/>
+          </a:fillRef>
+          <a:effectRef idx="2">
+            <a:schemeClr val="accent1"/>
+          </a:effectRef>
+          <a:fontRef idx="minor">
+            <a:schemeClr val="lt1"/>
+          </a:fontRef>
+        </p:style>
+        <p:txBody>
+          <a:bodyPr rtlCol="0" anchor="ctr"/>
+          <a:lstStyle/>
+          <a:p>
+            <a:pPr algn="ctr"/>
+          </a:p>
+        </p:txBody>
+      </p:sp>
+      <p:sp>
+        <p:nvSpPr>
+          <p:cNvPr id="5" name="Rounded Rectangle 4"/>
+          <p:cNvSpPr/>
+          <p:nvPr/>
+        </p:nvSpPr>
+        <p:spPr>
+          <a:xfrm>
+            <a:off x="3606393" y="2022287"/>
+            <a:ext cx="4945075" cy="437448"/>
+          </a:xfrm>
+          <a:prstGeom prst="roundRect">
+            <a:avLst/>
+          </a:prstGeom>
+          <a:solidFill>
+            <a:srgbClr val="16303A"/>
+          </a:solidFill>
+          <a:ln>
+            <a:noFill/>
+          </a:ln>
+          <a:effectLst/>
+        </p:spPr>
+        <p:style>
+          <a:lnRef idx="1">
+            <a:schemeClr val="accent1"/>
+          </a:lnRef>
+          <a:fillRef idx="3">
+            <a:schemeClr val="accent1"/>
+          </a:fillRef>
+          <a:effectRef idx="2">
+            <a:schemeClr val="accent1"/>
+          </a:effectRef>
+          <a:fontRef idx="minor">
+            <a:schemeClr val="lt1"/>
+          </a:fontRef>
+        </p:style>
+        <p:txBody>
+          <a:bodyPr rtlCol="0" anchor="ctr"/>
+          <a:lstStyle/>
+          <a:p>
+            <a:pPr algn="ctr"/>
+          </a:p>
+        </p:txBody>
+      </p:sp>
+      <p:sp>
+        <p:nvSpPr>
+          <p:cNvPr id="6" name="Rounded Rectangle 5"/>
+          <p:cNvSpPr/>
+          <p:nvPr/>
+        </p:nvSpPr>
+        <p:spPr>
+          <a:xfrm>
+            <a:off x="3720510" y="2155423"/>
+            <a:ext cx="1426463" cy="190195"/>
+          </a:xfrm>
+          <a:prstGeom prst="roundRect">
+            <a:avLst/>
+          </a:prstGeom>
+          <a:solidFill>
+            <a:srgbClr val="4A6B78"/>
+          </a:solidFill>
+          <a:ln>
+            <a:noFill/>
+          </a:ln>
+          <a:effectLst/>
+        </p:spPr>
+        <p:style>
+          <a:lnRef idx="1">
+            <a:schemeClr val="accent1"/>
+          </a:lnRef>
+          <a:fillRef idx="3">
+            <a:schemeClr val="accent1"/>
+          </a:fillRef>
+          <a:effectRef idx="2">
+            <a:schemeClr val="accent1"/>
+          </a:effectRef>
+          <a:fontRef idx="minor">
+            <a:schemeClr val="lt1"/>
+          </a:fontRef>
+        </p:style>
+        <p:txBody>
+          <a:bodyPr rtlCol="0" anchor="ctr"/>
+          <a:lstStyle/>
+          <a:p>
+            <a:pPr algn="ctr"/>
+          </a:p>
+        </p:txBody>
+      </p:sp>
+      <p:sp>
+        <p:nvSpPr>
+          <p:cNvPr id="7" name="Rounded Rectangle 6"/>
+          <p:cNvSpPr/>
+          <p:nvPr/>
+        </p:nvSpPr>
+        <p:spPr>
+          <a:xfrm>
+            <a:off x="3606393" y="2554833"/>
+            <a:ext cx="4945075" cy="1806854"/>
+          </a:xfrm>
+          <a:prstGeom prst="roundRect">
+            <a:avLst/>
+          </a:prstGeom>
+          <a:solidFill>
+            <a:srgbClr val="0B171D"/>
+          </a:solidFill>
+          <a:ln>
+            <a:noFill/>
+          </a:ln>
+          <a:effectLst/>
+        </p:spPr>
+        <p:style>
+          <a:lnRef idx="1">
+            <a:schemeClr val="accent1"/>
+          </a:lnRef>
+          <a:fillRef idx="3">
+            <a:schemeClr val="accent1"/>
+          </a:fillRef>
+          <a:effectRef idx="2">
+            <a:schemeClr val="accent1"/>
+          </a:effectRef>
+          <a:fontRef idx="minor">
+            <a:schemeClr val="lt1"/>
+          </a:fontRef>
+        </p:style>
+        <p:txBody>
+          <a:bodyPr rtlCol="0" anchor="ctr"/>
+          <a:lstStyle/>
+          <a:p>
+            <a:pPr algn="ctr"/>
+          </a:p>
+        </p:txBody>
+      </p:sp>
+      <p:sp>
+        <p:nvSpPr>
+          <p:cNvPr id="8" name="Rounded Rectangle 7"/>
+          <p:cNvSpPr/>
+          <p:nvPr/>
+        </p:nvSpPr>
+        <p:spPr>
+          <a:xfrm>
+            <a:off x="3720510" y="2668950"/>
+            <a:ext cx="2852927" cy="399409"/>
+          </a:xfrm>
+          <a:prstGeom prst="roundRect">
+            <a:avLst/>
+          </a:prstGeom>
+          <a:solidFill>
+            <a:srgbClr val="1B3540"/>
+          </a:solidFill>
+          <a:ln>
+            <a:noFill/>
+          </a:ln>
+          <a:effectLst/>
+        </p:spPr>
+        <p:style>
+          <a:lnRef idx="1">
+            <a:schemeClr val="accent1"/>
+          </a:lnRef>
+          <a:fillRef idx="3">
+            <a:schemeClr val="accent1"/>
+          </a:fillRef>
+          <a:effectRef idx="2">
+            <a:schemeClr val="accent1"/>
+          </a:effectRef>
+          <a:fontRef idx="minor">
+            <a:schemeClr val="lt1"/>
+          </a:fontRef>
+        </p:style>
+        <p:txBody>
+          <a:bodyPr rtlCol="0" anchor="ctr"/>
+          <a:lstStyle/>
+          <a:p>
+            <a:pPr algn="ctr"/>
+          </a:p>
+        </p:txBody>
+      </p:sp>
+      <p:sp>
+        <p:nvSpPr>
+          <p:cNvPr id="9" name="Rounded Rectangle 8"/>
+          <p:cNvSpPr/>
+          <p:nvPr/>
+        </p:nvSpPr>
+        <p:spPr>
+          <a:xfrm>
+            <a:off x="5584423" y="3182477"/>
+            <a:ext cx="2852927" cy="399409"/>
+          </a:xfrm>
+          <a:prstGeom prst="roundRect">
+            <a:avLst/>
+          </a:prstGeom>
+          <a:solidFill>
+            <a:srgbClr val="123A32"/>
+          </a:solidFill>
+          <a:ln>
+            <a:noFill/>
+          </a:ln>
+          <a:effectLst/>
+        </p:spPr>
+        <p:style>
+          <a:lnRef idx="1">
+            <a:schemeClr val="accent1"/>
+          </a:lnRef>
+          <a:fillRef idx="3">
+            <a:schemeClr val="accent1"/>
+          </a:fillRef>
+          <a:effectRef idx="2">
+            <a:schemeClr val="accent1"/>
+          </a:effectRef>
+          <a:fontRef idx="minor">
+            <a:schemeClr val="lt1"/>
+          </a:fontRef>
+        </p:style>
+        <p:txBody>
+          <a:bodyPr rtlCol="0" anchor="ctr"/>
+          <a:lstStyle/>
+          <a:p>
+            <a:pPr algn="ctr"/>
+          </a:p>
+        </p:txBody>
+      </p:sp>
+      <p:sp>
+        <p:nvSpPr>
+          <p:cNvPr id="10" name="Rounded Rectangle 9"/>
+          <p:cNvSpPr/>
+          <p:nvPr/>
+        </p:nvSpPr>
+        <p:spPr>
+          <a:xfrm>
+            <a:off x="3720510" y="3696004"/>
+            <a:ext cx="3138220" cy="399409"/>
+          </a:xfrm>
+          <a:prstGeom prst="roundRect">
+            <a:avLst/>
+          </a:prstGeom>
+          <a:solidFill>
+            <a:srgbClr val="1B3540"/>
+          </a:solidFill>
+          <a:ln>
+            <a:noFill/>
+          </a:ln>
+          <a:effectLst/>
+        </p:spPr>
+        <p:style>
+          <a:lnRef idx="1">
+            <a:schemeClr val="accent1"/>
+          </a:lnRef>
+          <a:fillRef idx="3">
+            <a:schemeClr val="accent1"/>
+          </a:fillRef>
+          <a:effectRef idx="2">
+            <a:schemeClr val="accent1"/>
+          </a:effectRef>
+          <a:fontRef idx="minor">
+            <a:schemeClr val="lt1"/>
+          </a:fontRef>
+        </p:style>
+        <p:txBody>
+          <a:bodyPr rtlCol="0" anchor="ctr"/>
+          <a:lstStyle/>
+          <a:p>
+            <a:pPr algn="ctr"/>
+          </a:p>
+        </p:txBody>
+      </p:sp>
+      <p:sp>
+        <p:nvSpPr>
+          <p:cNvPr id="11" name="Rounded Rectangle 10"/>
+          <p:cNvSpPr/>
+          <p:nvPr/>
+        </p:nvSpPr>
+        <p:spPr>
+          <a:xfrm>
+            <a:off x="3701491" y="4856195"/>
+            <a:ext cx="3899001" cy="323331"/>
+          </a:xfrm>
+          <a:prstGeom prst="roundRect">
+            <a:avLst/>
+          </a:prstGeom>
+          <a:solidFill>
+            <a:srgbClr val="16303A"/>
+          </a:solidFill>
+          <a:ln>
+            <a:noFill/>
+          </a:ln>
+          <a:effectLst/>
+        </p:spPr>
+        <p:style>
+          <a:lnRef idx="1">
+            <a:schemeClr val="accent1"/>
+          </a:lnRef>
+          <a:fillRef idx="3">
+            <a:schemeClr val="accent1"/>
+          </a:fillRef>
+          <a:effectRef idx="2">
+            <a:schemeClr val="accent1"/>
+          </a:effectRef>
+          <a:fontRef idx="minor">
+            <a:schemeClr val="lt1"/>
+          </a:fontRef>
+        </p:style>
+        <p:txBody>
+          <a:bodyPr rtlCol="0" anchor="ctr"/>
+          <a:lstStyle/>
+          <a:p>
+            <a:pPr algn="ctr"/>
+          </a:p>
+        </p:txBody>
+      </p:sp>
+      <p:sp>
+        <p:nvSpPr>
+          <p:cNvPr id="12" name="Rounded Rectangle 11"/>
+          <p:cNvSpPr/>
+          <p:nvPr/>
+        </p:nvSpPr>
+        <p:spPr>
+          <a:xfrm>
+            <a:off x="7695590" y="4856195"/>
+            <a:ext cx="779800" cy="323331"/>
+          </a:xfrm>
+          <a:prstGeom prst="roundRect">
+            <a:avLst/>
+          </a:prstGeom>
+          <a:solidFill>
+            <a:srgbClr val="01AEFD"/>
+          </a:solidFill>
+          <a:ln>
+            <a:noFill/>
+          </a:ln>
+          <a:effectLst/>
+        </p:spPr>
+        <p:style>
+          <a:lnRef idx="1">
+            <a:schemeClr val="accent1"/>
+          </a:lnRef>
+          <a:fillRef idx="3">
+            <a:schemeClr val="accent1"/>
+          </a:fillRef>
+          <a:effectRef idx="2">
+            <a:schemeClr val="accent1"/>
+          </a:effectRef>
+          <a:fontRef idx="minor">
+            <a:schemeClr val="lt1"/>
+          </a:fontRef>
+        </p:style>
+        <p:txBody>
+          <a:bodyPr rtlCol="0" anchor="ctr"/>
+          <a:lstStyle/>
+          <a:p>
+            <a:pPr algn="ctr"/>
+          </a:p>
+        </p:txBody>
+      </p:sp>
+      <p:sp>
+        <p:nvSpPr>
+          <p:cNvPr id="13" name="Rounded Rectangle 12"/>
+          <p:cNvSpPr/>
+          <p:nvPr/>
+        </p:nvSpPr>
+        <p:spPr>
+          <a:xfrm>
+            <a:off x="3720510" y="5407761"/>
+            <a:ext cx="1616659" cy="95097"/>
+          </a:xfrm>
+          <a:prstGeom prst="roundRect">
+            <a:avLst/>
+          </a:prstGeom>
+          <a:solidFill>
+            <a:srgbClr val="2A4550"/>
+          </a:solidFill>
+          <a:ln>
+            <a:noFill/>
+          </a:ln>
+          <a:effectLst/>
+        </p:spPr>
+        <p:style>
+          <a:lnRef idx="1">
+            <a:schemeClr val="accent1"/>
+          </a:lnRef>
+          <a:fillRef idx="3">
+            <a:schemeClr val="accent1"/>
+          </a:fillRef>
+          <a:effectRef idx="2">
+            <a:schemeClr val="accent1"/>
+          </a:effectRef>
+          <a:fontRef idx="minor">
+            <a:schemeClr val="lt1"/>
+          </a:fontRef>
+        </p:style>
+        <p:txBody>
+          <a:bodyPr rtlCol="0" anchor="ctr"/>
+          <a:lstStyle/>
+          <a:p>
+            <a:pPr algn="ctr"/>
+          </a:p>
+        </p:txBody>
+      </p:sp>
+      <p:sp>
+        <p:nvSpPr>
+          <p:cNvPr id="14" name="Rounded Rectangle 13"/>
+          <p:cNvSpPr/>
+          <p:nvPr/>
+        </p:nvSpPr>
+        <p:spPr>
+          <a:xfrm>
+            <a:off x="3663452" y="4818156"/>
+            <a:ext cx="3975079" cy="399409"/>
+          </a:xfrm>
+          <a:prstGeom prst="roundRect">
+            <a:avLst/>
+          </a:prstGeom>
+          <a:noFill/>
+          <a:ln w="44450">
+            <a:solidFill>
+              <a:srgbClr val="FFD633"/>
+            </a:solidFill>
+          </a:ln>
+          <a:effectLst/>
+        </p:spPr>
+        <p:style>
+          <a:lnRef idx="1">
+            <a:schemeClr val="accent1"/>
+          </a:lnRef>
+          <a:fillRef idx="3">
+            <a:schemeClr val="accent1"/>
+          </a:fillRef>
+          <a:effectRef idx="2">
+            <a:schemeClr val="accent1"/>
+          </a:effectRef>
+          <a:fontRef idx="minor">
+            <a:schemeClr val="lt1"/>
+          </a:fontRef>
+        </p:style>
+        <p:txBody>
+          <a:bodyPr rtlCol="0" anchor="ctr"/>
+          <a:lstStyle/>
+          <a:p>
+            <a:pPr algn="ctr"/>
+          </a:p>
+        </p:txBody>
+      </p:sp>
+      <p:sp>
+        <p:nvSpPr>
+          <p:cNvPr id="15" name="TextBox 14"/>
+          <p:cNvSpPr txBox="1"/>
+          <p:nvPr/>
+        </p:nvSpPr>
+        <p:spPr>
+          <a:xfrm>
+            <a:off x="822960" y="6172200"/>
+            <a:ext cx="10515600" cy="548640"/>
+          </a:xfrm>
+          <a:prstGeom prst="rect">
+            <a:avLst/>
+          </a:prstGeom>
+          <a:noFill/>
+        </p:spPr>
+        <p:txBody>
+          <a:bodyPr wrap="square">
+            <a:spAutoFit/>
+          </a:bodyPr>
+          <a:lstStyle/>
+          <a:p>
+            <a:r>
+              <a:rPr sz="2000">
+                <a:solidFill>
+                  <a:srgbClr val="0A6299"/>
+                </a:solidFill>
+              </a:rPr>
+              <a:t>getElementById grabs an element like this box.</a:t>
+            </a:r>
+          </a:p>
+        </p:txBody>
+      </p:sp>
+    </p:spTree>
+  </p:cSld>
+  <p:clrMapOvr>
+    <a:masterClrMapping/>
+  </p:clrMapOvr>
+</p:sld>
+</file>
+
+<file path=ppt/slides/slide145.xml><?xml version="1.0" encoding="utf-8"?>
+<p:sld xmlns:a="http://schemas.openxmlformats.org/drawingml/2006/main" xmlns:p="http://schemas.openxmlformats.org/presentationml/2006/main" xmlns:r="http://schemas.openxmlformats.org/officeDocument/2006/relationships">
+  <p:cSld>
+    <p:bg>
+      <p:bgPr>
+        <a:solidFill>
+          <a:srgbClr val="102127"/>
+        </a:solidFill>
+        <a:effectLst/>
+      </p:bgPr>
+    </p:bg>
+    <p:spTree>
+      <p:nvGrpSpPr>
+        <p:cNvPr id="1" name=""/>
+        <p:cNvGrpSpPr/>
+        <p:nvPr/>
+      </p:nvGrpSpPr>
+      <p:grpSpPr/>
+      <p:sp>
+        <p:nvSpPr>
+          <p:cNvPr id="2" name="TextBox 1"/>
+          <p:cNvSpPr txBox="1"/>
+          <p:nvPr/>
+        </p:nvSpPr>
+        <p:spPr>
+          <a:xfrm>
+            <a:off x="502920" y="274320"/>
+            <a:ext cx="11155680" cy="548640"/>
+          </a:xfrm>
+          <a:prstGeom prst="rect">
+            <a:avLst/>
+          </a:prstGeom>
+          <a:noFill/>
+        </p:spPr>
+        <p:txBody>
+          <a:bodyPr wrap="none">
+            <a:spAutoFit/>
+          </a:bodyPr>
+          <a:lstStyle/>
+          <a:p>
+            <a:r>
+              <a:rPr sz="2200" b="1">
+                <a:solidFill>
+                  <a:srgbClr val="01AEFD"/>
+                </a:solidFill>
+              </a:rPr>
+              <a:t>Type this into script.js   -   line 7</a:t>
+            </a:r>
+          </a:p>
+        </p:txBody>
+      </p:sp>
+      <p:sp>
+        <p:nvSpPr>
+          <p:cNvPr id="3" name="TextBox 2"/>
+          <p:cNvSpPr txBox="1"/>
+          <p:nvPr/>
+        </p:nvSpPr>
+        <p:spPr>
+          <a:xfrm>
+            <a:off x="502920" y="960120"/>
+            <a:ext cx="11155680" cy="4297680"/>
+          </a:xfrm>
+          <a:prstGeom prst="rect">
+            <a:avLst/>
+          </a:prstGeom>
+          <a:noFill/>
+        </p:spPr>
+        <p:txBody>
+          <a:bodyPr wrap="none">
+            <a:spAutoFit/>
+          </a:bodyPr>
+          <a:lstStyle/>
+          <a:p>
+            <a:pPr>
+              <a:spcAft>
+                <a:spcPts val="0"/>
+              </a:spcAft>
+            </a:pPr>
+            <a:r>
+              <a:rPr sz="1800">
+                <a:solidFill>
+                  <a:srgbClr val="6D8C97"/>
+                </a:solidFill>
+                <a:latin typeface="Consolas"/>
+              </a:rPr>
+              <a:t>   1  </a:t>
+            </a:r>
+            <a:r>
+              <a:rPr sz="1800">
+                <a:solidFill>
+                  <a:srgbClr val="6D8C97"/>
+                </a:solidFill>
+                <a:latin typeface="Consolas"/>
+              </a:rPr>
+              <a:t>// Week 1: prove the JavaScript file is really running.</a:t>
+            </a:r>
+          </a:p>
+          <a:p>
+            <a:pPr>
+              <a:spcAft>
+                <a:spcPts val="0"/>
+              </a:spcAft>
+            </a:pPr>
+            <a:r>
+              <a:rPr sz="1800">
+                <a:solidFill>
+                  <a:srgbClr val="6D8C97"/>
+                </a:solidFill>
+                <a:latin typeface="Consolas"/>
+              </a:rPr>
+              <a:t>   2  </a:t>
+            </a:r>
+            <a:r>
+              <a:rPr sz="1800">
+                <a:solidFill>
+                  <a:srgbClr val="6D8C97"/>
+                </a:solidFill>
+                <a:latin typeface="Consolas"/>
+              </a:rPr>
+              <a:t>console.log('My AI companion is starting up.');</a:t>
+            </a:r>
+          </a:p>
+          <a:p>
+            <a:pPr>
+              <a:spcAft>
+                <a:spcPts val="0"/>
+              </a:spcAft>
+            </a:pPr>
+            <a:r>
+              <a:rPr sz="1800">
+                <a:solidFill>
+                  <a:srgbClr val="6D8C97"/>
+                </a:solidFill>
+                <a:latin typeface="Consolas"/>
+              </a:rPr>
+              <a:t>   3  </a:t>
+            </a:r>
+            <a:r>
+              <a:rPr sz="1800">
+                <a:solidFill>
+                  <a:srgbClr val="6D8C97"/>
+                </a:solidFill>
+                <a:latin typeface="Consolas"/>
+              </a:rPr>
+              <a:t> </a:t>
+            </a:r>
+          </a:p>
+          <a:p>
+            <a:pPr>
+              <a:spcAft>
+                <a:spcPts val="0"/>
+              </a:spcAft>
+            </a:pPr>
+            <a:r>
+              <a:rPr sz="1800">
+                <a:solidFill>
+                  <a:srgbClr val="6D8C97"/>
+                </a:solidFill>
+                <a:latin typeface="Consolas"/>
+              </a:rPr>
+              <a:t>   4  </a:t>
+            </a:r>
+            <a:r>
+              <a:rPr sz="1800">
+                <a:solidFill>
+                  <a:srgbClr val="6D8C97"/>
+                </a:solidFill>
+                <a:latin typeface="Consolas"/>
+              </a:rPr>
+              <a:t>// Can this script see the page yet? Down here, yes.</a:t>
+            </a:r>
+          </a:p>
+          <a:p>
+            <a:pPr>
+              <a:spcAft>
+                <a:spcPts val="0"/>
+              </a:spcAft>
+            </a:pPr>
+            <a:r>
+              <a:rPr sz="1800">
+                <a:solidFill>
+                  <a:srgbClr val="6D8C97"/>
+                </a:solidFill>
+                <a:latin typeface="Consolas"/>
+              </a:rPr>
+              <a:t>   5  </a:t>
+            </a:r>
+            <a:r>
+              <a:rPr sz="1800">
+                <a:solidFill>
+                  <a:srgbClr val="6D8C97"/>
+                </a:solidFill>
+                <a:latin typeface="Consolas"/>
+              </a:rPr>
+              <a:t>// Move the &lt;script&gt; tag to the TOP of index.html and this prints false,</a:t>
+            </a:r>
+          </a:p>
+          <a:p>
+            <a:pPr>
+              <a:spcAft>
+                <a:spcPts val="0"/>
+              </a:spcAft>
+            </a:pPr>
+            <a:r>
+              <a:rPr sz="1800">
+                <a:solidFill>
+                  <a:srgbClr val="6D8C97"/>
+                </a:solidFill>
+                <a:latin typeface="Consolas"/>
+              </a:rPr>
+              <a:t>   6  </a:t>
+            </a:r>
+            <a:r>
+              <a:rPr sz="1800">
+                <a:solidFill>
+                  <a:srgbClr val="6D8C97"/>
+                </a:solidFill>
+                <a:latin typeface="Consolas"/>
+              </a:rPr>
+              <a:t>// because the boxes have not been made yet. That is why it goes last.</a:t>
+            </a:r>
+          </a:p>
+          <a:p>
+            <a:pPr>
+              <a:spcAft>
+                <a:spcPts val="0"/>
+              </a:spcAft>
+            </a:pPr>
+            <a:r>
+              <a:rPr sz="1800">
+                <a:solidFill>
+                  <a:srgbClr val="6D8C97"/>
+                </a:solidFill>
+                <a:latin typeface="Consolas"/>
+              </a:rPr>
+              <a:t>   7  </a:t>
+            </a:r>
+            <a:r>
+              <a:rPr sz="1800">
+                <a:solidFill>
+                  <a:srgbClr val="7FE0A0"/>
+                </a:solidFill>
+                <a:latin typeface="Consolas"/>
+              </a:rPr>
+              <a:t>console.log('Can I see the chat box?', document.getElementById('chat') !== null);</a:t>
+            </a:r>
+          </a:p>
+        </p:txBody>
+      </p:sp>
+      <p:sp>
+        <p:nvSpPr>
+          <p:cNvPr id="4" name="TextBox 3"/>
+          <p:cNvSpPr txBox="1"/>
+          <p:nvPr/>
+        </p:nvSpPr>
+        <p:spPr>
+          <a:xfrm>
+            <a:off x="548640" y="5623560"/>
+            <a:ext cx="11064240" cy="1051560"/>
+          </a:xfrm>
+          <a:prstGeom prst="rect">
+            <a:avLst/>
+          </a:prstGeom>
+          <a:noFill/>
+        </p:spPr>
+        <p:txBody>
+          <a:bodyPr wrap="square">
+            <a:spAutoFit/>
+          </a:bodyPr>
+          <a:lstStyle/>
+          <a:p>
+            <a:r>
+              <a:rPr sz="2000">
+                <a:solidFill>
+                  <a:srgbClr val="DCECEF"/>
+                </a:solidFill>
+              </a:rPr>
+              <a:t>getElementById looks for the chat box; !== null is true only if it was found. Because the script is at the bottom, it prints true.</a:t>
+            </a:r>
+          </a:p>
+        </p:txBody>
+      </p:sp>
+    </p:spTree>
+  </p:cSld>
+  <p:clrMapOvr>
+    <a:masterClrMapping/>
+  </p:clrMapOvr>
+</p:sld>
+</file>
+
+<file path=ppt/slides/slide146.xml><?xml version="1.0" encoding="utf-8"?>
+<p:sld xmlns:a="http://schemas.openxmlformats.org/drawingml/2006/main" xmlns:p="http://schemas.openxmlformats.org/presentationml/2006/main" xmlns:r="http://schemas.openxmlformats.org/officeDocument/2006/relationships">
+  <p:cSld>
+    <p:bg>
+      <p:bgPr>
+        <a:solidFill>
+          <a:srgbClr val="102127"/>
+        </a:solidFill>
+        <a:effectLst/>
+      </p:bgPr>
+    </p:bg>
+    <p:spTree>
+      <p:nvGrpSpPr>
+        <p:cNvPr id="1" name=""/>
+        <p:cNvGrpSpPr/>
+        <p:nvPr/>
+      </p:nvGrpSpPr>
+      <p:grpSpPr/>
+      <p:sp>
+        <p:nvSpPr>
+          <p:cNvPr id="2" name="TextBox 1"/>
+          <p:cNvSpPr txBox="1"/>
+          <p:nvPr/>
+        </p:nvSpPr>
+        <p:spPr>
+          <a:xfrm>
+            <a:off x="502920" y="274320"/>
+            <a:ext cx="11155680" cy="548640"/>
+          </a:xfrm>
+          <a:prstGeom prst="rect">
+            <a:avLst/>
+          </a:prstGeom>
+          <a:noFill/>
+        </p:spPr>
+        <p:txBody>
+          <a:bodyPr wrap="none">
+            <a:spAutoFit/>
+          </a:bodyPr>
+          <a:lstStyle/>
+          <a:p>
+            <a:r>
+              <a:rPr sz="2200" b="1">
+                <a:solidFill>
+                  <a:srgbClr val="01AEFD"/>
+                </a:solidFill>
+              </a:rPr>
+              <a:t>All together in script.js</a:t>
+            </a:r>
+          </a:p>
+        </p:txBody>
+      </p:sp>
+      <p:sp>
+        <p:nvSpPr>
+          <p:cNvPr id="3" name="TextBox 2"/>
+          <p:cNvSpPr txBox="1"/>
+          <p:nvPr/>
+        </p:nvSpPr>
+        <p:spPr>
+          <a:xfrm>
+            <a:off x="502920" y="960120"/>
+            <a:ext cx="11155680" cy="4297680"/>
+          </a:xfrm>
+          <a:prstGeom prst="rect">
+            <a:avLst/>
+          </a:prstGeom>
+          <a:noFill/>
+        </p:spPr>
+        <p:txBody>
+          <a:bodyPr wrap="none">
+            <a:spAutoFit/>
+          </a:bodyPr>
+          <a:lstStyle/>
+          <a:p>
+            <a:pPr>
+              <a:spcAft>
+                <a:spcPts val="0"/>
+              </a:spcAft>
+            </a:pPr>
+            <a:r>
+              <a:rPr sz="1800">
+                <a:solidFill>
+                  <a:srgbClr val="6D8C97"/>
+                </a:solidFill>
+                <a:latin typeface="Consolas"/>
+              </a:rPr>
+              <a:t>   1  </a:t>
+            </a:r>
+            <a:r>
+              <a:rPr sz="1800">
+                <a:solidFill>
+                  <a:srgbClr val="7FE0A0"/>
+                </a:solidFill>
+                <a:latin typeface="Consolas"/>
+              </a:rPr>
+              <a:t>// Week 1: prove the JavaScript file is really running.</a:t>
+            </a:r>
+          </a:p>
+          <a:p>
+            <a:pPr>
+              <a:spcAft>
+                <a:spcPts val="0"/>
+              </a:spcAft>
+            </a:pPr>
+            <a:r>
+              <a:rPr sz="1800">
+                <a:solidFill>
+                  <a:srgbClr val="6D8C97"/>
+                </a:solidFill>
+                <a:latin typeface="Consolas"/>
+              </a:rPr>
+              <a:t>   2  </a:t>
+            </a:r>
+            <a:r>
+              <a:rPr sz="1800">
+                <a:solidFill>
+                  <a:srgbClr val="7FE0A0"/>
+                </a:solidFill>
+                <a:latin typeface="Consolas"/>
+              </a:rPr>
+              <a:t>console.log('My AI companion is starting up.');</a:t>
+            </a:r>
+          </a:p>
+          <a:p>
+            <a:pPr>
+              <a:spcAft>
+                <a:spcPts val="0"/>
+              </a:spcAft>
+            </a:pPr>
+            <a:r>
+              <a:rPr sz="1800">
+                <a:solidFill>
+                  <a:srgbClr val="6D8C97"/>
+                </a:solidFill>
+                <a:latin typeface="Consolas"/>
+              </a:rPr>
+              <a:t>   3  </a:t>
+            </a:r>
+            <a:r>
+              <a:rPr sz="1800">
+                <a:solidFill>
+                  <a:srgbClr val="7FE0A0"/>
+                </a:solidFill>
+                <a:latin typeface="Consolas"/>
+              </a:rPr>
+              <a:t> </a:t>
+            </a:r>
+          </a:p>
+          <a:p>
+            <a:pPr>
+              <a:spcAft>
+                <a:spcPts val="0"/>
+              </a:spcAft>
+            </a:pPr>
+            <a:r>
+              <a:rPr sz="1800">
+                <a:solidFill>
+                  <a:srgbClr val="6D8C97"/>
+                </a:solidFill>
+                <a:latin typeface="Consolas"/>
+              </a:rPr>
+              <a:t>   4  </a:t>
+            </a:r>
+            <a:r>
+              <a:rPr sz="1800">
+                <a:solidFill>
+                  <a:srgbClr val="7FE0A0"/>
+                </a:solidFill>
+                <a:latin typeface="Consolas"/>
+              </a:rPr>
+              <a:t>// Can this script see the page yet? Down here, yes.</a:t>
+            </a:r>
+          </a:p>
+          <a:p>
+            <a:pPr>
+              <a:spcAft>
+                <a:spcPts val="0"/>
+              </a:spcAft>
+            </a:pPr>
+            <a:r>
+              <a:rPr sz="1800">
+                <a:solidFill>
+                  <a:srgbClr val="6D8C97"/>
+                </a:solidFill>
+                <a:latin typeface="Consolas"/>
+              </a:rPr>
+              <a:t>   5  </a:t>
+            </a:r>
+            <a:r>
+              <a:rPr sz="1800">
+                <a:solidFill>
+                  <a:srgbClr val="7FE0A0"/>
+                </a:solidFill>
+                <a:latin typeface="Consolas"/>
+              </a:rPr>
+              <a:t>// Move the &lt;script&gt; tag to the TOP of index.html and this prints false,</a:t>
+            </a:r>
+          </a:p>
+          <a:p>
+            <a:pPr>
+              <a:spcAft>
+                <a:spcPts val="0"/>
+              </a:spcAft>
+            </a:pPr>
+            <a:r>
+              <a:rPr sz="1800">
+                <a:solidFill>
+                  <a:srgbClr val="6D8C97"/>
+                </a:solidFill>
+                <a:latin typeface="Consolas"/>
+              </a:rPr>
+              <a:t>   6  </a:t>
+            </a:r>
+            <a:r>
+              <a:rPr sz="1800">
+                <a:solidFill>
+                  <a:srgbClr val="7FE0A0"/>
+                </a:solidFill>
+                <a:latin typeface="Consolas"/>
+              </a:rPr>
+              <a:t>// because the boxes have not been made yet. That is why it goes last.</a:t>
+            </a:r>
+          </a:p>
+          <a:p>
+            <a:pPr>
+              <a:spcAft>
+                <a:spcPts val="0"/>
+              </a:spcAft>
+            </a:pPr>
+            <a:r>
+              <a:rPr sz="1800">
+                <a:solidFill>
+                  <a:srgbClr val="6D8C97"/>
+                </a:solidFill>
+                <a:latin typeface="Consolas"/>
+              </a:rPr>
+              <a:t>   7  </a:t>
+            </a:r>
+            <a:r>
+              <a:rPr sz="1800">
+                <a:solidFill>
+                  <a:srgbClr val="7FE0A0"/>
+                </a:solidFill>
+                <a:latin typeface="Consolas"/>
+              </a:rPr>
+              <a:t>console.log('Can I see the chat box?', document.getElementById('chat') !== null);</a:t>
+            </a:r>
+          </a:p>
+        </p:txBody>
+      </p:sp>
+      <p:sp>
+        <p:nvSpPr>
+          <p:cNvPr id="4" name="TextBox 3"/>
+          <p:cNvSpPr txBox="1"/>
+          <p:nvPr/>
+        </p:nvSpPr>
+        <p:spPr>
+          <a:xfrm>
+            <a:off x="548640" y="5623560"/>
+            <a:ext cx="11064240" cy="1051560"/>
+          </a:xfrm>
+          <a:prstGeom prst="rect">
+            <a:avLst/>
+          </a:prstGeom>
+          <a:noFill/>
+        </p:spPr>
+        <p:txBody>
+          <a:bodyPr wrap="square">
+            <a:spAutoFit/>
+          </a:bodyPr>
+          <a:lstStyle/>
+          <a:p>
+            <a:r>
+              <a:rPr sz="2000">
+                <a:solidFill>
+                  <a:srgbClr val="DCECEF"/>
+                </a:solidFill>
+              </a:rPr>
+              <a:t>That is the whole piece. Check yours looks the same before moving on.</a:t>
+            </a:r>
+          </a:p>
+        </p:txBody>
+      </p:sp>
+    </p:spTree>
+  </p:cSld>
+  <p:clrMapOvr>
+    <a:masterClrMapping/>
+  </p:clrMapOvr>
+</p:sld>
+</file>
+
+<file path=ppt/slides/slide147.xml><?xml version="1.0" encoding="utf-8"?>
+<p:sld xmlns:a="http://schemas.openxmlformats.org/drawingml/2006/main" xmlns:p="http://schemas.openxmlformats.org/presentationml/2006/main" xmlns:r="http://schemas.openxmlformats.org/officeDocument/2006/relationships">
+  <p:cSld>
+    <p:spTree>
+      <p:nvGrpSpPr>
+        <p:cNvPr id="1" name=""/>
+        <p:cNvGrpSpPr/>
+        <p:nvPr/>
+      </p:nvGrpSpPr>
+      <p:grpSpPr/>
+      <p:sp>
+        <p:nvSpPr>
+          <p:cNvPr id="2" name="Title 1"/>
+          <p:cNvSpPr>
+            <a:spLocks noGrp="1"/>
+          </p:cNvSpPr>
+          <p:nvPr>
+            <p:ph type="title"/>
+          </p:nvPr>
+        </p:nvSpPr>
+        <p:spPr/>
+        <p:txBody>
+          <a:bodyPr/>
+          <a:lstStyle/>
+          <a:p>
+            <a:r>
+              <a:rPr sz="3800" b="1">
+                <a:solidFill>
+                  <a:srgbClr val="1F2A37"/>
+                </a:solidFill>
+              </a:rPr>
+              <a:t>id = a name</a:t>
+            </a:r>
+          </a:p>
+        </p:txBody>
+      </p:sp>
+      <p:sp>
+        <p:nvSpPr>
+          <p:cNvPr id="3" name="TextBox 2"/>
+          <p:cNvSpPr txBox="1"/>
+          <p:nvPr/>
+        </p:nvSpPr>
+        <p:spPr>
+          <a:xfrm>
+            <a:off x="822960" y="1828800"/>
+            <a:ext cx="10515600" cy="4206240"/>
+          </a:xfrm>
+          <a:prstGeom prst="rect">
+            <a:avLst/>
+          </a:prstGeom>
+          <a:noFill/>
+        </p:spPr>
+        <p:txBody>
+          <a:bodyPr wrap="square">
+            <a:spAutoFit/>
+          </a:bodyPr>
+          <a:lstStyle/>
+          <a:p>
+            <a:pPr>
+              <a:spcAft>
+                <a:spcPts val="1400"/>
+              </a:spcAft>
+            </a:pPr>
+            <a:r>
+              <a:rPr sz="2400">
+                <a:solidFill>
+                  <a:srgbClr val="1F2A37"/>
+                </a:solidFill>
+              </a:rPr>
+              <a:t>• &lt;div id="chat"&gt;</a:t>
+            </a:r>
+          </a:p>
+          <a:p>
+            <a:pPr>
+              <a:spcAft>
+                <a:spcPts val="1400"/>
+              </a:spcAft>
+            </a:pPr>
+            <a:r>
+              <a:rPr sz="2400">
+                <a:solidFill>
+                  <a:srgbClr val="1F2A37"/>
+                </a:solidFill>
+              </a:rPr>
+              <a:t>• Next week JavaScript uses that name to find the box</a:t>
+            </a:r>
+          </a:p>
+          <a:p>
+            <a:pPr>
+              <a:spcAft>
+                <a:spcPts val="1400"/>
+              </a:spcAft>
+            </a:pPr>
+            <a:r>
+              <a:rPr sz="2400">
+                <a:solidFill>
+                  <a:srgbClr val="1F2A37"/>
+                </a:solidFill>
+              </a:rPr>
+              <a:t>• Names must be spelled exactly the same in both files</a:t>
+            </a:r>
+          </a:p>
+        </p:txBody>
+      </p:sp>
+    </p:spTree>
+  </p:cSld>
+  <p:clrMapOvr>
+    <a:masterClrMapping/>
+  </p:clrMapOvr>
+</p:sld>
+</file>
+
+<file path=ppt/slides/slide148.xml><?xml version="1.0" encoding="utf-8"?>
+<p:sld xmlns:a="http://schemas.openxmlformats.org/drawingml/2006/main" xmlns:p="http://schemas.openxmlformats.org/presentationml/2006/main" xmlns:r="http://schemas.openxmlformats.org/officeDocument/2006/relationships">
+  <p:cSld>
+    <p:spTree>
+      <p:nvGrpSpPr>
+        <p:cNvPr id="1" name=""/>
+        <p:cNvGrpSpPr/>
+        <p:nvPr/>
+      </p:nvGrpSpPr>
+      <p:grpSpPr/>
+      <p:sp>
+        <p:nvSpPr>
+          <p:cNvPr id="2" name="Title 1"/>
+          <p:cNvSpPr>
+            <a:spLocks noGrp="1"/>
+          </p:cNvSpPr>
+          <p:nvPr>
+            <p:ph type="title"/>
+          </p:nvPr>
+        </p:nvSpPr>
+        <p:spPr/>
+        <p:txBody>
+          <a:bodyPr/>
+          <a:lstStyle/>
+          <a:p>
+            <a:r>
+              <a:rPr sz="3800" b="1">
+                <a:solidFill>
+                  <a:srgbClr val="1F2A37"/>
+                </a:solidFill>
+              </a:rPr>
+              <a:t>Checkpoint: your page</a:t>
+            </a:r>
+          </a:p>
+        </p:txBody>
+      </p:sp>
+      <p:sp>
+        <p:nvSpPr>
+          <p:cNvPr id="3" name="TextBox 2"/>
+          <p:cNvSpPr txBox="1"/>
+          <p:nvPr/>
+        </p:nvSpPr>
+        <p:spPr>
+          <a:xfrm>
+            <a:off x="868680" y="502920"/>
+            <a:ext cx="5486400" cy="457200"/>
+          </a:xfrm>
+          <a:prstGeom prst="rect">
+            <a:avLst/>
+          </a:prstGeom>
+          <a:noFill/>
+        </p:spPr>
+        <p:txBody>
+          <a:bodyPr wrap="none">
+            <a:spAutoFit/>
+          </a:bodyPr>
+          <a:lstStyle/>
+          <a:p>
+            <a:r>
+              <a:rPr sz="1500" b="1">
+                <a:solidFill>
+                  <a:srgbClr val="01AEFD"/>
+                </a:solidFill>
+              </a:rPr>
+              <a:t>CHECKPOINT - RUN IT</a:t>
+            </a:r>
+          </a:p>
+        </p:txBody>
+      </p:sp>
+      <p:sp>
+        <p:nvSpPr>
+          <p:cNvPr id="4" name="TextBox 3"/>
+          <p:cNvSpPr txBox="1"/>
+          <p:nvPr/>
+        </p:nvSpPr>
+        <p:spPr>
+          <a:xfrm>
+            <a:off x="822960" y="1828800"/>
+            <a:ext cx="10515600" cy="4206240"/>
+          </a:xfrm>
+          <a:prstGeom prst="rect">
+            <a:avLst/>
+          </a:prstGeom>
+          <a:noFill/>
+        </p:spPr>
+        <p:txBody>
+          <a:bodyPr wrap="square">
+            <a:spAutoFit/>
+          </a:bodyPr>
+          <a:lstStyle/>
+          <a:p>
+            <a:pPr>
+              <a:spcAft>
+                <a:spcPts val="1400"/>
+              </a:spcAft>
+            </a:pPr>
+            <a:r>
+              <a:rPr sz="2800">
+                <a:solidFill>
+                  <a:srgbClr val="01AEFD"/>
+                </a:solidFill>
+              </a:rPr>
+              <a:t>Press Run. You should see the title, an empty white chat box, and a text box with a blue Send button - all styled. Clicking Send does nothing yet; that is next week.</a:t>
+            </a:r>
+          </a:p>
+          <a:p>
+            <a:pPr>
+              <a:spcAft>
+                <a:spcPts val="1400"/>
+              </a:spcAft>
+            </a:pPr>
+            <a:r>
+              <a:rPr sz="2400">
+                <a:solidFill>
+                  <a:srgbClr val="1F2A37"/>
+                </a:solidFill>
+              </a:rPr>
+              <a:t>• Run it in the classroom, or press Show the output in the web deck.</a:t>
+            </a:r>
+          </a:p>
+          <a:p>
+            <a:pPr>
+              <a:spcAft>
+                <a:spcPts val="1400"/>
+              </a:spcAft>
+            </a:pPr>
+            <a:r>
+              <a:rPr sz="2400">
+                <a:solidFill>
+                  <a:srgbClr val="1F2A37"/>
+                </a:solidFill>
+              </a:rPr>
+              <a:t>• Everyone's screen should match this.</a:t>
+            </a:r>
+          </a:p>
+        </p:txBody>
+      </p:sp>
+    </p:spTree>
+  </p:cSld>
+  <p:clrMapOvr>
+    <a:masterClrMapping/>
+  </p:clrMapOvr>
+</p:sld>
+</file>
+
+<file path=ppt/slides/slide149.xml><?xml version="1.0" encoding="utf-8"?>
 <p:sld xmlns:a="http://schemas.openxmlformats.org/drawingml/2006/main" xmlns:p="http://schemas.openxmlformats.org/presentationml/2006/main" xmlns:r="http://schemas.openxmlformats.org/officeDocument/2006/relationships">
   <p:cSld>
     <p:spTree>

--- a/ai101/slides/week-01.pptx
+++ b/ai101/slides/week-01.pptx
@@ -3803,7 +3803,7 @@
         <p:spPr>
           <a:xfrm>
             <a:off x="3606393" y="2554833"/>
-            <a:ext cx="4945075" cy="1806854"/>
+            <a:ext cx="4945075" cy="1730776"/>
           </a:xfrm>
           <a:prstGeom prst="roundRect">
             <a:avLst/>
@@ -3978,8 +3978,8 @@
         </p:nvSpPr>
         <p:spPr>
           <a:xfrm>
-            <a:off x="3701491" y="4856195"/>
-            <a:ext cx="3899001" cy="323331"/>
+            <a:off x="3701491" y="4409236"/>
+            <a:ext cx="1426463" cy="228234"/>
           </a:xfrm>
           <a:prstGeom prst="roundRect">
             <a:avLst/>
@@ -4022,6 +4022,94 @@
         </p:nvSpPr>
         <p:spPr>
           <a:xfrm>
+            <a:off x="5223052" y="4409236"/>
+            <a:ext cx="1426463" cy="228234"/>
+          </a:xfrm>
+          <a:prstGeom prst="roundRect">
+            <a:avLst/>
+          </a:prstGeom>
+          <a:solidFill>
+            <a:srgbClr val="16303A"/>
+          </a:solidFill>
+          <a:ln>
+            <a:noFill/>
+          </a:ln>
+          <a:effectLst/>
+        </p:spPr>
+        <p:style>
+          <a:lnRef idx="1">
+            <a:schemeClr val="accent1"/>
+          </a:lnRef>
+          <a:fillRef idx="3">
+            <a:schemeClr val="accent1"/>
+          </a:fillRef>
+          <a:effectRef idx="2">
+            <a:schemeClr val="accent1"/>
+          </a:effectRef>
+          <a:fontRef idx="minor">
+            <a:schemeClr val="lt1"/>
+          </a:fontRef>
+        </p:style>
+        <p:txBody>
+          <a:bodyPr rtlCol="0" anchor="ctr"/>
+          <a:lstStyle/>
+          <a:p>
+            <a:pPr algn="ctr"/>
+          </a:p>
+        </p:txBody>
+      </p:sp>
+      <p:sp>
+        <p:nvSpPr>
+          <p:cNvPr id="13" name="Rounded Rectangle 12"/>
+          <p:cNvSpPr/>
+          <p:nvPr/>
+        </p:nvSpPr>
+        <p:spPr>
+          <a:xfrm>
+            <a:off x="3701491" y="4856195"/>
+            <a:ext cx="3899001" cy="323331"/>
+          </a:xfrm>
+          <a:prstGeom prst="roundRect">
+            <a:avLst/>
+          </a:prstGeom>
+          <a:solidFill>
+            <a:srgbClr val="16303A"/>
+          </a:solidFill>
+          <a:ln>
+            <a:noFill/>
+          </a:ln>
+          <a:effectLst/>
+        </p:spPr>
+        <p:style>
+          <a:lnRef idx="1">
+            <a:schemeClr val="accent1"/>
+          </a:lnRef>
+          <a:fillRef idx="3">
+            <a:schemeClr val="accent1"/>
+          </a:fillRef>
+          <a:effectRef idx="2">
+            <a:schemeClr val="accent1"/>
+          </a:effectRef>
+          <a:fontRef idx="minor">
+            <a:schemeClr val="lt1"/>
+          </a:fontRef>
+        </p:style>
+        <p:txBody>
+          <a:bodyPr rtlCol="0" anchor="ctr"/>
+          <a:lstStyle/>
+          <a:p>
+            <a:pPr algn="ctr"/>
+          </a:p>
+        </p:txBody>
+      </p:sp>
+      <p:sp>
+        <p:nvSpPr>
+          <p:cNvPr id="14" name="Rounded Rectangle 13"/>
+          <p:cNvSpPr/>
+          <p:nvPr/>
+        </p:nvSpPr>
+        <p:spPr>
+          <a:xfrm>
             <a:off x="7695590" y="4856195"/>
             <a:ext cx="779800" cy="323331"/>
           </a:xfrm>
@@ -4060,7 +4148,7 @@
       </p:sp>
       <p:sp>
         <p:nvSpPr>
-          <p:cNvPr id="13" name="Rounded Rectangle 12"/>
+          <p:cNvPr id="15" name="Rounded Rectangle 14"/>
           <p:cNvSpPr/>
           <p:nvPr/>
         </p:nvSpPr>
@@ -4104,7 +4192,7 @@
       </p:sp>
       <p:sp>
         <p:nvSpPr>
-          <p:cNvPr id="14" name="Rounded Rectangle 13"/>
+          <p:cNvPr id="16" name="Rounded Rectangle 15"/>
           <p:cNvSpPr/>
           <p:nvPr/>
         </p:nvSpPr>
@@ -4148,7 +4236,7 @@
       </p:sp>
       <p:sp>
         <p:nvSpPr>
-          <p:cNvPr id="15" name="TextBox 14"/>
+          <p:cNvPr id="17" name="TextBox 16"/>
           <p:cNvSpPr txBox="1"/>
           <p:nvPr/>
         </p:nvSpPr>
@@ -9077,7 +9165,7 @@
         <p:spPr>
           <a:xfrm>
             <a:off x="3606393" y="2554833"/>
-            <a:ext cx="4945075" cy="1806854"/>
+            <a:ext cx="4945075" cy="1730776"/>
           </a:xfrm>
           <a:prstGeom prst="roundRect">
             <a:avLst/>
@@ -9252,8 +9340,8 @@
         </p:nvSpPr>
         <p:spPr>
           <a:xfrm>
-            <a:off x="3701491" y="4856195"/>
-            <a:ext cx="3899001" cy="323331"/>
+            <a:off x="3701491" y="4409236"/>
+            <a:ext cx="1426463" cy="228234"/>
           </a:xfrm>
           <a:prstGeom prst="roundRect">
             <a:avLst/>
@@ -9296,6 +9384,94 @@
         </p:nvSpPr>
         <p:spPr>
           <a:xfrm>
+            <a:off x="5223052" y="4409236"/>
+            <a:ext cx="1426463" cy="228234"/>
+          </a:xfrm>
+          <a:prstGeom prst="roundRect">
+            <a:avLst/>
+          </a:prstGeom>
+          <a:solidFill>
+            <a:srgbClr val="16303A"/>
+          </a:solidFill>
+          <a:ln>
+            <a:noFill/>
+          </a:ln>
+          <a:effectLst/>
+        </p:spPr>
+        <p:style>
+          <a:lnRef idx="1">
+            <a:schemeClr val="accent1"/>
+          </a:lnRef>
+          <a:fillRef idx="3">
+            <a:schemeClr val="accent1"/>
+          </a:fillRef>
+          <a:effectRef idx="2">
+            <a:schemeClr val="accent1"/>
+          </a:effectRef>
+          <a:fontRef idx="minor">
+            <a:schemeClr val="lt1"/>
+          </a:fontRef>
+        </p:style>
+        <p:txBody>
+          <a:bodyPr rtlCol="0" anchor="ctr"/>
+          <a:lstStyle/>
+          <a:p>
+            <a:pPr algn="ctr"/>
+          </a:p>
+        </p:txBody>
+      </p:sp>
+      <p:sp>
+        <p:nvSpPr>
+          <p:cNvPr id="13" name="Rounded Rectangle 12"/>
+          <p:cNvSpPr/>
+          <p:nvPr/>
+        </p:nvSpPr>
+        <p:spPr>
+          <a:xfrm>
+            <a:off x="3701491" y="4856195"/>
+            <a:ext cx="3899001" cy="323331"/>
+          </a:xfrm>
+          <a:prstGeom prst="roundRect">
+            <a:avLst/>
+          </a:prstGeom>
+          <a:solidFill>
+            <a:srgbClr val="16303A"/>
+          </a:solidFill>
+          <a:ln>
+            <a:noFill/>
+          </a:ln>
+          <a:effectLst/>
+        </p:spPr>
+        <p:style>
+          <a:lnRef idx="1">
+            <a:schemeClr val="accent1"/>
+          </a:lnRef>
+          <a:fillRef idx="3">
+            <a:schemeClr val="accent1"/>
+          </a:fillRef>
+          <a:effectRef idx="2">
+            <a:schemeClr val="accent1"/>
+          </a:effectRef>
+          <a:fontRef idx="minor">
+            <a:schemeClr val="lt1"/>
+          </a:fontRef>
+        </p:style>
+        <p:txBody>
+          <a:bodyPr rtlCol="0" anchor="ctr"/>
+          <a:lstStyle/>
+          <a:p>
+            <a:pPr algn="ctr"/>
+          </a:p>
+        </p:txBody>
+      </p:sp>
+      <p:sp>
+        <p:nvSpPr>
+          <p:cNvPr id="14" name="Rounded Rectangle 13"/>
+          <p:cNvSpPr/>
+          <p:nvPr/>
+        </p:nvSpPr>
+        <p:spPr>
+          <a:xfrm>
             <a:off x="7695590" y="4856195"/>
             <a:ext cx="779800" cy="323331"/>
           </a:xfrm>
@@ -9334,7 +9510,7 @@
       </p:sp>
       <p:sp>
         <p:nvSpPr>
-          <p:cNvPr id="13" name="Rounded Rectangle 12"/>
+          <p:cNvPr id="15" name="Rounded Rectangle 14"/>
           <p:cNvSpPr/>
           <p:nvPr/>
         </p:nvSpPr>
@@ -9378,7 +9554,7 @@
       </p:sp>
       <p:sp>
         <p:nvSpPr>
-          <p:cNvPr id="14" name="Rounded Rectangle 13"/>
+          <p:cNvPr id="16" name="Rounded Rectangle 15"/>
           <p:cNvSpPr/>
           <p:nvPr/>
         </p:nvSpPr>
@@ -9422,7 +9598,7 @@
       </p:sp>
       <p:sp>
         <p:nvSpPr>
-          <p:cNvPr id="15" name="TextBox 14"/>
+          <p:cNvPr id="17" name="TextBox 16"/>
           <p:cNvSpPr txBox="1"/>
           <p:nvPr/>
         </p:nvSpPr>
@@ -11281,7 +11457,7 @@
         <p:spPr>
           <a:xfrm>
             <a:off x="3606393" y="2554833"/>
-            <a:ext cx="4945075" cy="1806854"/>
+            <a:ext cx="4945075" cy="1730776"/>
           </a:xfrm>
           <a:prstGeom prst="roundRect">
             <a:avLst/>
@@ -11456,8 +11632,8 @@
         </p:nvSpPr>
         <p:spPr>
           <a:xfrm>
-            <a:off x="3701491" y="4856195"/>
-            <a:ext cx="3899001" cy="323331"/>
+            <a:off x="3701491" y="4409236"/>
+            <a:ext cx="1426463" cy="228234"/>
           </a:xfrm>
           <a:prstGeom prst="roundRect">
             <a:avLst/>
@@ -11500,6 +11676,94 @@
         </p:nvSpPr>
         <p:spPr>
           <a:xfrm>
+            <a:off x="5223052" y="4409236"/>
+            <a:ext cx="1426463" cy="228234"/>
+          </a:xfrm>
+          <a:prstGeom prst="roundRect">
+            <a:avLst/>
+          </a:prstGeom>
+          <a:solidFill>
+            <a:srgbClr val="16303A"/>
+          </a:solidFill>
+          <a:ln>
+            <a:noFill/>
+          </a:ln>
+          <a:effectLst/>
+        </p:spPr>
+        <p:style>
+          <a:lnRef idx="1">
+            <a:schemeClr val="accent1"/>
+          </a:lnRef>
+          <a:fillRef idx="3">
+            <a:schemeClr val="accent1"/>
+          </a:fillRef>
+          <a:effectRef idx="2">
+            <a:schemeClr val="accent1"/>
+          </a:effectRef>
+          <a:fontRef idx="minor">
+            <a:schemeClr val="lt1"/>
+          </a:fontRef>
+        </p:style>
+        <p:txBody>
+          <a:bodyPr rtlCol="0" anchor="ctr"/>
+          <a:lstStyle/>
+          <a:p>
+            <a:pPr algn="ctr"/>
+          </a:p>
+        </p:txBody>
+      </p:sp>
+      <p:sp>
+        <p:nvSpPr>
+          <p:cNvPr id="13" name="Rounded Rectangle 12"/>
+          <p:cNvSpPr/>
+          <p:nvPr/>
+        </p:nvSpPr>
+        <p:spPr>
+          <a:xfrm>
+            <a:off x="3701491" y="4856195"/>
+            <a:ext cx="3899001" cy="323331"/>
+          </a:xfrm>
+          <a:prstGeom prst="roundRect">
+            <a:avLst/>
+          </a:prstGeom>
+          <a:solidFill>
+            <a:srgbClr val="16303A"/>
+          </a:solidFill>
+          <a:ln>
+            <a:noFill/>
+          </a:ln>
+          <a:effectLst/>
+        </p:spPr>
+        <p:style>
+          <a:lnRef idx="1">
+            <a:schemeClr val="accent1"/>
+          </a:lnRef>
+          <a:fillRef idx="3">
+            <a:schemeClr val="accent1"/>
+          </a:fillRef>
+          <a:effectRef idx="2">
+            <a:schemeClr val="accent1"/>
+          </a:effectRef>
+          <a:fontRef idx="minor">
+            <a:schemeClr val="lt1"/>
+          </a:fontRef>
+        </p:style>
+        <p:txBody>
+          <a:bodyPr rtlCol="0" anchor="ctr"/>
+          <a:lstStyle/>
+          <a:p>
+            <a:pPr algn="ctr"/>
+          </a:p>
+        </p:txBody>
+      </p:sp>
+      <p:sp>
+        <p:nvSpPr>
+          <p:cNvPr id="14" name="Rounded Rectangle 13"/>
+          <p:cNvSpPr/>
+          <p:nvPr/>
+        </p:nvSpPr>
+        <p:spPr>
+          <a:xfrm>
             <a:off x="7695590" y="4856195"/>
             <a:ext cx="779800" cy="323331"/>
           </a:xfrm>
@@ -11538,7 +11802,7 @@
       </p:sp>
       <p:sp>
         <p:nvSpPr>
-          <p:cNvPr id="13" name="Rounded Rectangle 12"/>
+          <p:cNvPr id="15" name="Rounded Rectangle 14"/>
           <p:cNvSpPr/>
           <p:nvPr/>
         </p:nvSpPr>
@@ -11582,7 +11846,7 @@
       </p:sp>
       <p:sp>
         <p:nvSpPr>
-          <p:cNvPr id="14" name="Rounded Rectangle 13"/>
+          <p:cNvPr id="16" name="Rounded Rectangle 15"/>
           <p:cNvSpPr/>
           <p:nvPr/>
         </p:nvSpPr>
@@ -11626,7 +11890,7 @@
       </p:sp>
       <p:sp>
         <p:nvSpPr>
-          <p:cNvPr id="15" name="TextBox 14"/>
+          <p:cNvPr id="17" name="TextBox 16"/>
           <p:cNvSpPr txBox="1"/>
           <p:nvPr/>
         </p:nvSpPr>
@@ -16039,7 +16303,7 @@
         <p:spPr>
           <a:xfrm>
             <a:off x="3606393" y="2554833"/>
-            <a:ext cx="4945075" cy="1806854"/>
+            <a:ext cx="4945075" cy="1730776"/>
           </a:xfrm>
           <a:prstGeom prst="roundRect">
             <a:avLst/>
@@ -16214,8 +16478,8 @@
         </p:nvSpPr>
         <p:spPr>
           <a:xfrm>
-            <a:off x="3701491" y="4856195"/>
-            <a:ext cx="3899001" cy="323331"/>
+            <a:off x="3701491" y="4409236"/>
+            <a:ext cx="1426463" cy="228234"/>
           </a:xfrm>
           <a:prstGeom prst="roundRect">
             <a:avLst/>
@@ -16258,6 +16522,94 @@
         </p:nvSpPr>
         <p:spPr>
           <a:xfrm>
+            <a:off x="5223052" y="4409236"/>
+            <a:ext cx="1426463" cy="228234"/>
+          </a:xfrm>
+          <a:prstGeom prst="roundRect">
+            <a:avLst/>
+          </a:prstGeom>
+          <a:solidFill>
+            <a:srgbClr val="16303A"/>
+          </a:solidFill>
+          <a:ln>
+            <a:noFill/>
+          </a:ln>
+          <a:effectLst/>
+        </p:spPr>
+        <p:style>
+          <a:lnRef idx="1">
+            <a:schemeClr val="accent1"/>
+          </a:lnRef>
+          <a:fillRef idx="3">
+            <a:schemeClr val="accent1"/>
+          </a:fillRef>
+          <a:effectRef idx="2">
+            <a:schemeClr val="accent1"/>
+          </a:effectRef>
+          <a:fontRef idx="minor">
+            <a:schemeClr val="lt1"/>
+          </a:fontRef>
+        </p:style>
+        <p:txBody>
+          <a:bodyPr rtlCol="0" anchor="ctr"/>
+          <a:lstStyle/>
+          <a:p>
+            <a:pPr algn="ctr"/>
+          </a:p>
+        </p:txBody>
+      </p:sp>
+      <p:sp>
+        <p:nvSpPr>
+          <p:cNvPr id="13" name="Rounded Rectangle 12"/>
+          <p:cNvSpPr/>
+          <p:nvPr/>
+        </p:nvSpPr>
+        <p:spPr>
+          <a:xfrm>
+            <a:off x="3701491" y="4856195"/>
+            <a:ext cx="3899001" cy="323331"/>
+          </a:xfrm>
+          <a:prstGeom prst="roundRect">
+            <a:avLst/>
+          </a:prstGeom>
+          <a:solidFill>
+            <a:srgbClr val="16303A"/>
+          </a:solidFill>
+          <a:ln>
+            <a:noFill/>
+          </a:ln>
+          <a:effectLst/>
+        </p:spPr>
+        <p:style>
+          <a:lnRef idx="1">
+            <a:schemeClr val="accent1"/>
+          </a:lnRef>
+          <a:fillRef idx="3">
+            <a:schemeClr val="accent1"/>
+          </a:fillRef>
+          <a:effectRef idx="2">
+            <a:schemeClr val="accent1"/>
+          </a:effectRef>
+          <a:fontRef idx="minor">
+            <a:schemeClr val="lt1"/>
+          </a:fontRef>
+        </p:style>
+        <p:txBody>
+          <a:bodyPr rtlCol="0" anchor="ctr"/>
+          <a:lstStyle/>
+          <a:p>
+            <a:pPr algn="ctr"/>
+          </a:p>
+        </p:txBody>
+      </p:sp>
+      <p:sp>
+        <p:nvSpPr>
+          <p:cNvPr id="14" name="Rounded Rectangle 13"/>
+          <p:cNvSpPr/>
+          <p:nvPr/>
+        </p:nvSpPr>
+        <p:spPr>
+          <a:xfrm>
             <a:off x="7695590" y="4856195"/>
             <a:ext cx="779800" cy="323331"/>
           </a:xfrm>
@@ -16296,7 +16648,7 @@
       </p:sp>
       <p:sp>
         <p:nvSpPr>
-          <p:cNvPr id="13" name="Rounded Rectangle 12"/>
+          <p:cNvPr id="15" name="Rounded Rectangle 14"/>
           <p:cNvSpPr/>
           <p:nvPr/>
         </p:nvSpPr>
@@ -16340,7 +16692,7 @@
       </p:sp>
       <p:sp>
         <p:nvSpPr>
-          <p:cNvPr id="14" name="Rounded Rectangle 13"/>
+          <p:cNvPr id="16" name="Rounded Rectangle 15"/>
           <p:cNvSpPr/>
           <p:nvPr/>
         </p:nvSpPr>
@@ -16384,7 +16736,7 @@
       </p:sp>
       <p:sp>
         <p:nvSpPr>
-          <p:cNvPr id="15" name="TextBox 14"/>
+          <p:cNvPr id="17" name="TextBox 16"/>
           <p:cNvSpPr txBox="1"/>
           <p:nvPr/>
         </p:nvSpPr>
@@ -17612,7 +17964,7 @@
         <p:spPr>
           <a:xfrm>
             <a:off x="3606393" y="2554833"/>
-            <a:ext cx="4945075" cy="1806854"/>
+            <a:ext cx="4945075" cy="1730776"/>
           </a:xfrm>
           <a:prstGeom prst="roundRect">
             <a:avLst/>
@@ -17787,8 +18139,8 @@
         </p:nvSpPr>
         <p:spPr>
           <a:xfrm>
-            <a:off x="3701491" y="4856195"/>
-            <a:ext cx="3899001" cy="323331"/>
+            <a:off x="3701491" y="4409236"/>
+            <a:ext cx="1426463" cy="228234"/>
           </a:xfrm>
           <a:prstGeom prst="roundRect">
             <a:avLst/>
@@ -17831,6 +18183,94 @@
         </p:nvSpPr>
         <p:spPr>
           <a:xfrm>
+            <a:off x="5223052" y="4409236"/>
+            <a:ext cx="1426463" cy="228234"/>
+          </a:xfrm>
+          <a:prstGeom prst="roundRect">
+            <a:avLst/>
+          </a:prstGeom>
+          <a:solidFill>
+            <a:srgbClr val="16303A"/>
+          </a:solidFill>
+          <a:ln>
+            <a:noFill/>
+          </a:ln>
+          <a:effectLst/>
+        </p:spPr>
+        <p:style>
+          <a:lnRef idx="1">
+            <a:schemeClr val="accent1"/>
+          </a:lnRef>
+          <a:fillRef idx="3">
+            <a:schemeClr val="accent1"/>
+          </a:fillRef>
+          <a:effectRef idx="2">
+            <a:schemeClr val="accent1"/>
+          </a:effectRef>
+          <a:fontRef idx="minor">
+            <a:schemeClr val="lt1"/>
+          </a:fontRef>
+        </p:style>
+        <p:txBody>
+          <a:bodyPr rtlCol="0" anchor="ctr"/>
+          <a:lstStyle/>
+          <a:p>
+            <a:pPr algn="ctr"/>
+          </a:p>
+        </p:txBody>
+      </p:sp>
+      <p:sp>
+        <p:nvSpPr>
+          <p:cNvPr id="13" name="Rounded Rectangle 12"/>
+          <p:cNvSpPr/>
+          <p:nvPr/>
+        </p:nvSpPr>
+        <p:spPr>
+          <a:xfrm>
+            <a:off x="3701491" y="4856195"/>
+            <a:ext cx="3899001" cy="323331"/>
+          </a:xfrm>
+          <a:prstGeom prst="roundRect">
+            <a:avLst/>
+          </a:prstGeom>
+          <a:solidFill>
+            <a:srgbClr val="16303A"/>
+          </a:solidFill>
+          <a:ln>
+            <a:noFill/>
+          </a:ln>
+          <a:effectLst/>
+        </p:spPr>
+        <p:style>
+          <a:lnRef idx="1">
+            <a:schemeClr val="accent1"/>
+          </a:lnRef>
+          <a:fillRef idx="3">
+            <a:schemeClr val="accent1"/>
+          </a:fillRef>
+          <a:effectRef idx="2">
+            <a:schemeClr val="accent1"/>
+          </a:effectRef>
+          <a:fontRef idx="minor">
+            <a:schemeClr val="lt1"/>
+          </a:fontRef>
+        </p:style>
+        <p:txBody>
+          <a:bodyPr rtlCol="0" anchor="ctr"/>
+          <a:lstStyle/>
+          <a:p>
+            <a:pPr algn="ctr"/>
+          </a:p>
+        </p:txBody>
+      </p:sp>
+      <p:sp>
+        <p:nvSpPr>
+          <p:cNvPr id="14" name="Rounded Rectangle 13"/>
+          <p:cNvSpPr/>
+          <p:nvPr/>
+        </p:nvSpPr>
+        <p:spPr>
+          <a:xfrm>
             <a:off x="7695590" y="4856195"/>
             <a:ext cx="779800" cy="323331"/>
           </a:xfrm>
@@ -17869,7 +18309,7 @@
       </p:sp>
       <p:sp>
         <p:nvSpPr>
-          <p:cNvPr id="13" name="Rounded Rectangle 12"/>
+          <p:cNvPr id="15" name="Rounded Rectangle 14"/>
           <p:cNvSpPr/>
           <p:nvPr/>
         </p:nvSpPr>
@@ -17913,7 +18353,7 @@
       </p:sp>
       <p:sp>
         <p:nvSpPr>
-          <p:cNvPr id="14" name="Rounded Rectangle 13"/>
+          <p:cNvPr id="16" name="Rounded Rectangle 15"/>
           <p:cNvSpPr/>
           <p:nvPr/>
         </p:nvSpPr>
@@ -17957,7 +18397,7 @@
       </p:sp>
       <p:sp>
         <p:nvSpPr>
-          <p:cNvPr id="15" name="TextBox 14"/>
+          <p:cNvPr id="17" name="TextBox 16"/>
           <p:cNvSpPr txBox="1"/>
           <p:nvPr/>
         </p:nvSpPr>
@@ -18526,7 +18966,7 @@
         <p:spPr>
           <a:xfrm>
             <a:off x="3606393" y="2554833"/>
-            <a:ext cx="4945075" cy="1806854"/>
+            <a:ext cx="4945075" cy="1730776"/>
           </a:xfrm>
           <a:prstGeom prst="roundRect">
             <a:avLst/>
@@ -18701,8 +19141,8 @@
         </p:nvSpPr>
         <p:spPr>
           <a:xfrm>
-            <a:off x="3701491" y="4856195"/>
-            <a:ext cx="3899001" cy="323331"/>
+            <a:off x="3701491" y="4409236"/>
+            <a:ext cx="1426463" cy="228234"/>
           </a:xfrm>
           <a:prstGeom prst="roundRect">
             <a:avLst/>
@@ -18745,6 +19185,94 @@
         </p:nvSpPr>
         <p:spPr>
           <a:xfrm>
+            <a:off x="5223052" y="4409236"/>
+            <a:ext cx="1426463" cy="228234"/>
+          </a:xfrm>
+          <a:prstGeom prst="roundRect">
+            <a:avLst/>
+          </a:prstGeom>
+          <a:solidFill>
+            <a:srgbClr val="16303A"/>
+          </a:solidFill>
+          <a:ln>
+            <a:noFill/>
+          </a:ln>
+          <a:effectLst/>
+        </p:spPr>
+        <p:style>
+          <a:lnRef idx="1">
+            <a:schemeClr val="accent1"/>
+          </a:lnRef>
+          <a:fillRef idx="3">
+            <a:schemeClr val="accent1"/>
+          </a:fillRef>
+          <a:effectRef idx="2">
+            <a:schemeClr val="accent1"/>
+          </a:effectRef>
+          <a:fontRef idx="minor">
+            <a:schemeClr val="lt1"/>
+          </a:fontRef>
+        </p:style>
+        <p:txBody>
+          <a:bodyPr rtlCol="0" anchor="ctr"/>
+          <a:lstStyle/>
+          <a:p>
+            <a:pPr algn="ctr"/>
+          </a:p>
+        </p:txBody>
+      </p:sp>
+      <p:sp>
+        <p:nvSpPr>
+          <p:cNvPr id="13" name="Rounded Rectangle 12"/>
+          <p:cNvSpPr/>
+          <p:nvPr/>
+        </p:nvSpPr>
+        <p:spPr>
+          <a:xfrm>
+            <a:off x="3701491" y="4856195"/>
+            <a:ext cx="3899001" cy="323331"/>
+          </a:xfrm>
+          <a:prstGeom prst="roundRect">
+            <a:avLst/>
+          </a:prstGeom>
+          <a:solidFill>
+            <a:srgbClr val="16303A"/>
+          </a:solidFill>
+          <a:ln>
+            <a:noFill/>
+          </a:ln>
+          <a:effectLst/>
+        </p:spPr>
+        <p:style>
+          <a:lnRef idx="1">
+            <a:schemeClr val="accent1"/>
+          </a:lnRef>
+          <a:fillRef idx="3">
+            <a:schemeClr val="accent1"/>
+          </a:fillRef>
+          <a:effectRef idx="2">
+            <a:schemeClr val="accent1"/>
+          </a:effectRef>
+          <a:fontRef idx="minor">
+            <a:schemeClr val="lt1"/>
+          </a:fontRef>
+        </p:style>
+        <p:txBody>
+          <a:bodyPr rtlCol="0" anchor="ctr"/>
+          <a:lstStyle/>
+          <a:p>
+            <a:pPr algn="ctr"/>
+          </a:p>
+        </p:txBody>
+      </p:sp>
+      <p:sp>
+        <p:nvSpPr>
+          <p:cNvPr id="14" name="Rounded Rectangle 13"/>
+          <p:cNvSpPr/>
+          <p:nvPr/>
+        </p:nvSpPr>
+        <p:spPr>
+          <a:xfrm>
             <a:off x="7695590" y="4856195"/>
             <a:ext cx="779800" cy="323331"/>
           </a:xfrm>
@@ -18783,7 +19311,7 @@
       </p:sp>
       <p:sp>
         <p:nvSpPr>
-          <p:cNvPr id="13" name="Rounded Rectangle 12"/>
+          <p:cNvPr id="15" name="Rounded Rectangle 14"/>
           <p:cNvSpPr/>
           <p:nvPr/>
         </p:nvSpPr>
@@ -18827,7 +19355,7 @@
       </p:sp>
       <p:sp>
         <p:nvSpPr>
-          <p:cNvPr id="14" name="Rounded Rectangle 13"/>
+          <p:cNvPr id="16" name="Rounded Rectangle 15"/>
           <p:cNvSpPr/>
           <p:nvPr/>
         </p:nvSpPr>
@@ -18871,7 +19399,7 @@
       </p:sp>
       <p:sp>
         <p:nvSpPr>
-          <p:cNvPr id="15" name="TextBox 14"/>
+          <p:cNvPr id="17" name="TextBox 16"/>
           <p:cNvSpPr txBox="1"/>
           <p:nvPr/>
         </p:nvSpPr>
@@ -20102,7 +20630,7 @@
         <p:spPr>
           <a:xfrm>
             <a:off x="3606393" y="2554833"/>
-            <a:ext cx="4945075" cy="1806854"/>
+            <a:ext cx="4945075" cy="1730776"/>
           </a:xfrm>
           <a:prstGeom prst="roundRect">
             <a:avLst/>
@@ -20277,8 +20805,8 @@
         </p:nvSpPr>
         <p:spPr>
           <a:xfrm>
-            <a:off x="3701491" y="4856195"/>
-            <a:ext cx="3899001" cy="323331"/>
+            <a:off x="3701491" y="4409236"/>
+            <a:ext cx="1426463" cy="228234"/>
           </a:xfrm>
           <a:prstGeom prst="roundRect">
             <a:avLst/>
@@ -20321,6 +20849,94 @@
         </p:nvSpPr>
         <p:spPr>
           <a:xfrm>
+            <a:off x="5223052" y="4409236"/>
+            <a:ext cx="1426463" cy="228234"/>
+          </a:xfrm>
+          <a:prstGeom prst="roundRect">
+            <a:avLst/>
+          </a:prstGeom>
+          <a:solidFill>
+            <a:srgbClr val="16303A"/>
+          </a:solidFill>
+          <a:ln>
+            <a:noFill/>
+          </a:ln>
+          <a:effectLst/>
+        </p:spPr>
+        <p:style>
+          <a:lnRef idx="1">
+            <a:schemeClr val="accent1"/>
+          </a:lnRef>
+          <a:fillRef idx="3">
+            <a:schemeClr val="accent1"/>
+          </a:fillRef>
+          <a:effectRef idx="2">
+            <a:schemeClr val="accent1"/>
+          </a:effectRef>
+          <a:fontRef idx="minor">
+            <a:schemeClr val="lt1"/>
+          </a:fontRef>
+        </p:style>
+        <p:txBody>
+          <a:bodyPr rtlCol="0" anchor="ctr"/>
+          <a:lstStyle/>
+          <a:p>
+            <a:pPr algn="ctr"/>
+          </a:p>
+        </p:txBody>
+      </p:sp>
+      <p:sp>
+        <p:nvSpPr>
+          <p:cNvPr id="13" name="Rounded Rectangle 12"/>
+          <p:cNvSpPr/>
+          <p:nvPr/>
+        </p:nvSpPr>
+        <p:spPr>
+          <a:xfrm>
+            <a:off x="3701491" y="4856195"/>
+            <a:ext cx="3899001" cy="323331"/>
+          </a:xfrm>
+          <a:prstGeom prst="roundRect">
+            <a:avLst/>
+          </a:prstGeom>
+          <a:solidFill>
+            <a:srgbClr val="16303A"/>
+          </a:solidFill>
+          <a:ln>
+            <a:noFill/>
+          </a:ln>
+          <a:effectLst/>
+        </p:spPr>
+        <p:style>
+          <a:lnRef idx="1">
+            <a:schemeClr val="accent1"/>
+          </a:lnRef>
+          <a:fillRef idx="3">
+            <a:schemeClr val="accent1"/>
+          </a:fillRef>
+          <a:effectRef idx="2">
+            <a:schemeClr val="accent1"/>
+          </a:effectRef>
+          <a:fontRef idx="minor">
+            <a:schemeClr val="lt1"/>
+          </a:fontRef>
+        </p:style>
+        <p:txBody>
+          <a:bodyPr rtlCol="0" anchor="ctr"/>
+          <a:lstStyle/>
+          <a:p>
+            <a:pPr algn="ctr"/>
+          </a:p>
+        </p:txBody>
+      </p:sp>
+      <p:sp>
+        <p:nvSpPr>
+          <p:cNvPr id="14" name="Rounded Rectangle 13"/>
+          <p:cNvSpPr/>
+          <p:nvPr/>
+        </p:nvSpPr>
+        <p:spPr>
+          <a:xfrm>
             <a:off x="7695590" y="4856195"/>
             <a:ext cx="779800" cy="323331"/>
           </a:xfrm>
@@ -20359,7 +20975,7 @@
       </p:sp>
       <p:sp>
         <p:nvSpPr>
-          <p:cNvPr id="13" name="Rounded Rectangle 12"/>
+          <p:cNvPr id="15" name="Rounded Rectangle 14"/>
           <p:cNvSpPr/>
           <p:nvPr/>
         </p:nvSpPr>
@@ -20403,7 +21019,7 @@
       </p:sp>
       <p:sp>
         <p:nvSpPr>
-          <p:cNvPr id="14" name="Rounded Rectangle 13"/>
+          <p:cNvPr id="16" name="Rounded Rectangle 15"/>
           <p:cNvSpPr/>
           <p:nvPr/>
         </p:nvSpPr>
@@ -20447,7 +21063,7 @@
       </p:sp>
       <p:sp>
         <p:nvSpPr>
-          <p:cNvPr id="15" name="TextBox 14"/>
+          <p:cNvPr id="17" name="TextBox 16"/>
           <p:cNvSpPr txBox="1"/>
           <p:nvPr/>
         </p:nvSpPr>
@@ -20981,7 +21597,7 @@
         <p:spPr>
           <a:xfrm>
             <a:off x="3606393" y="2554833"/>
-            <a:ext cx="4945075" cy="1806854"/>
+            <a:ext cx="4945075" cy="1730776"/>
           </a:xfrm>
           <a:prstGeom prst="roundRect">
             <a:avLst/>
@@ -21156,8 +21772,8 @@
         </p:nvSpPr>
         <p:spPr>
           <a:xfrm>
-            <a:off x="3701491" y="4856195"/>
-            <a:ext cx="3899001" cy="323331"/>
+            <a:off x="3701491" y="4409236"/>
+            <a:ext cx="1426463" cy="228234"/>
           </a:xfrm>
           <a:prstGeom prst="roundRect">
             <a:avLst/>
@@ -21200,6 +21816,94 @@
         </p:nvSpPr>
         <p:spPr>
           <a:xfrm>
+            <a:off x="5223052" y="4409236"/>
+            <a:ext cx="1426463" cy="228234"/>
+          </a:xfrm>
+          <a:prstGeom prst="roundRect">
+            <a:avLst/>
+          </a:prstGeom>
+          <a:solidFill>
+            <a:srgbClr val="16303A"/>
+          </a:solidFill>
+          <a:ln>
+            <a:noFill/>
+          </a:ln>
+          <a:effectLst/>
+        </p:spPr>
+        <p:style>
+          <a:lnRef idx="1">
+            <a:schemeClr val="accent1"/>
+          </a:lnRef>
+          <a:fillRef idx="3">
+            <a:schemeClr val="accent1"/>
+          </a:fillRef>
+          <a:effectRef idx="2">
+            <a:schemeClr val="accent1"/>
+          </a:effectRef>
+          <a:fontRef idx="minor">
+            <a:schemeClr val="lt1"/>
+          </a:fontRef>
+        </p:style>
+        <p:txBody>
+          <a:bodyPr rtlCol="0" anchor="ctr"/>
+          <a:lstStyle/>
+          <a:p>
+            <a:pPr algn="ctr"/>
+          </a:p>
+        </p:txBody>
+      </p:sp>
+      <p:sp>
+        <p:nvSpPr>
+          <p:cNvPr id="13" name="Rounded Rectangle 12"/>
+          <p:cNvSpPr/>
+          <p:nvPr/>
+        </p:nvSpPr>
+        <p:spPr>
+          <a:xfrm>
+            <a:off x="3701491" y="4856195"/>
+            <a:ext cx="3899001" cy="323331"/>
+          </a:xfrm>
+          <a:prstGeom prst="roundRect">
+            <a:avLst/>
+          </a:prstGeom>
+          <a:solidFill>
+            <a:srgbClr val="16303A"/>
+          </a:solidFill>
+          <a:ln>
+            <a:noFill/>
+          </a:ln>
+          <a:effectLst/>
+        </p:spPr>
+        <p:style>
+          <a:lnRef idx="1">
+            <a:schemeClr val="accent1"/>
+          </a:lnRef>
+          <a:fillRef idx="3">
+            <a:schemeClr val="accent1"/>
+          </a:fillRef>
+          <a:effectRef idx="2">
+            <a:schemeClr val="accent1"/>
+          </a:effectRef>
+          <a:fontRef idx="minor">
+            <a:schemeClr val="lt1"/>
+          </a:fontRef>
+        </p:style>
+        <p:txBody>
+          <a:bodyPr rtlCol="0" anchor="ctr"/>
+          <a:lstStyle/>
+          <a:p>
+            <a:pPr algn="ctr"/>
+          </a:p>
+        </p:txBody>
+      </p:sp>
+      <p:sp>
+        <p:nvSpPr>
+          <p:cNvPr id="14" name="Rounded Rectangle 13"/>
+          <p:cNvSpPr/>
+          <p:nvPr/>
+        </p:nvSpPr>
+        <p:spPr>
+          <a:xfrm>
             <a:off x="7695590" y="4856195"/>
             <a:ext cx="779800" cy="323331"/>
           </a:xfrm>
@@ -21238,7 +21942,7 @@
       </p:sp>
       <p:sp>
         <p:nvSpPr>
-          <p:cNvPr id="13" name="Rounded Rectangle 12"/>
+          <p:cNvPr id="15" name="Rounded Rectangle 14"/>
           <p:cNvSpPr/>
           <p:nvPr/>
         </p:nvSpPr>
@@ -21282,7 +21986,7 @@
       </p:sp>
       <p:sp>
         <p:nvSpPr>
-          <p:cNvPr id="14" name="Rounded Rectangle 13"/>
+          <p:cNvPr id="16" name="Rounded Rectangle 15"/>
           <p:cNvSpPr/>
           <p:nvPr/>
         </p:nvSpPr>
@@ -21326,7 +22030,7 @@
       </p:sp>
       <p:sp>
         <p:nvSpPr>
-          <p:cNvPr id="15" name="TextBox 14"/>
+          <p:cNvPr id="17" name="TextBox 16"/>
           <p:cNvSpPr txBox="1"/>
           <p:nvPr/>
         </p:nvSpPr>
@@ -21860,7 +22564,7 @@
         <p:spPr>
           <a:xfrm>
             <a:off x="3606393" y="2554833"/>
-            <a:ext cx="4945075" cy="1806854"/>
+            <a:ext cx="4945075" cy="1730776"/>
           </a:xfrm>
           <a:prstGeom prst="roundRect">
             <a:avLst/>
@@ -22035,8 +22739,8 @@
         </p:nvSpPr>
         <p:spPr>
           <a:xfrm>
-            <a:off x="3701491" y="4856195"/>
-            <a:ext cx="3899001" cy="323331"/>
+            <a:off x="3701491" y="4409236"/>
+            <a:ext cx="1426463" cy="228234"/>
           </a:xfrm>
           <a:prstGeom prst="roundRect">
             <a:avLst/>
@@ -22079,6 +22783,94 @@
         </p:nvSpPr>
         <p:spPr>
           <a:xfrm>
+            <a:off x="5223052" y="4409236"/>
+            <a:ext cx="1426463" cy="228234"/>
+          </a:xfrm>
+          <a:prstGeom prst="roundRect">
+            <a:avLst/>
+          </a:prstGeom>
+          <a:solidFill>
+            <a:srgbClr val="16303A"/>
+          </a:solidFill>
+          <a:ln>
+            <a:noFill/>
+          </a:ln>
+          <a:effectLst/>
+        </p:spPr>
+        <p:style>
+          <a:lnRef idx="1">
+            <a:schemeClr val="accent1"/>
+          </a:lnRef>
+          <a:fillRef idx="3">
+            <a:schemeClr val="accent1"/>
+          </a:fillRef>
+          <a:effectRef idx="2">
+            <a:schemeClr val="accent1"/>
+          </a:effectRef>
+          <a:fontRef idx="minor">
+            <a:schemeClr val="lt1"/>
+          </a:fontRef>
+        </p:style>
+        <p:txBody>
+          <a:bodyPr rtlCol="0" anchor="ctr"/>
+          <a:lstStyle/>
+          <a:p>
+            <a:pPr algn="ctr"/>
+          </a:p>
+        </p:txBody>
+      </p:sp>
+      <p:sp>
+        <p:nvSpPr>
+          <p:cNvPr id="13" name="Rounded Rectangle 12"/>
+          <p:cNvSpPr/>
+          <p:nvPr/>
+        </p:nvSpPr>
+        <p:spPr>
+          <a:xfrm>
+            <a:off x="3701491" y="4856195"/>
+            <a:ext cx="3899001" cy="323331"/>
+          </a:xfrm>
+          <a:prstGeom prst="roundRect">
+            <a:avLst/>
+          </a:prstGeom>
+          <a:solidFill>
+            <a:srgbClr val="16303A"/>
+          </a:solidFill>
+          <a:ln>
+            <a:noFill/>
+          </a:ln>
+          <a:effectLst/>
+        </p:spPr>
+        <p:style>
+          <a:lnRef idx="1">
+            <a:schemeClr val="accent1"/>
+          </a:lnRef>
+          <a:fillRef idx="3">
+            <a:schemeClr val="accent1"/>
+          </a:fillRef>
+          <a:effectRef idx="2">
+            <a:schemeClr val="accent1"/>
+          </a:effectRef>
+          <a:fontRef idx="minor">
+            <a:schemeClr val="lt1"/>
+          </a:fontRef>
+        </p:style>
+        <p:txBody>
+          <a:bodyPr rtlCol="0" anchor="ctr"/>
+          <a:lstStyle/>
+          <a:p>
+            <a:pPr algn="ctr"/>
+          </a:p>
+        </p:txBody>
+      </p:sp>
+      <p:sp>
+        <p:nvSpPr>
+          <p:cNvPr id="14" name="Rounded Rectangle 13"/>
+          <p:cNvSpPr/>
+          <p:nvPr/>
+        </p:nvSpPr>
+        <p:spPr>
+          <a:xfrm>
             <a:off x="7695590" y="4856195"/>
             <a:ext cx="779800" cy="323331"/>
           </a:xfrm>
@@ -22117,7 +22909,7 @@
       </p:sp>
       <p:sp>
         <p:nvSpPr>
-          <p:cNvPr id="13" name="Rounded Rectangle 12"/>
+          <p:cNvPr id="15" name="Rounded Rectangle 14"/>
           <p:cNvSpPr/>
           <p:nvPr/>
         </p:nvSpPr>
@@ -22161,7 +22953,7 @@
       </p:sp>
       <p:sp>
         <p:nvSpPr>
-          <p:cNvPr id="14" name="Rounded Rectangle 13"/>
+          <p:cNvPr id="16" name="Rounded Rectangle 15"/>
           <p:cNvSpPr/>
           <p:nvPr/>
         </p:nvSpPr>
@@ -22205,7 +22997,7 @@
       </p:sp>
       <p:sp>
         <p:nvSpPr>
-          <p:cNvPr id="15" name="TextBox 14"/>
+          <p:cNvPr id="17" name="TextBox 16"/>
           <p:cNvSpPr txBox="1"/>
           <p:nvPr/>
         </p:nvSpPr>
@@ -22726,7 +23518,7 @@
         <p:spPr>
           <a:xfrm>
             <a:off x="3606393" y="2554833"/>
-            <a:ext cx="4945075" cy="1806854"/>
+            <a:ext cx="4945075" cy="1730776"/>
           </a:xfrm>
           <a:prstGeom prst="roundRect">
             <a:avLst/>
@@ -22901,8 +23693,8 @@
         </p:nvSpPr>
         <p:spPr>
           <a:xfrm>
-            <a:off x="3701491" y="4856195"/>
-            <a:ext cx="3899001" cy="323331"/>
+            <a:off x="3701491" y="4409236"/>
+            <a:ext cx="1426463" cy="228234"/>
           </a:xfrm>
           <a:prstGeom prst="roundRect">
             <a:avLst/>
@@ -22945,6 +23737,94 @@
         </p:nvSpPr>
         <p:spPr>
           <a:xfrm>
+            <a:off x="5223052" y="4409236"/>
+            <a:ext cx="1426463" cy="228234"/>
+          </a:xfrm>
+          <a:prstGeom prst="roundRect">
+            <a:avLst/>
+          </a:prstGeom>
+          <a:solidFill>
+            <a:srgbClr val="16303A"/>
+          </a:solidFill>
+          <a:ln>
+            <a:noFill/>
+          </a:ln>
+          <a:effectLst/>
+        </p:spPr>
+        <p:style>
+          <a:lnRef idx="1">
+            <a:schemeClr val="accent1"/>
+          </a:lnRef>
+          <a:fillRef idx="3">
+            <a:schemeClr val="accent1"/>
+          </a:fillRef>
+          <a:effectRef idx="2">
+            <a:schemeClr val="accent1"/>
+          </a:effectRef>
+          <a:fontRef idx="minor">
+            <a:schemeClr val="lt1"/>
+          </a:fontRef>
+        </p:style>
+        <p:txBody>
+          <a:bodyPr rtlCol="0" anchor="ctr"/>
+          <a:lstStyle/>
+          <a:p>
+            <a:pPr algn="ctr"/>
+          </a:p>
+        </p:txBody>
+      </p:sp>
+      <p:sp>
+        <p:nvSpPr>
+          <p:cNvPr id="13" name="Rounded Rectangle 12"/>
+          <p:cNvSpPr/>
+          <p:nvPr/>
+        </p:nvSpPr>
+        <p:spPr>
+          <a:xfrm>
+            <a:off x="3701491" y="4856195"/>
+            <a:ext cx="3899001" cy="323331"/>
+          </a:xfrm>
+          <a:prstGeom prst="roundRect">
+            <a:avLst/>
+          </a:prstGeom>
+          <a:solidFill>
+            <a:srgbClr val="16303A"/>
+          </a:solidFill>
+          <a:ln>
+            <a:noFill/>
+          </a:ln>
+          <a:effectLst/>
+        </p:spPr>
+        <p:style>
+          <a:lnRef idx="1">
+            <a:schemeClr val="accent1"/>
+          </a:lnRef>
+          <a:fillRef idx="3">
+            <a:schemeClr val="accent1"/>
+          </a:fillRef>
+          <a:effectRef idx="2">
+            <a:schemeClr val="accent1"/>
+          </a:effectRef>
+          <a:fontRef idx="minor">
+            <a:schemeClr val="lt1"/>
+          </a:fontRef>
+        </p:style>
+        <p:txBody>
+          <a:bodyPr rtlCol="0" anchor="ctr"/>
+          <a:lstStyle/>
+          <a:p>
+            <a:pPr algn="ctr"/>
+          </a:p>
+        </p:txBody>
+      </p:sp>
+      <p:sp>
+        <p:nvSpPr>
+          <p:cNvPr id="14" name="Rounded Rectangle 13"/>
+          <p:cNvSpPr/>
+          <p:nvPr/>
+        </p:nvSpPr>
+        <p:spPr>
+          <a:xfrm>
             <a:off x="7695590" y="4856195"/>
             <a:ext cx="779800" cy="323331"/>
           </a:xfrm>
@@ -22983,7 +23863,7 @@
       </p:sp>
       <p:sp>
         <p:nvSpPr>
-          <p:cNvPr id="13" name="Rounded Rectangle 12"/>
+          <p:cNvPr id="15" name="Rounded Rectangle 14"/>
           <p:cNvSpPr/>
           <p:nvPr/>
         </p:nvSpPr>
@@ -23027,7 +23907,7 @@
       </p:sp>
       <p:sp>
         <p:nvSpPr>
-          <p:cNvPr id="14" name="Rounded Rectangle 13"/>
+          <p:cNvPr id="16" name="Rounded Rectangle 15"/>
           <p:cNvSpPr/>
           <p:nvPr/>
         </p:nvSpPr>
@@ -23071,7 +23951,7 @@
       </p:sp>
       <p:sp>
         <p:nvSpPr>
-          <p:cNvPr id="15" name="TextBox 14"/>
+          <p:cNvPr id="17" name="TextBox 16"/>
           <p:cNvSpPr txBox="1"/>
           <p:nvPr/>
         </p:nvSpPr>
@@ -23630,7 +24510,7 @@
         <p:spPr>
           <a:xfrm>
             <a:off x="3606393" y="2554833"/>
-            <a:ext cx="4945075" cy="1806854"/>
+            <a:ext cx="4945075" cy="1730776"/>
           </a:xfrm>
           <a:prstGeom prst="roundRect">
             <a:avLst/>
@@ -23805,8 +24685,8 @@
         </p:nvSpPr>
         <p:spPr>
           <a:xfrm>
-            <a:off x="3701491" y="4856195"/>
-            <a:ext cx="3899001" cy="323331"/>
+            <a:off x="3701491" y="4409236"/>
+            <a:ext cx="1426463" cy="228234"/>
           </a:xfrm>
           <a:prstGeom prst="roundRect">
             <a:avLst/>
@@ -23849,6 +24729,94 @@
         </p:nvSpPr>
         <p:spPr>
           <a:xfrm>
+            <a:off x="5223052" y="4409236"/>
+            <a:ext cx="1426463" cy="228234"/>
+          </a:xfrm>
+          <a:prstGeom prst="roundRect">
+            <a:avLst/>
+          </a:prstGeom>
+          <a:solidFill>
+            <a:srgbClr val="16303A"/>
+          </a:solidFill>
+          <a:ln>
+            <a:noFill/>
+          </a:ln>
+          <a:effectLst/>
+        </p:spPr>
+        <p:style>
+          <a:lnRef idx="1">
+            <a:schemeClr val="accent1"/>
+          </a:lnRef>
+          <a:fillRef idx="3">
+            <a:schemeClr val="accent1"/>
+          </a:fillRef>
+          <a:effectRef idx="2">
+            <a:schemeClr val="accent1"/>
+          </a:effectRef>
+          <a:fontRef idx="minor">
+            <a:schemeClr val="lt1"/>
+          </a:fontRef>
+        </p:style>
+        <p:txBody>
+          <a:bodyPr rtlCol="0" anchor="ctr"/>
+          <a:lstStyle/>
+          <a:p>
+            <a:pPr algn="ctr"/>
+          </a:p>
+        </p:txBody>
+      </p:sp>
+      <p:sp>
+        <p:nvSpPr>
+          <p:cNvPr id="13" name="Rounded Rectangle 12"/>
+          <p:cNvSpPr/>
+          <p:nvPr/>
+        </p:nvSpPr>
+        <p:spPr>
+          <a:xfrm>
+            <a:off x="3701491" y="4856195"/>
+            <a:ext cx="3899001" cy="323331"/>
+          </a:xfrm>
+          <a:prstGeom prst="roundRect">
+            <a:avLst/>
+          </a:prstGeom>
+          <a:solidFill>
+            <a:srgbClr val="16303A"/>
+          </a:solidFill>
+          <a:ln>
+            <a:noFill/>
+          </a:ln>
+          <a:effectLst/>
+        </p:spPr>
+        <p:style>
+          <a:lnRef idx="1">
+            <a:schemeClr val="accent1"/>
+          </a:lnRef>
+          <a:fillRef idx="3">
+            <a:schemeClr val="accent1"/>
+          </a:fillRef>
+          <a:effectRef idx="2">
+            <a:schemeClr val="accent1"/>
+          </a:effectRef>
+          <a:fontRef idx="minor">
+            <a:schemeClr val="lt1"/>
+          </a:fontRef>
+        </p:style>
+        <p:txBody>
+          <a:bodyPr rtlCol="0" anchor="ctr"/>
+          <a:lstStyle/>
+          <a:p>
+            <a:pPr algn="ctr"/>
+          </a:p>
+        </p:txBody>
+      </p:sp>
+      <p:sp>
+        <p:nvSpPr>
+          <p:cNvPr id="14" name="Rounded Rectangle 13"/>
+          <p:cNvSpPr/>
+          <p:nvPr/>
+        </p:nvSpPr>
+        <p:spPr>
+          <a:xfrm>
             <a:off x="7695590" y="4856195"/>
             <a:ext cx="779800" cy="323331"/>
           </a:xfrm>
@@ -23887,7 +24855,7 @@
       </p:sp>
       <p:sp>
         <p:nvSpPr>
-          <p:cNvPr id="13" name="Rounded Rectangle 12"/>
+          <p:cNvPr id="15" name="Rounded Rectangle 14"/>
           <p:cNvSpPr/>
           <p:nvPr/>
         </p:nvSpPr>
@@ -23931,7 +24899,7 @@
       </p:sp>
       <p:sp>
         <p:nvSpPr>
-          <p:cNvPr id="14" name="Rounded Rectangle 13"/>
+          <p:cNvPr id="16" name="Rounded Rectangle 15"/>
           <p:cNvSpPr/>
           <p:nvPr/>
         </p:nvSpPr>
@@ -23975,7 +24943,7 @@
       </p:sp>
       <p:sp>
         <p:nvSpPr>
-          <p:cNvPr id="15" name="TextBox 14"/>
+          <p:cNvPr id="17" name="TextBox 16"/>
           <p:cNvSpPr txBox="1"/>
           <p:nvPr/>
         </p:nvSpPr>
@@ -26183,7 +27151,7 @@
         <p:spPr>
           <a:xfrm>
             <a:off x="3606393" y="2554833"/>
-            <a:ext cx="4945075" cy="1806854"/>
+            <a:ext cx="4945075" cy="1730776"/>
           </a:xfrm>
           <a:prstGeom prst="roundRect">
             <a:avLst/>
@@ -26358,8 +27326,8 @@
         </p:nvSpPr>
         <p:spPr>
           <a:xfrm>
-            <a:off x="3701491" y="4856195"/>
-            <a:ext cx="3899001" cy="323331"/>
+            <a:off x="3701491" y="4409236"/>
+            <a:ext cx="1426463" cy="228234"/>
           </a:xfrm>
           <a:prstGeom prst="roundRect">
             <a:avLst/>
@@ -26402,6 +27370,94 @@
         </p:nvSpPr>
         <p:spPr>
           <a:xfrm>
+            <a:off x="5223052" y="4409236"/>
+            <a:ext cx="1426463" cy="228234"/>
+          </a:xfrm>
+          <a:prstGeom prst="roundRect">
+            <a:avLst/>
+          </a:prstGeom>
+          <a:solidFill>
+            <a:srgbClr val="16303A"/>
+          </a:solidFill>
+          <a:ln>
+            <a:noFill/>
+          </a:ln>
+          <a:effectLst/>
+        </p:spPr>
+        <p:style>
+          <a:lnRef idx="1">
+            <a:schemeClr val="accent1"/>
+          </a:lnRef>
+          <a:fillRef idx="3">
+            <a:schemeClr val="accent1"/>
+          </a:fillRef>
+          <a:effectRef idx="2">
+            <a:schemeClr val="accent1"/>
+          </a:effectRef>
+          <a:fontRef idx="minor">
+            <a:schemeClr val="lt1"/>
+          </a:fontRef>
+        </p:style>
+        <p:txBody>
+          <a:bodyPr rtlCol="0" anchor="ctr"/>
+          <a:lstStyle/>
+          <a:p>
+            <a:pPr algn="ctr"/>
+          </a:p>
+        </p:txBody>
+      </p:sp>
+      <p:sp>
+        <p:nvSpPr>
+          <p:cNvPr id="13" name="Rounded Rectangle 12"/>
+          <p:cNvSpPr/>
+          <p:nvPr/>
+        </p:nvSpPr>
+        <p:spPr>
+          <a:xfrm>
+            <a:off x="3701491" y="4856195"/>
+            <a:ext cx="3899001" cy="323331"/>
+          </a:xfrm>
+          <a:prstGeom prst="roundRect">
+            <a:avLst/>
+          </a:prstGeom>
+          <a:solidFill>
+            <a:srgbClr val="16303A"/>
+          </a:solidFill>
+          <a:ln>
+            <a:noFill/>
+          </a:ln>
+          <a:effectLst/>
+        </p:spPr>
+        <p:style>
+          <a:lnRef idx="1">
+            <a:schemeClr val="accent1"/>
+          </a:lnRef>
+          <a:fillRef idx="3">
+            <a:schemeClr val="accent1"/>
+          </a:fillRef>
+          <a:effectRef idx="2">
+            <a:schemeClr val="accent1"/>
+          </a:effectRef>
+          <a:fontRef idx="minor">
+            <a:schemeClr val="lt1"/>
+          </a:fontRef>
+        </p:style>
+        <p:txBody>
+          <a:bodyPr rtlCol="0" anchor="ctr"/>
+          <a:lstStyle/>
+          <a:p>
+            <a:pPr algn="ctr"/>
+          </a:p>
+        </p:txBody>
+      </p:sp>
+      <p:sp>
+        <p:nvSpPr>
+          <p:cNvPr id="14" name="Rounded Rectangle 13"/>
+          <p:cNvSpPr/>
+          <p:nvPr/>
+        </p:nvSpPr>
+        <p:spPr>
+          <a:xfrm>
             <a:off x="7695590" y="4856195"/>
             <a:ext cx="779800" cy="323331"/>
           </a:xfrm>
@@ -26440,7 +27496,7 @@
       </p:sp>
       <p:sp>
         <p:nvSpPr>
-          <p:cNvPr id="13" name="Rounded Rectangle 12"/>
+          <p:cNvPr id="15" name="Rounded Rectangle 14"/>
           <p:cNvSpPr/>
           <p:nvPr/>
         </p:nvSpPr>
@@ -26484,7 +27540,7 @@
       </p:sp>
       <p:sp>
         <p:nvSpPr>
-          <p:cNvPr id="14" name="Rounded Rectangle 13"/>
+          <p:cNvPr id="16" name="Rounded Rectangle 15"/>
           <p:cNvSpPr/>
           <p:nvPr/>
         </p:nvSpPr>
@@ -26528,7 +27584,7 @@
       </p:sp>
       <p:sp>
         <p:nvSpPr>
-          <p:cNvPr id="15" name="TextBox 14"/>
+          <p:cNvPr id="17" name="TextBox 16"/>
           <p:cNvSpPr txBox="1"/>
           <p:nvPr/>
         </p:nvSpPr>
@@ -27087,7 +28143,7 @@
         <p:spPr>
           <a:xfrm>
             <a:off x="3606393" y="2554833"/>
-            <a:ext cx="4945075" cy="1806854"/>
+            <a:ext cx="4945075" cy="1730776"/>
           </a:xfrm>
           <a:prstGeom prst="roundRect">
             <a:avLst/>
@@ -27262,8 +28318,8 @@
         </p:nvSpPr>
         <p:spPr>
           <a:xfrm>
-            <a:off x="3701491" y="4856195"/>
-            <a:ext cx="3899001" cy="323331"/>
+            <a:off x="3701491" y="4409236"/>
+            <a:ext cx="1426463" cy="228234"/>
           </a:xfrm>
           <a:prstGeom prst="roundRect">
             <a:avLst/>
@@ -27306,6 +28362,94 @@
         </p:nvSpPr>
         <p:spPr>
           <a:xfrm>
+            <a:off x="5223052" y="4409236"/>
+            <a:ext cx="1426463" cy="228234"/>
+          </a:xfrm>
+          <a:prstGeom prst="roundRect">
+            <a:avLst/>
+          </a:prstGeom>
+          <a:solidFill>
+            <a:srgbClr val="16303A"/>
+          </a:solidFill>
+          <a:ln>
+            <a:noFill/>
+          </a:ln>
+          <a:effectLst/>
+        </p:spPr>
+        <p:style>
+          <a:lnRef idx="1">
+            <a:schemeClr val="accent1"/>
+          </a:lnRef>
+          <a:fillRef idx="3">
+            <a:schemeClr val="accent1"/>
+          </a:fillRef>
+          <a:effectRef idx="2">
+            <a:schemeClr val="accent1"/>
+          </a:effectRef>
+          <a:fontRef idx="minor">
+            <a:schemeClr val="lt1"/>
+          </a:fontRef>
+        </p:style>
+        <p:txBody>
+          <a:bodyPr rtlCol="0" anchor="ctr"/>
+          <a:lstStyle/>
+          <a:p>
+            <a:pPr algn="ctr"/>
+          </a:p>
+        </p:txBody>
+      </p:sp>
+      <p:sp>
+        <p:nvSpPr>
+          <p:cNvPr id="13" name="Rounded Rectangle 12"/>
+          <p:cNvSpPr/>
+          <p:nvPr/>
+        </p:nvSpPr>
+        <p:spPr>
+          <a:xfrm>
+            <a:off x="3701491" y="4856195"/>
+            <a:ext cx="3899001" cy="323331"/>
+          </a:xfrm>
+          <a:prstGeom prst="roundRect">
+            <a:avLst/>
+          </a:prstGeom>
+          <a:solidFill>
+            <a:srgbClr val="16303A"/>
+          </a:solidFill>
+          <a:ln>
+            <a:noFill/>
+          </a:ln>
+          <a:effectLst/>
+        </p:spPr>
+        <p:style>
+          <a:lnRef idx="1">
+            <a:schemeClr val="accent1"/>
+          </a:lnRef>
+          <a:fillRef idx="3">
+            <a:schemeClr val="accent1"/>
+          </a:fillRef>
+          <a:effectRef idx="2">
+            <a:schemeClr val="accent1"/>
+          </a:effectRef>
+          <a:fontRef idx="minor">
+            <a:schemeClr val="lt1"/>
+          </a:fontRef>
+        </p:style>
+        <p:txBody>
+          <a:bodyPr rtlCol="0" anchor="ctr"/>
+          <a:lstStyle/>
+          <a:p>
+            <a:pPr algn="ctr"/>
+          </a:p>
+        </p:txBody>
+      </p:sp>
+      <p:sp>
+        <p:nvSpPr>
+          <p:cNvPr id="14" name="Rounded Rectangle 13"/>
+          <p:cNvSpPr/>
+          <p:nvPr/>
+        </p:nvSpPr>
+        <p:spPr>
+          <a:xfrm>
             <a:off x="7695590" y="4856195"/>
             <a:ext cx="779800" cy="323331"/>
           </a:xfrm>
@@ -27344,7 +28488,7 @@
       </p:sp>
       <p:sp>
         <p:nvSpPr>
-          <p:cNvPr id="13" name="Rounded Rectangle 12"/>
+          <p:cNvPr id="15" name="Rounded Rectangle 14"/>
           <p:cNvSpPr/>
           <p:nvPr/>
         </p:nvSpPr>
@@ -27388,7 +28532,7 @@
       </p:sp>
       <p:sp>
         <p:nvSpPr>
-          <p:cNvPr id="14" name="Rounded Rectangle 13"/>
+          <p:cNvPr id="16" name="Rounded Rectangle 15"/>
           <p:cNvSpPr/>
           <p:nvPr/>
         </p:nvSpPr>
@@ -27432,7 +28576,7 @@
       </p:sp>
       <p:sp>
         <p:nvSpPr>
-          <p:cNvPr id="15" name="TextBox 14"/>
+          <p:cNvPr id="17" name="TextBox 16"/>
           <p:cNvSpPr txBox="1"/>
           <p:nvPr/>
         </p:nvSpPr>
@@ -27696,7 +28840,7 @@
         <p:spPr>
           <a:xfrm>
             <a:off x="3606393" y="2554833"/>
-            <a:ext cx="4945075" cy="1806854"/>
+            <a:ext cx="4945075" cy="1730776"/>
           </a:xfrm>
           <a:prstGeom prst="roundRect">
             <a:avLst/>
@@ -27871,8 +29015,8 @@
         </p:nvSpPr>
         <p:spPr>
           <a:xfrm>
-            <a:off x="3701491" y="4856195"/>
-            <a:ext cx="3899001" cy="323331"/>
+            <a:off x="3701491" y="4409236"/>
+            <a:ext cx="1426463" cy="228234"/>
           </a:xfrm>
           <a:prstGeom prst="roundRect">
             <a:avLst/>
@@ -27915,6 +29059,94 @@
         </p:nvSpPr>
         <p:spPr>
           <a:xfrm>
+            <a:off x="5223052" y="4409236"/>
+            <a:ext cx="1426463" cy="228234"/>
+          </a:xfrm>
+          <a:prstGeom prst="roundRect">
+            <a:avLst/>
+          </a:prstGeom>
+          <a:solidFill>
+            <a:srgbClr val="16303A"/>
+          </a:solidFill>
+          <a:ln>
+            <a:noFill/>
+          </a:ln>
+          <a:effectLst/>
+        </p:spPr>
+        <p:style>
+          <a:lnRef idx="1">
+            <a:schemeClr val="accent1"/>
+          </a:lnRef>
+          <a:fillRef idx="3">
+            <a:schemeClr val="accent1"/>
+          </a:fillRef>
+          <a:effectRef idx="2">
+            <a:schemeClr val="accent1"/>
+          </a:effectRef>
+          <a:fontRef idx="minor">
+            <a:schemeClr val="lt1"/>
+          </a:fontRef>
+        </p:style>
+        <p:txBody>
+          <a:bodyPr rtlCol="0" anchor="ctr"/>
+          <a:lstStyle/>
+          <a:p>
+            <a:pPr algn="ctr"/>
+          </a:p>
+        </p:txBody>
+      </p:sp>
+      <p:sp>
+        <p:nvSpPr>
+          <p:cNvPr id="13" name="Rounded Rectangle 12"/>
+          <p:cNvSpPr/>
+          <p:nvPr/>
+        </p:nvSpPr>
+        <p:spPr>
+          <a:xfrm>
+            <a:off x="3701491" y="4856195"/>
+            <a:ext cx="3899001" cy="323331"/>
+          </a:xfrm>
+          <a:prstGeom prst="roundRect">
+            <a:avLst/>
+          </a:prstGeom>
+          <a:solidFill>
+            <a:srgbClr val="16303A"/>
+          </a:solidFill>
+          <a:ln>
+            <a:noFill/>
+          </a:ln>
+          <a:effectLst/>
+        </p:spPr>
+        <p:style>
+          <a:lnRef idx="1">
+            <a:schemeClr val="accent1"/>
+          </a:lnRef>
+          <a:fillRef idx="3">
+            <a:schemeClr val="accent1"/>
+          </a:fillRef>
+          <a:effectRef idx="2">
+            <a:schemeClr val="accent1"/>
+          </a:effectRef>
+          <a:fontRef idx="minor">
+            <a:schemeClr val="lt1"/>
+          </a:fontRef>
+        </p:style>
+        <p:txBody>
+          <a:bodyPr rtlCol="0" anchor="ctr"/>
+          <a:lstStyle/>
+          <a:p>
+            <a:pPr algn="ctr"/>
+          </a:p>
+        </p:txBody>
+      </p:sp>
+      <p:sp>
+        <p:nvSpPr>
+          <p:cNvPr id="14" name="Rounded Rectangle 13"/>
+          <p:cNvSpPr/>
+          <p:nvPr/>
+        </p:nvSpPr>
+        <p:spPr>
+          <a:xfrm>
             <a:off x="7695590" y="4856195"/>
             <a:ext cx="779800" cy="323331"/>
           </a:xfrm>
@@ -27953,7 +29185,7 @@
       </p:sp>
       <p:sp>
         <p:nvSpPr>
-          <p:cNvPr id="13" name="Rounded Rectangle 12"/>
+          <p:cNvPr id="15" name="Rounded Rectangle 14"/>
           <p:cNvSpPr/>
           <p:nvPr/>
         </p:nvSpPr>
@@ -27997,7 +29229,7 @@
       </p:sp>
       <p:sp>
         <p:nvSpPr>
-          <p:cNvPr id="14" name="Rounded Rectangle 13"/>
+          <p:cNvPr id="16" name="Rounded Rectangle 15"/>
           <p:cNvSpPr/>
           <p:nvPr/>
         </p:nvSpPr>
@@ -28041,7 +29273,7 @@
       </p:sp>
       <p:sp>
         <p:nvSpPr>
-          <p:cNvPr id="15" name="TextBox 14"/>
+          <p:cNvPr id="17" name="TextBox 16"/>
           <p:cNvSpPr txBox="1"/>
           <p:nvPr/>
         </p:nvSpPr>
@@ -28610,7 +29842,7 @@
         <p:spPr>
           <a:xfrm>
             <a:off x="3606393" y="2554833"/>
-            <a:ext cx="4945075" cy="1806854"/>
+            <a:ext cx="4945075" cy="1730776"/>
           </a:xfrm>
           <a:prstGeom prst="roundRect">
             <a:avLst/>
@@ -28785,8 +30017,8 @@
         </p:nvSpPr>
         <p:spPr>
           <a:xfrm>
-            <a:off x="3701491" y="4856195"/>
-            <a:ext cx="3899001" cy="323331"/>
+            <a:off x="3701491" y="4409236"/>
+            <a:ext cx="1426463" cy="228234"/>
           </a:xfrm>
           <a:prstGeom prst="roundRect">
             <a:avLst/>
@@ -28829,6 +30061,94 @@
         </p:nvSpPr>
         <p:spPr>
           <a:xfrm>
+            <a:off x="5223052" y="4409236"/>
+            <a:ext cx="1426463" cy="228234"/>
+          </a:xfrm>
+          <a:prstGeom prst="roundRect">
+            <a:avLst/>
+          </a:prstGeom>
+          <a:solidFill>
+            <a:srgbClr val="16303A"/>
+          </a:solidFill>
+          <a:ln>
+            <a:noFill/>
+          </a:ln>
+          <a:effectLst/>
+        </p:spPr>
+        <p:style>
+          <a:lnRef idx="1">
+            <a:schemeClr val="accent1"/>
+          </a:lnRef>
+          <a:fillRef idx="3">
+            <a:schemeClr val="accent1"/>
+          </a:fillRef>
+          <a:effectRef idx="2">
+            <a:schemeClr val="accent1"/>
+          </a:effectRef>
+          <a:fontRef idx="minor">
+            <a:schemeClr val="lt1"/>
+          </a:fontRef>
+        </p:style>
+        <p:txBody>
+          <a:bodyPr rtlCol="0" anchor="ctr"/>
+          <a:lstStyle/>
+          <a:p>
+            <a:pPr algn="ctr"/>
+          </a:p>
+        </p:txBody>
+      </p:sp>
+      <p:sp>
+        <p:nvSpPr>
+          <p:cNvPr id="13" name="Rounded Rectangle 12"/>
+          <p:cNvSpPr/>
+          <p:nvPr/>
+        </p:nvSpPr>
+        <p:spPr>
+          <a:xfrm>
+            <a:off x="3701491" y="4856195"/>
+            <a:ext cx="3899001" cy="323331"/>
+          </a:xfrm>
+          <a:prstGeom prst="roundRect">
+            <a:avLst/>
+          </a:prstGeom>
+          <a:solidFill>
+            <a:srgbClr val="16303A"/>
+          </a:solidFill>
+          <a:ln>
+            <a:noFill/>
+          </a:ln>
+          <a:effectLst/>
+        </p:spPr>
+        <p:style>
+          <a:lnRef idx="1">
+            <a:schemeClr val="accent1"/>
+          </a:lnRef>
+          <a:fillRef idx="3">
+            <a:schemeClr val="accent1"/>
+          </a:fillRef>
+          <a:effectRef idx="2">
+            <a:schemeClr val="accent1"/>
+          </a:effectRef>
+          <a:fontRef idx="minor">
+            <a:schemeClr val="lt1"/>
+          </a:fontRef>
+        </p:style>
+        <p:txBody>
+          <a:bodyPr rtlCol="0" anchor="ctr"/>
+          <a:lstStyle/>
+          <a:p>
+            <a:pPr algn="ctr"/>
+          </a:p>
+        </p:txBody>
+      </p:sp>
+      <p:sp>
+        <p:nvSpPr>
+          <p:cNvPr id="14" name="Rounded Rectangle 13"/>
+          <p:cNvSpPr/>
+          <p:nvPr/>
+        </p:nvSpPr>
+        <p:spPr>
+          <a:xfrm>
             <a:off x="7695590" y="4856195"/>
             <a:ext cx="779800" cy="323331"/>
           </a:xfrm>
@@ -28867,7 +30187,7 @@
       </p:sp>
       <p:sp>
         <p:nvSpPr>
-          <p:cNvPr id="13" name="Rounded Rectangle 12"/>
+          <p:cNvPr id="15" name="Rounded Rectangle 14"/>
           <p:cNvSpPr/>
           <p:nvPr/>
         </p:nvSpPr>
@@ -28911,7 +30231,7 @@
       </p:sp>
       <p:sp>
         <p:nvSpPr>
-          <p:cNvPr id="14" name="Rounded Rectangle 13"/>
+          <p:cNvPr id="16" name="Rounded Rectangle 15"/>
           <p:cNvSpPr/>
           <p:nvPr/>
         </p:nvSpPr>
@@ -28955,7 +30275,7 @@
       </p:sp>
       <p:sp>
         <p:nvSpPr>
-          <p:cNvPr id="15" name="TextBox 14"/>
+          <p:cNvPr id="17" name="TextBox 16"/>
           <p:cNvSpPr txBox="1"/>
           <p:nvPr/>
         </p:nvSpPr>
@@ -29349,7 +30669,7 @@
         <p:spPr>
           <a:xfrm>
             <a:off x="3606393" y="2554833"/>
-            <a:ext cx="4945075" cy="1806854"/>
+            <a:ext cx="4945075" cy="1730776"/>
           </a:xfrm>
           <a:prstGeom prst="roundRect">
             <a:avLst/>
@@ -29524,8 +30844,8 @@
         </p:nvSpPr>
         <p:spPr>
           <a:xfrm>
-            <a:off x="3701491" y="4856195"/>
-            <a:ext cx="3899001" cy="323331"/>
+            <a:off x="3701491" y="4409236"/>
+            <a:ext cx="1426463" cy="228234"/>
           </a:xfrm>
           <a:prstGeom prst="roundRect">
             <a:avLst/>
@@ -29568,6 +30888,94 @@
         </p:nvSpPr>
         <p:spPr>
           <a:xfrm>
+            <a:off x="5223052" y="4409236"/>
+            <a:ext cx="1426463" cy="228234"/>
+          </a:xfrm>
+          <a:prstGeom prst="roundRect">
+            <a:avLst/>
+          </a:prstGeom>
+          <a:solidFill>
+            <a:srgbClr val="16303A"/>
+          </a:solidFill>
+          <a:ln>
+            <a:noFill/>
+          </a:ln>
+          <a:effectLst/>
+        </p:spPr>
+        <p:style>
+          <a:lnRef idx="1">
+            <a:schemeClr val="accent1"/>
+          </a:lnRef>
+          <a:fillRef idx="3">
+            <a:schemeClr val="accent1"/>
+          </a:fillRef>
+          <a:effectRef idx="2">
+            <a:schemeClr val="accent1"/>
+          </a:effectRef>
+          <a:fontRef idx="minor">
+            <a:schemeClr val="lt1"/>
+          </a:fontRef>
+        </p:style>
+        <p:txBody>
+          <a:bodyPr rtlCol="0" anchor="ctr"/>
+          <a:lstStyle/>
+          <a:p>
+            <a:pPr algn="ctr"/>
+          </a:p>
+        </p:txBody>
+      </p:sp>
+      <p:sp>
+        <p:nvSpPr>
+          <p:cNvPr id="13" name="Rounded Rectangle 12"/>
+          <p:cNvSpPr/>
+          <p:nvPr/>
+        </p:nvSpPr>
+        <p:spPr>
+          <a:xfrm>
+            <a:off x="3701491" y="4856195"/>
+            <a:ext cx="3899001" cy="323331"/>
+          </a:xfrm>
+          <a:prstGeom prst="roundRect">
+            <a:avLst/>
+          </a:prstGeom>
+          <a:solidFill>
+            <a:srgbClr val="16303A"/>
+          </a:solidFill>
+          <a:ln>
+            <a:noFill/>
+          </a:ln>
+          <a:effectLst/>
+        </p:spPr>
+        <p:style>
+          <a:lnRef idx="1">
+            <a:schemeClr val="accent1"/>
+          </a:lnRef>
+          <a:fillRef idx="3">
+            <a:schemeClr val="accent1"/>
+          </a:fillRef>
+          <a:effectRef idx="2">
+            <a:schemeClr val="accent1"/>
+          </a:effectRef>
+          <a:fontRef idx="minor">
+            <a:schemeClr val="lt1"/>
+          </a:fontRef>
+        </p:style>
+        <p:txBody>
+          <a:bodyPr rtlCol="0" anchor="ctr"/>
+          <a:lstStyle/>
+          <a:p>
+            <a:pPr algn="ctr"/>
+          </a:p>
+        </p:txBody>
+      </p:sp>
+      <p:sp>
+        <p:nvSpPr>
+          <p:cNvPr id="14" name="Rounded Rectangle 13"/>
+          <p:cNvSpPr/>
+          <p:nvPr/>
+        </p:nvSpPr>
+        <p:spPr>
+          <a:xfrm>
             <a:off x="7695590" y="4856195"/>
             <a:ext cx="779800" cy="323331"/>
           </a:xfrm>
@@ -29606,7 +31014,7 @@
       </p:sp>
       <p:sp>
         <p:nvSpPr>
-          <p:cNvPr id="13" name="Rounded Rectangle 12"/>
+          <p:cNvPr id="15" name="Rounded Rectangle 14"/>
           <p:cNvSpPr/>
           <p:nvPr/>
         </p:nvSpPr>
@@ -29650,7 +31058,7 @@
       </p:sp>
       <p:sp>
         <p:nvSpPr>
-          <p:cNvPr id="14" name="Rounded Rectangle 13"/>
+          <p:cNvPr id="16" name="Rounded Rectangle 15"/>
           <p:cNvSpPr/>
           <p:nvPr/>
         </p:nvSpPr>
@@ -29694,7 +31102,7 @@
       </p:sp>
       <p:sp>
         <p:nvSpPr>
-          <p:cNvPr id="15" name="TextBox 14"/>
+          <p:cNvPr id="17" name="TextBox 16"/>
           <p:cNvSpPr txBox="1"/>
           <p:nvPr/>
         </p:nvSpPr>
@@ -30288,7 +31696,7 @@
         <p:spPr>
           <a:xfrm>
             <a:off x="3606393" y="2554833"/>
-            <a:ext cx="4945075" cy="1806854"/>
+            <a:ext cx="4945075" cy="1730776"/>
           </a:xfrm>
           <a:prstGeom prst="roundRect">
             <a:avLst/>
@@ -30463,8 +31871,8 @@
         </p:nvSpPr>
         <p:spPr>
           <a:xfrm>
-            <a:off x="3701491" y="4856195"/>
-            <a:ext cx="3899001" cy="323331"/>
+            <a:off x="3701491" y="4409236"/>
+            <a:ext cx="1426463" cy="228234"/>
           </a:xfrm>
           <a:prstGeom prst="roundRect">
             <a:avLst/>
@@ -30507,6 +31915,94 @@
         </p:nvSpPr>
         <p:spPr>
           <a:xfrm>
+            <a:off x="5223052" y="4409236"/>
+            <a:ext cx="1426463" cy="228234"/>
+          </a:xfrm>
+          <a:prstGeom prst="roundRect">
+            <a:avLst/>
+          </a:prstGeom>
+          <a:solidFill>
+            <a:srgbClr val="16303A"/>
+          </a:solidFill>
+          <a:ln>
+            <a:noFill/>
+          </a:ln>
+          <a:effectLst/>
+        </p:spPr>
+        <p:style>
+          <a:lnRef idx="1">
+            <a:schemeClr val="accent1"/>
+          </a:lnRef>
+          <a:fillRef idx="3">
+            <a:schemeClr val="accent1"/>
+          </a:fillRef>
+          <a:effectRef idx="2">
+            <a:schemeClr val="accent1"/>
+          </a:effectRef>
+          <a:fontRef idx="minor">
+            <a:schemeClr val="lt1"/>
+          </a:fontRef>
+        </p:style>
+        <p:txBody>
+          <a:bodyPr rtlCol="0" anchor="ctr"/>
+          <a:lstStyle/>
+          <a:p>
+            <a:pPr algn="ctr"/>
+          </a:p>
+        </p:txBody>
+      </p:sp>
+      <p:sp>
+        <p:nvSpPr>
+          <p:cNvPr id="13" name="Rounded Rectangle 12"/>
+          <p:cNvSpPr/>
+          <p:nvPr/>
+        </p:nvSpPr>
+        <p:spPr>
+          <a:xfrm>
+            <a:off x="3701491" y="4856195"/>
+            <a:ext cx="3899001" cy="323331"/>
+          </a:xfrm>
+          <a:prstGeom prst="roundRect">
+            <a:avLst/>
+          </a:prstGeom>
+          <a:solidFill>
+            <a:srgbClr val="16303A"/>
+          </a:solidFill>
+          <a:ln>
+            <a:noFill/>
+          </a:ln>
+          <a:effectLst/>
+        </p:spPr>
+        <p:style>
+          <a:lnRef idx="1">
+            <a:schemeClr val="accent1"/>
+          </a:lnRef>
+          <a:fillRef idx="3">
+            <a:schemeClr val="accent1"/>
+          </a:fillRef>
+          <a:effectRef idx="2">
+            <a:schemeClr val="accent1"/>
+          </a:effectRef>
+          <a:fontRef idx="minor">
+            <a:schemeClr val="lt1"/>
+          </a:fontRef>
+        </p:style>
+        <p:txBody>
+          <a:bodyPr rtlCol="0" anchor="ctr"/>
+          <a:lstStyle/>
+          <a:p>
+            <a:pPr algn="ctr"/>
+          </a:p>
+        </p:txBody>
+      </p:sp>
+      <p:sp>
+        <p:nvSpPr>
+          <p:cNvPr id="14" name="Rounded Rectangle 13"/>
+          <p:cNvSpPr/>
+          <p:nvPr/>
+        </p:nvSpPr>
+        <p:spPr>
+          <a:xfrm>
             <a:off x="7695590" y="4856195"/>
             <a:ext cx="779800" cy="323331"/>
           </a:xfrm>
@@ -30545,7 +32041,7 @@
       </p:sp>
       <p:sp>
         <p:nvSpPr>
-          <p:cNvPr id="13" name="Rounded Rectangle 12"/>
+          <p:cNvPr id="15" name="Rounded Rectangle 14"/>
           <p:cNvSpPr/>
           <p:nvPr/>
         </p:nvSpPr>
@@ -30589,7 +32085,7 @@
       </p:sp>
       <p:sp>
         <p:nvSpPr>
-          <p:cNvPr id="14" name="Rounded Rectangle 13"/>
+          <p:cNvPr id="16" name="Rounded Rectangle 15"/>
           <p:cNvSpPr/>
           <p:nvPr/>
         </p:nvSpPr>
@@ -30633,7 +32129,7 @@
       </p:sp>
       <p:sp>
         <p:nvSpPr>
-          <p:cNvPr id="15" name="TextBox 14"/>
+          <p:cNvPr id="17" name="TextBox 16"/>
           <p:cNvSpPr txBox="1"/>
           <p:nvPr/>
         </p:nvSpPr>
@@ -32197,7 +33693,7 @@
         <p:spPr>
           <a:xfrm>
             <a:off x="3606393" y="2554833"/>
-            <a:ext cx="4945075" cy="1806854"/>
+            <a:ext cx="4945075" cy="1730776"/>
           </a:xfrm>
           <a:prstGeom prst="roundRect">
             <a:avLst/>
@@ -32372,8 +33868,8 @@
         </p:nvSpPr>
         <p:spPr>
           <a:xfrm>
-            <a:off x="3701491" y="4856195"/>
-            <a:ext cx="3899001" cy="323331"/>
+            <a:off x="3701491" y="4409236"/>
+            <a:ext cx="1426463" cy="228234"/>
           </a:xfrm>
           <a:prstGeom prst="roundRect">
             <a:avLst/>
@@ -32416,6 +33912,94 @@
         </p:nvSpPr>
         <p:spPr>
           <a:xfrm>
+            <a:off x="5223052" y="4409236"/>
+            <a:ext cx="1426463" cy="228234"/>
+          </a:xfrm>
+          <a:prstGeom prst="roundRect">
+            <a:avLst/>
+          </a:prstGeom>
+          <a:solidFill>
+            <a:srgbClr val="16303A"/>
+          </a:solidFill>
+          <a:ln>
+            <a:noFill/>
+          </a:ln>
+          <a:effectLst/>
+        </p:spPr>
+        <p:style>
+          <a:lnRef idx="1">
+            <a:schemeClr val="accent1"/>
+          </a:lnRef>
+          <a:fillRef idx="3">
+            <a:schemeClr val="accent1"/>
+          </a:fillRef>
+          <a:effectRef idx="2">
+            <a:schemeClr val="accent1"/>
+          </a:effectRef>
+          <a:fontRef idx="minor">
+            <a:schemeClr val="lt1"/>
+          </a:fontRef>
+        </p:style>
+        <p:txBody>
+          <a:bodyPr rtlCol="0" anchor="ctr"/>
+          <a:lstStyle/>
+          <a:p>
+            <a:pPr algn="ctr"/>
+          </a:p>
+        </p:txBody>
+      </p:sp>
+      <p:sp>
+        <p:nvSpPr>
+          <p:cNvPr id="13" name="Rounded Rectangle 12"/>
+          <p:cNvSpPr/>
+          <p:nvPr/>
+        </p:nvSpPr>
+        <p:spPr>
+          <a:xfrm>
+            <a:off x="3701491" y="4856195"/>
+            <a:ext cx="3899001" cy="323331"/>
+          </a:xfrm>
+          <a:prstGeom prst="roundRect">
+            <a:avLst/>
+          </a:prstGeom>
+          <a:solidFill>
+            <a:srgbClr val="16303A"/>
+          </a:solidFill>
+          <a:ln>
+            <a:noFill/>
+          </a:ln>
+          <a:effectLst/>
+        </p:spPr>
+        <p:style>
+          <a:lnRef idx="1">
+            <a:schemeClr val="accent1"/>
+          </a:lnRef>
+          <a:fillRef idx="3">
+            <a:schemeClr val="accent1"/>
+          </a:fillRef>
+          <a:effectRef idx="2">
+            <a:schemeClr val="accent1"/>
+          </a:effectRef>
+          <a:fontRef idx="minor">
+            <a:schemeClr val="lt1"/>
+          </a:fontRef>
+        </p:style>
+        <p:txBody>
+          <a:bodyPr rtlCol="0" anchor="ctr"/>
+          <a:lstStyle/>
+          <a:p>
+            <a:pPr algn="ctr"/>
+          </a:p>
+        </p:txBody>
+      </p:sp>
+      <p:sp>
+        <p:nvSpPr>
+          <p:cNvPr id="14" name="Rounded Rectangle 13"/>
+          <p:cNvSpPr/>
+          <p:nvPr/>
+        </p:nvSpPr>
+        <p:spPr>
+          <a:xfrm>
             <a:off x="7695590" y="4856195"/>
             <a:ext cx="779800" cy="323331"/>
           </a:xfrm>
@@ -32454,7 +34038,7 @@
       </p:sp>
       <p:sp>
         <p:nvSpPr>
-          <p:cNvPr id="13" name="Rounded Rectangle 12"/>
+          <p:cNvPr id="15" name="Rounded Rectangle 14"/>
           <p:cNvSpPr/>
           <p:nvPr/>
         </p:nvSpPr>
@@ -32498,7 +34082,7 @@
       </p:sp>
       <p:sp>
         <p:nvSpPr>
-          <p:cNvPr id="14" name="Rounded Rectangle 13"/>
+          <p:cNvPr id="16" name="Rounded Rectangle 15"/>
           <p:cNvSpPr/>
           <p:nvPr/>
         </p:nvSpPr>
@@ -32542,7 +34126,7 @@
       </p:sp>
       <p:sp>
         <p:nvSpPr>
-          <p:cNvPr id="15" name="TextBox 14"/>
+          <p:cNvPr id="17" name="TextBox 16"/>
           <p:cNvSpPr txBox="1"/>
           <p:nvPr/>
         </p:nvSpPr>
@@ -33391,7 +34975,7 @@
         <p:spPr>
           <a:xfrm>
             <a:off x="3606393" y="2554833"/>
-            <a:ext cx="4945075" cy="1806854"/>
+            <a:ext cx="4945075" cy="1730776"/>
           </a:xfrm>
           <a:prstGeom prst="roundRect">
             <a:avLst/>
@@ -33566,8 +35150,8 @@
         </p:nvSpPr>
         <p:spPr>
           <a:xfrm>
-            <a:off x="3701491" y="4856195"/>
-            <a:ext cx="3899001" cy="323331"/>
+            <a:off x="3701491" y="4409236"/>
+            <a:ext cx="1426463" cy="228234"/>
           </a:xfrm>
           <a:prstGeom prst="roundRect">
             <a:avLst/>
@@ -33610,6 +35194,94 @@
         </p:nvSpPr>
         <p:spPr>
           <a:xfrm>
+            <a:off x="5223052" y="4409236"/>
+            <a:ext cx="1426463" cy="228234"/>
+          </a:xfrm>
+          <a:prstGeom prst="roundRect">
+            <a:avLst/>
+          </a:prstGeom>
+          <a:solidFill>
+            <a:srgbClr val="16303A"/>
+          </a:solidFill>
+          <a:ln>
+            <a:noFill/>
+          </a:ln>
+          <a:effectLst/>
+        </p:spPr>
+        <p:style>
+          <a:lnRef idx="1">
+            <a:schemeClr val="accent1"/>
+          </a:lnRef>
+          <a:fillRef idx="3">
+            <a:schemeClr val="accent1"/>
+          </a:fillRef>
+          <a:effectRef idx="2">
+            <a:schemeClr val="accent1"/>
+          </a:effectRef>
+          <a:fontRef idx="minor">
+            <a:schemeClr val="lt1"/>
+          </a:fontRef>
+        </p:style>
+        <p:txBody>
+          <a:bodyPr rtlCol="0" anchor="ctr"/>
+          <a:lstStyle/>
+          <a:p>
+            <a:pPr algn="ctr"/>
+          </a:p>
+        </p:txBody>
+      </p:sp>
+      <p:sp>
+        <p:nvSpPr>
+          <p:cNvPr id="13" name="Rounded Rectangle 12"/>
+          <p:cNvSpPr/>
+          <p:nvPr/>
+        </p:nvSpPr>
+        <p:spPr>
+          <a:xfrm>
+            <a:off x="3701491" y="4856195"/>
+            <a:ext cx="3899001" cy="323331"/>
+          </a:xfrm>
+          <a:prstGeom prst="roundRect">
+            <a:avLst/>
+          </a:prstGeom>
+          <a:solidFill>
+            <a:srgbClr val="16303A"/>
+          </a:solidFill>
+          <a:ln>
+            <a:noFill/>
+          </a:ln>
+          <a:effectLst/>
+        </p:spPr>
+        <p:style>
+          <a:lnRef idx="1">
+            <a:schemeClr val="accent1"/>
+          </a:lnRef>
+          <a:fillRef idx="3">
+            <a:schemeClr val="accent1"/>
+          </a:fillRef>
+          <a:effectRef idx="2">
+            <a:schemeClr val="accent1"/>
+          </a:effectRef>
+          <a:fontRef idx="minor">
+            <a:schemeClr val="lt1"/>
+          </a:fontRef>
+        </p:style>
+        <p:txBody>
+          <a:bodyPr rtlCol="0" anchor="ctr"/>
+          <a:lstStyle/>
+          <a:p>
+            <a:pPr algn="ctr"/>
+          </a:p>
+        </p:txBody>
+      </p:sp>
+      <p:sp>
+        <p:nvSpPr>
+          <p:cNvPr id="14" name="Rounded Rectangle 13"/>
+          <p:cNvSpPr/>
+          <p:nvPr/>
+        </p:nvSpPr>
+        <p:spPr>
+          <a:xfrm>
             <a:off x="7695590" y="4856195"/>
             <a:ext cx="779800" cy="323331"/>
           </a:xfrm>
@@ -33648,7 +35320,7 @@
       </p:sp>
       <p:sp>
         <p:nvSpPr>
-          <p:cNvPr id="13" name="Rounded Rectangle 12"/>
+          <p:cNvPr id="15" name="Rounded Rectangle 14"/>
           <p:cNvSpPr/>
           <p:nvPr/>
         </p:nvSpPr>
@@ -33692,7 +35364,7 @@
       </p:sp>
       <p:sp>
         <p:nvSpPr>
-          <p:cNvPr id="14" name="Rounded Rectangle 13"/>
+          <p:cNvPr id="16" name="Rounded Rectangle 15"/>
           <p:cNvSpPr/>
           <p:nvPr/>
         </p:nvSpPr>
@@ -33736,7 +35408,7 @@
       </p:sp>
       <p:sp>
         <p:nvSpPr>
-          <p:cNvPr id="15" name="TextBox 14"/>
+          <p:cNvPr id="17" name="TextBox 16"/>
           <p:cNvSpPr txBox="1"/>
           <p:nvPr/>
         </p:nvSpPr>
@@ -34000,7 +35672,7 @@
         <p:spPr>
           <a:xfrm>
             <a:off x="3606393" y="2554833"/>
-            <a:ext cx="4945075" cy="1806854"/>
+            <a:ext cx="4945075" cy="1730776"/>
           </a:xfrm>
           <a:prstGeom prst="roundRect">
             <a:avLst/>
@@ -34175,8 +35847,8 @@
         </p:nvSpPr>
         <p:spPr>
           <a:xfrm>
-            <a:off x="3701491" y="4856195"/>
-            <a:ext cx="3899001" cy="323331"/>
+            <a:off x="3701491" y="4409236"/>
+            <a:ext cx="1426463" cy="228234"/>
           </a:xfrm>
           <a:prstGeom prst="roundRect">
             <a:avLst/>
@@ -34219,6 +35891,94 @@
         </p:nvSpPr>
         <p:spPr>
           <a:xfrm>
+            <a:off x="5223052" y="4409236"/>
+            <a:ext cx="1426463" cy="228234"/>
+          </a:xfrm>
+          <a:prstGeom prst="roundRect">
+            <a:avLst/>
+          </a:prstGeom>
+          <a:solidFill>
+            <a:srgbClr val="16303A"/>
+          </a:solidFill>
+          <a:ln>
+            <a:noFill/>
+          </a:ln>
+          <a:effectLst/>
+        </p:spPr>
+        <p:style>
+          <a:lnRef idx="1">
+            <a:schemeClr val="accent1"/>
+          </a:lnRef>
+          <a:fillRef idx="3">
+            <a:schemeClr val="accent1"/>
+          </a:fillRef>
+          <a:effectRef idx="2">
+            <a:schemeClr val="accent1"/>
+          </a:effectRef>
+          <a:fontRef idx="minor">
+            <a:schemeClr val="lt1"/>
+          </a:fontRef>
+        </p:style>
+        <p:txBody>
+          <a:bodyPr rtlCol="0" anchor="ctr"/>
+          <a:lstStyle/>
+          <a:p>
+            <a:pPr algn="ctr"/>
+          </a:p>
+        </p:txBody>
+      </p:sp>
+      <p:sp>
+        <p:nvSpPr>
+          <p:cNvPr id="13" name="Rounded Rectangle 12"/>
+          <p:cNvSpPr/>
+          <p:nvPr/>
+        </p:nvSpPr>
+        <p:spPr>
+          <a:xfrm>
+            <a:off x="3701491" y="4856195"/>
+            <a:ext cx="3899001" cy="323331"/>
+          </a:xfrm>
+          <a:prstGeom prst="roundRect">
+            <a:avLst/>
+          </a:prstGeom>
+          <a:solidFill>
+            <a:srgbClr val="16303A"/>
+          </a:solidFill>
+          <a:ln>
+            <a:noFill/>
+          </a:ln>
+          <a:effectLst/>
+        </p:spPr>
+        <p:style>
+          <a:lnRef idx="1">
+            <a:schemeClr val="accent1"/>
+          </a:lnRef>
+          <a:fillRef idx="3">
+            <a:schemeClr val="accent1"/>
+          </a:fillRef>
+          <a:effectRef idx="2">
+            <a:schemeClr val="accent1"/>
+          </a:effectRef>
+          <a:fontRef idx="minor">
+            <a:schemeClr val="lt1"/>
+          </a:fontRef>
+        </p:style>
+        <p:txBody>
+          <a:bodyPr rtlCol="0" anchor="ctr"/>
+          <a:lstStyle/>
+          <a:p>
+            <a:pPr algn="ctr"/>
+          </a:p>
+        </p:txBody>
+      </p:sp>
+      <p:sp>
+        <p:nvSpPr>
+          <p:cNvPr id="14" name="Rounded Rectangle 13"/>
+          <p:cNvSpPr/>
+          <p:nvPr/>
+        </p:nvSpPr>
+        <p:spPr>
+          <a:xfrm>
             <a:off x="7695590" y="4856195"/>
             <a:ext cx="779800" cy="323331"/>
           </a:xfrm>
@@ -34257,7 +36017,7 @@
       </p:sp>
       <p:sp>
         <p:nvSpPr>
-          <p:cNvPr id="13" name="Rounded Rectangle 12"/>
+          <p:cNvPr id="15" name="Rounded Rectangle 14"/>
           <p:cNvSpPr/>
           <p:nvPr/>
         </p:nvSpPr>
@@ -34301,7 +36061,7 @@
       </p:sp>
       <p:sp>
         <p:nvSpPr>
-          <p:cNvPr id="14" name="Rounded Rectangle 13"/>
+          <p:cNvPr id="16" name="Rounded Rectangle 15"/>
           <p:cNvSpPr/>
           <p:nvPr/>
         </p:nvSpPr>
@@ -34345,7 +36105,7 @@
       </p:sp>
       <p:sp>
         <p:nvSpPr>
-          <p:cNvPr id="15" name="TextBox 14"/>
+          <p:cNvPr id="17" name="TextBox 16"/>
           <p:cNvSpPr txBox="1"/>
           <p:nvPr/>
         </p:nvSpPr>
@@ -35309,7 +37069,7 @@
         <p:spPr>
           <a:xfrm>
             <a:off x="3606393" y="2554833"/>
-            <a:ext cx="4945075" cy="1806854"/>
+            <a:ext cx="4945075" cy="1730776"/>
           </a:xfrm>
           <a:prstGeom prst="roundRect">
             <a:avLst/>
@@ -35484,8 +37244,8 @@
         </p:nvSpPr>
         <p:spPr>
           <a:xfrm>
-            <a:off x="3701491" y="4856195"/>
-            <a:ext cx="3899001" cy="323331"/>
+            <a:off x="3701491" y="4409236"/>
+            <a:ext cx="1426463" cy="228234"/>
           </a:xfrm>
           <a:prstGeom prst="roundRect">
             <a:avLst/>
@@ -35528,6 +37288,94 @@
         </p:nvSpPr>
         <p:spPr>
           <a:xfrm>
+            <a:off x="5223052" y="4409236"/>
+            <a:ext cx="1426463" cy="228234"/>
+          </a:xfrm>
+          <a:prstGeom prst="roundRect">
+            <a:avLst/>
+          </a:prstGeom>
+          <a:solidFill>
+            <a:srgbClr val="16303A"/>
+          </a:solidFill>
+          <a:ln>
+            <a:noFill/>
+          </a:ln>
+          <a:effectLst/>
+        </p:spPr>
+        <p:style>
+          <a:lnRef idx="1">
+            <a:schemeClr val="accent1"/>
+          </a:lnRef>
+          <a:fillRef idx="3">
+            <a:schemeClr val="accent1"/>
+          </a:fillRef>
+          <a:effectRef idx="2">
+            <a:schemeClr val="accent1"/>
+          </a:effectRef>
+          <a:fontRef idx="minor">
+            <a:schemeClr val="lt1"/>
+          </a:fontRef>
+        </p:style>
+        <p:txBody>
+          <a:bodyPr rtlCol="0" anchor="ctr"/>
+          <a:lstStyle/>
+          <a:p>
+            <a:pPr algn="ctr"/>
+          </a:p>
+        </p:txBody>
+      </p:sp>
+      <p:sp>
+        <p:nvSpPr>
+          <p:cNvPr id="13" name="Rounded Rectangle 12"/>
+          <p:cNvSpPr/>
+          <p:nvPr/>
+        </p:nvSpPr>
+        <p:spPr>
+          <a:xfrm>
+            <a:off x="3701491" y="4856195"/>
+            <a:ext cx="3899001" cy="323331"/>
+          </a:xfrm>
+          <a:prstGeom prst="roundRect">
+            <a:avLst/>
+          </a:prstGeom>
+          <a:solidFill>
+            <a:srgbClr val="16303A"/>
+          </a:solidFill>
+          <a:ln>
+            <a:noFill/>
+          </a:ln>
+          <a:effectLst/>
+        </p:spPr>
+        <p:style>
+          <a:lnRef idx="1">
+            <a:schemeClr val="accent1"/>
+          </a:lnRef>
+          <a:fillRef idx="3">
+            <a:schemeClr val="accent1"/>
+          </a:fillRef>
+          <a:effectRef idx="2">
+            <a:schemeClr val="accent1"/>
+          </a:effectRef>
+          <a:fontRef idx="minor">
+            <a:schemeClr val="lt1"/>
+          </a:fontRef>
+        </p:style>
+        <p:txBody>
+          <a:bodyPr rtlCol="0" anchor="ctr"/>
+          <a:lstStyle/>
+          <a:p>
+            <a:pPr algn="ctr"/>
+          </a:p>
+        </p:txBody>
+      </p:sp>
+      <p:sp>
+        <p:nvSpPr>
+          <p:cNvPr id="14" name="Rounded Rectangle 13"/>
+          <p:cNvSpPr/>
+          <p:nvPr/>
+        </p:nvSpPr>
+        <p:spPr>
+          <a:xfrm>
             <a:off x="7695590" y="4856195"/>
             <a:ext cx="779800" cy="323331"/>
           </a:xfrm>
@@ -35566,7 +37414,7 @@
       </p:sp>
       <p:sp>
         <p:nvSpPr>
-          <p:cNvPr id="13" name="Rounded Rectangle 12"/>
+          <p:cNvPr id="15" name="Rounded Rectangle 14"/>
           <p:cNvSpPr/>
           <p:nvPr/>
         </p:nvSpPr>
@@ -35610,7 +37458,7 @@
       </p:sp>
       <p:sp>
         <p:nvSpPr>
-          <p:cNvPr id="14" name="Rounded Rectangle 13"/>
+          <p:cNvPr id="16" name="Rounded Rectangle 15"/>
           <p:cNvSpPr/>
           <p:nvPr/>
         </p:nvSpPr>
@@ -35654,7 +37502,7 @@
       </p:sp>
       <p:sp>
         <p:nvSpPr>
-          <p:cNvPr id="15" name="TextBox 14"/>
+          <p:cNvPr id="17" name="TextBox 16"/>
           <p:cNvSpPr txBox="1"/>
           <p:nvPr/>
         </p:nvSpPr>
@@ -37033,7 +38881,7 @@
         <p:spPr>
           <a:xfrm>
             <a:off x="3606393" y="2554833"/>
-            <a:ext cx="4945075" cy="1806854"/>
+            <a:ext cx="4945075" cy="1730776"/>
           </a:xfrm>
           <a:prstGeom prst="roundRect">
             <a:avLst/>
@@ -37208,8 +39056,8 @@
         </p:nvSpPr>
         <p:spPr>
           <a:xfrm>
-            <a:off x="3701491" y="4856195"/>
-            <a:ext cx="3899001" cy="323331"/>
+            <a:off x="3701491" y="4409236"/>
+            <a:ext cx="1426463" cy="228234"/>
           </a:xfrm>
           <a:prstGeom prst="roundRect">
             <a:avLst/>
@@ -37252,6 +39100,94 @@
         </p:nvSpPr>
         <p:spPr>
           <a:xfrm>
+            <a:off x="5223052" y="4409236"/>
+            <a:ext cx="1426463" cy="228234"/>
+          </a:xfrm>
+          <a:prstGeom prst="roundRect">
+            <a:avLst/>
+          </a:prstGeom>
+          <a:solidFill>
+            <a:srgbClr val="16303A"/>
+          </a:solidFill>
+          <a:ln>
+            <a:noFill/>
+          </a:ln>
+          <a:effectLst/>
+        </p:spPr>
+        <p:style>
+          <a:lnRef idx="1">
+            <a:schemeClr val="accent1"/>
+          </a:lnRef>
+          <a:fillRef idx="3">
+            <a:schemeClr val="accent1"/>
+          </a:fillRef>
+          <a:effectRef idx="2">
+            <a:schemeClr val="accent1"/>
+          </a:effectRef>
+          <a:fontRef idx="minor">
+            <a:schemeClr val="lt1"/>
+          </a:fontRef>
+        </p:style>
+        <p:txBody>
+          <a:bodyPr rtlCol="0" anchor="ctr"/>
+          <a:lstStyle/>
+          <a:p>
+            <a:pPr algn="ctr"/>
+          </a:p>
+        </p:txBody>
+      </p:sp>
+      <p:sp>
+        <p:nvSpPr>
+          <p:cNvPr id="13" name="Rounded Rectangle 12"/>
+          <p:cNvSpPr/>
+          <p:nvPr/>
+        </p:nvSpPr>
+        <p:spPr>
+          <a:xfrm>
+            <a:off x="3701491" y="4856195"/>
+            <a:ext cx="3899001" cy="323331"/>
+          </a:xfrm>
+          <a:prstGeom prst="roundRect">
+            <a:avLst/>
+          </a:prstGeom>
+          <a:solidFill>
+            <a:srgbClr val="16303A"/>
+          </a:solidFill>
+          <a:ln>
+            <a:noFill/>
+          </a:ln>
+          <a:effectLst/>
+        </p:spPr>
+        <p:style>
+          <a:lnRef idx="1">
+            <a:schemeClr val="accent1"/>
+          </a:lnRef>
+          <a:fillRef idx="3">
+            <a:schemeClr val="accent1"/>
+          </a:fillRef>
+          <a:effectRef idx="2">
+            <a:schemeClr val="accent1"/>
+          </a:effectRef>
+          <a:fontRef idx="minor">
+            <a:schemeClr val="lt1"/>
+          </a:fontRef>
+        </p:style>
+        <p:txBody>
+          <a:bodyPr rtlCol="0" anchor="ctr"/>
+          <a:lstStyle/>
+          <a:p>
+            <a:pPr algn="ctr"/>
+          </a:p>
+        </p:txBody>
+      </p:sp>
+      <p:sp>
+        <p:nvSpPr>
+          <p:cNvPr id="14" name="Rounded Rectangle 13"/>
+          <p:cNvSpPr/>
+          <p:nvPr/>
+        </p:nvSpPr>
+        <p:spPr>
+          <a:xfrm>
             <a:off x="7695590" y="4856195"/>
             <a:ext cx="779800" cy="323331"/>
           </a:xfrm>
@@ -37290,7 +39226,7 @@
       </p:sp>
       <p:sp>
         <p:nvSpPr>
-          <p:cNvPr id="13" name="Rounded Rectangle 12"/>
+          <p:cNvPr id="15" name="Rounded Rectangle 14"/>
           <p:cNvSpPr/>
           <p:nvPr/>
         </p:nvSpPr>
@@ -37334,14 +39270,14 @@
       </p:sp>
       <p:sp>
         <p:nvSpPr>
-          <p:cNvPr id="14" name="Rounded Rectangle 13"/>
+          <p:cNvPr id="16" name="Rounded Rectangle 15"/>
           <p:cNvSpPr/>
           <p:nvPr/>
         </p:nvSpPr>
         <p:spPr>
           <a:xfrm>
             <a:off x="3568354" y="2516794"/>
-            <a:ext cx="5021153" cy="1882932"/>
+            <a:ext cx="5021153" cy="1806854"/>
           </a:xfrm>
           <a:prstGeom prst="roundRect">
             <a:avLst/>
@@ -37378,7 +39314,7 @@
       </p:sp>
       <p:sp>
         <p:nvSpPr>
-          <p:cNvPr id="15" name="TextBox 14"/>
+          <p:cNvPr id="17" name="TextBox 16"/>
           <p:cNvSpPr txBox="1"/>
           <p:nvPr/>
         </p:nvSpPr>
@@ -38852,7 +40788,7 @@
         <p:spPr>
           <a:xfrm>
             <a:off x="3606393" y="2554833"/>
-            <a:ext cx="4945075" cy="1806854"/>
+            <a:ext cx="4945075" cy="1730776"/>
           </a:xfrm>
           <a:prstGeom prst="roundRect">
             <a:avLst/>
@@ -39027,8 +40963,8 @@
         </p:nvSpPr>
         <p:spPr>
           <a:xfrm>
-            <a:off x="3701491" y="4856195"/>
-            <a:ext cx="3899001" cy="323331"/>
+            <a:off x="3701491" y="4409236"/>
+            <a:ext cx="1426463" cy="228234"/>
           </a:xfrm>
           <a:prstGeom prst="roundRect">
             <a:avLst/>
@@ -39071,6 +41007,94 @@
         </p:nvSpPr>
         <p:spPr>
           <a:xfrm>
+            <a:off x="5223052" y="4409236"/>
+            <a:ext cx="1426463" cy="228234"/>
+          </a:xfrm>
+          <a:prstGeom prst="roundRect">
+            <a:avLst/>
+          </a:prstGeom>
+          <a:solidFill>
+            <a:srgbClr val="16303A"/>
+          </a:solidFill>
+          <a:ln>
+            <a:noFill/>
+          </a:ln>
+          <a:effectLst/>
+        </p:spPr>
+        <p:style>
+          <a:lnRef idx="1">
+            <a:schemeClr val="accent1"/>
+          </a:lnRef>
+          <a:fillRef idx="3">
+            <a:schemeClr val="accent1"/>
+          </a:fillRef>
+          <a:effectRef idx="2">
+            <a:schemeClr val="accent1"/>
+          </a:effectRef>
+          <a:fontRef idx="minor">
+            <a:schemeClr val="lt1"/>
+          </a:fontRef>
+        </p:style>
+        <p:txBody>
+          <a:bodyPr rtlCol="0" anchor="ctr"/>
+          <a:lstStyle/>
+          <a:p>
+            <a:pPr algn="ctr"/>
+          </a:p>
+        </p:txBody>
+      </p:sp>
+      <p:sp>
+        <p:nvSpPr>
+          <p:cNvPr id="13" name="Rounded Rectangle 12"/>
+          <p:cNvSpPr/>
+          <p:nvPr/>
+        </p:nvSpPr>
+        <p:spPr>
+          <a:xfrm>
+            <a:off x="3701491" y="4856195"/>
+            <a:ext cx="3899001" cy="323331"/>
+          </a:xfrm>
+          <a:prstGeom prst="roundRect">
+            <a:avLst/>
+          </a:prstGeom>
+          <a:solidFill>
+            <a:srgbClr val="16303A"/>
+          </a:solidFill>
+          <a:ln>
+            <a:noFill/>
+          </a:ln>
+          <a:effectLst/>
+        </p:spPr>
+        <p:style>
+          <a:lnRef idx="1">
+            <a:schemeClr val="accent1"/>
+          </a:lnRef>
+          <a:fillRef idx="3">
+            <a:schemeClr val="accent1"/>
+          </a:fillRef>
+          <a:effectRef idx="2">
+            <a:schemeClr val="accent1"/>
+          </a:effectRef>
+          <a:fontRef idx="minor">
+            <a:schemeClr val="lt1"/>
+          </a:fontRef>
+        </p:style>
+        <p:txBody>
+          <a:bodyPr rtlCol="0" anchor="ctr"/>
+          <a:lstStyle/>
+          <a:p>
+            <a:pPr algn="ctr"/>
+          </a:p>
+        </p:txBody>
+      </p:sp>
+      <p:sp>
+        <p:nvSpPr>
+          <p:cNvPr id="14" name="Rounded Rectangle 13"/>
+          <p:cNvSpPr/>
+          <p:nvPr/>
+        </p:nvSpPr>
+        <p:spPr>
+          <a:xfrm>
             <a:off x="7695590" y="4856195"/>
             <a:ext cx="779800" cy="323331"/>
           </a:xfrm>
@@ -39109,7 +41133,7 @@
       </p:sp>
       <p:sp>
         <p:nvSpPr>
-          <p:cNvPr id="13" name="Rounded Rectangle 12"/>
+          <p:cNvPr id="15" name="Rounded Rectangle 14"/>
           <p:cNvSpPr/>
           <p:nvPr/>
         </p:nvSpPr>
@@ -39153,7 +41177,7 @@
       </p:sp>
       <p:sp>
         <p:nvSpPr>
-          <p:cNvPr id="14" name="Rounded Rectangle 13"/>
+          <p:cNvPr id="16" name="Rounded Rectangle 15"/>
           <p:cNvSpPr/>
           <p:nvPr/>
         </p:nvSpPr>
@@ -39197,7 +41221,7 @@
       </p:sp>
       <p:sp>
         <p:nvSpPr>
-          <p:cNvPr id="15" name="TextBox 14"/>
+          <p:cNvPr id="17" name="TextBox 16"/>
           <p:cNvSpPr txBox="1"/>
           <p:nvPr/>
         </p:nvSpPr>
@@ -39991,7 +42015,7 @@
         <p:spPr>
           <a:xfrm>
             <a:off x="3606393" y="2554833"/>
-            <a:ext cx="4945075" cy="1806854"/>
+            <a:ext cx="4945075" cy="1730776"/>
           </a:xfrm>
           <a:prstGeom prst="roundRect">
             <a:avLst/>
@@ -40166,8 +42190,8 @@
         </p:nvSpPr>
         <p:spPr>
           <a:xfrm>
-            <a:off x="3701491" y="4856195"/>
-            <a:ext cx="3899001" cy="323331"/>
+            <a:off x="3701491" y="4409236"/>
+            <a:ext cx="1426463" cy="228234"/>
           </a:xfrm>
           <a:prstGeom prst="roundRect">
             <a:avLst/>
@@ -40210,6 +42234,94 @@
         </p:nvSpPr>
         <p:spPr>
           <a:xfrm>
+            <a:off x="5223052" y="4409236"/>
+            <a:ext cx="1426463" cy="228234"/>
+          </a:xfrm>
+          <a:prstGeom prst="roundRect">
+            <a:avLst/>
+          </a:prstGeom>
+          <a:solidFill>
+            <a:srgbClr val="16303A"/>
+          </a:solidFill>
+          <a:ln>
+            <a:noFill/>
+          </a:ln>
+          <a:effectLst/>
+        </p:spPr>
+        <p:style>
+          <a:lnRef idx="1">
+            <a:schemeClr val="accent1"/>
+          </a:lnRef>
+          <a:fillRef idx="3">
+            <a:schemeClr val="accent1"/>
+          </a:fillRef>
+          <a:effectRef idx="2">
+            <a:schemeClr val="accent1"/>
+          </a:effectRef>
+          <a:fontRef idx="minor">
+            <a:schemeClr val="lt1"/>
+          </a:fontRef>
+        </p:style>
+        <p:txBody>
+          <a:bodyPr rtlCol="0" anchor="ctr"/>
+          <a:lstStyle/>
+          <a:p>
+            <a:pPr algn="ctr"/>
+          </a:p>
+        </p:txBody>
+      </p:sp>
+      <p:sp>
+        <p:nvSpPr>
+          <p:cNvPr id="13" name="Rounded Rectangle 12"/>
+          <p:cNvSpPr/>
+          <p:nvPr/>
+        </p:nvSpPr>
+        <p:spPr>
+          <a:xfrm>
+            <a:off x="3701491" y="4856195"/>
+            <a:ext cx="3899001" cy="323331"/>
+          </a:xfrm>
+          <a:prstGeom prst="roundRect">
+            <a:avLst/>
+          </a:prstGeom>
+          <a:solidFill>
+            <a:srgbClr val="16303A"/>
+          </a:solidFill>
+          <a:ln>
+            <a:noFill/>
+          </a:ln>
+          <a:effectLst/>
+        </p:spPr>
+        <p:style>
+          <a:lnRef idx="1">
+            <a:schemeClr val="accent1"/>
+          </a:lnRef>
+          <a:fillRef idx="3">
+            <a:schemeClr val="accent1"/>
+          </a:fillRef>
+          <a:effectRef idx="2">
+            <a:schemeClr val="accent1"/>
+          </a:effectRef>
+          <a:fontRef idx="minor">
+            <a:schemeClr val="lt1"/>
+          </a:fontRef>
+        </p:style>
+        <p:txBody>
+          <a:bodyPr rtlCol="0" anchor="ctr"/>
+          <a:lstStyle/>
+          <a:p>
+            <a:pPr algn="ctr"/>
+          </a:p>
+        </p:txBody>
+      </p:sp>
+      <p:sp>
+        <p:nvSpPr>
+          <p:cNvPr id="14" name="Rounded Rectangle 13"/>
+          <p:cNvSpPr/>
+          <p:nvPr/>
+        </p:nvSpPr>
+        <p:spPr>
+          <a:xfrm>
             <a:off x="7695590" y="4856195"/>
             <a:ext cx="779800" cy="323331"/>
           </a:xfrm>
@@ -40248,7 +42360,7 @@
       </p:sp>
       <p:sp>
         <p:nvSpPr>
-          <p:cNvPr id="13" name="Rounded Rectangle 12"/>
+          <p:cNvPr id="15" name="Rounded Rectangle 14"/>
           <p:cNvSpPr/>
           <p:nvPr/>
         </p:nvSpPr>
@@ -40292,7 +42404,7 @@
       </p:sp>
       <p:sp>
         <p:nvSpPr>
-          <p:cNvPr id="14" name="Rounded Rectangle 13"/>
+          <p:cNvPr id="16" name="Rounded Rectangle 15"/>
           <p:cNvSpPr/>
           <p:nvPr/>
         </p:nvSpPr>
@@ -40336,7 +42448,7 @@
       </p:sp>
       <p:sp>
         <p:nvSpPr>
-          <p:cNvPr id="15" name="TextBox 14"/>
+          <p:cNvPr id="17" name="TextBox 16"/>
           <p:cNvSpPr txBox="1"/>
           <p:nvPr/>
         </p:nvSpPr>
@@ -41040,7 +43152,7 @@
         <p:spPr>
           <a:xfrm>
             <a:off x="3606393" y="2554833"/>
-            <a:ext cx="4945075" cy="1806854"/>
+            <a:ext cx="4945075" cy="1730776"/>
           </a:xfrm>
           <a:prstGeom prst="roundRect">
             <a:avLst/>
@@ -41215,8 +43327,8 @@
         </p:nvSpPr>
         <p:spPr>
           <a:xfrm>
-            <a:off x="3701491" y="4856195"/>
-            <a:ext cx="3899001" cy="323331"/>
+            <a:off x="3701491" y="4409236"/>
+            <a:ext cx="1426463" cy="228234"/>
           </a:xfrm>
           <a:prstGeom prst="roundRect">
             <a:avLst/>
@@ -41259,6 +43371,94 @@
         </p:nvSpPr>
         <p:spPr>
           <a:xfrm>
+            <a:off x="5223052" y="4409236"/>
+            <a:ext cx="1426463" cy="228234"/>
+          </a:xfrm>
+          <a:prstGeom prst="roundRect">
+            <a:avLst/>
+          </a:prstGeom>
+          <a:solidFill>
+            <a:srgbClr val="16303A"/>
+          </a:solidFill>
+          <a:ln>
+            <a:noFill/>
+          </a:ln>
+          <a:effectLst/>
+        </p:spPr>
+        <p:style>
+          <a:lnRef idx="1">
+            <a:schemeClr val="accent1"/>
+          </a:lnRef>
+          <a:fillRef idx="3">
+            <a:schemeClr val="accent1"/>
+          </a:fillRef>
+          <a:effectRef idx="2">
+            <a:schemeClr val="accent1"/>
+          </a:effectRef>
+          <a:fontRef idx="minor">
+            <a:schemeClr val="lt1"/>
+          </a:fontRef>
+        </p:style>
+        <p:txBody>
+          <a:bodyPr rtlCol="0" anchor="ctr"/>
+          <a:lstStyle/>
+          <a:p>
+            <a:pPr algn="ctr"/>
+          </a:p>
+        </p:txBody>
+      </p:sp>
+      <p:sp>
+        <p:nvSpPr>
+          <p:cNvPr id="13" name="Rounded Rectangle 12"/>
+          <p:cNvSpPr/>
+          <p:nvPr/>
+        </p:nvSpPr>
+        <p:spPr>
+          <a:xfrm>
+            <a:off x="3701491" y="4856195"/>
+            <a:ext cx="3899001" cy="323331"/>
+          </a:xfrm>
+          <a:prstGeom prst="roundRect">
+            <a:avLst/>
+          </a:prstGeom>
+          <a:solidFill>
+            <a:srgbClr val="16303A"/>
+          </a:solidFill>
+          <a:ln>
+            <a:noFill/>
+          </a:ln>
+          <a:effectLst/>
+        </p:spPr>
+        <p:style>
+          <a:lnRef idx="1">
+            <a:schemeClr val="accent1"/>
+          </a:lnRef>
+          <a:fillRef idx="3">
+            <a:schemeClr val="accent1"/>
+          </a:fillRef>
+          <a:effectRef idx="2">
+            <a:schemeClr val="accent1"/>
+          </a:effectRef>
+          <a:fontRef idx="minor">
+            <a:schemeClr val="lt1"/>
+          </a:fontRef>
+        </p:style>
+        <p:txBody>
+          <a:bodyPr rtlCol="0" anchor="ctr"/>
+          <a:lstStyle/>
+          <a:p>
+            <a:pPr algn="ctr"/>
+          </a:p>
+        </p:txBody>
+      </p:sp>
+      <p:sp>
+        <p:nvSpPr>
+          <p:cNvPr id="14" name="Rounded Rectangle 13"/>
+          <p:cNvSpPr/>
+          <p:nvPr/>
+        </p:nvSpPr>
+        <p:spPr>
+          <a:xfrm>
             <a:off x="7695590" y="4856195"/>
             <a:ext cx="779800" cy="323331"/>
           </a:xfrm>
@@ -41297,7 +43497,7 @@
       </p:sp>
       <p:sp>
         <p:nvSpPr>
-          <p:cNvPr id="13" name="Rounded Rectangle 12"/>
+          <p:cNvPr id="15" name="Rounded Rectangle 14"/>
           <p:cNvSpPr/>
           <p:nvPr/>
         </p:nvSpPr>
@@ -41341,14 +43541,14 @@
       </p:sp>
       <p:sp>
         <p:nvSpPr>
-          <p:cNvPr id="14" name="Rounded Rectangle 13"/>
+          <p:cNvPr id="16" name="Rounded Rectangle 15"/>
           <p:cNvSpPr/>
           <p:nvPr/>
         </p:nvSpPr>
         <p:spPr>
           <a:xfrm>
             <a:off x="3568354" y="2516794"/>
-            <a:ext cx="5021153" cy="1882932"/>
+            <a:ext cx="5021153" cy="1806854"/>
           </a:xfrm>
           <a:prstGeom prst="roundRect">
             <a:avLst/>
@@ -41385,7 +43585,7 @@
       </p:sp>
       <p:sp>
         <p:nvSpPr>
-          <p:cNvPr id="15" name="TextBox 14"/>
+          <p:cNvPr id="17" name="TextBox 16"/>
           <p:cNvSpPr txBox="1"/>
           <p:nvPr/>
         </p:nvSpPr>
@@ -42709,7 +44909,7 @@
         <p:spPr>
           <a:xfrm>
             <a:off x="3606393" y="2554833"/>
-            <a:ext cx="4945075" cy="1806854"/>
+            <a:ext cx="4945075" cy="1730776"/>
           </a:xfrm>
           <a:prstGeom prst="roundRect">
             <a:avLst/>
@@ -42884,8 +45084,8 @@
         </p:nvSpPr>
         <p:spPr>
           <a:xfrm>
-            <a:off x="3701491" y="4856195"/>
-            <a:ext cx="3899001" cy="323331"/>
+            <a:off x="3701491" y="4409236"/>
+            <a:ext cx="1426463" cy="228234"/>
           </a:xfrm>
           <a:prstGeom prst="roundRect">
             <a:avLst/>
@@ -42928,6 +45128,94 @@
         </p:nvSpPr>
         <p:spPr>
           <a:xfrm>
+            <a:off x="5223052" y="4409236"/>
+            <a:ext cx="1426463" cy="228234"/>
+          </a:xfrm>
+          <a:prstGeom prst="roundRect">
+            <a:avLst/>
+          </a:prstGeom>
+          <a:solidFill>
+            <a:srgbClr val="16303A"/>
+          </a:solidFill>
+          <a:ln>
+            <a:noFill/>
+          </a:ln>
+          <a:effectLst/>
+        </p:spPr>
+        <p:style>
+          <a:lnRef idx="1">
+            <a:schemeClr val="accent1"/>
+          </a:lnRef>
+          <a:fillRef idx="3">
+            <a:schemeClr val="accent1"/>
+          </a:fillRef>
+          <a:effectRef idx="2">
+            <a:schemeClr val="accent1"/>
+          </a:effectRef>
+          <a:fontRef idx="minor">
+            <a:schemeClr val="lt1"/>
+          </a:fontRef>
+        </p:style>
+        <p:txBody>
+          <a:bodyPr rtlCol="0" anchor="ctr"/>
+          <a:lstStyle/>
+          <a:p>
+            <a:pPr algn="ctr"/>
+          </a:p>
+        </p:txBody>
+      </p:sp>
+      <p:sp>
+        <p:nvSpPr>
+          <p:cNvPr id="13" name="Rounded Rectangle 12"/>
+          <p:cNvSpPr/>
+          <p:nvPr/>
+        </p:nvSpPr>
+        <p:spPr>
+          <a:xfrm>
+            <a:off x="3701491" y="4856195"/>
+            <a:ext cx="3899001" cy="323331"/>
+          </a:xfrm>
+          <a:prstGeom prst="roundRect">
+            <a:avLst/>
+          </a:prstGeom>
+          <a:solidFill>
+            <a:srgbClr val="16303A"/>
+          </a:solidFill>
+          <a:ln>
+            <a:noFill/>
+          </a:ln>
+          <a:effectLst/>
+        </p:spPr>
+        <p:style>
+          <a:lnRef idx="1">
+            <a:schemeClr val="accent1"/>
+          </a:lnRef>
+          <a:fillRef idx="3">
+            <a:schemeClr val="accent1"/>
+          </a:fillRef>
+          <a:effectRef idx="2">
+            <a:schemeClr val="accent1"/>
+          </a:effectRef>
+          <a:fontRef idx="minor">
+            <a:schemeClr val="lt1"/>
+          </a:fontRef>
+        </p:style>
+        <p:txBody>
+          <a:bodyPr rtlCol="0" anchor="ctr"/>
+          <a:lstStyle/>
+          <a:p>
+            <a:pPr algn="ctr"/>
+          </a:p>
+        </p:txBody>
+      </p:sp>
+      <p:sp>
+        <p:nvSpPr>
+          <p:cNvPr id="14" name="Rounded Rectangle 13"/>
+          <p:cNvSpPr/>
+          <p:nvPr/>
+        </p:nvSpPr>
+        <p:spPr>
+          <a:xfrm>
             <a:off x="7695590" y="4856195"/>
             <a:ext cx="779800" cy="323331"/>
           </a:xfrm>
@@ -42966,7 +45254,7 @@
       </p:sp>
       <p:sp>
         <p:nvSpPr>
-          <p:cNvPr id="13" name="Rounded Rectangle 12"/>
+          <p:cNvPr id="15" name="Rounded Rectangle 14"/>
           <p:cNvSpPr/>
           <p:nvPr/>
         </p:nvSpPr>
@@ -43010,7 +45298,7 @@
       </p:sp>
       <p:sp>
         <p:nvSpPr>
-          <p:cNvPr id="14" name="Rounded Rectangle 13"/>
+          <p:cNvPr id="16" name="Rounded Rectangle 15"/>
           <p:cNvSpPr/>
           <p:nvPr/>
         </p:nvSpPr>
@@ -43054,7 +45342,7 @@
       </p:sp>
       <p:sp>
         <p:nvSpPr>
-          <p:cNvPr id="15" name="TextBox 14"/>
+          <p:cNvPr id="17" name="TextBox 16"/>
           <p:cNvSpPr txBox="1"/>
           <p:nvPr/>
         </p:nvSpPr>
@@ -43433,7 +45721,7 @@
         <p:spPr>
           <a:xfrm>
             <a:off x="3606393" y="2554833"/>
-            <a:ext cx="4945075" cy="1806854"/>
+            <a:ext cx="4945075" cy="1730776"/>
           </a:xfrm>
           <a:prstGeom prst="roundRect">
             <a:avLst/>
@@ -43608,8 +45896,8 @@
         </p:nvSpPr>
         <p:spPr>
           <a:xfrm>
-            <a:off x="3701491" y="4856195"/>
-            <a:ext cx="3899001" cy="323331"/>
+            <a:off x="3701491" y="4409236"/>
+            <a:ext cx="1426463" cy="228234"/>
           </a:xfrm>
           <a:prstGeom prst="roundRect">
             <a:avLst/>
@@ -43652,6 +45940,94 @@
         </p:nvSpPr>
         <p:spPr>
           <a:xfrm>
+            <a:off x="5223052" y="4409236"/>
+            <a:ext cx="1426463" cy="228234"/>
+          </a:xfrm>
+          <a:prstGeom prst="roundRect">
+            <a:avLst/>
+          </a:prstGeom>
+          <a:solidFill>
+            <a:srgbClr val="16303A"/>
+          </a:solidFill>
+          <a:ln>
+            <a:noFill/>
+          </a:ln>
+          <a:effectLst/>
+        </p:spPr>
+        <p:style>
+          <a:lnRef idx="1">
+            <a:schemeClr val="accent1"/>
+          </a:lnRef>
+          <a:fillRef idx="3">
+            <a:schemeClr val="accent1"/>
+          </a:fillRef>
+          <a:effectRef idx="2">
+            <a:schemeClr val="accent1"/>
+          </a:effectRef>
+          <a:fontRef idx="minor">
+            <a:schemeClr val="lt1"/>
+          </a:fontRef>
+        </p:style>
+        <p:txBody>
+          <a:bodyPr rtlCol="0" anchor="ctr"/>
+          <a:lstStyle/>
+          <a:p>
+            <a:pPr algn="ctr"/>
+          </a:p>
+        </p:txBody>
+      </p:sp>
+      <p:sp>
+        <p:nvSpPr>
+          <p:cNvPr id="13" name="Rounded Rectangle 12"/>
+          <p:cNvSpPr/>
+          <p:nvPr/>
+        </p:nvSpPr>
+        <p:spPr>
+          <a:xfrm>
+            <a:off x="3701491" y="4856195"/>
+            <a:ext cx="3899001" cy="323331"/>
+          </a:xfrm>
+          <a:prstGeom prst="roundRect">
+            <a:avLst/>
+          </a:prstGeom>
+          <a:solidFill>
+            <a:srgbClr val="16303A"/>
+          </a:solidFill>
+          <a:ln>
+            <a:noFill/>
+          </a:ln>
+          <a:effectLst/>
+        </p:spPr>
+        <p:style>
+          <a:lnRef idx="1">
+            <a:schemeClr val="accent1"/>
+          </a:lnRef>
+          <a:fillRef idx="3">
+            <a:schemeClr val="accent1"/>
+          </a:fillRef>
+          <a:effectRef idx="2">
+            <a:schemeClr val="accent1"/>
+          </a:effectRef>
+          <a:fontRef idx="minor">
+            <a:schemeClr val="lt1"/>
+          </a:fontRef>
+        </p:style>
+        <p:txBody>
+          <a:bodyPr rtlCol="0" anchor="ctr"/>
+          <a:lstStyle/>
+          <a:p>
+            <a:pPr algn="ctr"/>
+          </a:p>
+        </p:txBody>
+      </p:sp>
+      <p:sp>
+        <p:nvSpPr>
+          <p:cNvPr id="14" name="Rounded Rectangle 13"/>
+          <p:cNvSpPr/>
+          <p:nvPr/>
+        </p:nvSpPr>
+        <p:spPr>
+          <a:xfrm>
             <a:off x="7695590" y="4856195"/>
             <a:ext cx="779800" cy="323331"/>
           </a:xfrm>
@@ -43690,7 +46066,7 @@
       </p:sp>
       <p:sp>
         <p:nvSpPr>
-          <p:cNvPr id="13" name="Rounded Rectangle 12"/>
+          <p:cNvPr id="15" name="Rounded Rectangle 14"/>
           <p:cNvSpPr/>
           <p:nvPr/>
         </p:nvSpPr>
@@ -43734,7 +46110,7 @@
       </p:sp>
       <p:sp>
         <p:nvSpPr>
-          <p:cNvPr id="14" name="Rounded Rectangle 13"/>
+          <p:cNvPr id="16" name="Rounded Rectangle 15"/>
           <p:cNvSpPr/>
           <p:nvPr/>
         </p:nvSpPr>
@@ -43778,7 +46154,7 @@
       </p:sp>
       <p:sp>
         <p:nvSpPr>
-          <p:cNvPr id="15" name="TextBox 14"/>
+          <p:cNvPr id="17" name="TextBox 16"/>
           <p:cNvSpPr txBox="1"/>
           <p:nvPr/>
         </p:nvSpPr>
@@ -44157,7 +46533,7 @@
         <p:spPr>
           <a:xfrm>
             <a:off x="3606393" y="2554833"/>
-            <a:ext cx="4945075" cy="1806854"/>
+            <a:ext cx="4945075" cy="1730776"/>
           </a:xfrm>
           <a:prstGeom prst="roundRect">
             <a:avLst/>
@@ -44332,8 +46708,8 @@
         </p:nvSpPr>
         <p:spPr>
           <a:xfrm>
-            <a:off x="3701491" y="4856195"/>
-            <a:ext cx="3899001" cy="323331"/>
+            <a:off x="3701491" y="4409236"/>
+            <a:ext cx="1426463" cy="228234"/>
           </a:xfrm>
           <a:prstGeom prst="roundRect">
             <a:avLst/>
@@ -44376,6 +46752,94 @@
         </p:nvSpPr>
         <p:spPr>
           <a:xfrm>
+            <a:off x="5223052" y="4409236"/>
+            <a:ext cx="1426463" cy="228234"/>
+          </a:xfrm>
+          <a:prstGeom prst="roundRect">
+            <a:avLst/>
+          </a:prstGeom>
+          <a:solidFill>
+            <a:srgbClr val="16303A"/>
+          </a:solidFill>
+          <a:ln>
+            <a:noFill/>
+          </a:ln>
+          <a:effectLst/>
+        </p:spPr>
+        <p:style>
+          <a:lnRef idx="1">
+            <a:schemeClr val="accent1"/>
+          </a:lnRef>
+          <a:fillRef idx="3">
+            <a:schemeClr val="accent1"/>
+          </a:fillRef>
+          <a:effectRef idx="2">
+            <a:schemeClr val="accent1"/>
+          </a:effectRef>
+          <a:fontRef idx="minor">
+            <a:schemeClr val="lt1"/>
+          </a:fontRef>
+        </p:style>
+        <p:txBody>
+          <a:bodyPr rtlCol="0" anchor="ctr"/>
+          <a:lstStyle/>
+          <a:p>
+            <a:pPr algn="ctr"/>
+          </a:p>
+        </p:txBody>
+      </p:sp>
+      <p:sp>
+        <p:nvSpPr>
+          <p:cNvPr id="13" name="Rounded Rectangle 12"/>
+          <p:cNvSpPr/>
+          <p:nvPr/>
+        </p:nvSpPr>
+        <p:spPr>
+          <a:xfrm>
+            <a:off x="3701491" y="4856195"/>
+            <a:ext cx="3899001" cy="323331"/>
+          </a:xfrm>
+          <a:prstGeom prst="roundRect">
+            <a:avLst/>
+          </a:prstGeom>
+          <a:solidFill>
+            <a:srgbClr val="16303A"/>
+          </a:solidFill>
+          <a:ln>
+            <a:noFill/>
+          </a:ln>
+          <a:effectLst/>
+        </p:spPr>
+        <p:style>
+          <a:lnRef idx="1">
+            <a:schemeClr val="accent1"/>
+          </a:lnRef>
+          <a:fillRef idx="3">
+            <a:schemeClr val="accent1"/>
+          </a:fillRef>
+          <a:effectRef idx="2">
+            <a:schemeClr val="accent1"/>
+          </a:effectRef>
+          <a:fontRef idx="minor">
+            <a:schemeClr val="lt1"/>
+          </a:fontRef>
+        </p:style>
+        <p:txBody>
+          <a:bodyPr rtlCol="0" anchor="ctr"/>
+          <a:lstStyle/>
+          <a:p>
+            <a:pPr algn="ctr"/>
+          </a:p>
+        </p:txBody>
+      </p:sp>
+      <p:sp>
+        <p:nvSpPr>
+          <p:cNvPr id="14" name="Rounded Rectangle 13"/>
+          <p:cNvSpPr/>
+          <p:nvPr/>
+        </p:nvSpPr>
+        <p:spPr>
+          <a:xfrm>
             <a:off x="7695590" y="4856195"/>
             <a:ext cx="779800" cy="323331"/>
           </a:xfrm>
@@ -44414,7 +46878,7 @@
       </p:sp>
       <p:sp>
         <p:nvSpPr>
-          <p:cNvPr id="13" name="Rounded Rectangle 12"/>
+          <p:cNvPr id="15" name="Rounded Rectangle 14"/>
           <p:cNvSpPr/>
           <p:nvPr/>
         </p:nvSpPr>
@@ -44458,7 +46922,7 @@
       </p:sp>
       <p:sp>
         <p:nvSpPr>
-          <p:cNvPr id="14" name="Rounded Rectangle 13"/>
+          <p:cNvPr id="16" name="Rounded Rectangle 15"/>
           <p:cNvSpPr/>
           <p:nvPr/>
         </p:nvSpPr>
@@ -44502,7 +46966,7 @@
       </p:sp>
       <p:sp>
         <p:nvSpPr>
-          <p:cNvPr id="15" name="TextBox 14"/>
+          <p:cNvPr id="17" name="TextBox 16"/>
           <p:cNvSpPr txBox="1"/>
           <p:nvPr/>
         </p:nvSpPr>
